--- a/docs/ppt/PPT1_공급가능용량_프로젝트보고.pptx
+++ b/docs/ppt/PPT1_공급가능용량_프로젝트보고.pptx
@@ -504,7 +504,7 @@
           <a:p>
             <a:r>
               <a:rPr lang="en-US" dirty="0"/>
-              <a:t>전력 판매를 위해 매일 '내일 낼 수 있는 전기량'을 신고합니다. 기온에 따라 출력이 달라지고, 신고값이 정확해야 손해도 페널티도 없습니다. 기존에는 엑셀 4개를 오가며 손으로 계산했는데, 이를 프로그램 하나로 자동화했습니다.</a:t>
+              <a:t>전력 판매를 위해 매일 '내일 낼 수 있는 전기량'을 신고합니다. 기온에 따라 출력이 376~469MW로 크게 달라지고, 허용범위가 ±0.5%(약 ±2MW)라 정확도가 중요합니다. 기존에는 엑셀 4개를 오가며 손으로 계산했는데 이를 자동화했고, 기존 엑셀과 계산이 동일함을 오차 0.18MW로 확인했습니다.</a:t>
             </a:r>
             <a:endParaRPr lang="en-US" dirty="0"/>
           </a:p>
@@ -592,7 +592,7 @@
           <a:p>
             <a:r>
               <a:rPr lang="en-US" dirty="0"/>
-              <a:t>화면 5개로 구성했습니다. 계산 방식은 설계 이론값에 실제 시험에서 배운 보정값을 더하는 구조입니다. 시험 성적표로 비유하면, 교과서 예상 점수(이론값)에 실제 시험에서 늘 얼마씩 차이 나는지(보정값)를 반영하는 것입니다.</a:t>
+              <a:t>화면 5개로 구성했습니다. 계산은 2단 구조입니다 — 1단은 설계 성능곡선(기존 엑셀과 동일), 2단은 실제 시험 32건에서 배운 보정값입니다. '150개 자동 점검'은 계산식을 수정할 때마다 프로그램이 스스로 150가지 항목을 다시 검사해 계산 오류를 사전에 막는 장치입니다.</a:t>
             </a:r>
             <a:endParaRPr lang="en-US" dirty="0"/>
           </a:p>
@@ -680,7 +680,7 @@
           <a:p>
             <a:r>
               <a:rPr lang="en-US" dirty="0"/>
-              <a:t>1차 개발은 완료됐고 지금은 시운전 단계입니다. 배포는 폴더 복사만으로 가능하며, 모든 계산이 사내 PC 안에서만 이뤄져 자료가 외부로 나가지 않습니다. 앞으로 실제 시험 결과를 쌓아가며 정확도를 높일 계획입니다.</a:t>
+              <a:t>6월 분석·엔진 개발, 7월 데이터 자동취득, 8월 프로그램 완성까지 마쳤고 현재 시운전 중입니다. 9월 정식 운영이 목표입니다. 배포는 폴더 복사만으로 가능하며, 모든 계산이 사내 PC 안에서만 이뤄져 자료가 외부로 나가지 않습니다. ※ 마일스톤 날짜는 실제 일정에 맞게 수정하세요.</a:t>
             </a:r>
             <a:endParaRPr lang="en-US" dirty="0"/>
           </a:p>
@@ -1081,20 +1081,20 @@
         </p:nvSpPr>
         <p:spPr>
           <a:xfrm>
-            <a:off x="411480" y="164592"/>
-            <a:ext cx="640080" cy="566928"/>
-          </a:xfrm>
-          <a:prstGeom prst="rect">
-            <a:avLst/>
-          </a:prstGeom>
-          <a:noFill/>
-          <a:ln/>
-        </p:spPr>
-        <p:txBody>
-          <a:bodyPr wrap="square" lIns="0" tIns="0" rIns="0" bIns="0" rtlCol="0" anchor="ctr"/>
-          <a:lstStyle/>
-          <a:p>
-            <a:pPr algn="l" indent="0" marL="0">
+            <a:off x="411480" y="182880"/>
+            <a:ext cx="640080" cy="548640"/>
+          </a:xfrm>
+          <a:prstGeom prst="rect">
+            <a:avLst/>
+          </a:prstGeom>
+          <a:noFill/>
+          <a:ln/>
+        </p:spPr>
+        <p:txBody>
+          <a:bodyPr wrap="square" lIns="0" tIns="0" rIns="0" bIns="0" rtlCol="0" anchor="ctr"/>
+          <a:lstStyle/>
+          <a:p>
+            <a:pPr indent="0" marL="0">
               <a:buNone/>
             </a:pPr>
             <a:r>
@@ -1120,8 +1120,8 @@
         </p:nvSpPr>
         <p:spPr>
           <a:xfrm>
-            <a:off x="1051560" y="164592"/>
-            <a:ext cx="5120640" cy="566928"/>
+            <a:off x="1051560" y="182880"/>
+            <a:ext cx="6766560" cy="548640"/>
           </a:xfrm>
           <a:prstGeom prst="rect">
             <a:avLst/>
@@ -1159,8 +1159,8 @@
         </p:nvSpPr>
         <p:spPr>
           <a:xfrm>
-            <a:off x="6263640" y="164592"/>
-            <a:ext cx="5532120" cy="566928"/>
+            <a:off x="7955280" y="155448"/>
+            <a:ext cx="3840480" cy="292608"/>
           </a:xfrm>
           <a:prstGeom prst="rect">
             <a:avLst/>
@@ -1176,7 +1176,7 @@
               <a:buNone/>
             </a:pPr>
             <a:r>
-              <a:rPr lang="en-US" sz="1250" dirty="0">
+              <a:rPr lang="en-US" sz="1200" dirty="0">
                 <a:solidFill>
                   <a:srgbClr val="C9BFBB"/>
                 </a:solidFill>
@@ -1184,26 +1184,65 @@
                 <a:ea typeface="맑은 고딕" pitchFamily="34" charset="-122"/>
                 <a:cs typeface="맑은 고딕" pitchFamily="34" charset="-120"/>
               </a:rPr>
-              <a:t>매일 전기 판매량을 정확히 신고해야 합니다</a:t>
-            </a:r>
-            <a:endParaRPr lang="en-US" sz="1250" dirty="0"/>
-          </a:p>
-        </p:txBody>
-      </p:sp>
-      <p:sp>
-        <p:nvSpPr>
-          <p:cNvPr id="6" name="Shape 4"/>
-          <p:cNvSpPr/>
-          <p:nvPr/>
-        </p:nvSpPr>
-        <p:spPr>
-          <a:xfrm>
-            <a:off x="502920" y="1234440"/>
-            <a:ext cx="3566160" cy="1572768"/>
+              <a:t>소속 : 발전운영팀</a:t>
+            </a:r>
+            <a:endParaRPr lang="en-US" sz="1200" dirty="0"/>
+          </a:p>
+        </p:txBody>
+      </p:sp>
+      <p:sp>
+        <p:nvSpPr>
+          <p:cNvPr id="6" name="Text 4"/>
+          <p:cNvSpPr/>
+          <p:nvPr/>
+        </p:nvSpPr>
+        <p:spPr>
+          <a:xfrm>
+            <a:off x="7955280" y="457200"/>
+            <a:ext cx="3840480" cy="292608"/>
+          </a:xfrm>
+          <a:prstGeom prst="rect">
+            <a:avLst/>
+          </a:prstGeom>
+          <a:noFill/>
+          <a:ln/>
+        </p:spPr>
+        <p:txBody>
+          <a:bodyPr wrap="square" lIns="0" tIns="0" rIns="0" bIns="0" rtlCol="0" anchor="ctr"/>
+          <a:lstStyle/>
+          <a:p>
+            <a:pPr algn="r" indent="0" marL="0">
+              <a:buNone/>
+            </a:pPr>
+            <a:r>
+              <a:rPr lang="en-US" sz="1200" b="1" dirty="0">
+                <a:solidFill>
+                  <a:srgbClr val="FFFFFF"/>
+                </a:solidFill>
+                <a:latin typeface="맑은 고딕" pitchFamily="34" charset="0"/>
+                <a:ea typeface="맑은 고딕" pitchFamily="34" charset="-122"/>
+                <a:cs typeface="맑은 고딕" pitchFamily="34" charset="-120"/>
+              </a:rPr>
+              <a:t>담당자 : ○○○  ·  2026. 8월</a:t>
+            </a:r>
+            <a:endParaRPr lang="en-US" sz="1200" dirty="0"/>
+          </a:p>
+        </p:txBody>
+      </p:sp>
+      <p:sp>
+        <p:nvSpPr>
+          <p:cNvPr id="7" name="Shape 5"/>
+          <p:cNvSpPr/>
+          <p:nvPr/>
+        </p:nvSpPr>
+        <p:spPr>
+          <a:xfrm>
+            <a:off x="502920" y="1170432"/>
+            <a:ext cx="3566160" cy="1517904"/>
           </a:xfrm>
           <a:prstGeom prst="roundRect">
             <a:avLst>
-              <a:gd name="adj" fmla="val 3488"/>
+              <a:gd name="adj" fmla="val 3614"/>
             </a:avLst>
           </a:prstGeom>
           <a:solidFill>
@@ -1226,14 +1265,14 @@
       </p:sp>
       <p:sp>
         <p:nvSpPr>
-          <p:cNvPr id="7" name="Shape 5"/>
-          <p:cNvSpPr/>
-          <p:nvPr/>
-        </p:nvSpPr>
-        <p:spPr>
-          <a:xfrm>
-            <a:off x="758952" y="1481328"/>
-            <a:ext cx="384048" cy="384048"/>
+          <p:cNvPr id="8" name="Shape 6"/>
+          <p:cNvSpPr/>
+          <p:nvPr/>
+        </p:nvSpPr>
+        <p:spPr>
+          <a:xfrm>
+            <a:off x="758952" y="1389888"/>
+            <a:ext cx="365760" cy="365760"/>
           </a:xfrm>
           <a:prstGeom prst="ellipse">
             <a:avLst/>
@@ -1246,14 +1285,14 @@
       </p:sp>
       <p:sp>
         <p:nvSpPr>
-          <p:cNvPr id="8" name="Text 6"/>
-          <p:cNvSpPr/>
-          <p:nvPr/>
-        </p:nvSpPr>
-        <p:spPr>
-          <a:xfrm>
-            <a:off x="758952" y="1481328"/>
-            <a:ext cx="384048" cy="384048"/>
+          <p:cNvPr id="9" name="Text 7"/>
+          <p:cNvSpPr/>
+          <p:nvPr/>
+        </p:nvSpPr>
+        <p:spPr>
+          <a:xfrm>
+            <a:off x="758952" y="1389888"/>
+            <a:ext cx="365760" cy="365760"/>
           </a:xfrm>
           <a:prstGeom prst="rect">
             <a:avLst/>
@@ -1269,7 +1308,7 @@
               <a:buNone/>
             </a:pPr>
             <a:r>
-              <a:rPr lang="en-US" sz="1500" b="1" dirty="0">
+              <a:rPr lang="en-US" sz="1400" b="1" dirty="0">
                 <a:solidFill>
                   <a:srgbClr val="FFFFFF"/>
                 </a:solidFill>
@@ -1279,20 +1318,20 @@
               </a:rPr>
               <a:t>1</a:t>
             </a:r>
-            <a:endParaRPr lang="en-US" sz="1500" dirty="0"/>
-          </a:p>
-        </p:txBody>
-      </p:sp>
-      <p:sp>
-        <p:nvSpPr>
-          <p:cNvPr id="9" name="Text 7"/>
-          <p:cNvSpPr/>
-          <p:nvPr/>
-        </p:nvSpPr>
-        <p:spPr>
-          <a:xfrm>
-            <a:off x="1280160" y="1444752"/>
-            <a:ext cx="2560320" cy="365760"/>
+            <a:endParaRPr lang="en-US" sz="1400" dirty="0"/>
+          </a:p>
+        </p:txBody>
+      </p:sp>
+      <p:sp>
+        <p:nvSpPr>
+          <p:cNvPr id="10" name="Text 8"/>
+          <p:cNvSpPr/>
+          <p:nvPr/>
+        </p:nvSpPr>
+        <p:spPr>
+          <a:xfrm>
+            <a:off x="1252728" y="1362456"/>
+            <a:ext cx="2606040" cy="365760"/>
           </a:xfrm>
           <a:prstGeom prst="rect">
             <a:avLst/>
@@ -1308,7 +1347,7 @@
               <a:buNone/>
             </a:pPr>
             <a:r>
-              <a:rPr lang="en-US" sz="1500" b="1" dirty="0">
+              <a:rPr lang="en-US" sz="1450" b="1" dirty="0">
                 <a:solidFill>
                   <a:srgbClr val="1F1A18"/>
                 </a:solidFill>
@@ -1316,22 +1355,22 @@
                 <a:ea typeface="맑은 고딕" pitchFamily="34" charset="-122"/>
                 <a:cs typeface="맑은 고딕" pitchFamily="34" charset="-120"/>
               </a:rPr>
-              <a:t>매일 신고</a:t>
-            </a:r>
-            <a:endParaRPr lang="en-US" sz="1500" dirty="0"/>
-          </a:p>
-        </p:txBody>
-      </p:sp>
-      <p:sp>
-        <p:nvSpPr>
-          <p:cNvPr id="10" name="Text 8"/>
-          <p:cNvSpPr/>
-          <p:nvPr/>
-        </p:nvSpPr>
-        <p:spPr>
-          <a:xfrm>
-            <a:off x="758952" y="1938528"/>
-            <a:ext cx="3063240" cy="749808"/>
+              <a:t>매일 신고합니다</a:t>
+            </a:r>
+            <a:endParaRPr lang="en-US" sz="1450" dirty="0"/>
+          </a:p>
+        </p:txBody>
+      </p:sp>
+      <p:sp>
+        <p:nvSpPr>
+          <p:cNvPr id="11" name="Text 9"/>
+          <p:cNvSpPr/>
+          <p:nvPr/>
+        </p:nvSpPr>
+        <p:spPr>
+          <a:xfrm>
+            <a:off x="758952" y="1828800"/>
+            <a:ext cx="3108960" cy="731520"/>
           </a:xfrm>
           <a:prstGeom prst="rect">
             <a:avLst/>
@@ -1345,12 +1384,12 @@
           <a:p>
             <a:pPr indent="0" marL="0">
               <a:lnSpc>
-                <a:spcPts val="1600"/>
+                <a:spcPts val="1500"/>
               </a:lnSpc>
               <a:buNone/>
             </a:pPr>
             <a:r>
-              <a:rPr lang="en-US" sz="1150" dirty="0">
+              <a:rPr lang="en-US" sz="1100" dirty="0">
                 <a:solidFill>
                   <a:srgbClr val="6B625E"/>
                 </a:solidFill>
@@ -1358,19 +1397,19 @@
                 <a:ea typeface="맑은 고딕" pitchFamily="34" charset="-122"/>
                 <a:cs typeface="맑은 고딕" pitchFamily="34" charset="-120"/>
               </a:rPr>
-              <a:t>내일 우리 발전소가</a:t>
-            </a:r>
-            <a:endParaRPr lang="en-US" sz="1150" dirty="0"/>
+              <a:t>내일 우리 발전소가 낼 수 있는</a:t>
+            </a:r>
+            <a:endParaRPr lang="en-US" sz="1100" dirty="0"/>
           </a:p>
           <a:p>
             <a:pPr indent="0" marL="0">
               <a:lnSpc>
-                <a:spcPts val="1600"/>
+                <a:spcPts val="1500"/>
               </a:lnSpc>
               <a:buNone/>
             </a:pPr>
             <a:r>
-              <a:rPr lang="en-US" sz="1150" dirty="0">
+              <a:rPr lang="en-US" sz="1100" dirty="0">
                 <a:solidFill>
                   <a:srgbClr val="6B625E"/>
                 </a:solidFill>
@@ -1378,46 +1417,26 @@
                 <a:ea typeface="맑은 고딕" pitchFamily="34" charset="-122"/>
                 <a:cs typeface="맑은 고딕" pitchFamily="34" charset="-120"/>
               </a:rPr>
-              <a:t>낼 수 있는 전기량을</a:t>
-            </a:r>
-            <a:endParaRPr lang="en-US" sz="1150" dirty="0"/>
-          </a:p>
-          <a:p>
-            <a:pPr indent="0" marL="0">
-              <a:lnSpc>
-                <a:spcPts val="1600"/>
-              </a:lnSpc>
-              <a:buNone/>
-            </a:pPr>
-            <a:r>
-              <a:rPr lang="en-US" sz="1150" dirty="0">
-                <a:solidFill>
-                  <a:srgbClr val="6B625E"/>
-                </a:solidFill>
-                <a:latin typeface="맑은 고딕" pitchFamily="34" charset="0"/>
-                <a:ea typeface="맑은 고딕" pitchFamily="34" charset="-122"/>
-                <a:cs typeface="맑은 고딕" pitchFamily="34" charset="-120"/>
-              </a:rPr>
-              <a:t>전력거래소에 신고</a:t>
-            </a:r>
-            <a:endParaRPr lang="en-US" sz="1150" dirty="0"/>
-          </a:p>
-        </p:txBody>
-      </p:sp>
-      <p:sp>
-        <p:nvSpPr>
-          <p:cNvPr id="11" name="Shape 9"/>
-          <p:cNvSpPr/>
-          <p:nvPr/>
-        </p:nvSpPr>
-        <p:spPr>
-          <a:xfrm>
-            <a:off x="4379976" y="1234440"/>
-            <a:ext cx="3566160" cy="1572768"/>
+              <a:t>전기량을 전력거래소에 신고</a:t>
+            </a:r>
+            <a:endParaRPr lang="en-US" sz="1100" dirty="0"/>
+          </a:p>
+        </p:txBody>
+      </p:sp>
+      <p:sp>
+        <p:nvSpPr>
+          <p:cNvPr id="12" name="Shape 10"/>
+          <p:cNvSpPr/>
+          <p:nvPr/>
+        </p:nvSpPr>
+        <p:spPr>
+          <a:xfrm>
+            <a:off x="4379976" y="1170432"/>
+            <a:ext cx="3566160" cy="1517904"/>
           </a:xfrm>
           <a:prstGeom prst="roundRect">
             <a:avLst>
-              <a:gd name="adj" fmla="val 3488"/>
+              <a:gd name="adj" fmla="val 3614"/>
             </a:avLst>
           </a:prstGeom>
           <a:solidFill>
@@ -1440,14 +1459,14 @@
       </p:sp>
       <p:sp>
         <p:nvSpPr>
-          <p:cNvPr id="12" name="Shape 10"/>
-          <p:cNvSpPr/>
-          <p:nvPr/>
-        </p:nvSpPr>
-        <p:spPr>
-          <a:xfrm>
-            <a:off x="4636008" y="1481328"/>
-            <a:ext cx="384048" cy="384048"/>
+          <p:cNvPr id="13" name="Shape 11"/>
+          <p:cNvSpPr/>
+          <p:nvPr/>
+        </p:nvSpPr>
+        <p:spPr>
+          <a:xfrm>
+            <a:off x="4636008" y="1389888"/>
+            <a:ext cx="365760" cy="365760"/>
           </a:xfrm>
           <a:prstGeom prst="ellipse">
             <a:avLst/>
@@ -1460,14 +1479,14 @@
       </p:sp>
       <p:sp>
         <p:nvSpPr>
-          <p:cNvPr id="13" name="Text 11"/>
-          <p:cNvSpPr/>
-          <p:nvPr/>
-        </p:nvSpPr>
-        <p:spPr>
-          <a:xfrm>
-            <a:off x="4636008" y="1481328"/>
-            <a:ext cx="384048" cy="384048"/>
+          <p:cNvPr id="14" name="Text 12"/>
+          <p:cNvSpPr/>
+          <p:nvPr/>
+        </p:nvSpPr>
+        <p:spPr>
+          <a:xfrm>
+            <a:off x="4636008" y="1389888"/>
+            <a:ext cx="365760" cy="365760"/>
           </a:xfrm>
           <a:prstGeom prst="rect">
             <a:avLst/>
@@ -1483,7 +1502,7 @@
               <a:buNone/>
             </a:pPr>
             <a:r>
-              <a:rPr lang="en-US" sz="1500" b="1" dirty="0">
+              <a:rPr lang="en-US" sz="1400" b="1" dirty="0">
                 <a:solidFill>
                   <a:srgbClr val="FFFFFF"/>
                 </a:solidFill>
@@ -1493,20 +1512,20 @@
               </a:rPr>
               <a:t>2</a:t>
             </a:r>
-            <a:endParaRPr lang="en-US" sz="1500" dirty="0"/>
-          </a:p>
-        </p:txBody>
-      </p:sp>
-      <p:sp>
-        <p:nvSpPr>
-          <p:cNvPr id="14" name="Text 12"/>
-          <p:cNvSpPr/>
-          <p:nvPr/>
-        </p:nvSpPr>
-        <p:spPr>
-          <a:xfrm>
-            <a:off x="5157216" y="1444752"/>
-            <a:ext cx="2560320" cy="365760"/>
+            <a:endParaRPr lang="en-US" sz="1400" dirty="0"/>
+          </a:p>
+        </p:txBody>
+      </p:sp>
+      <p:sp>
+        <p:nvSpPr>
+          <p:cNvPr id="15" name="Text 13"/>
+          <p:cNvSpPr/>
+          <p:nvPr/>
+        </p:nvSpPr>
+        <p:spPr>
+          <a:xfrm>
+            <a:off x="5129784" y="1362456"/>
+            <a:ext cx="2606040" cy="365760"/>
           </a:xfrm>
           <a:prstGeom prst="rect">
             <a:avLst/>
@@ -1522,7 +1541,7 @@
               <a:buNone/>
             </a:pPr>
             <a:r>
-              <a:rPr lang="en-US" sz="1500" b="1" dirty="0">
+              <a:rPr lang="en-US" sz="1450" b="1" dirty="0">
                 <a:solidFill>
                   <a:srgbClr val="1F1A18"/>
                 </a:solidFill>
@@ -1530,22 +1549,22 @@
                 <a:ea typeface="맑은 고딕" pitchFamily="34" charset="-122"/>
                 <a:cs typeface="맑은 고딕" pitchFamily="34" charset="-120"/>
               </a:rPr>
-              <a:t>온도가 변수</a:t>
-            </a:r>
-            <a:endParaRPr lang="en-US" sz="1500" dirty="0"/>
-          </a:p>
-        </p:txBody>
-      </p:sp>
-      <p:sp>
-        <p:nvSpPr>
-          <p:cNvPr id="15" name="Text 13"/>
-          <p:cNvSpPr/>
-          <p:nvPr/>
-        </p:nvSpPr>
-        <p:spPr>
-          <a:xfrm>
-            <a:off x="4636008" y="1938528"/>
-            <a:ext cx="3063240" cy="749808"/>
+              <a:t>온도가 변수입니다</a:t>
+            </a:r>
+            <a:endParaRPr lang="en-US" sz="1450" dirty="0"/>
+          </a:p>
+        </p:txBody>
+      </p:sp>
+      <p:sp>
+        <p:nvSpPr>
+          <p:cNvPr id="16" name="Text 14"/>
+          <p:cNvSpPr/>
+          <p:nvPr/>
+        </p:nvSpPr>
+        <p:spPr>
+          <a:xfrm>
+            <a:off x="4636008" y="1828800"/>
+            <a:ext cx="3108960" cy="731520"/>
           </a:xfrm>
           <a:prstGeom prst="rect">
             <a:avLst/>
@@ -1559,12 +1578,12 @@
           <a:p>
             <a:pPr indent="0" marL="0">
               <a:lnSpc>
-                <a:spcPts val="1600"/>
+                <a:spcPts val="1500"/>
               </a:lnSpc>
               <a:buNone/>
             </a:pPr>
             <a:r>
-              <a:rPr lang="en-US" sz="1150" dirty="0">
+              <a:rPr lang="en-US" sz="1100" dirty="0">
                 <a:solidFill>
                   <a:srgbClr val="6B625E"/>
                 </a:solidFill>
@@ -1572,19 +1591,19 @@
                 <a:ea typeface="맑은 고딕" pitchFamily="34" charset="-122"/>
                 <a:cs typeface="맑은 고딕" pitchFamily="34" charset="-120"/>
               </a:rPr>
-              <a:t>같은 발전소라도</a:t>
-            </a:r>
-            <a:endParaRPr lang="en-US" sz="1150" dirty="0"/>
+              <a:t>같은 발전소라도 기온에 따라</a:t>
+            </a:r>
+            <a:endParaRPr lang="en-US" sz="1100" dirty="0"/>
           </a:p>
           <a:p>
             <a:pPr indent="0" marL="0">
               <a:lnSpc>
-                <a:spcPts val="1600"/>
+                <a:spcPts val="1500"/>
               </a:lnSpc>
               <a:buNone/>
             </a:pPr>
             <a:r>
-              <a:rPr lang="en-US" sz="1150" dirty="0">
+              <a:rPr lang="en-US" sz="1100" dirty="0">
                 <a:solidFill>
                   <a:srgbClr val="6B625E"/>
                 </a:solidFill>
@@ -1592,46 +1611,26 @@
                 <a:ea typeface="맑은 고딕" pitchFamily="34" charset="-122"/>
                 <a:cs typeface="맑은 고딕" pitchFamily="34" charset="-120"/>
               </a:rPr>
-              <a:t>날씨(기온)에 따라</a:t>
-            </a:r>
-            <a:endParaRPr lang="en-US" sz="1150" dirty="0"/>
-          </a:p>
-          <a:p>
-            <a:pPr indent="0" marL="0">
-              <a:lnSpc>
-                <a:spcPts val="1600"/>
-              </a:lnSpc>
-              <a:buNone/>
-            </a:pPr>
-            <a:r>
-              <a:rPr lang="en-US" sz="1150" dirty="0">
-                <a:solidFill>
-                  <a:srgbClr val="6B625E"/>
-                </a:solidFill>
-                <a:latin typeface="맑은 고딕" pitchFamily="34" charset="0"/>
-                <a:ea typeface="맑은 고딕" pitchFamily="34" charset="-122"/>
-                <a:cs typeface="맑은 고딕" pitchFamily="34" charset="-120"/>
-              </a:rPr>
-              <a:t>출력이 크게 달라짐</a:t>
-            </a:r>
-            <a:endParaRPr lang="en-US" sz="1150" dirty="0"/>
-          </a:p>
-        </p:txBody>
-      </p:sp>
-      <p:sp>
-        <p:nvSpPr>
-          <p:cNvPr id="16" name="Shape 14"/>
-          <p:cNvSpPr/>
-          <p:nvPr/>
-        </p:nvSpPr>
-        <p:spPr>
-          <a:xfrm>
-            <a:off x="8257032" y="1234440"/>
-            <a:ext cx="3566160" cy="1572768"/>
+              <a:t>출력이 376~469 MW 로 변동</a:t>
+            </a:r>
+            <a:endParaRPr lang="en-US" sz="1100" dirty="0"/>
+          </a:p>
+        </p:txBody>
+      </p:sp>
+      <p:sp>
+        <p:nvSpPr>
+          <p:cNvPr id="17" name="Shape 15"/>
+          <p:cNvSpPr/>
+          <p:nvPr/>
+        </p:nvSpPr>
+        <p:spPr>
+          <a:xfrm>
+            <a:off x="8257032" y="1170432"/>
+            <a:ext cx="3566160" cy="1517904"/>
           </a:xfrm>
           <a:prstGeom prst="roundRect">
             <a:avLst>
-              <a:gd name="adj" fmla="val 3488"/>
+              <a:gd name="adj" fmla="val 3614"/>
             </a:avLst>
           </a:prstGeom>
           <a:solidFill>
@@ -1654,14 +1653,14 @@
       </p:sp>
       <p:sp>
         <p:nvSpPr>
-          <p:cNvPr id="17" name="Shape 15"/>
-          <p:cNvSpPr/>
-          <p:nvPr/>
-        </p:nvSpPr>
-        <p:spPr>
-          <a:xfrm>
-            <a:off x="8513064" y="1481328"/>
-            <a:ext cx="384048" cy="384048"/>
+          <p:cNvPr id="18" name="Shape 16"/>
+          <p:cNvSpPr/>
+          <p:nvPr/>
+        </p:nvSpPr>
+        <p:spPr>
+          <a:xfrm>
+            <a:off x="8513064" y="1389888"/>
+            <a:ext cx="365760" cy="365760"/>
           </a:xfrm>
           <a:prstGeom prst="ellipse">
             <a:avLst/>
@@ -1674,14 +1673,14 @@
       </p:sp>
       <p:sp>
         <p:nvSpPr>
-          <p:cNvPr id="18" name="Text 16"/>
-          <p:cNvSpPr/>
-          <p:nvPr/>
-        </p:nvSpPr>
-        <p:spPr>
-          <a:xfrm>
-            <a:off x="8513064" y="1481328"/>
-            <a:ext cx="384048" cy="384048"/>
+          <p:cNvPr id="19" name="Text 17"/>
+          <p:cNvSpPr/>
+          <p:nvPr/>
+        </p:nvSpPr>
+        <p:spPr>
+          <a:xfrm>
+            <a:off x="8513064" y="1389888"/>
+            <a:ext cx="365760" cy="365760"/>
           </a:xfrm>
           <a:prstGeom prst="rect">
             <a:avLst/>
@@ -1697,7 +1696,7 @@
               <a:buNone/>
             </a:pPr>
             <a:r>
-              <a:rPr lang="en-US" sz="1500" b="1" dirty="0">
+              <a:rPr lang="en-US" sz="1400" b="1" dirty="0">
                 <a:solidFill>
                   <a:srgbClr val="FFFFFF"/>
                 </a:solidFill>
@@ -1707,20 +1706,20 @@
               </a:rPr>
               <a:t>3</a:t>
             </a:r>
-            <a:endParaRPr lang="en-US" sz="1500" dirty="0"/>
-          </a:p>
-        </p:txBody>
-      </p:sp>
-      <p:sp>
-        <p:nvSpPr>
-          <p:cNvPr id="19" name="Text 17"/>
-          <p:cNvSpPr/>
-          <p:nvPr/>
-        </p:nvSpPr>
-        <p:spPr>
-          <a:xfrm>
-            <a:off x="9034272" y="1444752"/>
-            <a:ext cx="2560320" cy="365760"/>
+            <a:endParaRPr lang="en-US" sz="1400" dirty="0"/>
+          </a:p>
+        </p:txBody>
+      </p:sp>
+      <p:sp>
+        <p:nvSpPr>
+          <p:cNvPr id="20" name="Text 18"/>
+          <p:cNvSpPr/>
+          <p:nvPr/>
+        </p:nvSpPr>
+        <p:spPr>
+          <a:xfrm>
+            <a:off x="9006840" y="1362456"/>
+            <a:ext cx="2606040" cy="365760"/>
           </a:xfrm>
           <a:prstGeom prst="rect">
             <a:avLst/>
@@ -1736,7 +1735,7 @@
               <a:buNone/>
             </a:pPr>
             <a:r>
-              <a:rPr lang="en-US" sz="1500" b="1" dirty="0">
+              <a:rPr lang="en-US" sz="1450" b="1" dirty="0">
                 <a:solidFill>
                   <a:srgbClr val="1F1A18"/>
                 </a:solidFill>
@@ -1744,22 +1743,22 @@
                 <a:ea typeface="맑은 고딕" pitchFamily="34" charset="-122"/>
                 <a:cs typeface="맑은 고딕" pitchFamily="34" charset="-120"/>
               </a:rPr>
-              <a:t>정확도가 곧 돈</a:t>
-            </a:r>
-            <a:endParaRPr lang="en-US" sz="1500" dirty="0"/>
-          </a:p>
-        </p:txBody>
-      </p:sp>
-      <p:sp>
-        <p:nvSpPr>
-          <p:cNvPr id="20" name="Text 18"/>
-          <p:cNvSpPr/>
-          <p:nvPr/>
-        </p:nvSpPr>
-        <p:spPr>
-          <a:xfrm>
-            <a:off x="8513064" y="1938528"/>
-            <a:ext cx="3063240" cy="749808"/>
+              <a:t>정확도가 곧 돈입니다</a:t>
+            </a:r>
+            <a:endParaRPr lang="en-US" sz="1450" dirty="0"/>
+          </a:p>
+        </p:txBody>
+      </p:sp>
+      <p:sp>
+        <p:nvSpPr>
+          <p:cNvPr id="21" name="Text 19"/>
+          <p:cNvSpPr/>
+          <p:nvPr/>
+        </p:nvSpPr>
+        <p:spPr>
+          <a:xfrm>
+            <a:off x="8513064" y="1828800"/>
+            <a:ext cx="3108960" cy="731520"/>
           </a:xfrm>
           <a:prstGeom prst="rect">
             <a:avLst/>
@@ -1773,12 +1772,12 @@
           <a:p>
             <a:pPr indent="0" marL="0">
               <a:lnSpc>
-                <a:spcPts val="1600"/>
+                <a:spcPts val="1500"/>
               </a:lnSpc>
               <a:buNone/>
             </a:pPr>
             <a:r>
-              <a:rPr lang="en-US" sz="1150" dirty="0">
+              <a:rPr lang="en-US" sz="1100" dirty="0">
                 <a:solidFill>
                   <a:srgbClr val="6B625E"/>
                 </a:solidFill>
@@ -1786,19 +1785,19 @@
                 <a:ea typeface="맑은 고딕" pitchFamily="34" charset="-122"/>
                 <a:cs typeface="맑은 고딕" pitchFamily="34" charset="-120"/>
               </a:rPr>
-              <a:t>적게 신고 → 덜 팔아 손해</a:t>
-            </a:r>
-            <a:endParaRPr lang="en-US" sz="1150" dirty="0"/>
+              <a:t>허용범위 ±0.5% (약 ±2 MW)</a:t>
+            </a:r>
+            <a:endParaRPr lang="en-US" sz="1100" dirty="0"/>
           </a:p>
           <a:p>
             <a:pPr indent="0" marL="0">
               <a:lnSpc>
-                <a:spcPts val="1600"/>
+                <a:spcPts val="1500"/>
               </a:lnSpc>
               <a:buNone/>
             </a:pPr>
             <a:r>
-              <a:rPr lang="en-US" sz="1150" dirty="0">
+              <a:rPr lang="en-US" sz="1100" dirty="0">
                 <a:solidFill>
                   <a:srgbClr val="6B625E"/>
                 </a:solidFill>
@@ -1806,22 +1805,22 @@
                 <a:ea typeface="맑은 고딕" pitchFamily="34" charset="-122"/>
                 <a:cs typeface="맑은 고딕" pitchFamily="34" charset="-120"/>
               </a:rPr>
-              <a:t>못 지키면 → 페널티</a:t>
-            </a:r>
-            <a:endParaRPr lang="en-US" sz="1150" dirty="0"/>
-          </a:p>
-        </p:txBody>
-      </p:sp>
-      <p:sp>
-        <p:nvSpPr>
-          <p:cNvPr id="21" name="Text 19"/>
-          <p:cNvSpPr/>
-          <p:nvPr/>
-        </p:nvSpPr>
-        <p:spPr>
-          <a:xfrm>
-            <a:off x="502920" y="3035808"/>
-            <a:ext cx="5394960" cy="310896"/>
+              <a:t>적게 신고 → 손해 / 못 지키면 → 페널티</a:t>
+            </a:r>
+            <a:endParaRPr lang="en-US" sz="1100" dirty="0"/>
+          </a:p>
+        </p:txBody>
+      </p:sp>
+      <p:sp>
+        <p:nvSpPr>
+          <p:cNvPr id="22" name="Text 20"/>
+          <p:cNvSpPr/>
+          <p:nvPr/>
+        </p:nvSpPr>
+        <p:spPr>
+          <a:xfrm>
+            <a:off x="502920" y="2871216"/>
+            <a:ext cx="5394960" cy="292608"/>
           </a:xfrm>
           <a:prstGeom prst="rect">
             <a:avLst/>
@@ -1837,7 +1836,7 @@
               <a:buNone/>
             </a:pPr>
             <a:r>
-              <a:rPr lang="en-US" sz="1400" b="1" dirty="0">
+              <a:rPr lang="en-US" sz="1350" b="1" dirty="0">
                 <a:solidFill>
                   <a:srgbClr val="6B625E"/>
                 </a:solidFill>
@@ -1847,24 +1846,24 @@
               </a:rPr>
               <a:t>지금까지는 이렇게 했습니다</a:t>
             </a:r>
-            <a:endParaRPr lang="en-US" sz="1400" dirty="0"/>
-          </a:p>
-        </p:txBody>
-      </p:sp>
-      <p:sp>
-        <p:nvSpPr>
-          <p:cNvPr id="22" name="Shape 20"/>
-          <p:cNvSpPr/>
-          <p:nvPr/>
-        </p:nvSpPr>
-        <p:spPr>
-          <a:xfrm>
-            <a:off x="502920" y="3401568"/>
-            <a:ext cx="5394960" cy="2487168"/>
+            <a:endParaRPr lang="en-US" sz="1350" dirty="0"/>
+          </a:p>
+        </p:txBody>
+      </p:sp>
+      <p:sp>
+        <p:nvSpPr>
+          <p:cNvPr id="23" name="Shape 21"/>
+          <p:cNvSpPr/>
+          <p:nvPr/>
+        </p:nvSpPr>
+        <p:spPr>
+          <a:xfrm>
+            <a:off x="502920" y="3218688"/>
+            <a:ext cx="5394960" cy="2103120"/>
           </a:xfrm>
           <a:prstGeom prst="roundRect">
             <a:avLst>
-              <a:gd name="adj" fmla="val 2206"/>
+              <a:gd name="adj" fmla="val 2609"/>
             </a:avLst>
           </a:prstGeom>
           <a:solidFill>
@@ -1887,14 +1886,14 @@
       </p:sp>
       <p:sp>
         <p:nvSpPr>
-          <p:cNvPr id="23" name="Text 21"/>
-          <p:cNvSpPr/>
-          <p:nvPr/>
-        </p:nvSpPr>
-        <p:spPr>
-          <a:xfrm>
-            <a:off x="822960" y="3703320"/>
-            <a:ext cx="4754880" cy="1463040"/>
+          <p:cNvPr id="24" name="Text 22"/>
+          <p:cNvSpPr/>
+          <p:nvPr/>
+        </p:nvSpPr>
+        <p:spPr>
+          <a:xfrm>
+            <a:off x="822960" y="3456432"/>
+            <a:ext cx="4800600" cy="1371600"/>
           </a:xfrm>
           <a:prstGeom prst="rect">
             <a:avLst/>
@@ -1908,13 +1907,13 @@
           <a:p>
             <a:pPr marL="342900" indent="-342900">
               <a:spcAft>
-                <a:spcPts val="800"/>
+                <a:spcPts val="700"/>
               </a:spcAft>
               <a:buSzPct val="100000"/>
               <a:buChar char="•"/>
             </a:pPr>
             <a:r>
-              <a:rPr lang="en-US" sz="1300" dirty="0">
+              <a:rPr lang="en-US" sz="1250" dirty="0">
                 <a:solidFill>
                   <a:srgbClr val="1F1A18"/>
                 </a:solidFill>
@@ -1922,20 +1921,20 @@
                 <a:ea typeface="맑은 고딕" pitchFamily="34" charset="-122"/>
                 <a:cs typeface="맑은 고딕" pitchFamily="34" charset="-120"/>
               </a:rPr>
-              <a:t>담당자가 엑셀 4개를 오가며 직접 계산</a:t>
-            </a:r>
-            <a:endParaRPr lang="en-US" sz="1300" dirty="0"/>
+              <a:t>엑셀 4개를 오가며 담당자가 직접 계산</a:t>
+            </a:r>
+            <a:endParaRPr lang="en-US" sz="1250" dirty="0"/>
           </a:p>
           <a:p>
             <a:pPr marL="342900" indent="-342900">
               <a:spcAft>
-                <a:spcPts val="800"/>
+                <a:spcPts val="700"/>
               </a:spcAft>
               <a:buSzPct val="100000"/>
               <a:buChar char="•"/>
             </a:pPr>
             <a:r>
-              <a:rPr lang="en-US" sz="1300" dirty="0">
+              <a:rPr lang="en-US" sz="1250" dirty="0">
                 <a:solidFill>
                   <a:srgbClr val="1F1A18"/>
                 </a:solidFill>
@@ -1943,20 +1942,20 @@
                 <a:ea typeface="맑은 고딕" pitchFamily="34" charset="-122"/>
                 <a:cs typeface="맑은 고딕" pitchFamily="34" charset="-120"/>
               </a:rPr>
-              <a:t>테스트 결과를 손으로 옮겨 적고 평균을 냄</a:t>
-            </a:r>
-            <a:endParaRPr lang="en-US" sz="1300" dirty="0"/>
+              <a:t>시험 결과를 손으로 옮겨 적고 평균 산출</a:t>
+            </a:r>
+            <a:endParaRPr lang="en-US" sz="1250" dirty="0"/>
           </a:p>
           <a:p>
             <a:pPr marL="342900" indent="-342900">
               <a:spcAft>
-                <a:spcPts val="800"/>
+                <a:spcPts val="700"/>
               </a:spcAft>
               <a:buSzPct val="100000"/>
               <a:buChar char="•"/>
             </a:pPr>
             <a:r>
-              <a:rPr lang="en-US" sz="1300" dirty="0">
+              <a:rPr lang="en-US" sz="1250" dirty="0">
                 <a:solidFill>
                   <a:srgbClr val="1F1A18"/>
                 </a:solidFill>
@@ -1964,20 +1963,20 @@
                 <a:ea typeface="맑은 고딕" pitchFamily="34" charset="-122"/>
                 <a:cs typeface="맑은 고딕" pitchFamily="34" charset="-120"/>
               </a:rPr>
-              <a:t>한 번 만드는 데 시간이 오래 걸림</a:t>
-            </a:r>
-            <a:endParaRPr lang="en-US" sz="1300" dirty="0"/>
+              <a:t>온도 61개 구간 값을 매번 수작업 입력</a:t>
+            </a:r>
+            <a:endParaRPr lang="en-US" sz="1250" dirty="0"/>
           </a:p>
           <a:p>
             <a:pPr marL="342900" indent="-342900">
               <a:spcAft>
-                <a:spcPts val="800"/>
+                <a:spcPts val="700"/>
               </a:spcAft>
               <a:buSzPct val="100000"/>
               <a:buChar char="•"/>
             </a:pPr>
             <a:r>
-              <a:rPr lang="en-US" sz="1300" dirty="0">
+              <a:rPr lang="en-US" sz="1250" dirty="0">
                 <a:solidFill>
                   <a:srgbClr val="1F1A18"/>
                 </a:solidFill>
@@ -1985,22 +1984,22 @@
                 <a:ea typeface="맑은 고딕" pitchFamily="34" charset="-122"/>
                 <a:cs typeface="맑은 고딕" pitchFamily="34" charset="-120"/>
               </a:rPr>
-              <a:t>사람이 하는 일이라 실수 가능성이 있음</a:t>
-            </a:r>
-            <a:endParaRPr lang="en-US" sz="1300" dirty="0"/>
-          </a:p>
-        </p:txBody>
-      </p:sp>
-      <p:sp>
-        <p:nvSpPr>
-          <p:cNvPr id="24" name="Text 22"/>
-          <p:cNvSpPr/>
-          <p:nvPr/>
-        </p:nvSpPr>
-        <p:spPr>
-          <a:xfrm>
-            <a:off x="822960" y="5285232"/>
-            <a:ext cx="4754880" cy="365760"/>
+              <a:t>사람이 하는 일이라 실수 가능성 존재</a:t>
+            </a:r>
+            <a:endParaRPr lang="en-US" sz="1250" dirty="0"/>
+          </a:p>
+        </p:txBody>
+      </p:sp>
+      <p:sp>
+        <p:nvSpPr>
+          <p:cNvPr id="25" name="Text 23"/>
+          <p:cNvSpPr/>
+          <p:nvPr/>
+        </p:nvSpPr>
+        <p:spPr>
+          <a:xfrm>
+            <a:off x="822960" y="4901184"/>
+            <a:ext cx="4800600" cy="310896"/>
           </a:xfrm>
           <a:prstGeom prst="rect">
             <a:avLst/>
@@ -2016,7 +2015,7 @@
               <a:buNone/>
             </a:pPr>
             <a:r>
-              <a:rPr lang="en-US" sz="1300" i="1" dirty="0">
+              <a:rPr lang="en-US" sz="1250" i="1" dirty="0">
                 <a:solidFill>
                   <a:srgbClr val="6B625E"/>
                 </a:solidFill>
@@ -2026,20 +2025,20 @@
               </a:rPr>
               <a:t>＂엑셀 4개 · 수작업 · 반복＂</a:t>
             </a:r>
-            <a:endParaRPr lang="en-US" sz="1300" dirty="0"/>
-          </a:p>
-        </p:txBody>
-      </p:sp>
-      <p:sp>
-        <p:nvSpPr>
-          <p:cNvPr id="25" name="Text 23"/>
-          <p:cNvSpPr/>
-          <p:nvPr/>
-        </p:nvSpPr>
-        <p:spPr>
-          <a:xfrm>
-            <a:off x="6291072" y="3035808"/>
-            <a:ext cx="5394960" cy="310896"/>
+            <a:endParaRPr lang="en-US" sz="1250" dirty="0"/>
+          </a:p>
+        </p:txBody>
+      </p:sp>
+      <p:sp>
+        <p:nvSpPr>
+          <p:cNvPr id="26" name="Text 24"/>
+          <p:cNvSpPr/>
+          <p:nvPr/>
+        </p:nvSpPr>
+        <p:spPr>
+          <a:xfrm>
+            <a:off x="6291072" y="2871216"/>
+            <a:ext cx="5394960" cy="292608"/>
           </a:xfrm>
           <a:prstGeom prst="rect">
             <a:avLst/>
@@ -2055,7 +2054,7 @@
               <a:buNone/>
             </a:pPr>
             <a:r>
-              <a:rPr lang="en-US" sz="1400" b="1" dirty="0">
+              <a:rPr lang="en-US" sz="1350" b="1" dirty="0">
                 <a:solidFill>
                   <a:srgbClr val="EA002C"/>
                 </a:solidFill>
@@ -2065,24 +2064,24 @@
               </a:rPr>
               <a:t>그래서 이렇게 바꿨습니다</a:t>
             </a:r>
-            <a:endParaRPr lang="en-US" sz="1400" dirty="0"/>
-          </a:p>
-        </p:txBody>
-      </p:sp>
-      <p:sp>
-        <p:nvSpPr>
-          <p:cNvPr id="26" name="Shape 24"/>
-          <p:cNvSpPr/>
-          <p:nvPr/>
-        </p:nvSpPr>
-        <p:spPr>
-          <a:xfrm>
-            <a:off x="6291072" y="3401568"/>
-            <a:ext cx="5394960" cy="2487168"/>
+            <a:endParaRPr lang="en-US" sz="1350" dirty="0"/>
+          </a:p>
+        </p:txBody>
+      </p:sp>
+      <p:sp>
+        <p:nvSpPr>
+          <p:cNvPr id="27" name="Shape 25"/>
+          <p:cNvSpPr/>
+          <p:nvPr/>
+        </p:nvSpPr>
+        <p:spPr>
+          <a:xfrm>
+            <a:off x="6291072" y="3218688"/>
+            <a:ext cx="5394960" cy="2103120"/>
           </a:xfrm>
           <a:prstGeom prst="roundRect">
             <a:avLst>
-              <a:gd name="adj" fmla="val 2206"/>
+              <a:gd name="adj" fmla="val 2609"/>
             </a:avLst>
           </a:prstGeom>
           <a:solidFill>
@@ -2105,14 +2104,14 @@
       </p:sp>
       <p:sp>
         <p:nvSpPr>
-          <p:cNvPr id="27" name="Text 25"/>
-          <p:cNvSpPr/>
-          <p:nvPr/>
-        </p:nvSpPr>
-        <p:spPr>
-          <a:xfrm>
-            <a:off x="6611112" y="3703320"/>
-            <a:ext cx="4754880" cy="1463040"/>
+          <p:cNvPr id="28" name="Text 26"/>
+          <p:cNvSpPr/>
+          <p:nvPr/>
+        </p:nvSpPr>
+        <p:spPr>
+          <a:xfrm>
+            <a:off x="6611112" y="3456432"/>
+            <a:ext cx="4800600" cy="1371600"/>
           </a:xfrm>
           <a:prstGeom prst="rect">
             <a:avLst/>
@@ -2126,13 +2125,13 @@
           <a:p>
             <a:pPr marL="342900" indent="-342900">
               <a:spcAft>
-                <a:spcPts val="800"/>
+                <a:spcPts val="700"/>
               </a:spcAft>
               <a:buSzPct val="100000"/>
               <a:buChar char="•"/>
             </a:pPr>
             <a:r>
-              <a:rPr lang="en-US" sz="1300" dirty="0">
+              <a:rPr lang="en-US" sz="1250" dirty="0">
                 <a:solidFill>
                   <a:srgbClr val="1F1A18"/>
                 </a:solidFill>
@@ -2140,20 +2139,20 @@
                 <a:ea typeface="맑은 고딕" pitchFamily="34" charset="-122"/>
                 <a:cs typeface="맑은 고딕" pitchFamily="34" charset="-120"/>
               </a:rPr>
-              <a:t>날짜만 입력하면 발전소 데이터를 자동으로 가져옴</a:t>
-            </a:r>
-            <a:endParaRPr lang="en-US" sz="1300" dirty="0"/>
+              <a:t>날짜만 입력하면 발전소 데이터 자동 취득</a:t>
+            </a:r>
+            <a:endParaRPr lang="en-US" sz="1250" dirty="0"/>
           </a:p>
           <a:p>
             <a:pPr marL="342900" indent="-342900">
               <a:spcAft>
-                <a:spcPts val="800"/>
+                <a:spcPts val="700"/>
               </a:spcAft>
               <a:buSzPct val="100000"/>
               <a:buChar char="•"/>
             </a:pPr>
             <a:r>
-              <a:rPr lang="en-US" sz="1300" dirty="0">
+              <a:rPr lang="en-US" sz="1250" dirty="0">
                 <a:solidFill>
                   <a:srgbClr val="1F1A18"/>
                 </a:solidFill>
@@ -2161,20 +2160,20 @@
                 <a:ea typeface="맑은 고딕" pitchFamily="34" charset="-122"/>
                 <a:cs typeface="맑은 고딕" pitchFamily="34" charset="-120"/>
               </a:rPr>
-              <a:t>계산·보정·검증까지 프로그램이 처리</a:t>
-            </a:r>
-            <a:endParaRPr lang="en-US" sz="1300" dirty="0"/>
+              <a:t>계산·보정·검증을 프로그램이 일괄 처리</a:t>
+            </a:r>
+            <a:endParaRPr lang="en-US" sz="1250" dirty="0"/>
           </a:p>
           <a:p>
             <a:pPr marL="342900" indent="-342900">
               <a:spcAft>
-                <a:spcPts val="800"/>
+                <a:spcPts val="700"/>
               </a:spcAft>
               <a:buSzPct val="100000"/>
               <a:buChar char="•"/>
             </a:pPr>
             <a:r>
-              <a:rPr lang="en-US" sz="1300" dirty="0">
+              <a:rPr lang="en-US" sz="1250" dirty="0">
                 <a:solidFill>
                   <a:srgbClr val="1F1A18"/>
                 </a:solidFill>
@@ -2182,20 +2181,20 @@
                 <a:ea typeface="맑은 고딕" pitchFamily="34" charset="-122"/>
                 <a:cs typeface="맑은 고딕" pitchFamily="34" charset="-120"/>
               </a:rPr>
-              <a:t>신고용 엑셀 파일까지 자동 생성</a:t>
-            </a:r>
-            <a:endParaRPr lang="en-US" sz="1300" dirty="0"/>
+              <a:t>온도 61개 구간 신고파일까지 자동 생성</a:t>
+            </a:r>
+            <a:endParaRPr lang="en-US" sz="1250" dirty="0"/>
           </a:p>
           <a:p>
             <a:pPr marL="342900" indent="-342900">
               <a:spcAft>
-                <a:spcPts val="800"/>
+                <a:spcPts val="700"/>
               </a:spcAft>
               <a:buSzPct val="100000"/>
               <a:buChar char="•"/>
             </a:pPr>
             <a:r>
-              <a:rPr lang="en-US" sz="1300" dirty="0">
+              <a:rPr lang="en-US" sz="1250" dirty="0">
                 <a:solidFill>
                   <a:srgbClr val="1F1A18"/>
                 </a:solidFill>
@@ -2203,22 +2202,22 @@
                 <a:ea typeface="맑은 고딕" pitchFamily="34" charset="-122"/>
                 <a:cs typeface="맑은 고딕" pitchFamily="34" charset="-120"/>
               </a:rPr>
-              <a:t>계산 결과는 기존 엑셀과 동일함을 확인</a:t>
-            </a:r>
-            <a:endParaRPr lang="en-US" sz="1300" dirty="0"/>
-          </a:p>
-        </p:txBody>
-      </p:sp>
-      <p:sp>
-        <p:nvSpPr>
-          <p:cNvPr id="28" name="Text 26"/>
-          <p:cNvSpPr/>
-          <p:nvPr/>
-        </p:nvSpPr>
-        <p:spPr>
-          <a:xfrm>
-            <a:off x="6611112" y="5285232"/>
-            <a:ext cx="4754880" cy="365760"/>
+              <a:t>기존 엑셀과 동일 계산 확인 (오차 0.18 MW)</a:t>
+            </a:r>
+            <a:endParaRPr lang="en-US" sz="1250" dirty="0"/>
+          </a:p>
+        </p:txBody>
+      </p:sp>
+      <p:sp>
+        <p:nvSpPr>
+          <p:cNvPr id="29" name="Text 27"/>
+          <p:cNvSpPr/>
+          <p:nvPr/>
+        </p:nvSpPr>
+        <p:spPr>
+          <a:xfrm>
+            <a:off x="6611112" y="4901184"/>
+            <a:ext cx="4800600" cy="310896"/>
           </a:xfrm>
           <a:prstGeom prst="rect">
             <a:avLst/>
@@ -2234,7 +2233,7 @@
               <a:buNone/>
             </a:pPr>
             <a:r>
-              <a:rPr lang="en-US" sz="1300" b="1" i="1" dirty="0">
+              <a:rPr lang="en-US" sz="1250" b="1" i="1" dirty="0">
                 <a:solidFill>
                   <a:srgbClr val="EA002C"/>
                 </a:solidFill>
@@ -2244,28 +2243,28 @@
               </a:rPr>
               <a:t>＂날짜 입력 → 클릭 한 번＂</a:t>
             </a:r>
-            <a:endParaRPr lang="en-US" sz="1300" dirty="0"/>
-          </a:p>
-        </p:txBody>
-      </p:sp>
-      <p:sp>
-        <p:nvSpPr>
-          <p:cNvPr id="29" name="Shape 27"/>
-          <p:cNvSpPr/>
-          <p:nvPr/>
-        </p:nvSpPr>
-        <p:spPr>
-          <a:xfrm>
-            <a:off x="502920" y="6053328"/>
-            <a:ext cx="11183112" cy="566928"/>
+            <a:endParaRPr lang="en-US" sz="1250" dirty="0"/>
+          </a:p>
+        </p:txBody>
+      </p:sp>
+      <p:sp>
+        <p:nvSpPr>
+          <p:cNvPr id="30" name="Shape 28"/>
+          <p:cNvSpPr/>
+          <p:nvPr/>
+        </p:nvSpPr>
+        <p:spPr>
+          <a:xfrm>
+            <a:off x="502920" y="5541264"/>
+            <a:ext cx="11183112" cy="1078992"/>
           </a:xfrm>
           <a:prstGeom prst="roundRect">
             <a:avLst>
-              <a:gd name="adj" fmla="val 9677"/>
+              <a:gd name="adj" fmla="val 5085"/>
             </a:avLst>
           </a:prstGeom>
           <a:solidFill>
-            <a:srgbClr val="1F1A18"/>
+            <a:srgbClr val="FFFFFF"/>
           </a:solidFill>
           <a:ln w="12700">
             <a:solidFill>
@@ -2284,92 +2283,182 @@
       </p:sp>
       <p:sp>
         <p:nvSpPr>
-          <p:cNvPr id="30" name="Text 28"/>
-          <p:cNvSpPr/>
-          <p:nvPr/>
-        </p:nvSpPr>
-        <p:spPr>
-          <a:xfrm>
-            <a:off x="777240" y="6144768"/>
-            <a:ext cx="2651760" cy="182880"/>
-          </a:xfrm>
-          <a:prstGeom prst="rect">
-            <a:avLst/>
-          </a:prstGeom>
-          <a:noFill/>
-          <a:ln/>
-        </p:spPr>
-        <p:txBody>
-          <a:bodyPr wrap="square" lIns="0" tIns="0" rIns="0" bIns="0" rtlCol="0" anchor="ctr"/>
+          <p:cNvPr id="31" name="Text 29"/>
+          <p:cNvSpPr/>
+          <p:nvPr/>
+        </p:nvSpPr>
+        <p:spPr>
+          <a:xfrm>
+            <a:off x="868680" y="5705856"/>
+            <a:ext cx="2057400" cy="347472"/>
+          </a:xfrm>
+          <a:prstGeom prst="rect">
+            <a:avLst/>
+          </a:prstGeom>
+          <a:noFill/>
+          <a:ln/>
+        </p:spPr>
+        <p:txBody>
+          <a:bodyPr wrap="square" lIns="0" tIns="0" rIns="0" bIns="0" rtlCol="0" anchor="b"/>
           <a:lstStyle/>
           <a:p>
             <a:pPr indent="0" marL="0">
               <a:buNone/>
             </a:pPr>
             <a:r>
+              <a:rPr lang="en-US" sz="2100" b="1" dirty="0">
+                <a:solidFill>
+                  <a:srgbClr val="EA002C"/>
+                </a:solidFill>
+                <a:latin typeface="맑은 고딕" pitchFamily="34" charset="0"/>
+                <a:ea typeface="맑은 고딕" pitchFamily="34" charset="-122"/>
+                <a:cs typeface="맑은 고딕" pitchFamily="34" charset="-120"/>
+              </a:rPr>
+              <a:t>32</a:t>
+            </a:r>
+            <a:pPr indent="0" marL="0">
+              <a:buNone/>
+            </a:pPr>
+            <a:r>
+              <a:rPr lang="en-US" sz="1150" b="1" dirty="0">
+                <a:solidFill>
+                  <a:srgbClr val="EA002C"/>
+                </a:solidFill>
+                <a:latin typeface="맑은 고딕" pitchFamily="34" charset="0"/>
+                <a:ea typeface="맑은 고딕" pitchFamily="34" charset="-122"/>
+                <a:cs typeface="맑은 고딕" pitchFamily="34" charset="-120"/>
+              </a:rPr>
+              <a:t> 건</a:t>
+            </a:r>
+            <a:endParaRPr lang="en-US" sz="2100" dirty="0"/>
+          </a:p>
+        </p:txBody>
+      </p:sp>
+      <p:sp>
+        <p:nvSpPr>
+          <p:cNvPr id="32" name="Text 30"/>
+          <p:cNvSpPr/>
+          <p:nvPr/>
+        </p:nvSpPr>
+        <p:spPr>
+          <a:xfrm>
+            <a:off x="868680" y="6053328"/>
+            <a:ext cx="2057400" cy="402336"/>
+          </a:xfrm>
+          <a:prstGeom prst="rect">
+            <a:avLst/>
+          </a:prstGeom>
+          <a:noFill/>
+          <a:ln/>
+        </p:spPr>
+        <p:txBody>
+          <a:bodyPr wrap="square" lIns="0" tIns="0" rIns="0" bIns="0" rtlCol="0" anchor="ctr"/>
+          <a:lstStyle/>
+          <a:p>
+            <a:pPr indent="0" marL="0">
+              <a:lnSpc>
+                <a:spcPts val="1200"/>
+              </a:lnSpc>
+              <a:buNone/>
+            </a:pPr>
+            <a:r>
               <a:rPr lang="en-US" sz="950" dirty="0">
                 <a:solidFill>
-                  <a:srgbClr val="A99F9B"/>
-                </a:solidFill>
-                <a:latin typeface="맑은 고딕" pitchFamily="34" charset="0"/>
-                <a:ea typeface="맑은 고딕" pitchFamily="34" charset="-122"/>
-                <a:cs typeface="맑은 고딕" pitchFamily="34" charset="-120"/>
-              </a:rPr>
-              <a:t>작업 시간</a:t>
+                  <a:srgbClr val="6B625E"/>
+                </a:solidFill>
+                <a:latin typeface="맑은 고딕" pitchFamily="34" charset="0"/>
+                <a:ea typeface="맑은 고딕" pitchFamily="34" charset="-122"/>
+                <a:cs typeface="맑은 고딕" pitchFamily="34" charset="-120"/>
+              </a:rPr>
+              <a:t>축적된 시험 결과</a:t>
             </a:r>
             <a:endParaRPr lang="en-US" sz="950" dirty="0"/>
           </a:p>
-        </p:txBody>
-      </p:sp>
-      <p:sp>
-        <p:nvSpPr>
-          <p:cNvPr id="31" name="Text 29"/>
-          <p:cNvSpPr/>
-          <p:nvPr/>
-        </p:nvSpPr>
-        <p:spPr>
-          <a:xfrm>
-            <a:off x="777240" y="6327648"/>
-            <a:ext cx="2651760" cy="219456"/>
-          </a:xfrm>
-          <a:prstGeom prst="rect">
-            <a:avLst/>
-          </a:prstGeom>
-          <a:noFill/>
-          <a:ln/>
-        </p:spPr>
-        <p:txBody>
-          <a:bodyPr wrap="square" lIns="0" tIns="0" rIns="0" bIns="0" rtlCol="0" anchor="ctr"/>
-          <a:lstStyle/>
           <a:p>
             <a:pPr indent="0" marL="0">
+              <a:lnSpc>
+                <a:spcPts val="1200"/>
+              </a:lnSpc>
+              <a:buNone/>
+            </a:pPr>
+            <a:r>
+              <a:rPr lang="en-US" sz="950" dirty="0">
+                <a:solidFill>
+                  <a:srgbClr val="6B625E"/>
+                </a:solidFill>
+                <a:latin typeface="맑은 고딕" pitchFamily="34" charset="0"/>
+                <a:ea typeface="맑은 고딕" pitchFamily="34" charset="-122"/>
+                <a:cs typeface="맑은 고딕" pitchFamily="34" charset="-120"/>
+              </a:rPr>
+              <a:t>(−1.9 ~ 36.1°C)</a:t>
+            </a:r>
+            <a:endParaRPr lang="en-US" sz="950" dirty="0"/>
+          </a:p>
+        </p:txBody>
+      </p:sp>
+      <p:sp>
+        <p:nvSpPr>
+          <p:cNvPr id="33" name="Text 31"/>
+          <p:cNvSpPr/>
+          <p:nvPr/>
+        </p:nvSpPr>
+        <p:spPr>
+          <a:xfrm>
+            <a:off x="3063240" y="5705856"/>
+            <a:ext cx="2057400" cy="347472"/>
+          </a:xfrm>
+          <a:prstGeom prst="rect">
+            <a:avLst/>
+          </a:prstGeom>
+          <a:noFill/>
+          <a:ln/>
+        </p:spPr>
+        <p:txBody>
+          <a:bodyPr wrap="square" lIns="0" tIns="0" rIns="0" bIns="0" rtlCol="0" anchor="b"/>
+          <a:lstStyle/>
+          <a:p>
+            <a:pPr indent="0" marL="0">
+              <a:buNone/>
+            </a:pPr>
+            <a:r>
+              <a:rPr lang="en-US" sz="2100" b="1" dirty="0">
+                <a:solidFill>
+                  <a:srgbClr val="1F1A18"/>
+                </a:solidFill>
+                <a:latin typeface="맑은 고딕" pitchFamily="34" charset="0"/>
+                <a:ea typeface="맑은 고딕" pitchFamily="34" charset="-122"/>
+                <a:cs typeface="맑은 고딕" pitchFamily="34" charset="-120"/>
+              </a:rPr>
+              <a:t>0.18</a:t>
+            </a:r>
+            <a:pPr indent="0" marL="0">
               <a:buNone/>
             </a:pPr>
             <a:r>
               <a:rPr lang="en-US" sz="1150" b="1" dirty="0">
                 <a:solidFill>
-                  <a:srgbClr val="FFFFFF"/>
-                </a:solidFill>
-                <a:latin typeface="맑은 고딕" pitchFamily="34" charset="0"/>
-                <a:ea typeface="맑은 고딕" pitchFamily="34" charset="-122"/>
-                <a:cs typeface="맑은 고딕" pitchFamily="34" charset="-120"/>
-              </a:rPr>
-              <a:t>수 시간 → 클릭 한 번</a:t>
-            </a:r>
-            <a:endParaRPr lang="en-US" sz="1150" dirty="0"/>
-          </a:p>
-        </p:txBody>
-      </p:sp>
-      <p:sp>
-        <p:nvSpPr>
-          <p:cNvPr id="32" name="Text 30"/>
-          <p:cNvSpPr/>
-          <p:nvPr/>
-        </p:nvSpPr>
-        <p:spPr>
-          <a:xfrm>
-            <a:off x="3538728" y="6144768"/>
-            <a:ext cx="2651760" cy="182880"/>
+                  <a:srgbClr val="1F1A18"/>
+                </a:solidFill>
+                <a:latin typeface="맑은 고딕" pitchFamily="34" charset="0"/>
+                <a:ea typeface="맑은 고딕" pitchFamily="34" charset="-122"/>
+                <a:cs typeface="맑은 고딕" pitchFamily="34" charset="-120"/>
+              </a:rPr>
+              <a:t> MW</a:t>
+            </a:r>
+            <a:endParaRPr lang="en-US" sz="2100" dirty="0"/>
+          </a:p>
+        </p:txBody>
+      </p:sp>
+      <p:sp>
+        <p:nvSpPr>
+          <p:cNvPr id="34" name="Text 32"/>
+          <p:cNvSpPr/>
+          <p:nvPr/>
+        </p:nvSpPr>
+        <p:spPr>
+          <a:xfrm>
+            <a:off x="3063240" y="6053328"/>
+            <a:ext cx="2057400" cy="402336"/>
           </a:xfrm>
           <a:prstGeom prst="rect">
             <a:avLst/>
@@ -2382,72 +2471,109 @@
           <a:lstStyle/>
           <a:p>
             <a:pPr indent="0" marL="0">
+              <a:lnSpc>
+                <a:spcPts val="1200"/>
+              </a:lnSpc>
               <a:buNone/>
             </a:pPr>
             <a:r>
               <a:rPr lang="en-US" sz="950" dirty="0">
                 <a:solidFill>
-                  <a:srgbClr val="A99F9B"/>
-                </a:solidFill>
-                <a:latin typeface="맑은 고딕" pitchFamily="34" charset="0"/>
-                <a:ea typeface="맑은 고딕" pitchFamily="34" charset="-122"/>
-                <a:cs typeface="맑은 고딕" pitchFamily="34" charset="-120"/>
-              </a:rPr>
-              <a:t>계산 정확도</a:t>
+                  <a:srgbClr val="6B625E"/>
+                </a:solidFill>
+                <a:latin typeface="맑은 고딕" pitchFamily="34" charset="0"/>
+                <a:ea typeface="맑은 고딕" pitchFamily="34" charset="-122"/>
+                <a:cs typeface="맑은 고딕" pitchFamily="34" charset="-120"/>
+              </a:rPr>
+              <a:t>기존 엑셀 대비</a:t>
             </a:r>
             <a:endParaRPr lang="en-US" sz="950" dirty="0"/>
           </a:p>
-        </p:txBody>
-      </p:sp>
-      <p:sp>
-        <p:nvSpPr>
-          <p:cNvPr id="33" name="Text 31"/>
-          <p:cNvSpPr/>
-          <p:nvPr/>
-        </p:nvSpPr>
-        <p:spPr>
-          <a:xfrm>
-            <a:off x="3538728" y="6327648"/>
-            <a:ext cx="2651760" cy="219456"/>
-          </a:xfrm>
-          <a:prstGeom prst="rect">
-            <a:avLst/>
-          </a:prstGeom>
-          <a:noFill/>
-          <a:ln/>
-        </p:spPr>
-        <p:txBody>
-          <a:bodyPr wrap="square" lIns="0" tIns="0" rIns="0" bIns="0" rtlCol="0" anchor="ctr"/>
-          <a:lstStyle/>
           <a:p>
             <a:pPr indent="0" marL="0">
+              <a:lnSpc>
+                <a:spcPts val="1200"/>
+              </a:lnSpc>
+              <a:buNone/>
+            </a:pPr>
+            <a:r>
+              <a:rPr lang="en-US" sz="950" dirty="0">
+                <a:solidFill>
+                  <a:srgbClr val="6B625E"/>
+                </a:solidFill>
+                <a:latin typeface="맑은 고딕" pitchFamily="34" charset="0"/>
+                <a:ea typeface="맑은 고딕" pitchFamily="34" charset="-122"/>
+                <a:cs typeface="맑은 고딕" pitchFamily="34" charset="-120"/>
+              </a:rPr>
+              <a:t>최대 계산 오차</a:t>
+            </a:r>
+            <a:endParaRPr lang="en-US" sz="950" dirty="0"/>
+          </a:p>
+        </p:txBody>
+      </p:sp>
+      <p:sp>
+        <p:nvSpPr>
+          <p:cNvPr id="35" name="Text 33"/>
+          <p:cNvSpPr/>
+          <p:nvPr/>
+        </p:nvSpPr>
+        <p:spPr>
+          <a:xfrm>
+            <a:off x="5257800" y="5705856"/>
+            <a:ext cx="2057400" cy="347472"/>
+          </a:xfrm>
+          <a:prstGeom prst="rect">
+            <a:avLst/>
+          </a:prstGeom>
+          <a:noFill/>
+          <a:ln/>
+        </p:spPr>
+        <p:txBody>
+          <a:bodyPr wrap="square" lIns="0" tIns="0" rIns="0" bIns="0" rtlCol="0" anchor="b"/>
+          <a:lstStyle/>
+          <a:p>
+            <a:pPr indent="0" marL="0">
+              <a:buNone/>
+            </a:pPr>
+            <a:r>
+              <a:rPr lang="en-US" sz="2100" b="1" dirty="0">
+                <a:solidFill>
+                  <a:srgbClr val="EA002C"/>
+                </a:solidFill>
+                <a:latin typeface="맑은 고딕" pitchFamily="34" charset="0"/>
+                <a:ea typeface="맑은 고딕" pitchFamily="34" charset="-122"/>
+                <a:cs typeface="맑은 고딕" pitchFamily="34" charset="-120"/>
+              </a:rPr>
+              <a:t>1.24</a:t>
+            </a:r>
+            <a:pPr indent="0" marL="0">
               <a:buNone/>
             </a:pPr>
             <a:r>
               <a:rPr lang="en-US" sz="1150" b="1" dirty="0">
                 <a:solidFill>
-                  <a:srgbClr val="FFFFFF"/>
-                </a:solidFill>
-                <a:latin typeface="맑은 고딕" pitchFamily="34" charset="0"/>
-                <a:ea typeface="맑은 고딕" pitchFamily="34" charset="-122"/>
-                <a:cs typeface="맑은 고딕" pitchFamily="34" charset="-120"/>
-              </a:rPr>
-              <a:t>기존 엑셀과 동일 (오차 0.18MW)</a:t>
-            </a:r>
-            <a:endParaRPr lang="en-US" sz="1150" dirty="0"/>
-          </a:p>
-        </p:txBody>
-      </p:sp>
-      <p:sp>
-        <p:nvSpPr>
-          <p:cNvPr id="34" name="Text 32"/>
-          <p:cNvSpPr/>
-          <p:nvPr/>
-        </p:nvSpPr>
-        <p:spPr>
-          <a:xfrm>
-            <a:off x="6300216" y="6144768"/>
-            <a:ext cx="2651760" cy="182880"/>
+                  <a:srgbClr val="EA002C"/>
+                </a:solidFill>
+                <a:latin typeface="맑은 고딕" pitchFamily="34" charset="0"/>
+                <a:ea typeface="맑은 고딕" pitchFamily="34" charset="-122"/>
+                <a:cs typeface="맑은 고딕" pitchFamily="34" charset="-120"/>
+              </a:rPr>
+              <a:t> MW</a:t>
+            </a:r>
+            <a:endParaRPr lang="en-US" sz="2100" dirty="0"/>
+          </a:p>
+        </p:txBody>
+      </p:sp>
+      <p:sp>
+        <p:nvSpPr>
+          <p:cNvPr id="36" name="Text 34"/>
+          <p:cNvSpPr/>
+          <p:nvPr/>
+        </p:nvSpPr>
+        <p:spPr>
+          <a:xfrm>
+            <a:off x="5257800" y="6053328"/>
+            <a:ext cx="2057400" cy="402336"/>
           </a:xfrm>
           <a:prstGeom prst="rect">
             <a:avLst/>
@@ -2460,12 +2586,15 @@
           <a:lstStyle/>
           <a:p>
             <a:pPr indent="0" marL="0">
+              <a:lnSpc>
+                <a:spcPts val="1200"/>
+              </a:lnSpc>
               <a:buNone/>
             </a:pPr>
             <a:r>
               <a:rPr lang="en-US" sz="950" dirty="0">
                 <a:solidFill>
-                  <a:srgbClr val="A99F9B"/>
+                  <a:srgbClr val="6B625E"/>
                 </a:solidFill>
                 <a:latin typeface="맑은 고딕" pitchFamily="34" charset="0"/>
                 <a:ea typeface="맑은 고딕" pitchFamily="34" charset="-122"/>
@@ -2475,57 +2604,91 @@
             </a:r>
             <a:endParaRPr lang="en-US" sz="950" dirty="0"/>
           </a:p>
-        </p:txBody>
-      </p:sp>
-      <p:sp>
-        <p:nvSpPr>
-          <p:cNvPr id="35" name="Text 33"/>
-          <p:cNvSpPr/>
-          <p:nvPr/>
-        </p:nvSpPr>
-        <p:spPr>
-          <a:xfrm>
-            <a:off x="6300216" y="6327648"/>
-            <a:ext cx="2651760" cy="219456"/>
-          </a:xfrm>
-          <a:prstGeom prst="rect">
-            <a:avLst/>
-          </a:prstGeom>
-          <a:noFill/>
-          <a:ln/>
-        </p:spPr>
-        <p:txBody>
-          <a:bodyPr wrap="square" lIns="0" tIns="0" rIns="0" bIns="0" rtlCol="0" anchor="ctr"/>
-          <a:lstStyle/>
           <a:p>
             <a:pPr indent="0" marL="0">
+              <a:lnSpc>
+                <a:spcPts val="1200"/>
+              </a:lnSpc>
+              <a:buNone/>
+            </a:pPr>
+            <a:r>
+              <a:rPr lang="en-US" sz="950" dirty="0">
+                <a:solidFill>
+                  <a:srgbClr val="6B625E"/>
+                </a:solidFill>
+                <a:latin typeface="맑은 고딕" pitchFamily="34" charset="0"/>
+                <a:ea typeface="맑은 고딕" pitchFamily="34" charset="-122"/>
+                <a:cs typeface="맑은 고딕" pitchFamily="34" charset="-120"/>
+              </a:rPr>
+              <a:t>(1.42 → 12% 개선)</a:t>
+            </a:r>
+            <a:endParaRPr lang="en-US" sz="950" dirty="0"/>
+          </a:p>
+        </p:txBody>
+      </p:sp>
+      <p:sp>
+        <p:nvSpPr>
+          <p:cNvPr id="37" name="Text 35"/>
+          <p:cNvSpPr/>
+          <p:nvPr/>
+        </p:nvSpPr>
+        <p:spPr>
+          <a:xfrm>
+            <a:off x="7452360" y="5705856"/>
+            <a:ext cx="2057400" cy="347472"/>
+          </a:xfrm>
+          <a:prstGeom prst="rect">
+            <a:avLst/>
+          </a:prstGeom>
+          <a:noFill/>
+          <a:ln/>
+        </p:spPr>
+        <p:txBody>
+          <a:bodyPr wrap="square" lIns="0" tIns="0" rIns="0" bIns="0" rtlCol="0" anchor="b"/>
+          <a:lstStyle/>
+          <a:p>
+            <a:pPr indent="0" marL="0">
+              <a:buNone/>
+            </a:pPr>
+            <a:r>
+              <a:rPr lang="en-US" sz="2100" b="1" dirty="0">
+                <a:solidFill>
+                  <a:srgbClr val="1F1A18"/>
+                </a:solidFill>
+                <a:latin typeface="맑은 고딕" pitchFamily="34" charset="0"/>
+                <a:ea typeface="맑은 고딕" pitchFamily="34" charset="-122"/>
+                <a:cs typeface="맑은 고딕" pitchFamily="34" charset="-120"/>
+              </a:rPr>
+              <a:t>61</a:t>
+            </a:r>
+            <a:pPr indent="0" marL="0">
               <a:buNone/>
             </a:pPr>
             <a:r>
               <a:rPr lang="en-US" sz="1150" b="1" dirty="0">
                 <a:solidFill>
-                  <a:srgbClr val="FFFFFF"/>
-                </a:solidFill>
-                <a:latin typeface="맑은 고딕" pitchFamily="34" charset="0"/>
-                <a:ea typeface="맑은 고딕" pitchFamily="34" charset="-122"/>
-                <a:cs typeface="맑은 고딕" pitchFamily="34" charset="-120"/>
-              </a:rPr>
-              <a:t>1.42 → 1.24 MW 개선</a:t>
-            </a:r>
-            <a:endParaRPr lang="en-US" sz="1150" dirty="0"/>
-          </a:p>
-        </p:txBody>
-      </p:sp>
-      <p:sp>
-        <p:nvSpPr>
-          <p:cNvPr id="36" name="Text 34"/>
-          <p:cNvSpPr/>
-          <p:nvPr/>
-        </p:nvSpPr>
-        <p:spPr>
-          <a:xfrm>
-            <a:off x="9061704" y="6144768"/>
-            <a:ext cx="2651760" cy="182880"/>
+                  <a:srgbClr val="1F1A18"/>
+                </a:solidFill>
+                <a:latin typeface="맑은 고딕" pitchFamily="34" charset="0"/>
+                <a:ea typeface="맑은 고딕" pitchFamily="34" charset="-122"/>
+                <a:cs typeface="맑은 고딕" pitchFamily="34" charset="-120"/>
+              </a:rPr>
+              <a:t> 개</a:t>
+            </a:r>
+            <a:endParaRPr lang="en-US" sz="2100" dirty="0"/>
+          </a:p>
+        </p:txBody>
+      </p:sp>
+      <p:sp>
+        <p:nvSpPr>
+          <p:cNvPr id="38" name="Text 36"/>
+          <p:cNvSpPr/>
+          <p:nvPr/>
+        </p:nvSpPr>
+        <p:spPr>
+          <a:xfrm>
+            <a:off x="7452360" y="6053328"/>
+            <a:ext cx="2057400" cy="402336"/>
           </a:xfrm>
           <a:prstGeom prst="rect">
             <a:avLst/>
@@ -2538,59 +2701,158 @@
           <a:lstStyle/>
           <a:p>
             <a:pPr indent="0" marL="0">
+              <a:lnSpc>
+                <a:spcPts val="1200"/>
+              </a:lnSpc>
               <a:buNone/>
             </a:pPr>
             <a:r>
               <a:rPr lang="en-US" sz="950" dirty="0">
                 <a:solidFill>
-                  <a:srgbClr val="A99F9B"/>
-                </a:solidFill>
-                <a:latin typeface="맑은 고딕" pitchFamily="34" charset="0"/>
-                <a:ea typeface="맑은 고딕" pitchFamily="34" charset="-122"/>
-                <a:cs typeface="맑은 고딕" pitchFamily="34" charset="-120"/>
-              </a:rPr>
-              <a:t>자동 검증</a:t>
+                  <a:srgbClr val="6B625E"/>
+                </a:solidFill>
+                <a:latin typeface="맑은 고딕" pitchFamily="34" charset="0"/>
+                <a:ea typeface="맑은 고딕" pitchFamily="34" charset="-122"/>
+                <a:cs typeface="맑은 고딕" pitchFamily="34" charset="-120"/>
+              </a:rPr>
+              <a:t>자동 산출 온도 구간</a:t>
             </a:r>
             <a:endParaRPr lang="en-US" sz="950" dirty="0"/>
           </a:p>
-        </p:txBody>
-      </p:sp>
-      <p:sp>
-        <p:nvSpPr>
-          <p:cNvPr id="37" name="Text 35"/>
-          <p:cNvSpPr/>
-          <p:nvPr/>
-        </p:nvSpPr>
-        <p:spPr>
-          <a:xfrm>
-            <a:off x="9061704" y="6327648"/>
-            <a:ext cx="2651760" cy="219456"/>
-          </a:xfrm>
-          <a:prstGeom prst="rect">
-            <a:avLst/>
-          </a:prstGeom>
-          <a:noFill/>
-          <a:ln/>
-        </p:spPr>
-        <p:txBody>
-          <a:bodyPr wrap="square" lIns="0" tIns="0" rIns="0" bIns="0" rtlCol="0" anchor="ctr"/>
-          <a:lstStyle/>
           <a:p>
             <a:pPr indent="0" marL="0">
+              <a:lnSpc>
+                <a:spcPts val="1200"/>
+              </a:lnSpc>
+              <a:buNone/>
+            </a:pPr>
+            <a:r>
+              <a:rPr lang="en-US" sz="950" dirty="0">
+                <a:solidFill>
+                  <a:srgbClr val="6B625E"/>
+                </a:solidFill>
+                <a:latin typeface="맑은 고딕" pitchFamily="34" charset="0"/>
+                <a:ea typeface="맑은 고딕" pitchFamily="34" charset="-122"/>
+                <a:cs typeface="맑은 고딕" pitchFamily="34" charset="-120"/>
+              </a:rPr>
+              <a:t>(−20 ~ 40°C)</a:t>
+            </a:r>
+            <a:endParaRPr lang="en-US" sz="950" dirty="0"/>
+          </a:p>
+        </p:txBody>
+      </p:sp>
+      <p:sp>
+        <p:nvSpPr>
+          <p:cNvPr id="39" name="Text 37"/>
+          <p:cNvSpPr/>
+          <p:nvPr/>
+        </p:nvSpPr>
+        <p:spPr>
+          <a:xfrm>
+            <a:off x="9646920" y="5705856"/>
+            <a:ext cx="2057400" cy="347472"/>
+          </a:xfrm>
+          <a:prstGeom prst="rect">
+            <a:avLst/>
+          </a:prstGeom>
+          <a:noFill/>
+          <a:ln/>
+        </p:spPr>
+        <p:txBody>
+          <a:bodyPr wrap="square" lIns="0" tIns="0" rIns="0" bIns="0" rtlCol="0" anchor="b"/>
+          <a:lstStyle/>
+          <a:p>
+            <a:pPr indent="0" marL="0">
+              <a:buNone/>
+            </a:pPr>
+            <a:r>
+              <a:rPr lang="en-US" sz="2100" b="1" dirty="0">
+                <a:solidFill>
+                  <a:srgbClr val="8A7F7A"/>
+                </a:solidFill>
+                <a:latin typeface="맑은 고딕" pitchFamily="34" charset="0"/>
+                <a:ea typeface="맑은 고딕" pitchFamily="34" charset="-122"/>
+                <a:cs typeface="맑은 고딕" pitchFamily="34" charset="-120"/>
+              </a:rPr>
+              <a:t>±0.5</a:t>
+            </a:r>
+            <a:pPr indent="0" marL="0">
               <a:buNone/>
             </a:pPr>
             <a:r>
               <a:rPr lang="en-US" sz="1150" b="1" dirty="0">
                 <a:solidFill>
-                  <a:srgbClr val="FFFFFF"/>
-                </a:solidFill>
-                <a:latin typeface="맑은 고딕" pitchFamily="34" charset="0"/>
-                <a:ea typeface="맑은 고딕" pitchFamily="34" charset="-122"/>
-                <a:cs typeface="맑은 고딕" pitchFamily="34" charset="-120"/>
-              </a:rPr>
-              <a:t>150건 상시 점검</a:t>
-            </a:r>
-            <a:endParaRPr lang="en-US" sz="1150" dirty="0"/>
+                  <a:srgbClr val="8A7F7A"/>
+                </a:solidFill>
+                <a:latin typeface="맑은 고딕" pitchFamily="34" charset="0"/>
+                <a:ea typeface="맑은 고딕" pitchFamily="34" charset="-122"/>
+                <a:cs typeface="맑은 고딕" pitchFamily="34" charset="-120"/>
+              </a:rPr>
+              <a:t> %</a:t>
+            </a:r>
+            <a:endParaRPr lang="en-US" sz="2100" dirty="0"/>
+          </a:p>
+        </p:txBody>
+      </p:sp>
+      <p:sp>
+        <p:nvSpPr>
+          <p:cNvPr id="40" name="Text 38"/>
+          <p:cNvSpPr/>
+          <p:nvPr/>
+        </p:nvSpPr>
+        <p:spPr>
+          <a:xfrm>
+            <a:off x="9646920" y="6053328"/>
+            <a:ext cx="2057400" cy="402336"/>
+          </a:xfrm>
+          <a:prstGeom prst="rect">
+            <a:avLst/>
+          </a:prstGeom>
+          <a:noFill/>
+          <a:ln/>
+        </p:spPr>
+        <p:txBody>
+          <a:bodyPr wrap="square" lIns="0" tIns="0" rIns="0" bIns="0" rtlCol="0" anchor="ctr"/>
+          <a:lstStyle/>
+          <a:p>
+            <a:pPr indent="0" marL="0">
+              <a:lnSpc>
+                <a:spcPts val="1200"/>
+              </a:lnSpc>
+              <a:buNone/>
+            </a:pPr>
+            <a:r>
+              <a:rPr lang="en-US" sz="950" dirty="0">
+                <a:solidFill>
+                  <a:srgbClr val="6B625E"/>
+                </a:solidFill>
+                <a:latin typeface="맑은 고딕" pitchFamily="34" charset="0"/>
+                <a:ea typeface="맑은 고딕" pitchFamily="34" charset="-122"/>
+                <a:cs typeface="맑은 고딕" pitchFamily="34" charset="-120"/>
+              </a:rPr>
+              <a:t>입찰 허용범위</a:t>
+            </a:r>
+            <a:endParaRPr lang="en-US" sz="950" dirty="0"/>
+          </a:p>
+          <a:p>
+            <a:pPr indent="0" marL="0">
+              <a:lnSpc>
+                <a:spcPts val="1200"/>
+              </a:lnSpc>
+              <a:buNone/>
+            </a:pPr>
+            <a:r>
+              <a:rPr lang="en-US" sz="950" dirty="0">
+                <a:solidFill>
+                  <a:srgbClr val="6B625E"/>
+                </a:solidFill>
+                <a:latin typeface="맑은 고딕" pitchFamily="34" charset="0"/>
+                <a:ea typeface="맑은 고딕" pitchFamily="34" charset="-122"/>
+                <a:cs typeface="맑은 고딕" pitchFamily="34" charset="-120"/>
+              </a:rPr>
+              <a:t>(약 ±2 MW)</a:t>
+            </a:r>
+            <a:endParaRPr lang="en-US" sz="950" dirty="0"/>
           </a:p>
         </p:txBody>
       </p:sp>
@@ -2654,20 +2916,20 @@
         </p:nvSpPr>
         <p:spPr>
           <a:xfrm>
-            <a:off x="411480" y="164592"/>
-            <a:ext cx="640080" cy="566928"/>
-          </a:xfrm>
-          <a:prstGeom prst="rect">
-            <a:avLst/>
-          </a:prstGeom>
-          <a:noFill/>
-          <a:ln/>
-        </p:spPr>
-        <p:txBody>
-          <a:bodyPr wrap="square" lIns="0" tIns="0" rIns="0" bIns="0" rtlCol="0" anchor="ctr"/>
-          <a:lstStyle/>
-          <a:p>
-            <a:pPr algn="l" indent="0" marL="0">
+            <a:off x="411480" y="182880"/>
+            <a:ext cx="640080" cy="548640"/>
+          </a:xfrm>
+          <a:prstGeom prst="rect">
+            <a:avLst/>
+          </a:prstGeom>
+          <a:noFill/>
+          <a:ln/>
+        </p:spPr>
+        <p:txBody>
+          <a:bodyPr wrap="square" lIns="0" tIns="0" rIns="0" bIns="0" rtlCol="0" anchor="ctr"/>
+          <a:lstStyle/>
+          <a:p>
+            <a:pPr indent="0" marL="0">
               <a:buNone/>
             </a:pPr>
             <a:r>
@@ -2693,8 +2955,8 @@
         </p:nvSpPr>
         <p:spPr>
           <a:xfrm>
-            <a:off x="1051560" y="164592"/>
-            <a:ext cx="5120640" cy="566928"/>
+            <a:off x="1051560" y="182880"/>
+            <a:ext cx="6766560" cy="548640"/>
           </a:xfrm>
           <a:prstGeom prst="rect">
             <a:avLst/>
@@ -2732,8 +2994,8 @@
         </p:nvSpPr>
         <p:spPr>
           <a:xfrm>
-            <a:off x="6263640" y="164592"/>
-            <a:ext cx="5532120" cy="566928"/>
+            <a:off x="7955280" y="155448"/>
+            <a:ext cx="3840480" cy="292608"/>
           </a:xfrm>
           <a:prstGeom prst="rect">
             <a:avLst/>
@@ -2749,7 +3011,7 @@
               <a:buNone/>
             </a:pPr>
             <a:r>
-              <a:rPr lang="en-US" sz="1250" dirty="0">
+              <a:rPr lang="en-US" sz="1200" dirty="0">
                 <a:solidFill>
                   <a:srgbClr val="C9BFBB"/>
                 </a:solidFill>
@@ -2757,22 +3019,61 @@
                 <a:ea typeface="맑은 고딕" pitchFamily="34" charset="-122"/>
                 <a:cs typeface="맑은 고딕" pitchFamily="34" charset="-120"/>
               </a:rPr>
-              <a:t>화면 5개짜리 Windows 프로그램</a:t>
-            </a:r>
-            <a:endParaRPr lang="en-US" sz="1250" dirty="0"/>
-          </a:p>
-        </p:txBody>
-      </p:sp>
-      <p:sp>
-        <p:nvSpPr>
-          <p:cNvPr id="6" name="Shape 4"/>
-          <p:cNvSpPr/>
-          <p:nvPr/>
-        </p:nvSpPr>
-        <p:spPr>
-          <a:xfrm>
-            <a:off x="548640" y="1298448"/>
-            <a:ext cx="310896" cy="310896"/>
+              <a:t>소속 : 발전운영팀</a:t>
+            </a:r>
+            <a:endParaRPr lang="en-US" sz="1200" dirty="0"/>
+          </a:p>
+        </p:txBody>
+      </p:sp>
+      <p:sp>
+        <p:nvSpPr>
+          <p:cNvPr id="6" name="Text 4"/>
+          <p:cNvSpPr/>
+          <p:nvPr/>
+        </p:nvSpPr>
+        <p:spPr>
+          <a:xfrm>
+            <a:off x="7955280" y="457200"/>
+            <a:ext cx="3840480" cy="292608"/>
+          </a:xfrm>
+          <a:prstGeom prst="rect">
+            <a:avLst/>
+          </a:prstGeom>
+          <a:noFill/>
+          <a:ln/>
+        </p:spPr>
+        <p:txBody>
+          <a:bodyPr wrap="square" lIns="0" tIns="0" rIns="0" bIns="0" rtlCol="0" anchor="ctr"/>
+          <a:lstStyle/>
+          <a:p>
+            <a:pPr algn="r" indent="0" marL="0">
+              <a:buNone/>
+            </a:pPr>
+            <a:r>
+              <a:rPr lang="en-US" sz="1200" b="1" dirty="0">
+                <a:solidFill>
+                  <a:srgbClr val="FFFFFF"/>
+                </a:solidFill>
+                <a:latin typeface="맑은 고딕" pitchFamily="34" charset="0"/>
+                <a:ea typeface="맑은 고딕" pitchFamily="34" charset="-122"/>
+                <a:cs typeface="맑은 고딕" pitchFamily="34" charset="-120"/>
+              </a:rPr>
+              <a:t>담당자 : ○○○  ·  2026. 8월</a:t>
+            </a:r>
+            <a:endParaRPr lang="en-US" sz="1200" dirty="0"/>
+          </a:p>
+        </p:txBody>
+      </p:sp>
+      <p:sp>
+        <p:nvSpPr>
+          <p:cNvPr id="7" name="Shape 5"/>
+          <p:cNvSpPr/>
+          <p:nvPr/>
+        </p:nvSpPr>
+        <p:spPr>
+          <a:xfrm>
+            <a:off x="502920" y="1069848"/>
+            <a:ext cx="237744" cy="237744"/>
           </a:xfrm>
           <a:prstGeom prst="ellipse">
             <a:avLst/>
@@ -2785,14 +3086,196 @@
       </p:sp>
       <p:sp>
         <p:nvSpPr>
-          <p:cNvPr id="7" name="Text 5"/>
-          <p:cNvSpPr/>
-          <p:nvPr/>
-        </p:nvSpPr>
-        <p:spPr>
-          <a:xfrm>
-            <a:off x="548640" y="1298448"/>
-            <a:ext cx="310896" cy="310896"/>
+          <p:cNvPr id="8" name="Text 6"/>
+          <p:cNvSpPr/>
+          <p:nvPr/>
+        </p:nvSpPr>
+        <p:spPr>
+          <a:xfrm>
+            <a:off x="868680" y="1024128"/>
+            <a:ext cx="4572000" cy="310896"/>
+          </a:xfrm>
+          <a:prstGeom prst="rect">
+            <a:avLst/>
+          </a:prstGeom>
+          <a:noFill/>
+          <a:ln/>
+        </p:spPr>
+        <p:txBody>
+          <a:bodyPr wrap="square" lIns="0" tIns="0" rIns="0" bIns="0" rtlCol="0" anchor="ctr"/>
+          <a:lstStyle/>
+          <a:p>
+            <a:pPr indent="0" marL="0">
+              <a:buNone/>
+            </a:pPr>
+            <a:r>
+              <a:rPr lang="en-US" sz="1350" b="1" dirty="0">
+                <a:solidFill>
+                  <a:srgbClr val="1F1A18"/>
+                </a:solidFill>
+                <a:latin typeface="맑은 고딕" pitchFamily="34" charset="0"/>
+                <a:ea typeface="맑은 고딕" pitchFamily="34" charset="-122"/>
+                <a:cs typeface="맑은 고딕" pitchFamily="34" charset="-120"/>
+              </a:rPr>
+              <a:t>화면 5개짜리 Windows 프로그램</a:t>
+            </a:r>
+            <a:endParaRPr lang="en-US" sz="1350" dirty="0"/>
+          </a:p>
+        </p:txBody>
+      </p:sp>
+      <p:sp>
+        <p:nvSpPr>
+          <p:cNvPr id="9" name="Text 7"/>
+          <p:cNvSpPr/>
+          <p:nvPr/>
+        </p:nvSpPr>
+        <p:spPr>
+          <a:xfrm>
+            <a:off x="5532120" y="1024128"/>
+            <a:ext cx="6126480" cy="310896"/>
+          </a:xfrm>
+          <a:prstGeom prst="rect">
+            <a:avLst/>
+          </a:prstGeom>
+          <a:noFill/>
+          <a:ln/>
+        </p:spPr>
+        <p:txBody>
+          <a:bodyPr wrap="square" lIns="0" tIns="0" rIns="0" bIns="0" rtlCol="0" anchor="ctr"/>
+          <a:lstStyle/>
+          <a:p>
+            <a:pPr algn="r" indent="0" marL="0">
+              <a:buNone/>
+            </a:pPr>
+            <a:r>
+              <a:rPr lang="en-US" sz="1000" dirty="0">
+                <a:solidFill>
+                  <a:srgbClr val="9A908C"/>
+                </a:solidFill>
+                <a:latin typeface="맑은 고딕" pitchFamily="34" charset="0"/>
+                <a:ea typeface="맑은 고딕" pitchFamily="34" charset="-122"/>
+                <a:cs typeface="맑은 고딕" pitchFamily="34" charset="-120"/>
+              </a:rPr>
+              <a:t>날짜 입력 → 자동 취득 → 보정 계산 → 신고파일 생성</a:t>
+            </a:r>
+            <a:endParaRPr lang="en-US" sz="1000" dirty="0"/>
+          </a:p>
+        </p:txBody>
+      </p:sp>
+      <p:sp>
+        <p:nvSpPr>
+          <p:cNvPr id="10" name="Shape 8"/>
+          <p:cNvSpPr/>
+          <p:nvPr/>
+        </p:nvSpPr>
+        <p:spPr>
+          <a:xfrm>
+            <a:off x="502920" y="1426464"/>
+            <a:ext cx="2075688" cy="2304288"/>
+          </a:xfrm>
+          <a:prstGeom prst="roundRect">
+            <a:avLst>
+              <a:gd name="adj" fmla="val 2643"/>
+            </a:avLst>
+          </a:prstGeom>
+          <a:solidFill>
+            <a:srgbClr val="FBF9F8"/>
+          </a:solidFill>
+          <a:ln w="12700">
+            <a:solidFill>
+              <a:srgbClr val="E8E0DC"/>
+            </a:solidFill>
+            <a:prstDash val="solid"/>
+          </a:ln>
+          <a:effectLst>
+            <a:outerShdw sx="100000" sy="100000" kx="0" ky="0" algn="bl" rotWithShape="0" blurRad="101600" dist="12700" dir="5400000">
+              <a:srgbClr val="D8CFCA">
+                <a:alpha val="50000"/>
+              </a:srgbClr>
+            </a:outerShdw>
+          </a:effectLst>
+        </p:spPr>
+      </p:sp>
+      <p:sp>
+        <p:nvSpPr>
+          <p:cNvPr id="11" name="Shape 9"/>
+          <p:cNvSpPr/>
+          <p:nvPr/>
+        </p:nvSpPr>
+        <p:spPr>
+          <a:xfrm>
+            <a:off x="612648" y="1536192"/>
+            <a:ext cx="1856232" cy="1856232"/>
+          </a:xfrm>
+          <a:prstGeom prst="roundRect">
+            <a:avLst>
+              <a:gd name="adj" fmla="val 1478"/>
+            </a:avLst>
+          </a:prstGeom>
+          <a:solidFill>
+            <a:srgbClr val="FFFFFF"/>
+          </a:solidFill>
+          <a:ln w="12700">
+            <a:solidFill>
+              <a:srgbClr val="E8E0DC"/>
+            </a:solidFill>
+            <a:prstDash val="solid"/>
+          </a:ln>
+        </p:spPr>
+      </p:sp>
+      <p:pic>
+        <p:nvPicPr>
+          <p:cNvPr id="12" name="Image 0" descr="/tmp/claude-0/-home-user-Test/9494b856-101a-5688-a4a1-6c122cea1ac2/scratchpad/s_run.png">    </p:cNvPr>
+          <p:cNvPicPr>
+            <a:picLocks noChangeAspect="1"/>
+          </p:cNvPicPr>
+          <p:nvPr/>
+        </p:nvPicPr>
+        <p:blipFill>
+          <a:blip r:embed="rId1"/>
+          <a:srcRect l="0" r="0" t="0" b="0"/>
+          <a:stretch/>
+        </p:blipFill>
+        <p:spPr>
+          <a:xfrm>
+            <a:off x="612648" y="1536192"/>
+            <a:ext cx="1856232" cy="1856232"/>
+          </a:xfrm>
+          <a:prstGeom prst="rect">
+            <a:avLst/>
+          </a:prstGeom>
+        </p:spPr>
+      </p:pic>
+      <p:sp>
+        <p:nvSpPr>
+          <p:cNvPr id="13" name="Shape 10"/>
+          <p:cNvSpPr/>
+          <p:nvPr/>
+        </p:nvSpPr>
+        <p:spPr>
+          <a:xfrm>
+            <a:off x="612648" y="3438144"/>
+            <a:ext cx="219456" cy="219456"/>
+          </a:xfrm>
+          <a:prstGeom prst="ellipse">
+            <a:avLst/>
+          </a:prstGeom>
+          <a:solidFill>
+            <a:srgbClr val="EA002C"/>
+          </a:solidFill>
+          <a:ln/>
+        </p:spPr>
+      </p:sp>
+      <p:sp>
+        <p:nvSpPr>
+          <p:cNvPr id="14" name="Text 11"/>
+          <p:cNvSpPr/>
+          <p:nvPr/>
+        </p:nvSpPr>
+        <p:spPr>
+          <a:xfrm>
+            <a:off x="612648" y="3438144"/>
+            <a:ext cx="219456" cy="219456"/>
           </a:xfrm>
           <a:prstGeom prst="rect">
             <a:avLst/>
@@ -2808,7 +3291,7 @@
               <a:buNone/>
             </a:pPr>
             <a:r>
-              <a:rPr lang="en-US" sz="1300" b="1" dirty="0">
+              <a:rPr lang="en-US" sz="1000" b="1" dirty="0">
                 <a:solidFill>
                   <a:srgbClr val="FFFFFF"/>
                 </a:solidFill>
@@ -2818,20 +3301,20 @@
               </a:rPr>
               <a:t>1</a:t>
             </a:r>
-            <a:endParaRPr lang="en-US" sz="1300" dirty="0"/>
-          </a:p>
-        </p:txBody>
-      </p:sp>
-      <p:sp>
-        <p:nvSpPr>
-          <p:cNvPr id="8" name="Text 6"/>
-          <p:cNvSpPr/>
-          <p:nvPr/>
-        </p:nvSpPr>
-        <p:spPr>
-          <a:xfrm>
-            <a:off x="987552" y="1225296"/>
-            <a:ext cx="4206240" cy="292608"/>
+            <a:endParaRPr lang="en-US" sz="1000" dirty="0"/>
+          </a:p>
+        </p:txBody>
+      </p:sp>
+      <p:sp>
+        <p:nvSpPr>
+          <p:cNvPr id="15" name="Text 12"/>
+          <p:cNvSpPr/>
+          <p:nvPr/>
+        </p:nvSpPr>
+        <p:spPr>
+          <a:xfrm>
+            <a:off x="886968" y="3419856"/>
+            <a:ext cx="1627632" cy="256032"/>
           </a:xfrm>
           <a:prstGeom prst="rect">
             <a:avLst/>
@@ -2847,7 +3330,7 @@
               <a:buNone/>
             </a:pPr>
             <a:r>
-              <a:rPr lang="en-US" sz="1400" b="1" dirty="0">
+              <a:rPr lang="en-US" sz="1100" b="1" dirty="0">
                 <a:solidFill>
                   <a:srgbClr val="1F1A18"/>
                 </a:solidFill>
@@ -2857,20 +3340,1151 @@
               </a:rPr>
               <a:t>공급가능용량 산정</a:t>
             </a:r>
-            <a:endParaRPr lang="en-US" sz="1400" dirty="0"/>
-          </a:p>
-        </p:txBody>
-      </p:sp>
-      <p:sp>
-        <p:nvSpPr>
-          <p:cNvPr id="9" name="Text 7"/>
-          <p:cNvSpPr/>
-          <p:nvPr/>
-        </p:nvSpPr>
-        <p:spPr>
-          <a:xfrm>
-            <a:off x="987552" y="1536192"/>
-            <a:ext cx="4297680" cy="457200"/>
+            <a:endParaRPr lang="en-US" sz="1100" dirty="0"/>
+          </a:p>
+        </p:txBody>
+      </p:sp>
+      <p:sp>
+        <p:nvSpPr>
+          <p:cNvPr id="16" name="Text 13"/>
+          <p:cNvSpPr/>
+          <p:nvPr/>
+        </p:nvSpPr>
+        <p:spPr>
+          <a:xfrm>
+            <a:off x="502920" y="3803904"/>
+            <a:ext cx="2075688" cy="512064"/>
+          </a:xfrm>
+          <a:prstGeom prst="rect">
+            <a:avLst/>
+          </a:prstGeom>
+          <a:noFill/>
+          <a:ln/>
+        </p:spPr>
+        <p:txBody>
+          <a:bodyPr wrap="square" lIns="0" tIns="0" rIns="0" bIns="0" rtlCol="0" anchor="ctr"/>
+          <a:lstStyle/>
+          <a:p>
+            <a:pPr algn="ctr" indent="0" marL="0">
+              <a:lnSpc>
+                <a:spcPts val="1200"/>
+              </a:lnSpc>
+              <a:buNone/>
+            </a:pPr>
+            <a:r>
+              <a:rPr lang="en-US" sz="950" dirty="0">
+                <a:solidFill>
+                  <a:srgbClr val="6B625E"/>
+                </a:solidFill>
+                <a:latin typeface="맑은 고딕" pitchFamily="34" charset="0"/>
+                <a:ea typeface="맑은 고딕" pitchFamily="34" charset="-122"/>
+                <a:cs typeface="맑은 고딕" pitchFamily="34" charset="-120"/>
+              </a:rPr>
+              <a:t>날짜만 입력하면</a:t>
+            </a:r>
+            <a:endParaRPr lang="en-US" sz="950" dirty="0"/>
+          </a:p>
+          <a:p>
+            <a:pPr algn="ctr" indent="0" marL="0">
+              <a:lnSpc>
+                <a:spcPts val="1200"/>
+              </a:lnSpc>
+              <a:buNone/>
+            </a:pPr>
+            <a:r>
+              <a:rPr lang="en-US" sz="950" dirty="0">
+                <a:solidFill>
+                  <a:srgbClr val="6B625E"/>
+                </a:solidFill>
+                <a:latin typeface="맑은 고딕" pitchFamily="34" charset="0"/>
+                <a:ea typeface="맑은 고딕" pitchFamily="34" charset="-122"/>
+                <a:cs typeface="맑은 고딕" pitchFamily="34" charset="-120"/>
+              </a:rPr>
+              <a:t>신고파일까지 자동 생성</a:t>
+            </a:r>
+            <a:endParaRPr lang="en-US" sz="950" dirty="0"/>
+          </a:p>
+        </p:txBody>
+      </p:sp>
+      <p:sp>
+        <p:nvSpPr>
+          <p:cNvPr id="17" name="Shape 14"/>
+          <p:cNvSpPr/>
+          <p:nvPr/>
+        </p:nvSpPr>
+        <p:spPr>
+          <a:xfrm>
+            <a:off x="2779776" y="1426464"/>
+            <a:ext cx="2075688" cy="2304288"/>
+          </a:xfrm>
+          <a:prstGeom prst="roundRect">
+            <a:avLst>
+              <a:gd name="adj" fmla="val 2643"/>
+            </a:avLst>
+          </a:prstGeom>
+          <a:solidFill>
+            <a:srgbClr val="FBF9F8"/>
+          </a:solidFill>
+          <a:ln w="12700">
+            <a:solidFill>
+              <a:srgbClr val="E8E0DC"/>
+            </a:solidFill>
+            <a:prstDash val="solid"/>
+          </a:ln>
+          <a:effectLst>
+            <a:outerShdw sx="100000" sy="100000" kx="0" ky="0" algn="bl" rotWithShape="0" blurRad="101600" dist="12700" dir="5400000">
+              <a:srgbClr val="D8CFCA">
+                <a:alpha val="50000"/>
+              </a:srgbClr>
+            </a:outerShdw>
+          </a:effectLst>
+        </p:spPr>
+      </p:sp>
+      <p:sp>
+        <p:nvSpPr>
+          <p:cNvPr id="18" name="Shape 15"/>
+          <p:cNvSpPr/>
+          <p:nvPr/>
+        </p:nvSpPr>
+        <p:spPr>
+          <a:xfrm>
+            <a:off x="2889504" y="1536192"/>
+            <a:ext cx="1856232" cy="1856232"/>
+          </a:xfrm>
+          <a:prstGeom prst="roundRect">
+            <a:avLst>
+              <a:gd name="adj" fmla="val 1478"/>
+            </a:avLst>
+          </a:prstGeom>
+          <a:solidFill>
+            <a:srgbClr val="FFFFFF"/>
+          </a:solidFill>
+          <a:ln w="12700">
+            <a:solidFill>
+              <a:srgbClr val="E8E0DC"/>
+            </a:solidFill>
+            <a:prstDash val="solid"/>
+          </a:ln>
+        </p:spPr>
+      </p:sp>
+      <p:pic>
+        <p:nvPicPr>
+          <p:cNvPr id="19" name="Image 1" descr="/tmp/claude-0/-home-user-Test/9494b856-101a-5688-a4a1-6c122cea1ac2/scratchpad/s_status.png">    </p:cNvPr>
+          <p:cNvPicPr>
+            <a:picLocks noChangeAspect="1"/>
+          </p:cNvPicPr>
+          <p:nvPr/>
+        </p:nvPicPr>
+        <p:blipFill>
+          <a:blip r:embed="rId2"/>
+          <a:srcRect l="0" r="0" t="0" b="0"/>
+          <a:stretch/>
+        </p:blipFill>
+        <p:spPr>
+          <a:xfrm>
+            <a:off x="2889504" y="1536192"/>
+            <a:ext cx="1856232" cy="1856232"/>
+          </a:xfrm>
+          <a:prstGeom prst="rect">
+            <a:avLst/>
+          </a:prstGeom>
+        </p:spPr>
+      </p:pic>
+      <p:sp>
+        <p:nvSpPr>
+          <p:cNvPr id="20" name="Shape 16"/>
+          <p:cNvSpPr/>
+          <p:nvPr/>
+        </p:nvSpPr>
+        <p:spPr>
+          <a:xfrm>
+            <a:off x="2889504" y="3438144"/>
+            <a:ext cx="219456" cy="219456"/>
+          </a:xfrm>
+          <a:prstGeom prst="ellipse">
+            <a:avLst/>
+          </a:prstGeom>
+          <a:solidFill>
+            <a:srgbClr val="EA002C"/>
+          </a:solidFill>
+          <a:ln/>
+        </p:spPr>
+      </p:sp>
+      <p:sp>
+        <p:nvSpPr>
+          <p:cNvPr id="21" name="Text 17"/>
+          <p:cNvSpPr/>
+          <p:nvPr/>
+        </p:nvSpPr>
+        <p:spPr>
+          <a:xfrm>
+            <a:off x="2889504" y="3438144"/>
+            <a:ext cx="219456" cy="219456"/>
+          </a:xfrm>
+          <a:prstGeom prst="rect">
+            <a:avLst/>
+          </a:prstGeom>
+          <a:noFill/>
+          <a:ln/>
+        </p:spPr>
+        <p:txBody>
+          <a:bodyPr wrap="square" lIns="0" tIns="0" rIns="0" bIns="0" rtlCol="0" anchor="ctr"/>
+          <a:lstStyle/>
+          <a:p>
+            <a:pPr algn="ctr" indent="0" marL="0">
+              <a:buNone/>
+            </a:pPr>
+            <a:r>
+              <a:rPr lang="en-US" sz="1000" b="1" dirty="0">
+                <a:solidFill>
+                  <a:srgbClr val="FFFFFF"/>
+                </a:solidFill>
+                <a:latin typeface="맑은 고딕" pitchFamily="34" charset="0"/>
+                <a:ea typeface="맑은 고딕" pitchFamily="34" charset="-122"/>
+                <a:cs typeface="맑은 고딕" pitchFamily="34" charset="-120"/>
+              </a:rPr>
+              <a:t>2</a:t>
+            </a:r>
+            <a:endParaRPr lang="en-US" sz="1000" dirty="0"/>
+          </a:p>
+        </p:txBody>
+      </p:sp>
+      <p:sp>
+        <p:nvSpPr>
+          <p:cNvPr id="22" name="Text 18"/>
+          <p:cNvSpPr/>
+          <p:nvPr/>
+        </p:nvSpPr>
+        <p:spPr>
+          <a:xfrm>
+            <a:off x="3163824" y="3419856"/>
+            <a:ext cx="1627632" cy="256032"/>
+          </a:xfrm>
+          <a:prstGeom prst="rect">
+            <a:avLst/>
+          </a:prstGeom>
+          <a:noFill/>
+          <a:ln/>
+        </p:spPr>
+        <p:txBody>
+          <a:bodyPr wrap="square" lIns="0" tIns="0" rIns="0" bIns="0" rtlCol="0" anchor="ctr"/>
+          <a:lstStyle/>
+          <a:p>
+            <a:pPr indent="0" marL="0">
+              <a:buNone/>
+            </a:pPr>
+            <a:r>
+              <a:rPr lang="en-US" sz="1100" b="1" dirty="0">
+                <a:solidFill>
+                  <a:srgbClr val="1F1A18"/>
+                </a:solidFill>
+                <a:latin typeface="맑은 고딕" pitchFamily="34" charset="0"/>
+                <a:ea typeface="맑은 고딕" pitchFamily="34" charset="-122"/>
+                <a:cs typeface="맑은 고딕" pitchFamily="34" charset="-120"/>
+              </a:rPr>
+              <a:t>온도별 보정값 현황</a:t>
+            </a:r>
+            <a:endParaRPr lang="en-US" sz="1100" dirty="0"/>
+          </a:p>
+        </p:txBody>
+      </p:sp>
+      <p:sp>
+        <p:nvSpPr>
+          <p:cNvPr id="23" name="Text 19"/>
+          <p:cNvSpPr/>
+          <p:nvPr/>
+        </p:nvSpPr>
+        <p:spPr>
+          <a:xfrm>
+            <a:off x="2779776" y="3803904"/>
+            <a:ext cx="2075688" cy="512064"/>
+          </a:xfrm>
+          <a:prstGeom prst="rect">
+            <a:avLst/>
+          </a:prstGeom>
+          <a:noFill/>
+          <a:ln/>
+        </p:spPr>
+        <p:txBody>
+          <a:bodyPr wrap="square" lIns="0" tIns="0" rIns="0" bIns="0" rtlCol="0" anchor="ctr"/>
+          <a:lstStyle/>
+          <a:p>
+            <a:pPr algn="ctr" indent="0" marL="0">
+              <a:lnSpc>
+                <a:spcPts val="1200"/>
+              </a:lnSpc>
+              <a:buNone/>
+            </a:pPr>
+            <a:r>
+              <a:rPr lang="en-US" sz="950" dirty="0">
+                <a:solidFill>
+                  <a:srgbClr val="6B625E"/>
+                </a:solidFill>
+                <a:latin typeface="맑은 고딕" pitchFamily="34" charset="0"/>
+                <a:ea typeface="맑은 고딕" pitchFamily="34" charset="-122"/>
+                <a:cs typeface="맑은 고딕" pitchFamily="34" charset="-120"/>
+              </a:rPr>
+              <a:t>구간별 시험 건수를</a:t>
+            </a:r>
+            <a:endParaRPr lang="en-US" sz="950" dirty="0"/>
+          </a:p>
+          <a:p>
+            <a:pPr algn="ctr" indent="0" marL="0">
+              <a:lnSpc>
+                <a:spcPts val="1200"/>
+              </a:lnSpc>
+              <a:buNone/>
+            </a:pPr>
+            <a:r>
+              <a:rPr lang="en-US" sz="950" dirty="0">
+                <a:solidFill>
+                  <a:srgbClr val="6B625E"/>
+                </a:solidFill>
+                <a:latin typeface="맑은 고딕" pitchFamily="34" charset="0"/>
+                <a:ea typeface="맑은 고딕" pitchFamily="34" charset="-122"/>
+                <a:cs typeface="맑은 고딕" pitchFamily="34" charset="-120"/>
+              </a:rPr>
+              <a:t>신호등으로 표시</a:t>
+            </a:r>
+            <a:endParaRPr lang="en-US" sz="950" dirty="0"/>
+          </a:p>
+        </p:txBody>
+      </p:sp>
+      <p:sp>
+        <p:nvSpPr>
+          <p:cNvPr id="24" name="Shape 20"/>
+          <p:cNvSpPr/>
+          <p:nvPr/>
+        </p:nvSpPr>
+        <p:spPr>
+          <a:xfrm>
+            <a:off x="5056632" y="1426464"/>
+            <a:ext cx="2075688" cy="2304288"/>
+          </a:xfrm>
+          <a:prstGeom prst="roundRect">
+            <a:avLst>
+              <a:gd name="adj" fmla="val 2643"/>
+            </a:avLst>
+          </a:prstGeom>
+          <a:solidFill>
+            <a:srgbClr val="FBF9F8"/>
+          </a:solidFill>
+          <a:ln w="12700">
+            <a:solidFill>
+              <a:srgbClr val="E8E0DC"/>
+            </a:solidFill>
+            <a:prstDash val="solid"/>
+          </a:ln>
+          <a:effectLst>
+            <a:outerShdw sx="100000" sy="100000" kx="0" ky="0" algn="bl" rotWithShape="0" blurRad="101600" dist="12700" dir="5400000">
+              <a:srgbClr val="D8CFCA">
+                <a:alpha val="50000"/>
+              </a:srgbClr>
+            </a:outerShdw>
+          </a:effectLst>
+        </p:spPr>
+      </p:sp>
+      <p:sp>
+        <p:nvSpPr>
+          <p:cNvPr id="25" name="Shape 21"/>
+          <p:cNvSpPr/>
+          <p:nvPr/>
+        </p:nvSpPr>
+        <p:spPr>
+          <a:xfrm>
+            <a:off x="5166360" y="1536192"/>
+            <a:ext cx="1856232" cy="1856232"/>
+          </a:xfrm>
+          <a:prstGeom prst="roundRect">
+            <a:avLst>
+              <a:gd name="adj" fmla="val 1478"/>
+            </a:avLst>
+          </a:prstGeom>
+          <a:solidFill>
+            <a:srgbClr val="FFFFFF"/>
+          </a:solidFill>
+          <a:ln w="12700">
+            <a:solidFill>
+              <a:srgbClr val="E8E0DC"/>
+            </a:solidFill>
+            <a:prstDash val="solid"/>
+          </a:ln>
+        </p:spPr>
+      </p:sp>
+      <p:pic>
+        <p:nvPicPr>
+          <p:cNvPr id="26" name="Image 2" descr="/tmp/claude-0/-home-user-Test/9494b856-101a-5688-a4a1-6c122cea1ac2/scratchpad/s_list.png">    </p:cNvPr>
+          <p:cNvPicPr>
+            <a:picLocks noChangeAspect="1"/>
+          </p:cNvPicPr>
+          <p:nvPr/>
+        </p:nvPicPr>
+        <p:blipFill>
+          <a:blip r:embed="rId3"/>
+          <a:srcRect l="0" r="0" t="0" b="0"/>
+          <a:stretch/>
+        </p:blipFill>
+        <p:spPr>
+          <a:xfrm>
+            <a:off x="5166360" y="1536192"/>
+            <a:ext cx="1856232" cy="1856232"/>
+          </a:xfrm>
+          <a:prstGeom prst="rect">
+            <a:avLst/>
+          </a:prstGeom>
+        </p:spPr>
+      </p:pic>
+      <p:sp>
+        <p:nvSpPr>
+          <p:cNvPr id="27" name="Shape 22"/>
+          <p:cNvSpPr/>
+          <p:nvPr/>
+        </p:nvSpPr>
+        <p:spPr>
+          <a:xfrm>
+            <a:off x="5166360" y="3438144"/>
+            <a:ext cx="219456" cy="219456"/>
+          </a:xfrm>
+          <a:prstGeom prst="ellipse">
+            <a:avLst/>
+          </a:prstGeom>
+          <a:solidFill>
+            <a:srgbClr val="EA002C"/>
+          </a:solidFill>
+          <a:ln/>
+        </p:spPr>
+      </p:sp>
+      <p:sp>
+        <p:nvSpPr>
+          <p:cNvPr id="28" name="Text 23"/>
+          <p:cNvSpPr/>
+          <p:nvPr/>
+        </p:nvSpPr>
+        <p:spPr>
+          <a:xfrm>
+            <a:off x="5166360" y="3438144"/>
+            <a:ext cx="219456" cy="219456"/>
+          </a:xfrm>
+          <a:prstGeom prst="rect">
+            <a:avLst/>
+          </a:prstGeom>
+          <a:noFill/>
+          <a:ln/>
+        </p:spPr>
+        <p:txBody>
+          <a:bodyPr wrap="square" lIns="0" tIns="0" rIns="0" bIns="0" rtlCol="0" anchor="ctr"/>
+          <a:lstStyle/>
+          <a:p>
+            <a:pPr algn="ctr" indent="0" marL="0">
+              <a:buNone/>
+            </a:pPr>
+            <a:r>
+              <a:rPr lang="en-US" sz="1000" b="1" dirty="0">
+                <a:solidFill>
+                  <a:srgbClr val="FFFFFF"/>
+                </a:solidFill>
+                <a:latin typeface="맑은 고딕" pitchFamily="34" charset="0"/>
+                <a:ea typeface="맑은 고딕" pitchFamily="34" charset="-122"/>
+                <a:cs typeface="맑은 고딕" pitchFamily="34" charset="-120"/>
+              </a:rPr>
+              <a:t>3</a:t>
+            </a:r>
+            <a:endParaRPr lang="en-US" sz="1000" dirty="0"/>
+          </a:p>
+        </p:txBody>
+      </p:sp>
+      <p:sp>
+        <p:nvSpPr>
+          <p:cNvPr id="29" name="Text 24"/>
+          <p:cNvSpPr/>
+          <p:nvPr/>
+        </p:nvSpPr>
+        <p:spPr>
+          <a:xfrm>
+            <a:off x="5440680" y="3419856"/>
+            <a:ext cx="1627632" cy="256032"/>
+          </a:xfrm>
+          <a:prstGeom prst="rect">
+            <a:avLst/>
+          </a:prstGeom>
+          <a:noFill/>
+          <a:ln/>
+        </p:spPr>
+        <p:txBody>
+          <a:bodyPr wrap="square" lIns="0" tIns="0" rIns="0" bIns="0" rtlCol="0" anchor="ctr"/>
+          <a:lstStyle/>
+          <a:p>
+            <a:pPr indent="0" marL="0">
+              <a:buNone/>
+            </a:pPr>
+            <a:r>
+              <a:rPr lang="en-US" sz="1100" b="1" dirty="0">
+                <a:solidFill>
+                  <a:srgbClr val="1F1A18"/>
+                </a:solidFill>
+                <a:latin typeface="맑은 고딕" pitchFamily="34" charset="0"/>
+                <a:ea typeface="맑은 고딕" pitchFamily="34" charset="-122"/>
+                <a:cs typeface="맑은 고딕" pitchFamily="34" charset="-120"/>
+              </a:rPr>
+              <a:t>시험 결과 목록</a:t>
+            </a:r>
+            <a:endParaRPr lang="en-US" sz="1100" dirty="0"/>
+          </a:p>
+        </p:txBody>
+      </p:sp>
+      <p:sp>
+        <p:nvSpPr>
+          <p:cNvPr id="30" name="Text 25"/>
+          <p:cNvSpPr/>
+          <p:nvPr/>
+        </p:nvSpPr>
+        <p:spPr>
+          <a:xfrm>
+            <a:off x="5056632" y="3803904"/>
+            <a:ext cx="2075688" cy="512064"/>
+          </a:xfrm>
+          <a:prstGeom prst="rect">
+            <a:avLst/>
+          </a:prstGeom>
+          <a:noFill/>
+          <a:ln/>
+        </p:spPr>
+        <p:txBody>
+          <a:bodyPr wrap="square" lIns="0" tIns="0" rIns="0" bIns="0" rtlCol="0" anchor="ctr"/>
+          <a:lstStyle/>
+          <a:p>
+            <a:pPr algn="ctr" indent="0" marL="0">
+              <a:lnSpc>
+                <a:spcPts val="1200"/>
+              </a:lnSpc>
+              <a:buNone/>
+            </a:pPr>
+            <a:r>
+              <a:rPr lang="en-US" sz="950" dirty="0">
+                <a:solidFill>
+                  <a:srgbClr val="6B625E"/>
+                </a:solidFill>
+                <a:latin typeface="맑은 고딕" pitchFamily="34" charset="0"/>
+                <a:ea typeface="맑은 고딕" pitchFamily="34" charset="-122"/>
+                <a:cs typeface="맑은 고딕" pitchFamily="34" charset="-120"/>
+              </a:rPr>
+              <a:t>누적 32건 관리</a:t>
+            </a:r>
+            <a:endParaRPr lang="en-US" sz="950" dirty="0"/>
+          </a:p>
+          <a:p>
+            <a:pPr algn="ctr" indent="0" marL="0">
+              <a:lnSpc>
+                <a:spcPts val="1200"/>
+              </a:lnSpc>
+              <a:buNone/>
+            </a:pPr>
+            <a:r>
+              <a:rPr lang="en-US" sz="950" dirty="0">
+                <a:solidFill>
+                  <a:srgbClr val="6B625E"/>
+                </a:solidFill>
+                <a:latin typeface="맑은 고딕" pitchFamily="34" charset="0"/>
+                <a:ea typeface="맑은 고딕" pitchFamily="34" charset="-122"/>
+                <a:cs typeface="맑은 고딕" pitchFamily="34" charset="-120"/>
+              </a:rPr>
+              <a:t>(날짜·온도·측정값)</a:t>
+            </a:r>
+            <a:endParaRPr lang="en-US" sz="950" dirty="0"/>
+          </a:p>
+        </p:txBody>
+      </p:sp>
+      <p:sp>
+        <p:nvSpPr>
+          <p:cNvPr id="31" name="Shape 26"/>
+          <p:cNvSpPr/>
+          <p:nvPr/>
+        </p:nvSpPr>
+        <p:spPr>
+          <a:xfrm>
+            <a:off x="7333488" y="1426464"/>
+            <a:ext cx="2075688" cy="2304288"/>
+          </a:xfrm>
+          <a:prstGeom prst="roundRect">
+            <a:avLst>
+              <a:gd name="adj" fmla="val 2643"/>
+            </a:avLst>
+          </a:prstGeom>
+          <a:solidFill>
+            <a:srgbClr val="FBF9F8"/>
+          </a:solidFill>
+          <a:ln w="12700">
+            <a:solidFill>
+              <a:srgbClr val="E8E0DC"/>
+            </a:solidFill>
+            <a:prstDash val="solid"/>
+          </a:ln>
+          <a:effectLst>
+            <a:outerShdw sx="100000" sy="100000" kx="0" ky="0" algn="bl" rotWithShape="0" blurRad="101600" dist="12700" dir="5400000">
+              <a:srgbClr val="D8CFCA">
+                <a:alpha val="50000"/>
+              </a:srgbClr>
+            </a:outerShdw>
+          </a:effectLst>
+        </p:spPr>
+      </p:sp>
+      <p:sp>
+        <p:nvSpPr>
+          <p:cNvPr id="32" name="Shape 27"/>
+          <p:cNvSpPr/>
+          <p:nvPr/>
+        </p:nvSpPr>
+        <p:spPr>
+          <a:xfrm>
+            <a:off x="7443216" y="1536192"/>
+            <a:ext cx="1856232" cy="1856232"/>
+          </a:xfrm>
+          <a:prstGeom prst="roundRect">
+            <a:avLst>
+              <a:gd name="adj" fmla="val 1478"/>
+            </a:avLst>
+          </a:prstGeom>
+          <a:solidFill>
+            <a:srgbClr val="FFFFFF"/>
+          </a:solidFill>
+          <a:ln w="12700">
+            <a:solidFill>
+              <a:srgbClr val="E8E0DC"/>
+            </a:solidFill>
+            <a:prstDash val="solid"/>
+          </a:ln>
+        </p:spPr>
+      </p:sp>
+      <p:pic>
+        <p:nvPicPr>
+          <p:cNvPr id="33" name="Image 3" descr="/tmp/claude-0/-home-user-Test/9494b856-101a-5688-a4a1-6c122cea1ac2/scratchpad/s_sim.png">    </p:cNvPr>
+          <p:cNvPicPr>
+            <a:picLocks noChangeAspect="1"/>
+          </p:cNvPicPr>
+          <p:nvPr/>
+        </p:nvPicPr>
+        <p:blipFill>
+          <a:blip r:embed="rId4"/>
+          <a:srcRect l="0" r="0" t="0" b="0"/>
+          <a:stretch/>
+        </p:blipFill>
+        <p:spPr>
+          <a:xfrm>
+            <a:off x="7443216" y="1536192"/>
+            <a:ext cx="1856232" cy="1856232"/>
+          </a:xfrm>
+          <a:prstGeom prst="rect">
+            <a:avLst/>
+          </a:prstGeom>
+        </p:spPr>
+      </p:pic>
+      <p:sp>
+        <p:nvSpPr>
+          <p:cNvPr id="34" name="Shape 28"/>
+          <p:cNvSpPr/>
+          <p:nvPr/>
+        </p:nvSpPr>
+        <p:spPr>
+          <a:xfrm>
+            <a:off x="7443216" y="3438144"/>
+            <a:ext cx="219456" cy="219456"/>
+          </a:xfrm>
+          <a:prstGeom prst="ellipse">
+            <a:avLst/>
+          </a:prstGeom>
+          <a:solidFill>
+            <a:srgbClr val="F47725"/>
+          </a:solidFill>
+          <a:ln/>
+        </p:spPr>
+      </p:sp>
+      <p:sp>
+        <p:nvSpPr>
+          <p:cNvPr id="35" name="Text 29"/>
+          <p:cNvSpPr/>
+          <p:nvPr/>
+        </p:nvSpPr>
+        <p:spPr>
+          <a:xfrm>
+            <a:off x="7443216" y="3438144"/>
+            <a:ext cx="219456" cy="219456"/>
+          </a:xfrm>
+          <a:prstGeom prst="rect">
+            <a:avLst/>
+          </a:prstGeom>
+          <a:noFill/>
+          <a:ln/>
+        </p:spPr>
+        <p:txBody>
+          <a:bodyPr wrap="square" lIns="0" tIns="0" rIns="0" bIns="0" rtlCol="0" anchor="ctr"/>
+          <a:lstStyle/>
+          <a:p>
+            <a:pPr algn="ctr" indent="0" marL="0">
+              <a:buNone/>
+            </a:pPr>
+            <a:r>
+              <a:rPr lang="en-US" sz="1000" b="1" dirty="0">
+                <a:solidFill>
+                  <a:srgbClr val="FFFFFF"/>
+                </a:solidFill>
+                <a:latin typeface="맑은 고딕" pitchFamily="34" charset="0"/>
+                <a:ea typeface="맑은 고딕" pitchFamily="34" charset="-122"/>
+                <a:cs typeface="맑은 고딕" pitchFamily="34" charset="-120"/>
+              </a:rPr>
+              <a:t>4</a:t>
+            </a:r>
+            <a:endParaRPr lang="en-US" sz="1000" dirty="0"/>
+          </a:p>
+        </p:txBody>
+      </p:sp>
+      <p:sp>
+        <p:nvSpPr>
+          <p:cNvPr id="36" name="Text 30"/>
+          <p:cNvSpPr/>
+          <p:nvPr/>
+        </p:nvSpPr>
+        <p:spPr>
+          <a:xfrm>
+            <a:off x="7717536" y="3419856"/>
+            <a:ext cx="1627632" cy="256032"/>
+          </a:xfrm>
+          <a:prstGeom prst="rect">
+            <a:avLst/>
+          </a:prstGeom>
+          <a:noFill/>
+          <a:ln/>
+        </p:spPr>
+        <p:txBody>
+          <a:bodyPr wrap="square" lIns="0" tIns="0" rIns="0" bIns="0" rtlCol="0" anchor="ctr"/>
+          <a:lstStyle/>
+          <a:p>
+            <a:pPr indent="0" marL="0">
+              <a:buNone/>
+            </a:pPr>
+            <a:r>
+              <a:rPr lang="en-US" sz="1100" b="1" dirty="0">
+                <a:solidFill>
+                  <a:srgbClr val="1F1A18"/>
+                </a:solidFill>
+                <a:latin typeface="맑은 고딕" pitchFamily="34" charset="0"/>
+                <a:ea typeface="맑은 고딕" pitchFamily="34" charset="-122"/>
+                <a:cs typeface="맑은 고딕" pitchFamily="34" charset="-120"/>
+              </a:rPr>
+              <a:t>출력 시뮬레이션</a:t>
+            </a:r>
+            <a:endParaRPr lang="en-US" sz="1100" dirty="0"/>
+          </a:p>
+        </p:txBody>
+      </p:sp>
+      <p:sp>
+        <p:nvSpPr>
+          <p:cNvPr id="37" name="Text 31"/>
+          <p:cNvSpPr/>
+          <p:nvPr/>
+        </p:nvSpPr>
+        <p:spPr>
+          <a:xfrm>
+            <a:off x="7333488" y="3803904"/>
+            <a:ext cx="2075688" cy="512064"/>
+          </a:xfrm>
+          <a:prstGeom prst="rect">
+            <a:avLst/>
+          </a:prstGeom>
+          <a:noFill/>
+          <a:ln/>
+        </p:spPr>
+        <p:txBody>
+          <a:bodyPr wrap="square" lIns="0" tIns="0" rIns="0" bIns="0" rtlCol="0" anchor="ctr"/>
+          <a:lstStyle/>
+          <a:p>
+            <a:pPr algn="ctr" indent="0" marL="0">
+              <a:lnSpc>
+                <a:spcPts val="1200"/>
+              </a:lnSpc>
+              <a:buNone/>
+            </a:pPr>
+            <a:r>
+              <a:rPr lang="en-US" sz="950" dirty="0">
+                <a:solidFill>
+                  <a:srgbClr val="6B625E"/>
+                </a:solidFill>
+                <a:latin typeface="맑은 고딕" pitchFamily="34" charset="0"/>
+                <a:ea typeface="맑은 고딕" pitchFamily="34" charset="-122"/>
+                <a:cs typeface="맑은 고딕" pitchFamily="34" charset="-120"/>
+              </a:rPr>
+              <a:t>조건 입력 → 예상 출력</a:t>
+            </a:r>
+            <a:endParaRPr lang="en-US" sz="950" dirty="0"/>
+          </a:p>
+          <a:p>
+            <a:pPr algn="ctr" indent="0" marL="0">
+              <a:lnSpc>
+                <a:spcPts val="1200"/>
+              </a:lnSpc>
+              <a:buNone/>
+            </a:pPr>
+            <a:r>
+              <a:rPr lang="en-US" sz="950" dirty="0">
+                <a:solidFill>
+                  <a:srgbClr val="6B625E"/>
+                </a:solidFill>
+                <a:latin typeface="맑은 고딕" pitchFamily="34" charset="0"/>
+                <a:ea typeface="맑은 고딕" pitchFamily="34" charset="-122"/>
+                <a:cs typeface="맑은 고딕" pitchFamily="34" charset="-120"/>
+              </a:rPr>
+              <a:t>시험 후 즉시 대조</a:t>
+            </a:r>
+            <a:endParaRPr lang="en-US" sz="950" dirty="0"/>
+          </a:p>
+        </p:txBody>
+      </p:sp>
+      <p:sp>
+        <p:nvSpPr>
+          <p:cNvPr id="38" name="Shape 32"/>
+          <p:cNvSpPr/>
+          <p:nvPr/>
+        </p:nvSpPr>
+        <p:spPr>
+          <a:xfrm>
+            <a:off x="9610344" y="1426464"/>
+            <a:ext cx="2075688" cy="2304288"/>
+          </a:xfrm>
+          <a:prstGeom prst="roundRect">
+            <a:avLst>
+              <a:gd name="adj" fmla="val 2643"/>
+            </a:avLst>
+          </a:prstGeom>
+          <a:solidFill>
+            <a:srgbClr val="FBF9F8"/>
+          </a:solidFill>
+          <a:ln w="12700">
+            <a:solidFill>
+              <a:srgbClr val="E8E0DC"/>
+            </a:solidFill>
+            <a:prstDash val="solid"/>
+          </a:ln>
+          <a:effectLst>
+            <a:outerShdw sx="100000" sy="100000" kx="0" ky="0" algn="bl" rotWithShape="0" blurRad="101600" dist="12700" dir="5400000">
+              <a:srgbClr val="D8CFCA">
+                <a:alpha val="50000"/>
+              </a:srgbClr>
+            </a:outerShdw>
+          </a:effectLst>
+        </p:spPr>
+      </p:sp>
+      <p:sp>
+        <p:nvSpPr>
+          <p:cNvPr id="39" name="Shape 33"/>
+          <p:cNvSpPr/>
+          <p:nvPr/>
+        </p:nvSpPr>
+        <p:spPr>
+          <a:xfrm>
+            <a:off x="9720072" y="1536192"/>
+            <a:ext cx="1856232" cy="1856232"/>
+          </a:xfrm>
+          <a:prstGeom prst="roundRect">
+            <a:avLst>
+              <a:gd name="adj" fmla="val 1478"/>
+            </a:avLst>
+          </a:prstGeom>
+          <a:solidFill>
+            <a:srgbClr val="FFFFFF"/>
+          </a:solidFill>
+          <a:ln w="12700">
+            <a:solidFill>
+              <a:srgbClr val="E8E0DC"/>
+            </a:solidFill>
+            <a:prstDash val="solid"/>
+          </a:ln>
+        </p:spPr>
+      </p:sp>
+      <p:pic>
+        <p:nvPicPr>
+          <p:cNvPr id="40" name="Image 4" descr="/tmp/claude-0/-home-user-Test/9494b856-101a-5688-a4a1-6c122cea1ac2/scratchpad/s_chart.png">    </p:cNvPr>
+          <p:cNvPicPr>
+            <a:picLocks noChangeAspect="1"/>
+          </p:cNvPicPr>
+          <p:nvPr/>
+        </p:nvPicPr>
+        <p:blipFill>
+          <a:blip r:embed="rId5"/>
+          <a:srcRect l="0" r="0" t="0" b="0"/>
+          <a:stretch/>
+        </p:blipFill>
+        <p:spPr>
+          <a:xfrm>
+            <a:off x="9720072" y="1536192"/>
+            <a:ext cx="1856232" cy="1856232"/>
+          </a:xfrm>
+          <a:prstGeom prst="rect">
+            <a:avLst/>
+          </a:prstGeom>
+        </p:spPr>
+      </p:pic>
+      <p:sp>
+        <p:nvSpPr>
+          <p:cNvPr id="41" name="Shape 34"/>
+          <p:cNvSpPr/>
+          <p:nvPr/>
+        </p:nvSpPr>
+        <p:spPr>
+          <a:xfrm>
+            <a:off x="9720072" y="3438144"/>
+            <a:ext cx="219456" cy="219456"/>
+          </a:xfrm>
+          <a:prstGeom prst="ellipse">
+            <a:avLst/>
+          </a:prstGeom>
+          <a:solidFill>
+            <a:srgbClr val="F47725"/>
+          </a:solidFill>
+          <a:ln/>
+        </p:spPr>
+      </p:sp>
+      <p:sp>
+        <p:nvSpPr>
+          <p:cNvPr id="42" name="Text 35"/>
+          <p:cNvSpPr/>
+          <p:nvPr/>
+        </p:nvSpPr>
+        <p:spPr>
+          <a:xfrm>
+            <a:off x="9720072" y="3438144"/>
+            <a:ext cx="219456" cy="219456"/>
+          </a:xfrm>
+          <a:prstGeom prst="rect">
+            <a:avLst/>
+          </a:prstGeom>
+          <a:noFill/>
+          <a:ln/>
+        </p:spPr>
+        <p:txBody>
+          <a:bodyPr wrap="square" lIns="0" tIns="0" rIns="0" bIns="0" rtlCol="0" anchor="ctr"/>
+          <a:lstStyle/>
+          <a:p>
+            <a:pPr algn="ctr" indent="0" marL="0">
+              <a:buNone/>
+            </a:pPr>
+            <a:r>
+              <a:rPr lang="en-US" sz="1000" b="1" dirty="0">
+                <a:solidFill>
+                  <a:srgbClr val="FFFFFF"/>
+                </a:solidFill>
+                <a:latin typeface="맑은 고딕" pitchFamily="34" charset="0"/>
+                <a:ea typeface="맑은 고딕" pitchFamily="34" charset="-122"/>
+                <a:cs typeface="맑은 고딕" pitchFamily="34" charset="-120"/>
+              </a:rPr>
+              <a:t>5</a:t>
+            </a:r>
+            <a:endParaRPr lang="en-US" sz="1000" dirty="0"/>
+          </a:p>
+        </p:txBody>
+      </p:sp>
+      <p:sp>
+        <p:nvSpPr>
+          <p:cNvPr id="43" name="Text 36"/>
+          <p:cNvSpPr/>
+          <p:nvPr/>
+        </p:nvSpPr>
+        <p:spPr>
+          <a:xfrm>
+            <a:off x="9994392" y="3419856"/>
+            <a:ext cx="1627632" cy="256032"/>
+          </a:xfrm>
+          <a:prstGeom prst="rect">
+            <a:avLst/>
+          </a:prstGeom>
+          <a:noFill/>
+          <a:ln/>
+        </p:spPr>
+        <p:txBody>
+          <a:bodyPr wrap="square" lIns="0" tIns="0" rIns="0" bIns="0" rtlCol="0" anchor="ctr"/>
+          <a:lstStyle/>
+          <a:p>
+            <a:pPr indent="0" marL="0">
+              <a:buNone/>
+            </a:pPr>
+            <a:r>
+              <a:rPr lang="en-US" sz="1100" b="1" dirty="0">
+                <a:solidFill>
+                  <a:srgbClr val="1F1A18"/>
+                </a:solidFill>
+                <a:latin typeface="맑은 고딕" pitchFamily="34" charset="0"/>
+                <a:ea typeface="맑은 고딕" pitchFamily="34" charset="-122"/>
+                <a:cs typeface="맑은 고딕" pitchFamily="34" charset="-120"/>
+              </a:rPr>
+              <a:t>출력곡선 비교</a:t>
+            </a:r>
+            <a:endParaRPr lang="en-US" sz="1100" dirty="0"/>
+          </a:p>
+        </p:txBody>
+      </p:sp>
+      <p:sp>
+        <p:nvSpPr>
+          <p:cNvPr id="44" name="Text 37"/>
+          <p:cNvSpPr/>
+          <p:nvPr/>
+        </p:nvSpPr>
+        <p:spPr>
+          <a:xfrm>
+            <a:off x="9610344" y="3803904"/>
+            <a:ext cx="2075688" cy="512064"/>
+          </a:xfrm>
+          <a:prstGeom prst="rect">
+            <a:avLst/>
+          </a:prstGeom>
+          <a:noFill/>
+          <a:ln/>
+        </p:spPr>
+        <p:txBody>
+          <a:bodyPr wrap="square" lIns="0" tIns="0" rIns="0" bIns="0" rtlCol="0" anchor="ctr"/>
+          <a:lstStyle/>
+          <a:p>
+            <a:pPr algn="ctr" indent="0" marL="0">
+              <a:lnSpc>
+                <a:spcPts val="1200"/>
+              </a:lnSpc>
+              <a:buNone/>
+            </a:pPr>
+            <a:r>
+              <a:rPr lang="en-US" sz="950" dirty="0">
+                <a:solidFill>
+                  <a:srgbClr val="6B625E"/>
+                </a:solidFill>
+                <a:latin typeface="맑은 고딕" pitchFamily="34" charset="0"/>
+                <a:ea typeface="맑은 고딕" pitchFamily="34" charset="-122"/>
+                <a:cs typeface="맑은 고딕" pitchFamily="34" charset="-120"/>
+              </a:rPr>
+              <a:t>이론값 vs 보정 후</a:t>
+            </a:r>
+            <a:endParaRPr lang="en-US" sz="950" dirty="0"/>
+          </a:p>
+          <a:p>
+            <a:pPr algn="ctr" indent="0" marL="0">
+              <a:lnSpc>
+                <a:spcPts val="1200"/>
+              </a:lnSpc>
+              <a:buNone/>
+            </a:pPr>
+            <a:r>
+              <a:rPr lang="en-US" sz="950" dirty="0">
+                <a:solidFill>
+                  <a:srgbClr val="6B625E"/>
+                </a:solidFill>
+                <a:latin typeface="맑은 고딕" pitchFamily="34" charset="0"/>
+                <a:ea typeface="맑은 고딕" pitchFamily="34" charset="-122"/>
+                <a:cs typeface="맑은 고딕" pitchFamily="34" charset="-120"/>
+              </a:rPr>
+              <a:t>그래프로 확인</a:t>
+            </a:r>
+            <a:endParaRPr lang="en-US" sz="950" dirty="0"/>
+          </a:p>
+        </p:txBody>
+      </p:sp>
+      <p:sp>
+        <p:nvSpPr>
+          <p:cNvPr id="45" name="Shape 38"/>
+          <p:cNvSpPr/>
+          <p:nvPr/>
+        </p:nvSpPr>
+        <p:spPr>
+          <a:xfrm>
+            <a:off x="502920" y="4453128"/>
+            <a:ext cx="237744" cy="237744"/>
+          </a:xfrm>
+          <a:prstGeom prst="ellipse">
+            <a:avLst/>
+          </a:prstGeom>
+          <a:solidFill>
+            <a:srgbClr val="F47725"/>
+          </a:solidFill>
+          <a:ln/>
+        </p:spPr>
+      </p:sp>
+      <p:sp>
+        <p:nvSpPr>
+          <p:cNvPr id="46" name="Text 39"/>
+          <p:cNvSpPr/>
+          <p:nvPr/>
+        </p:nvSpPr>
+        <p:spPr>
+          <a:xfrm>
+            <a:off x="868680" y="4407408"/>
+            <a:ext cx="4572000" cy="310896"/>
+          </a:xfrm>
+          <a:prstGeom prst="rect">
+            <a:avLst/>
+          </a:prstGeom>
+          <a:noFill/>
+          <a:ln/>
+        </p:spPr>
+        <p:txBody>
+          <a:bodyPr wrap="square" lIns="0" tIns="0" rIns="0" bIns="0" rtlCol="0" anchor="ctr"/>
+          <a:lstStyle/>
+          <a:p>
+            <a:pPr indent="0" marL="0">
+              <a:buNone/>
+            </a:pPr>
+            <a:r>
+              <a:rPr lang="en-US" sz="1350" b="1" dirty="0">
+                <a:solidFill>
+                  <a:srgbClr val="1F1A18"/>
+                </a:solidFill>
+                <a:latin typeface="맑은 고딕" pitchFamily="34" charset="0"/>
+                <a:ea typeface="맑은 고딕" pitchFamily="34" charset="-122"/>
+                <a:cs typeface="맑은 고딕" pitchFamily="34" charset="-120"/>
+              </a:rPr>
+              <a:t>계산 방식 — 2단 구조</a:t>
+            </a:r>
+            <a:endParaRPr lang="en-US" sz="1350" dirty="0"/>
+          </a:p>
+        </p:txBody>
+      </p:sp>
+      <p:sp>
+        <p:nvSpPr>
+          <p:cNvPr id="47" name="Shape 40"/>
+          <p:cNvSpPr/>
+          <p:nvPr/>
+        </p:nvSpPr>
+        <p:spPr>
+          <a:xfrm>
+            <a:off x="502920" y="4791456"/>
+            <a:ext cx="5394960" cy="1828800"/>
+          </a:xfrm>
+          <a:prstGeom prst="roundRect">
+            <a:avLst>
+              <a:gd name="adj" fmla="val 3000"/>
+            </a:avLst>
+          </a:prstGeom>
+          <a:solidFill>
+            <a:srgbClr val="FFF4EE"/>
+          </a:solidFill>
+          <a:ln w="12700">
+            <a:solidFill>
+              <a:srgbClr val="E8E0DC"/>
+            </a:solidFill>
+            <a:prstDash val="solid"/>
+          </a:ln>
+          <a:effectLst>
+            <a:outerShdw sx="100000" sy="100000" kx="0" ky="0" algn="bl" rotWithShape="0" blurRad="101600" dist="12700" dir="5400000">
+              <a:srgbClr val="D8CFCA">
+                <a:alpha val="50000"/>
+              </a:srgbClr>
+            </a:outerShdw>
+          </a:effectLst>
+        </p:spPr>
+      </p:sp>
+      <p:sp>
+        <p:nvSpPr>
+          <p:cNvPr id="48" name="Text 41"/>
+          <p:cNvSpPr/>
+          <p:nvPr/>
+        </p:nvSpPr>
+        <p:spPr>
+          <a:xfrm>
+            <a:off x="822960" y="4974336"/>
+            <a:ext cx="4800600" cy="1499616"/>
           </a:xfrm>
           <a:prstGeom prst="rect">
             <a:avLst/>
@@ -2889,138 +4503,18 @@
               <a:buNone/>
             </a:pPr>
             <a:r>
-              <a:rPr lang="en-US" sz="1150" dirty="0">
-                <a:solidFill>
-                  <a:srgbClr val="6B625E"/>
-                </a:solidFill>
-                <a:latin typeface="맑은 고딕" pitchFamily="34" charset="0"/>
-                <a:ea typeface="맑은 고딕" pitchFamily="34" charset="-122"/>
-                <a:cs typeface="맑은 고딕" pitchFamily="34" charset="-120"/>
-              </a:rPr>
-              <a:t>날짜만 입력 → 자동 취득 → 신고파일 생성</a:t>
-            </a:r>
-            <a:endParaRPr lang="en-US" sz="1150" dirty="0"/>
-          </a:p>
-        </p:txBody>
-      </p:sp>
-      <p:sp>
-        <p:nvSpPr>
-          <p:cNvPr id="10" name="Shape 8"/>
-          <p:cNvSpPr/>
-          <p:nvPr/>
-        </p:nvSpPr>
-        <p:spPr>
-          <a:xfrm>
-            <a:off x="548640" y="2267712"/>
-            <a:ext cx="310896" cy="310896"/>
-          </a:xfrm>
-          <a:prstGeom prst="ellipse">
-            <a:avLst/>
-          </a:prstGeom>
-          <a:solidFill>
-            <a:srgbClr val="EA002C"/>
-          </a:solidFill>
-          <a:ln/>
-        </p:spPr>
-      </p:sp>
-      <p:sp>
-        <p:nvSpPr>
-          <p:cNvPr id="11" name="Text 9"/>
-          <p:cNvSpPr/>
-          <p:nvPr/>
-        </p:nvSpPr>
-        <p:spPr>
-          <a:xfrm>
-            <a:off x="548640" y="2267712"/>
-            <a:ext cx="310896" cy="310896"/>
-          </a:xfrm>
-          <a:prstGeom prst="rect">
-            <a:avLst/>
-          </a:prstGeom>
-          <a:noFill/>
-          <a:ln/>
-        </p:spPr>
-        <p:txBody>
-          <a:bodyPr wrap="square" lIns="0" tIns="0" rIns="0" bIns="0" rtlCol="0" anchor="ctr"/>
-          <a:lstStyle/>
-          <a:p>
-            <a:pPr algn="ctr" indent="0" marL="0">
-              <a:buNone/>
-            </a:pPr>
-            <a:r>
-              <a:rPr lang="en-US" sz="1300" b="1" dirty="0">
-                <a:solidFill>
-                  <a:srgbClr val="FFFFFF"/>
-                </a:solidFill>
-                <a:latin typeface="맑은 고딕" pitchFamily="34" charset="0"/>
-                <a:ea typeface="맑은 고딕" pitchFamily="34" charset="-122"/>
-                <a:cs typeface="맑은 고딕" pitchFamily="34" charset="-120"/>
-              </a:rPr>
-              <a:t>2</a:t>
-            </a:r>
-            <a:endParaRPr lang="en-US" sz="1300" dirty="0"/>
-          </a:p>
-        </p:txBody>
-      </p:sp>
-      <p:sp>
-        <p:nvSpPr>
-          <p:cNvPr id="12" name="Text 10"/>
-          <p:cNvSpPr/>
-          <p:nvPr/>
-        </p:nvSpPr>
-        <p:spPr>
-          <a:xfrm>
-            <a:off x="987552" y="2194560"/>
-            <a:ext cx="4206240" cy="292608"/>
-          </a:xfrm>
-          <a:prstGeom prst="rect">
-            <a:avLst/>
-          </a:prstGeom>
-          <a:noFill/>
-          <a:ln/>
-        </p:spPr>
-        <p:txBody>
-          <a:bodyPr wrap="square" lIns="0" tIns="0" rIns="0" bIns="0" rtlCol="0" anchor="ctr"/>
-          <a:lstStyle/>
-          <a:p>
-            <a:pPr indent="0" marL="0">
-              <a:buNone/>
-            </a:pPr>
-            <a:r>
-              <a:rPr lang="en-US" sz="1400" b="1" dirty="0">
-                <a:solidFill>
-                  <a:srgbClr val="1F1A18"/>
-                </a:solidFill>
-                <a:latin typeface="맑은 고딕" pitchFamily="34" charset="0"/>
-                <a:ea typeface="맑은 고딕" pitchFamily="34" charset="-122"/>
-                <a:cs typeface="맑은 고딕" pitchFamily="34" charset="-120"/>
-              </a:rPr>
-              <a:t>온도별 보정값 현황</a:t>
-            </a:r>
-            <a:endParaRPr lang="en-US" sz="1400" dirty="0"/>
-          </a:p>
-        </p:txBody>
-      </p:sp>
-      <p:sp>
-        <p:nvSpPr>
-          <p:cNvPr id="13" name="Text 11"/>
-          <p:cNvSpPr/>
-          <p:nvPr/>
-        </p:nvSpPr>
-        <p:spPr>
-          <a:xfrm>
-            <a:off x="987552" y="2505456"/>
-            <a:ext cx="4297680" cy="457200"/>
-          </a:xfrm>
-          <a:prstGeom prst="rect">
-            <a:avLst/>
-          </a:prstGeom>
-          <a:noFill/>
-          <a:ln/>
-        </p:spPr>
-        <p:txBody>
-          <a:bodyPr wrap="square" lIns="0" tIns="0" rIns="0" bIns="0" rtlCol="0" anchor="ctr"/>
-          <a:lstStyle/>
+              <a:rPr lang="en-US" sz="1200" b="1" dirty="0">
+                <a:solidFill>
+                  <a:srgbClr val="EA002C"/>
+                </a:solidFill>
+                <a:latin typeface="맑은 고딕" pitchFamily="34" charset="0"/>
+                <a:ea typeface="맑은 고딕" pitchFamily="34" charset="-122"/>
+                <a:cs typeface="맑은 고딕" pitchFamily="34" charset="-120"/>
+              </a:rPr>
+              <a:t>1단  이론값</a:t>
+            </a:r>
+            <a:endParaRPr lang="en-US" sz="1200" dirty="0"/>
+          </a:p>
           <a:p>
             <a:pPr indent="0" marL="0">
               <a:lnSpc>
@@ -3029,7 +4523,7 @@
               <a:buNone/>
             </a:pPr>
             <a:r>
-              <a:rPr lang="en-US" sz="1150" dirty="0">
+              <a:rPr lang="en-US" sz="1100" dirty="0">
                 <a:solidFill>
                   <a:srgbClr val="6B625E"/>
                 </a:solidFill>
@@ -3037,130 +4531,10 @@
                 <a:ea typeface="맑은 고딕" pitchFamily="34" charset="-122"/>
                 <a:cs typeface="맑은 고딕" pitchFamily="34" charset="-120"/>
               </a:rPr>
-              <a:t>구간별 데이터가 충분한지 신호등 표시</a:t>
-            </a:r>
-            <a:endParaRPr lang="en-US" sz="1150" dirty="0"/>
-          </a:p>
-        </p:txBody>
-      </p:sp>
-      <p:sp>
-        <p:nvSpPr>
-          <p:cNvPr id="14" name="Shape 12"/>
-          <p:cNvSpPr/>
-          <p:nvPr/>
-        </p:nvSpPr>
-        <p:spPr>
-          <a:xfrm>
-            <a:off x="548640" y="3236976"/>
-            <a:ext cx="310896" cy="310896"/>
-          </a:xfrm>
-          <a:prstGeom prst="ellipse">
-            <a:avLst/>
-          </a:prstGeom>
-          <a:solidFill>
-            <a:srgbClr val="EA002C"/>
-          </a:solidFill>
-          <a:ln/>
-        </p:spPr>
-      </p:sp>
-      <p:sp>
-        <p:nvSpPr>
-          <p:cNvPr id="15" name="Text 13"/>
-          <p:cNvSpPr/>
-          <p:nvPr/>
-        </p:nvSpPr>
-        <p:spPr>
-          <a:xfrm>
-            <a:off x="548640" y="3236976"/>
-            <a:ext cx="310896" cy="310896"/>
-          </a:xfrm>
-          <a:prstGeom prst="rect">
-            <a:avLst/>
-          </a:prstGeom>
-          <a:noFill/>
-          <a:ln/>
-        </p:spPr>
-        <p:txBody>
-          <a:bodyPr wrap="square" lIns="0" tIns="0" rIns="0" bIns="0" rtlCol="0" anchor="ctr"/>
-          <a:lstStyle/>
-          <a:p>
-            <a:pPr algn="ctr" indent="0" marL="0">
-              <a:buNone/>
-            </a:pPr>
-            <a:r>
-              <a:rPr lang="en-US" sz="1300" b="1" dirty="0">
-                <a:solidFill>
-                  <a:srgbClr val="FFFFFF"/>
-                </a:solidFill>
-                <a:latin typeface="맑은 고딕" pitchFamily="34" charset="0"/>
-                <a:ea typeface="맑은 고딕" pitchFamily="34" charset="-122"/>
-                <a:cs typeface="맑은 고딕" pitchFamily="34" charset="-120"/>
-              </a:rPr>
-              <a:t>3</a:t>
-            </a:r>
-            <a:endParaRPr lang="en-US" sz="1300" dirty="0"/>
-          </a:p>
-        </p:txBody>
-      </p:sp>
-      <p:sp>
-        <p:nvSpPr>
-          <p:cNvPr id="16" name="Text 14"/>
-          <p:cNvSpPr/>
-          <p:nvPr/>
-        </p:nvSpPr>
-        <p:spPr>
-          <a:xfrm>
-            <a:off x="987552" y="3163824"/>
-            <a:ext cx="4206240" cy="292608"/>
-          </a:xfrm>
-          <a:prstGeom prst="rect">
-            <a:avLst/>
-          </a:prstGeom>
-          <a:noFill/>
-          <a:ln/>
-        </p:spPr>
-        <p:txBody>
-          <a:bodyPr wrap="square" lIns="0" tIns="0" rIns="0" bIns="0" rtlCol="0" anchor="ctr"/>
-          <a:lstStyle/>
-          <a:p>
-            <a:pPr indent="0" marL="0">
-              <a:buNone/>
-            </a:pPr>
-            <a:r>
-              <a:rPr lang="en-US" sz="1400" b="1" dirty="0">
-                <a:solidFill>
-                  <a:srgbClr val="1F1A18"/>
-                </a:solidFill>
-                <a:latin typeface="맑은 고딕" pitchFamily="34" charset="0"/>
-                <a:ea typeface="맑은 고딕" pitchFamily="34" charset="-122"/>
-                <a:cs typeface="맑은 고딕" pitchFamily="34" charset="-120"/>
-              </a:rPr>
-              <a:t>테스트 결과 목록</a:t>
-            </a:r>
-            <a:endParaRPr lang="en-US" sz="1400" dirty="0"/>
-          </a:p>
-        </p:txBody>
-      </p:sp>
-      <p:sp>
-        <p:nvSpPr>
-          <p:cNvPr id="17" name="Text 15"/>
-          <p:cNvSpPr/>
-          <p:nvPr/>
-        </p:nvSpPr>
-        <p:spPr>
-          <a:xfrm>
-            <a:off x="987552" y="3474720"/>
-            <a:ext cx="4297680" cy="457200"/>
-          </a:xfrm>
-          <a:prstGeom prst="rect">
-            <a:avLst/>
-          </a:prstGeom>
-          <a:noFill/>
-          <a:ln/>
-        </p:spPr>
-        <p:txBody>
-          <a:bodyPr wrap="square" lIns="0" tIns="0" rIns="0" bIns="0" rtlCol="0" anchor="ctr"/>
-          <a:lstStyle/>
+              <a:t>설계 성능곡선으로 계산 (기존 엑셀과 동일)</a:t>
+            </a:r>
+            <a:endParaRPr lang="en-US" sz="1200" dirty="0"/>
+          </a:p>
           <a:p>
             <a:pPr indent="0" marL="0">
               <a:lnSpc>
@@ -3168,139 +4542,8 @@
               </a:lnSpc>
               <a:buNone/>
             </a:pPr>
-            <a:r>
-              <a:rPr lang="en-US" sz="1150" dirty="0">
-                <a:solidFill>
-                  <a:srgbClr val="6B625E"/>
-                </a:solidFill>
-                <a:latin typeface="맑은 고딕" pitchFamily="34" charset="0"/>
-                <a:ea typeface="맑은 고딕" pitchFamily="34" charset="-122"/>
-                <a:cs typeface="맑은 고딕" pitchFamily="34" charset="-120"/>
-              </a:rPr>
-              <a:t>지금까지 쌓인 시험 결과 관리</a:t>
-            </a:r>
-            <a:endParaRPr lang="en-US" sz="1150" dirty="0"/>
-          </a:p>
-        </p:txBody>
-      </p:sp>
-      <p:sp>
-        <p:nvSpPr>
-          <p:cNvPr id="18" name="Shape 16"/>
-          <p:cNvSpPr/>
-          <p:nvPr/>
-        </p:nvSpPr>
-        <p:spPr>
-          <a:xfrm>
-            <a:off x="548640" y="4206240"/>
-            <a:ext cx="310896" cy="310896"/>
-          </a:xfrm>
-          <a:prstGeom prst="ellipse">
-            <a:avLst/>
-          </a:prstGeom>
-          <a:solidFill>
-            <a:srgbClr val="F47725"/>
-          </a:solidFill>
-          <a:ln/>
-        </p:spPr>
-      </p:sp>
-      <p:sp>
-        <p:nvSpPr>
-          <p:cNvPr id="19" name="Text 17"/>
-          <p:cNvSpPr/>
-          <p:nvPr/>
-        </p:nvSpPr>
-        <p:spPr>
-          <a:xfrm>
-            <a:off x="548640" y="4206240"/>
-            <a:ext cx="310896" cy="310896"/>
-          </a:xfrm>
-          <a:prstGeom prst="rect">
-            <a:avLst/>
-          </a:prstGeom>
-          <a:noFill/>
-          <a:ln/>
-        </p:spPr>
-        <p:txBody>
-          <a:bodyPr wrap="square" lIns="0" tIns="0" rIns="0" bIns="0" rtlCol="0" anchor="ctr"/>
-          <a:lstStyle/>
-          <a:p>
-            <a:pPr algn="ctr" indent="0" marL="0">
-              <a:buNone/>
-            </a:pPr>
-            <a:r>
-              <a:rPr lang="en-US" sz="1300" b="1" dirty="0">
-                <a:solidFill>
-                  <a:srgbClr val="FFFFFF"/>
-                </a:solidFill>
-                <a:latin typeface="맑은 고딕" pitchFamily="34" charset="0"/>
-                <a:ea typeface="맑은 고딕" pitchFamily="34" charset="-122"/>
-                <a:cs typeface="맑은 고딕" pitchFamily="34" charset="-120"/>
-              </a:rPr>
-              <a:t>4</a:t>
-            </a:r>
-            <a:endParaRPr lang="en-US" sz="1300" dirty="0"/>
-          </a:p>
-        </p:txBody>
-      </p:sp>
-      <p:sp>
-        <p:nvSpPr>
-          <p:cNvPr id="20" name="Text 18"/>
-          <p:cNvSpPr/>
-          <p:nvPr/>
-        </p:nvSpPr>
-        <p:spPr>
-          <a:xfrm>
-            <a:off x="987552" y="4133088"/>
-            <a:ext cx="4206240" cy="292608"/>
-          </a:xfrm>
-          <a:prstGeom prst="rect">
-            <a:avLst/>
-          </a:prstGeom>
-          <a:noFill/>
-          <a:ln/>
-        </p:spPr>
-        <p:txBody>
-          <a:bodyPr wrap="square" lIns="0" tIns="0" rIns="0" bIns="0" rtlCol="0" anchor="ctr"/>
-          <a:lstStyle/>
-          <a:p>
-            <a:pPr indent="0" marL="0">
-              <a:buNone/>
-            </a:pPr>
-            <a:r>
-              <a:rPr lang="en-US" sz="1400" b="1" dirty="0">
-                <a:solidFill>
-                  <a:srgbClr val="1F1A18"/>
-                </a:solidFill>
-                <a:latin typeface="맑은 고딕" pitchFamily="34" charset="0"/>
-                <a:ea typeface="맑은 고딕" pitchFamily="34" charset="-122"/>
-                <a:cs typeface="맑은 고딕" pitchFamily="34" charset="-120"/>
-              </a:rPr>
-              <a:t>출력 시뮬레이션</a:t>
-            </a:r>
-            <a:endParaRPr lang="en-US" sz="1400" dirty="0"/>
-          </a:p>
-        </p:txBody>
-      </p:sp>
-      <p:sp>
-        <p:nvSpPr>
-          <p:cNvPr id="21" name="Text 19"/>
-          <p:cNvSpPr/>
-          <p:nvPr/>
-        </p:nvSpPr>
-        <p:spPr>
-          <a:xfrm>
-            <a:off x="987552" y="4443984"/>
-            <a:ext cx="4297680" cy="457200"/>
-          </a:xfrm>
-          <a:prstGeom prst="rect">
-            <a:avLst/>
-          </a:prstGeom>
-          <a:noFill/>
-          <a:ln/>
-        </p:spPr>
-        <p:txBody>
-          <a:bodyPr wrap="square" lIns="0" tIns="0" rIns="0" bIns="0" rtlCol="0" anchor="ctr"/>
-          <a:lstStyle/>
+            <a:endParaRPr lang="en-US" sz="1200" dirty="0"/>
+          </a:p>
           <a:p>
             <a:pPr indent="0" marL="0">
               <a:lnSpc>
@@ -3309,138 +4552,18 @@
               <a:buNone/>
             </a:pPr>
             <a:r>
-              <a:rPr lang="en-US" sz="1150" dirty="0">
-                <a:solidFill>
-                  <a:srgbClr val="6B625E"/>
-                </a:solidFill>
-                <a:latin typeface="맑은 고딕" pitchFamily="34" charset="0"/>
-                <a:ea typeface="맑은 고딕" pitchFamily="34" charset="-122"/>
-                <a:cs typeface="맑은 고딕" pitchFamily="34" charset="-120"/>
-              </a:rPr>
-              <a:t>조건을 넣어 예상 출력 확인 · 시험 후 대조</a:t>
-            </a:r>
-            <a:endParaRPr lang="en-US" sz="1150" dirty="0"/>
-          </a:p>
-        </p:txBody>
-      </p:sp>
-      <p:sp>
-        <p:nvSpPr>
-          <p:cNvPr id="22" name="Shape 20"/>
-          <p:cNvSpPr/>
-          <p:nvPr/>
-        </p:nvSpPr>
-        <p:spPr>
-          <a:xfrm>
-            <a:off x="548640" y="5175504"/>
-            <a:ext cx="310896" cy="310896"/>
-          </a:xfrm>
-          <a:prstGeom prst="ellipse">
-            <a:avLst/>
-          </a:prstGeom>
-          <a:solidFill>
-            <a:srgbClr val="F47725"/>
-          </a:solidFill>
-          <a:ln/>
-        </p:spPr>
-      </p:sp>
-      <p:sp>
-        <p:nvSpPr>
-          <p:cNvPr id="23" name="Text 21"/>
-          <p:cNvSpPr/>
-          <p:nvPr/>
-        </p:nvSpPr>
-        <p:spPr>
-          <a:xfrm>
-            <a:off x="548640" y="5175504"/>
-            <a:ext cx="310896" cy="310896"/>
-          </a:xfrm>
-          <a:prstGeom prst="rect">
-            <a:avLst/>
-          </a:prstGeom>
-          <a:noFill/>
-          <a:ln/>
-        </p:spPr>
-        <p:txBody>
-          <a:bodyPr wrap="square" lIns="0" tIns="0" rIns="0" bIns="0" rtlCol="0" anchor="ctr"/>
-          <a:lstStyle/>
-          <a:p>
-            <a:pPr algn="ctr" indent="0" marL="0">
-              <a:buNone/>
-            </a:pPr>
-            <a:r>
-              <a:rPr lang="en-US" sz="1300" b="1" dirty="0">
-                <a:solidFill>
-                  <a:srgbClr val="FFFFFF"/>
-                </a:solidFill>
-                <a:latin typeface="맑은 고딕" pitchFamily="34" charset="0"/>
-                <a:ea typeface="맑은 고딕" pitchFamily="34" charset="-122"/>
-                <a:cs typeface="맑은 고딕" pitchFamily="34" charset="-120"/>
-              </a:rPr>
-              <a:t>5</a:t>
-            </a:r>
-            <a:endParaRPr lang="en-US" sz="1300" dirty="0"/>
-          </a:p>
-        </p:txBody>
-      </p:sp>
-      <p:sp>
-        <p:nvSpPr>
-          <p:cNvPr id="24" name="Text 22"/>
-          <p:cNvSpPr/>
-          <p:nvPr/>
-        </p:nvSpPr>
-        <p:spPr>
-          <a:xfrm>
-            <a:off x="987552" y="5102352"/>
-            <a:ext cx="4206240" cy="292608"/>
-          </a:xfrm>
-          <a:prstGeom prst="rect">
-            <a:avLst/>
-          </a:prstGeom>
-          <a:noFill/>
-          <a:ln/>
-        </p:spPr>
-        <p:txBody>
-          <a:bodyPr wrap="square" lIns="0" tIns="0" rIns="0" bIns="0" rtlCol="0" anchor="ctr"/>
-          <a:lstStyle/>
-          <a:p>
-            <a:pPr indent="0" marL="0">
-              <a:buNone/>
-            </a:pPr>
-            <a:r>
-              <a:rPr lang="en-US" sz="1400" b="1" dirty="0">
-                <a:solidFill>
-                  <a:srgbClr val="1F1A18"/>
-                </a:solidFill>
-                <a:latin typeface="맑은 고딕" pitchFamily="34" charset="0"/>
-                <a:ea typeface="맑은 고딕" pitchFamily="34" charset="-122"/>
-                <a:cs typeface="맑은 고딕" pitchFamily="34" charset="-120"/>
-              </a:rPr>
-              <a:t>출력곡선 비교</a:t>
-            </a:r>
-            <a:endParaRPr lang="en-US" sz="1400" dirty="0"/>
-          </a:p>
-        </p:txBody>
-      </p:sp>
-      <p:sp>
-        <p:nvSpPr>
-          <p:cNvPr id="25" name="Text 23"/>
-          <p:cNvSpPr/>
-          <p:nvPr/>
-        </p:nvSpPr>
-        <p:spPr>
-          <a:xfrm>
-            <a:off x="987552" y="5413248"/>
-            <a:ext cx="4297680" cy="457200"/>
-          </a:xfrm>
-          <a:prstGeom prst="rect">
-            <a:avLst/>
-          </a:prstGeom>
-          <a:noFill/>
-          <a:ln/>
-        </p:spPr>
-        <p:txBody>
-          <a:bodyPr wrap="square" lIns="0" tIns="0" rIns="0" bIns="0" rtlCol="0" anchor="ctr"/>
-          <a:lstStyle/>
+              <a:rPr lang="en-US" sz="1200" b="1" dirty="0">
+                <a:solidFill>
+                  <a:srgbClr val="EA002C"/>
+                </a:solidFill>
+                <a:latin typeface="맑은 고딕" pitchFamily="34" charset="0"/>
+                <a:ea typeface="맑은 고딕" pitchFamily="34" charset="-122"/>
+                <a:cs typeface="맑은 고딕" pitchFamily="34" charset="-120"/>
+              </a:rPr>
+              <a:t>2단  보정값</a:t>
+            </a:r>
+            <a:endParaRPr lang="en-US" sz="1200" dirty="0"/>
+          </a:p>
           <a:p>
             <a:pPr indent="0" marL="0">
               <a:lnSpc>
@@ -3449,7 +4572,7 @@
               <a:buNone/>
             </a:pPr>
             <a:r>
-              <a:rPr lang="en-US" sz="1150" dirty="0">
+              <a:rPr lang="en-US" sz="1100" dirty="0">
                 <a:solidFill>
                   <a:srgbClr val="6B625E"/>
                 </a:solidFill>
@@ -3457,26 +4580,114 @@
                 <a:ea typeface="맑은 고딕" pitchFamily="34" charset="-122"/>
                 <a:cs typeface="맑은 고딕" pitchFamily="34" charset="-120"/>
               </a:rPr>
-              <a:t>이론값과 보정 후 값을 그래프로 비교</a:t>
-            </a:r>
-            <a:endParaRPr lang="en-US" sz="1150" dirty="0"/>
-          </a:p>
-        </p:txBody>
-      </p:sp>
-      <p:sp>
-        <p:nvSpPr>
-          <p:cNvPr id="26" name="Shape 24"/>
-          <p:cNvSpPr/>
-          <p:nvPr/>
-        </p:nvSpPr>
-        <p:spPr>
-          <a:xfrm>
-            <a:off x="5532120" y="1170432"/>
-            <a:ext cx="6172200" cy="2395728"/>
+              <a:t>실제 시험 32건에서 배운 차이를 반영</a:t>
+            </a:r>
+            <a:endParaRPr lang="en-US" sz="1200" dirty="0"/>
+          </a:p>
+          <a:p>
+            <a:pPr indent="0" marL="0">
+              <a:lnSpc>
+                <a:spcPts val="1500"/>
+              </a:lnSpc>
+              <a:buNone/>
+            </a:pPr>
+            <a:endParaRPr lang="en-US" sz="1200" dirty="0"/>
+          </a:p>
+          <a:p>
+            <a:pPr indent="0" marL="0">
+              <a:lnSpc>
+                <a:spcPts val="1500"/>
+              </a:lnSpc>
+              <a:buNone/>
+            </a:pPr>
+            <a:r>
+              <a:rPr lang="en-US" sz="1250" b="1" dirty="0">
+                <a:solidFill>
+                  <a:srgbClr val="1F1A18"/>
+                </a:solidFill>
+                <a:latin typeface="맑은 고딕" pitchFamily="34" charset="0"/>
+                <a:ea typeface="맑은 고딕" pitchFamily="34" charset="-122"/>
+                <a:cs typeface="맑은 고딕" pitchFamily="34" charset="-120"/>
+              </a:rPr>
+              <a:t>신고값 = 이론값 + 보정값</a:t>
+            </a:r>
+            <a:endParaRPr lang="en-US" sz="1200" dirty="0"/>
+          </a:p>
+        </p:txBody>
+      </p:sp>
+      <p:sp>
+        <p:nvSpPr>
+          <p:cNvPr id="49" name="Shape 42"/>
+          <p:cNvSpPr/>
+          <p:nvPr/>
+        </p:nvSpPr>
+        <p:spPr>
+          <a:xfrm>
+            <a:off x="6291072" y="4453128"/>
+            <a:ext cx="237744" cy="237744"/>
+          </a:xfrm>
+          <a:prstGeom prst="ellipse">
+            <a:avLst/>
+          </a:prstGeom>
+          <a:solidFill>
+            <a:srgbClr val="8A7F7A"/>
+          </a:solidFill>
+          <a:ln/>
+        </p:spPr>
+      </p:sp>
+      <p:sp>
+        <p:nvSpPr>
+          <p:cNvPr id="50" name="Text 43"/>
+          <p:cNvSpPr/>
+          <p:nvPr/>
+        </p:nvSpPr>
+        <p:spPr>
+          <a:xfrm>
+            <a:off x="6656832" y="4407408"/>
+            <a:ext cx="4572000" cy="310896"/>
+          </a:xfrm>
+          <a:prstGeom prst="rect">
+            <a:avLst/>
+          </a:prstGeom>
+          <a:noFill/>
+          <a:ln/>
+        </p:spPr>
+        <p:txBody>
+          <a:bodyPr wrap="square" lIns="0" tIns="0" rIns="0" bIns="0" rtlCol="0" anchor="ctr"/>
+          <a:lstStyle/>
+          <a:p>
+            <a:pPr indent="0" marL="0">
+              <a:buNone/>
+            </a:pPr>
+            <a:r>
+              <a:rPr lang="en-US" sz="1350" b="1" dirty="0">
+                <a:solidFill>
+                  <a:srgbClr val="1F1A18"/>
+                </a:solidFill>
+                <a:latin typeface="맑은 고딕" pitchFamily="34" charset="0"/>
+                <a:ea typeface="맑은 고딕" pitchFamily="34" charset="-122"/>
+                <a:cs typeface="맑은 고딕" pitchFamily="34" charset="-120"/>
+              </a:rPr>
+              <a:t>정확도 · 검증</a:t>
+            </a:r>
+            <a:endParaRPr lang="en-US" sz="1350" dirty="0"/>
+          </a:p>
+        </p:txBody>
+      </p:sp>
+      <p:sp>
+        <p:nvSpPr>
+          <p:cNvPr id="51" name="Shape 44"/>
+          <p:cNvSpPr/>
+          <p:nvPr/>
+        </p:nvSpPr>
+        <p:spPr>
+          <a:xfrm>
+            <a:off x="6291072" y="4791456"/>
+            <a:ext cx="5394960" cy="1828800"/>
           </a:xfrm>
           <a:prstGeom prst="roundRect">
             <a:avLst>
-              <a:gd name="adj" fmla="val 2290"/>
+              <a:gd name="adj" fmla="val 3000"/>
             </a:avLst>
           </a:prstGeom>
           <a:solidFill>
@@ -3497,52 +4708,28 @@
           </a:effectLst>
         </p:spPr>
       </p:sp>
-      <p:pic>
-        <p:nvPicPr>
-          <p:cNvPr id="27" name="Image 0" descr="/tmp/claude-0/-home-user-Test/9494b856-101a-5688-a4a1-6c122cea1ac2/scratchpad/s_run.png">    </p:cNvPr>
-          <p:cNvPicPr>
-            <a:picLocks noChangeAspect="1"/>
-          </p:cNvPicPr>
-          <p:nvPr/>
-        </p:nvPicPr>
-        <p:blipFill>
-          <a:blip r:embed="rId1"/>
-          <a:stretch>
-            <a:fillRect/>
-          </a:stretch>
-        </p:blipFill>
-        <p:spPr>
-          <a:xfrm>
-            <a:off x="5669280" y="1298448"/>
-            <a:ext cx="5897880" cy="2139696"/>
-          </a:xfrm>
-          <a:prstGeom prst="rect">
-            <a:avLst/>
-          </a:prstGeom>
-        </p:spPr>
-      </p:pic>
-      <p:sp>
-        <p:nvSpPr>
-          <p:cNvPr id="28" name="Text 25"/>
-          <p:cNvSpPr/>
-          <p:nvPr/>
-        </p:nvSpPr>
-        <p:spPr>
-          <a:xfrm>
-            <a:off x="5532120" y="3593592"/>
-            <a:ext cx="6172200" cy="237744"/>
-          </a:xfrm>
-          <a:prstGeom prst="rect">
-            <a:avLst/>
-          </a:prstGeom>
-          <a:noFill/>
-          <a:ln/>
-        </p:spPr>
-        <p:txBody>
-          <a:bodyPr wrap="square" lIns="0" tIns="0" rIns="0" bIns="0" rtlCol="0" anchor="ctr"/>
-          <a:lstStyle/>
-          <a:p>
-            <a:pPr algn="ctr" indent="0" marL="0">
+      <p:sp>
+        <p:nvSpPr>
+          <p:cNvPr id="52" name="Text 45"/>
+          <p:cNvSpPr/>
+          <p:nvPr/>
+        </p:nvSpPr>
+        <p:spPr>
+          <a:xfrm>
+            <a:off x="6583680" y="4974336"/>
+            <a:ext cx="3200400" cy="292608"/>
+          </a:xfrm>
+          <a:prstGeom prst="rect">
+            <a:avLst/>
+          </a:prstGeom>
+          <a:noFill/>
+          <a:ln/>
+        </p:spPr>
+        <p:txBody>
+          <a:bodyPr wrap="square" lIns="0" tIns="0" rIns="0" bIns="0" rtlCol="0" anchor="ctr"/>
+          <a:lstStyle/>
+          <a:p>
+            <a:pPr indent="0" marL="0">
               <a:buNone/>
             </a:pPr>
             <a:r>
@@ -3554,7 +4741,7 @@
                 <a:ea typeface="맑은 고딕" pitchFamily="34" charset="-122"/>
                 <a:cs typeface="맑은 고딕" pitchFamily="34" charset="-120"/>
               </a:rPr>
-              <a:t>① 공급가능용량 산정 화면</a:t>
+              <a:t>기존 엑셀과 계산 일치</a:t>
             </a:r>
             <a:endParaRPr lang="en-US" sz="1050" dirty="0"/>
           </a:p>
@@ -3562,84 +4749,65 @@
       </p:sp>
       <p:sp>
         <p:nvSpPr>
-          <p:cNvPr id="29" name="Shape 26"/>
-          <p:cNvSpPr/>
-          <p:nvPr/>
-        </p:nvSpPr>
-        <p:spPr>
-          <a:xfrm>
-            <a:off x="5532120" y="3931920"/>
-            <a:ext cx="6172200" cy="2395728"/>
-          </a:xfrm>
-          <a:prstGeom prst="roundRect">
-            <a:avLst>
-              <a:gd name="adj" fmla="val 2290"/>
-            </a:avLst>
-          </a:prstGeom>
-          <a:solidFill>
-            <a:srgbClr val="FFFFFF"/>
-          </a:solidFill>
-          <a:ln w="12700">
-            <a:solidFill>
-              <a:srgbClr val="E8E0DC"/>
-            </a:solidFill>
-            <a:prstDash val="solid"/>
-          </a:ln>
-          <a:effectLst>
-            <a:outerShdw sx="100000" sy="100000" kx="0" ky="0" algn="bl" rotWithShape="0" blurRad="101600" dist="12700" dir="5400000">
-              <a:srgbClr val="D8CFCA">
-                <a:alpha val="50000"/>
-              </a:srgbClr>
-            </a:outerShdw>
-          </a:effectLst>
-        </p:spPr>
-      </p:sp>
-      <p:pic>
-        <p:nvPicPr>
-          <p:cNvPr id="30" name="Image 1" descr="/tmp/claude-0/-home-user-Test/9494b856-101a-5688-a4a1-6c122cea1ac2/scratchpad/s_chart.png">    </p:cNvPr>
-          <p:cNvPicPr>
-            <a:picLocks noChangeAspect="1"/>
-          </p:cNvPicPr>
-          <p:nvPr/>
-        </p:nvPicPr>
-        <p:blipFill>
-          <a:blip r:embed="rId2"/>
-          <a:stretch>
-            <a:fillRect/>
-          </a:stretch>
-        </p:blipFill>
-        <p:spPr>
-          <a:xfrm>
-            <a:off x="5669280" y="4059936"/>
-            <a:ext cx="5897880" cy="2139696"/>
-          </a:xfrm>
-          <a:prstGeom prst="rect">
-            <a:avLst/>
-          </a:prstGeom>
-        </p:spPr>
-      </p:pic>
-      <p:sp>
-        <p:nvSpPr>
-          <p:cNvPr id="31" name="Text 27"/>
-          <p:cNvSpPr/>
-          <p:nvPr/>
-        </p:nvSpPr>
-        <p:spPr>
-          <a:xfrm>
-            <a:off x="5532120" y="6355080"/>
-            <a:ext cx="6172200" cy="237744"/>
-          </a:xfrm>
-          <a:prstGeom prst="rect">
-            <a:avLst/>
-          </a:prstGeom>
-          <a:noFill/>
-          <a:ln/>
-        </p:spPr>
-        <p:txBody>
-          <a:bodyPr wrap="square" lIns="0" tIns="0" rIns="0" bIns="0" rtlCol="0" anchor="ctr"/>
-          <a:lstStyle/>
-          <a:p>
-            <a:pPr algn="ctr" indent="0" marL="0">
+          <p:cNvPr id="53" name="Text 46"/>
+          <p:cNvSpPr/>
+          <p:nvPr/>
+        </p:nvSpPr>
+        <p:spPr>
+          <a:xfrm>
+            <a:off x="9784080" y="4974336"/>
+            <a:ext cx="1691640" cy="292608"/>
+          </a:xfrm>
+          <a:prstGeom prst="rect">
+            <a:avLst/>
+          </a:prstGeom>
+          <a:noFill/>
+          <a:ln/>
+        </p:spPr>
+        <p:txBody>
+          <a:bodyPr wrap="square" lIns="0" tIns="0" rIns="0" bIns="0" rtlCol="0" anchor="ctr"/>
+          <a:lstStyle/>
+          <a:p>
+            <a:pPr algn="r" indent="0" marL="0">
+              <a:buNone/>
+            </a:pPr>
+            <a:r>
+              <a:rPr lang="en-US" sz="1100" b="1" dirty="0">
+                <a:solidFill>
+                  <a:srgbClr val="EA002C"/>
+                </a:solidFill>
+                <a:latin typeface="맑은 고딕" pitchFamily="34" charset="0"/>
+                <a:ea typeface="맑은 고딕" pitchFamily="34" charset="-122"/>
+                <a:cs typeface="맑은 고딕" pitchFamily="34" charset="-120"/>
+              </a:rPr>
+              <a:t>최대 오차 0.18 MW</a:t>
+            </a:r>
+            <a:endParaRPr lang="en-US" sz="1100" dirty="0"/>
+          </a:p>
+        </p:txBody>
+      </p:sp>
+      <p:sp>
+        <p:nvSpPr>
+          <p:cNvPr id="54" name="Text 47"/>
+          <p:cNvSpPr/>
+          <p:nvPr/>
+        </p:nvSpPr>
+        <p:spPr>
+          <a:xfrm>
+            <a:off x="6583680" y="5321808"/>
+            <a:ext cx="3200400" cy="292608"/>
+          </a:xfrm>
+          <a:prstGeom prst="rect">
+            <a:avLst/>
+          </a:prstGeom>
+          <a:noFill/>
+          <a:ln/>
+        </p:spPr>
+        <p:txBody>
+          <a:bodyPr wrap="square" lIns="0" tIns="0" rIns="0" bIns="0" rtlCol="0" anchor="ctr"/>
+          <a:lstStyle/>
+          <a:p>
+            <a:pPr indent="0" marL="0">
               <a:buNone/>
             </a:pPr>
             <a:r>
@@ -3651,7 +4819,7 @@
                 <a:ea typeface="맑은 고딕" pitchFamily="34" charset="-122"/>
                 <a:cs typeface="맑은 고딕" pitchFamily="34" charset="-120"/>
               </a:rPr>
-              <a:t>⑤ 출력곡선 비교 — 이론값(회색) vs 보정 후(빨강)</a:t>
+              <a:t>예측 오차 (시험 32건 교차검증)</a:t>
             </a:r>
             <a:endParaRPr lang="en-US" sz="1050" dirty="0"/>
           </a:p>
@@ -3659,48 +4827,53 @@
       </p:sp>
       <p:sp>
         <p:nvSpPr>
-          <p:cNvPr id="32" name="Shape 28"/>
-          <p:cNvSpPr/>
-          <p:nvPr/>
-        </p:nvSpPr>
-        <p:spPr>
-          <a:xfrm>
-            <a:off x="502920" y="6053328"/>
-            <a:ext cx="4800600" cy="566928"/>
-          </a:xfrm>
-          <a:prstGeom prst="roundRect">
-            <a:avLst>
-              <a:gd name="adj" fmla="val 9677"/>
-            </a:avLst>
-          </a:prstGeom>
-          <a:solidFill>
-            <a:srgbClr val="FFF4EE"/>
-          </a:solidFill>
-          <a:ln w="12700">
-            <a:solidFill>
-              <a:srgbClr val="E8E0DC"/>
-            </a:solidFill>
-            <a:prstDash val="solid"/>
-          </a:ln>
-          <a:effectLst>
-            <a:outerShdw sx="100000" sy="100000" kx="0" ky="0" algn="bl" rotWithShape="0" blurRad="101600" dist="12700" dir="5400000">
-              <a:srgbClr val="D8CFCA">
-                <a:alpha val="50000"/>
-              </a:srgbClr>
-            </a:outerShdw>
-          </a:effectLst>
-        </p:spPr>
-      </p:sp>
-      <p:sp>
-        <p:nvSpPr>
-          <p:cNvPr id="33" name="Text 29"/>
-          <p:cNvSpPr/>
-          <p:nvPr/>
-        </p:nvSpPr>
-        <p:spPr>
-          <a:xfrm>
-            <a:off x="731520" y="6144768"/>
-            <a:ext cx="4480560" cy="384048"/>
+          <p:cNvPr id="55" name="Text 48"/>
+          <p:cNvSpPr/>
+          <p:nvPr/>
+        </p:nvSpPr>
+        <p:spPr>
+          <a:xfrm>
+            <a:off x="9784080" y="5321808"/>
+            <a:ext cx="1691640" cy="292608"/>
+          </a:xfrm>
+          <a:prstGeom prst="rect">
+            <a:avLst/>
+          </a:prstGeom>
+          <a:noFill/>
+          <a:ln/>
+        </p:spPr>
+        <p:txBody>
+          <a:bodyPr wrap="square" lIns="0" tIns="0" rIns="0" bIns="0" rtlCol="0" anchor="ctr"/>
+          <a:lstStyle/>
+          <a:p>
+            <a:pPr algn="r" indent="0" marL="0">
+              <a:buNone/>
+            </a:pPr>
+            <a:r>
+              <a:rPr lang="en-US" sz="1100" b="1" dirty="0">
+                <a:solidFill>
+                  <a:srgbClr val="EA002C"/>
+                </a:solidFill>
+                <a:latin typeface="맑은 고딕" pitchFamily="34" charset="0"/>
+                <a:ea typeface="맑은 고딕" pitchFamily="34" charset="-122"/>
+                <a:cs typeface="맑은 고딕" pitchFamily="34" charset="-120"/>
+              </a:rPr>
+              <a:t>1.42 → 1.24 MW</a:t>
+            </a:r>
+            <a:endParaRPr lang="en-US" sz="1100" dirty="0"/>
+          </a:p>
+        </p:txBody>
+      </p:sp>
+      <p:sp>
+        <p:nvSpPr>
+          <p:cNvPr id="56" name="Text 49"/>
+          <p:cNvSpPr/>
+          <p:nvPr/>
+        </p:nvSpPr>
+        <p:spPr>
+          <a:xfrm>
+            <a:off x="6583680" y="5669280"/>
+            <a:ext cx="3200400" cy="292608"/>
           </a:xfrm>
           <a:prstGeom prst="rect">
             <a:avLst/>
@@ -3716,17 +4889,173 @@
               <a:buNone/>
             </a:pPr>
             <a:r>
-              <a:rPr lang="en-US" sz="1150" b="1" dirty="0">
-                <a:solidFill>
-                  <a:srgbClr val="EA002C"/>
-                </a:solidFill>
-                <a:latin typeface="맑은 고딕" pitchFamily="34" charset="0"/>
-                <a:ea typeface="맑은 고딕" pitchFamily="34" charset="-122"/>
-                <a:cs typeface="맑은 고딕" pitchFamily="34" charset="-120"/>
-              </a:rPr>
-              <a:t>계산 방식 : 설계 이론값 + 실제 시험으로 배운 보정값</a:t>
-            </a:r>
-            <a:endParaRPr lang="en-US" sz="1150" dirty="0"/>
+              <a:rPr lang="en-US" sz="1050" dirty="0">
+                <a:solidFill>
+                  <a:srgbClr val="6B625E"/>
+                </a:solidFill>
+                <a:latin typeface="맑은 고딕" pitchFamily="34" charset="0"/>
+                <a:ea typeface="맑은 고딕" pitchFamily="34" charset="-122"/>
+                <a:cs typeface="맑은 고딕" pitchFamily="34" charset="-120"/>
+              </a:rPr>
+              <a:t>데이터 취득값 일치 확인</a:t>
+            </a:r>
+            <a:endParaRPr lang="en-US" sz="1050" dirty="0"/>
+          </a:p>
+        </p:txBody>
+      </p:sp>
+      <p:sp>
+        <p:nvSpPr>
+          <p:cNvPr id="57" name="Text 50"/>
+          <p:cNvSpPr/>
+          <p:nvPr/>
+        </p:nvSpPr>
+        <p:spPr>
+          <a:xfrm>
+            <a:off x="9784080" y="5669280"/>
+            <a:ext cx="1691640" cy="292608"/>
+          </a:xfrm>
+          <a:prstGeom prst="rect">
+            <a:avLst/>
+          </a:prstGeom>
+          <a:noFill/>
+          <a:ln/>
+        </p:spPr>
+        <p:txBody>
+          <a:bodyPr wrap="square" lIns="0" tIns="0" rIns="0" bIns="0" rtlCol="0" anchor="ctr"/>
+          <a:lstStyle/>
+          <a:p>
+            <a:pPr algn="r" indent="0" marL="0">
+              <a:buNone/>
+            </a:pPr>
+            <a:r>
+              <a:rPr lang="en-US" sz="1100" b="1" dirty="0">
+                <a:solidFill>
+                  <a:srgbClr val="1F1A18"/>
+                </a:solidFill>
+                <a:latin typeface="맑은 고딕" pitchFamily="34" charset="0"/>
+                <a:ea typeface="맑은 고딕" pitchFamily="34" charset="-122"/>
+                <a:cs typeface="맑은 고딕" pitchFamily="34" charset="-120"/>
+              </a:rPr>
+              <a:t>24.85262 = 24.8526</a:t>
+            </a:r>
+            <a:endParaRPr lang="en-US" sz="1100" dirty="0"/>
+          </a:p>
+        </p:txBody>
+      </p:sp>
+      <p:sp>
+        <p:nvSpPr>
+          <p:cNvPr id="58" name="Text 51"/>
+          <p:cNvSpPr/>
+          <p:nvPr/>
+        </p:nvSpPr>
+        <p:spPr>
+          <a:xfrm>
+            <a:off x="6583680" y="6016752"/>
+            <a:ext cx="3200400" cy="292608"/>
+          </a:xfrm>
+          <a:prstGeom prst="rect">
+            <a:avLst/>
+          </a:prstGeom>
+          <a:noFill/>
+          <a:ln/>
+        </p:spPr>
+        <p:txBody>
+          <a:bodyPr wrap="square" lIns="0" tIns="0" rIns="0" bIns="0" rtlCol="0" anchor="ctr"/>
+          <a:lstStyle/>
+          <a:p>
+            <a:pPr indent="0" marL="0">
+              <a:buNone/>
+            </a:pPr>
+            <a:r>
+              <a:rPr lang="en-US" sz="1050" dirty="0">
+                <a:solidFill>
+                  <a:srgbClr val="6B625E"/>
+                </a:solidFill>
+                <a:latin typeface="맑은 고딕" pitchFamily="34" charset="0"/>
+                <a:ea typeface="맑은 고딕" pitchFamily="34" charset="-122"/>
+                <a:cs typeface="맑은 고딕" pitchFamily="34" charset="-120"/>
+              </a:rPr>
+              <a:t>계산 검증 항목 자동 점검</a:t>
+            </a:r>
+            <a:endParaRPr lang="en-US" sz="1050" dirty="0"/>
+          </a:p>
+        </p:txBody>
+      </p:sp>
+      <p:sp>
+        <p:nvSpPr>
+          <p:cNvPr id="59" name="Text 52"/>
+          <p:cNvSpPr/>
+          <p:nvPr/>
+        </p:nvSpPr>
+        <p:spPr>
+          <a:xfrm>
+            <a:off x="9784080" y="6016752"/>
+            <a:ext cx="1691640" cy="292608"/>
+          </a:xfrm>
+          <a:prstGeom prst="rect">
+            <a:avLst/>
+          </a:prstGeom>
+          <a:noFill/>
+          <a:ln/>
+        </p:spPr>
+        <p:txBody>
+          <a:bodyPr wrap="square" lIns="0" tIns="0" rIns="0" bIns="0" rtlCol="0" anchor="ctr"/>
+          <a:lstStyle/>
+          <a:p>
+            <a:pPr algn="r" indent="0" marL="0">
+              <a:buNone/>
+            </a:pPr>
+            <a:r>
+              <a:rPr lang="en-US" sz="1100" b="1" dirty="0">
+                <a:solidFill>
+                  <a:srgbClr val="1F1A18"/>
+                </a:solidFill>
+                <a:latin typeface="맑은 고딕" pitchFamily="34" charset="0"/>
+                <a:ea typeface="맑은 고딕" pitchFamily="34" charset="-122"/>
+                <a:cs typeface="맑은 고딕" pitchFamily="34" charset="-120"/>
+              </a:rPr>
+              <a:t>150개 / 수정 시마다</a:t>
+            </a:r>
+            <a:endParaRPr lang="en-US" sz="1100" dirty="0"/>
+          </a:p>
+        </p:txBody>
+      </p:sp>
+      <p:sp>
+        <p:nvSpPr>
+          <p:cNvPr id="60" name="Text 53"/>
+          <p:cNvSpPr/>
+          <p:nvPr/>
+        </p:nvSpPr>
+        <p:spPr>
+          <a:xfrm>
+            <a:off x="6583680" y="6345936"/>
+            <a:ext cx="4892040" cy="237744"/>
+          </a:xfrm>
+          <a:prstGeom prst="rect">
+            <a:avLst/>
+          </a:prstGeom>
+          <a:noFill/>
+          <a:ln/>
+        </p:spPr>
+        <p:txBody>
+          <a:bodyPr wrap="square" lIns="0" tIns="0" rIns="0" bIns="0" rtlCol="0" anchor="ctr"/>
+          <a:lstStyle/>
+          <a:p>
+            <a:pPr indent="0" marL="0">
+              <a:buNone/>
+            </a:pPr>
+            <a:r>
+              <a:rPr lang="en-US" sz="900" dirty="0">
+                <a:solidFill>
+                  <a:srgbClr val="9A908C"/>
+                </a:solidFill>
+                <a:latin typeface="맑은 고딕" pitchFamily="34" charset="0"/>
+                <a:ea typeface="맑은 고딕" pitchFamily="34" charset="-122"/>
+                <a:cs typeface="맑은 고딕" pitchFamily="34" charset="-120"/>
+              </a:rPr>
+              <a:t>※ 계산식이 바뀌면 150개 항목을 자동으로 다시 검사 — 오류를 사전에 차단</a:t>
+            </a:r>
+            <a:endParaRPr lang="en-US" sz="900" dirty="0"/>
           </a:p>
         </p:txBody>
       </p:sp>
@@ -3790,20 +5119,20 @@
         </p:nvSpPr>
         <p:spPr>
           <a:xfrm>
-            <a:off x="411480" y="164592"/>
-            <a:ext cx="640080" cy="566928"/>
-          </a:xfrm>
-          <a:prstGeom prst="rect">
-            <a:avLst/>
-          </a:prstGeom>
-          <a:noFill/>
-          <a:ln/>
-        </p:spPr>
-        <p:txBody>
-          <a:bodyPr wrap="square" lIns="0" tIns="0" rIns="0" bIns="0" rtlCol="0" anchor="ctr"/>
-          <a:lstStyle/>
-          <a:p>
-            <a:pPr algn="l" indent="0" marL="0">
+            <a:off x="411480" y="182880"/>
+            <a:ext cx="640080" cy="548640"/>
+          </a:xfrm>
+          <a:prstGeom prst="rect">
+            <a:avLst/>
+          </a:prstGeom>
+          <a:noFill/>
+          <a:ln/>
+        </p:spPr>
+        <p:txBody>
+          <a:bodyPr wrap="square" lIns="0" tIns="0" rIns="0" bIns="0" rtlCol="0" anchor="ctr"/>
+          <a:lstStyle/>
+          <a:p>
+            <a:pPr indent="0" marL="0">
               <a:buNone/>
             </a:pPr>
             <a:r>
@@ -3829,8 +5158,8 @@
         </p:nvSpPr>
         <p:spPr>
           <a:xfrm>
-            <a:off x="1051560" y="164592"/>
-            <a:ext cx="5120640" cy="566928"/>
+            <a:off x="1051560" y="182880"/>
+            <a:ext cx="6766560" cy="548640"/>
           </a:xfrm>
           <a:prstGeom prst="rect">
             <a:avLst/>
@@ -3868,8 +5197,8 @@
         </p:nvSpPr>
         <p:spPr>
           <a:xfrm>
-            <a:off x="6263640" y="164592"/>
-            <a:ext cx="5532120" cy="566928"/>
+            <a:off x="7955280" y="155448"/>
+            <a:ext cx="3840480" cy="292608"/>
           </a:xfrm>
           <a:prstGeom prst="rect">
             <a:avLst/>
@@ -3885,7 +5214,7 @@
               <a:buNone/>
             </a:pPr>
             <a:r>
-              <a:rPr lang="en-US" sz="1250" dirty="0">
+              <a:rPr lang="en-US" sz="1200" dirty="0">
                 <a:solidFill>
                   <a:srgbClr val="C9BFBB"/>
                 </a:solidFill>
@@ -3893,9 +5222,9 @@
                 <a:ea typeface="맑은 고딕" pitchFamily="34" charset="-122"/>
                 <a:cs typeface="맑은 고딕" pitchFamily="34" charset="-120"/>
               </a:rPr>
-              <a:t>2026년 8월 기준 · 발전운영팀</a:t>
-            </a:r>
-            <a:endParaRPr lang="en-US" sz="1250" dirty="0"/>
+              <a:t>소속 : 발전운영팀</a:t>
+            </a:r>
+            <a:endParaRPr lang="en-US" sz="1200" dirty="0"/>
           </a:p>
         </p:txBody>
       </p:sp>
@@ -3907,8 +5236,67 @@
         </p:nvSpPr>
         <p:spPr>
           <a:xfrm>
-            <a:off x="502920" y="1078992"/>
-            <a:ext cx="3657600" cy="256032"/>
+            <a:off x="7955280" y="457200"/>
+            <a:ext cx="3840480" cy="292608"/>
+          </a:xfrm>
+          <a:prstGeom prst="rect">
+            <a:avLst/>
+          </a:prstGeom>
+          <a:noFill/>
+          <a:ln/>
+        </p:spPr>
+        <p:txBody>
+          <a:bodyPr wrap="square" lIns="0" tIns="0" rIns="0" bIns="0" rtlCol="0" anchor="ctr"/>
+          <a:lstStyle/>
+          <a:p>
+            <a:pPr algn="r" indent="0" marL="0">
+              <a:buNone/>
+            </a:pPr>
+            <a:r>
+              <a:rPr lang="en-US" sz="1200" b="1" dirty="0">
+                <a:solidFill>
+                  <a:srgbClr val="FFFFFF"/>
+                </a:solidFill>
+                <a:latin typeface="맑은 고딕" pitchFamily="34" charset="0"/>
+                <a:ea typeface="맑은 고딕" pitchFamily="34" charset="-122"/>
+                <a:cs typeface="맑은 고딕" pitchFamily="34" charset="-120"/>
+              </a:rPr>
+              <a:t>담당자 : ○○○  ·  2026. 8월</a:t>
+            </a:r>
+            <a:endParaRPr lang="en-US" sz="1200" dirty="0"/>
+          </a:p>
+        </p:txBody>
+      </p:sp>
+      <p:sp>
+        <p:nvSpPr>
+          <p:cNvPr id="7" name="Shape 5"/>
+          <p:cNvSpPr/>
+          <p:nvPr/>
+        </p:nvSpPr>
+        <p:spPr>
+          <a:xfrm>
+            <a:off x="502920" y="1069848"/>
+            <a:ext cx="237744" cy="237744"/>
+          </a:xfrm>
+          <a:prstGeom prst="ellipse">
+            <a:avLst/>
+          </a:prstGeom>
+          <a:solidFill>
+            <a:srgbClr val="EA002C"/>
+          </a:solidFill>
+          <a:ln/>
+        </p:spPr>
+      </p:sp>
+      <p:sp>
+        <p:nvSpPr>
+          <p:cNvPr id="8" name="Text 6"/>
+          <p:cNvSpPr/>
+          <p:nvPr/>
+        </p:nvSpPr>
+        <p:spPr>
+          <a:xfrm>
+            <a:off x="868680" y="1024128"/>
+            <a:ext cx="4572000" cy="310896"/>
           </a:xfrm>
           <a:prstGeom prst="rect">
             <a:avLst/>
@@ -3924,7 +5312,7 @@
               <a:buNone/>
             </a:pPr>
             <a:r>
-              <a:rPr lang="en-US" sz="1400" b="1" dirty="0">
+              <a:rPr lang="en-US" sz="1350" b="1" dirty="0">
                 <a:solidFill>
                   <a:srgbClr val="1F1A18"/>
                 </a:solidFill>
@@ -3934,19 +5322,58 @@
               </a:rPr>
               <a:t>진행 현황</a:t>
             </a:r>
-            <a:endParaRPr lang="en-US" sz="1400" dirty="0"/>
-          </a:p>
-        </p:txBody>
-      </p:sp>
-      <p:sp>
-        <p:nvSpPr>
-          <p:cNvPr id="7" name="Shape 5"/>
-          <p:cNvSpPr/>
-          <p:nvPr/>
-        </p:nvSpPr>
-        <p:spPr>
-          <a:xfrm>
-            <a:off x="777240" y="2121408"/>
+            <a:endParaRPr lang="en-US" sz="1350" dirty="0"/>
+          </a:p>
+        </p:txBody>
+      </p:sp>
+      <p:sp>
+        <p:nvSpPr>
+          <p:cNvPr id="9" name="Text 7"/>
+          <p:cNvSpPr/>
+          <p:nvPr/>
+        </p:nvSpPr>
+        <p:spPr>
+          <a:xfrm>
+            <a:off x="5532120" y="1024128"/>
+            <a:ext cx="6126480" cy="310896"/>
+          </a:xfrm>
+          <a:prstGeom prst="rect">
+            <a:avLst/>
+          </a:prstGeom>
+          <a:noFill/>
+          <a:ln/>
+        </p:spPr>
+        <p:txBody>
+          <a:bodyPr wrap="square" lIns="0" tIns="0" rIns="0" bIns="0" rtlCol="0" anchor="ctr"/>
+          <a:lstStyle/>
+          <a:p>
+            <a:pPr algn="r" indent="0" marL="0">
+              <a:buNone/>
+            </a:pPr>
+            <a:r>
+              <a:rPr lang="en-US" sz="1000" dirty="0">
+                <a:solidFill>
+                  <a:srgbClr val="9A908C"/>
+                </a:solidFill>
+                <a:latin typeface="맑은 고딕" pitchFamily="34" charset="0"/>
+                <a:ea typeface="맑은 고딕" pitchFamily="34" charset="-122"/>
+                <a:cs typeface="맑은 고딕" pitchFamily="34" charset="-120"/>
+              </a:rPr>
+              <a:t>1차 개발 완료 · 현재 시운전 단계</a:t>
+            </a:r>
+            <a:endParaRPr lang="en-US" sz="1000" dirty="0"/>
+          </a:p>
+        </p:txBody>
+      </p:sp>
+      <p:sp>
+        <p:nvSpPr>
+          <p:cNvPr id="10" name="Shape 8"/>
+          <p:cNvSpPr/>
+          <p:nvPr/>
+        </p:nvSpPr>
+        <p:spPr>
+          <a:xfrm>
+            <a:off x="777240" y="2212848"/>
             <a:ext cx="8869680" cy="0"/>
           </a:xfrm>
           <a:prstGeom prst="line">
@@ -3963,14 +5390,14 @@
       </p:sp>
       <p:sp>
         <p:nvSpPr>
-          <p:cNvPr id="8" name="Shape 6"/>
-          <p:cNvSpPr/>
-          <p:nvPr/>
-        </p:nvSpPr>
-        <p:spPr>
-          <a:xfrm>
-            <a:off x="777240" y="2121408"/>
-            <a:ext cx="6903720" cy="0"/>
+          <p:cNvPr id="11" name="Shape 9"/>
+          <p:cNvSpPr/>
+          <p:nvPr/>
+        </p:nvSpPr>
+        <p:spPr>
+          <a:xfrm>
+            <a:off x="777240" y="2212848"/>
+            <a:ext cx="7095744" cy="0"/>
           </a:xfrm>
           <a:prstGeom prst="line">
             <a:avLst/>
@@ -3986,13 +5413,91 @@
       </p:sp>
       <p:sp>
         <p:nvSpPr>
-          <p:cNvPr id="9" name="Shape 7"/>
-          <p:cNvSpPr/>
-          <p:nvPr/>
-        </p:nvSpPr>
-        <p:spPr>
-          <a:xfrm>
-            <a:off x="630936" y="1975104"/>
+          <p:cNvPr id="12" name="Text 10"/>
+          <p:cNvSpPr/>
+          <p:nvPr/>
+        </p:nvSpPr>
+        <p:spPr>
+          <a:xfrm>
+            <a:off x="137160" y="1371600"/>
+            <a:ext cx="1280160" cy="237744"/>
+          </a:xfrm>
+          <a:prstGeom prst="rect">
+            <a:avLst/>
+          </a:prstGeom>
+          <a:noFill/>
+          <a:ln/>
+        </p:spPr>
+        <p:txBody>
+          <a:bodyPr wrap="square" lIns="0" tIns="0" rIns="0" bIns="0" rtlCol="0" anchor="ctr"/>
+          <a:lstStyle/>
+          <a:p>
+            <a:pPr algn="ctr" indent="0" marL="0">
+              <a:buNone/>
+            </a:pPr>
+            <a:r>
+              <a:rPr lang="en-US" sz="1100" b="1" dirty="0">
+                <a:solidFill>
+                  <a:srgbClr val="1F1A18"/>
+                </a:solidFill>
+                <a:latin typeface="맑은 고딕" pitchFamily="34" charset="0"/>
+                <a:ea typeface="맑은 고딕" pitchFamily="34" charset="-122"/>
+                <a:cs typeface="맑은 고딕" pitchFamily="34" charset="-120"/>
+              </a:rPr>
+              <a:t>'26.6월</a:t>
+            </a:r>
+            <a:endParaRPr lang="en-US" sz="1100" dirty="0"/>
+          </a:p>
+        </p:txBody>
+      </p:sp>
+      <p:sp>
+        <p:nvSpPr>
+          <p:cNvPr id="13" name="Text 11"/>
+          <p:cNvSpPr/>
+          <p:nvPr/>
+        </p:nvSpPr>
+        <p:spPr>
+          <a:xfrm>
+            <a:off x="137160" y="1645920"/>
+            <a:ext cx="1280160" cy="219456"/>
+          </a:xfrm>
+          <a:prstGeom prst="rect">
+            <a:avLst/>
+          </a:prstGeom>
+          <a:noFill/>
+          <a:ln/>
+        </p:spPr>
+        <p:txBody>
+          <a:bodyPr wrap="square" lIns="0" tIns="0" rIns="0" bIns="0" rtlCol="0" anchor="ctr"/>
+          <a:lstStyle/>
+          <a:p>
+            <a:pPr algn="ctr" indent="0" marL="0">
+              <a:buNone/>
+            </a:pPr>
+            <a:r>
+              <a:rPr lang="en-US" sz="950" b="1" dirty="0">
+                <a:solidFill>
+                  <a:srgbClr val="EA002C"/>
+                </a:solidFill>
+                <a:latin typeface="맑은 고딕" pitchFamily="34" charset="0"/>
+                <a:ea typeface="맑은 고딕" pitchFamily="34" charset="-122"/>
+                <a:cs typeface="맑은 고딕" pitchFamily="34" charset="-120"/>
+              </a:rPr>
+              <a:t>완료</a:t>
+            </a:r>
+            <a:endParaRPr lang="en-US" sz="950" dirty="0"/>
+          </a:p>
+        </p:txBody>
+      </p:sp>
+      <p:sp>
+        <p:nvSpPr>
+          <p:cNvPr id="14" name="Shape 12"/>
+          <p:cNvSpPr/>
+          <p:nvPr/>
+        </p:nvSpPr>
+        <p:spPr>
+          <a:xfrm>
+            <a:off x="630936" y="2066544"/>
             <a:ext cx="292608" cy="292608"/>
           </a:xfrm>
           <a:prstGeom prst="ellipse">
@@ -4011,14 +5516,14 @@
       </p:sp>
       <p:sp>
         <p:nvSpPr>
-          <p:cNvPr id="10" name="Text 8"/>
-          <p:cNvSpPr/>
-          <p:nvPr/>
-        </p:nvSpPr>
-        <p:spPr>
-          <a:xfrm>
-            <a:off x="210312" y="1408176"/>
-            <a:ext cx="1133856" cy="237744"/>
+          <p:cNvPr id="15" name="Text 13"/>
+          <p:cNvSpPr/>
+          <p:nvPr/>
+        </p:nvSpPr>
+        <p:spPr>
+          <a:xfrm>
+            <a:off x="-64008" y="2450592"/>
+            <a:ext cx="1682496" cy="274320"/>
           </a:xfrm>
           <a:prstGeom prst="rect">
             <a:avLst/>
@@ -4034,45 +5539,6 @@
               <a:buNone/>
             </a:pPr>
             <a:r>
-              <a:rPr lang="en-US" sz="950" b="1" dirty="0">
-                <a:solidFill>
-                  <a:srgbClr val="EA002C"/>
-                </a:solidFill>
-                <a:latin typeface="맑은 고딕" pitchFamily="34" charset="0"/>
-                <a:ea typeface="맑은 고딕" pitchFamily="34" charset="-122"/>
-                <a:cs typeface="맑은 고딕" pitchFamily="34" charset="-120"/>
-              </a:rPr>
-              <a:t>완료</a:t>
-            </a:r>
-            <a:endParaRPr lang="en-US" sz="950" dirty="0"/>
-          </a:p>
-        </p:txBody>
-      </p:sp>
-      <p:sp>
-        <p:nvSpPr>
-          <p:cNvPr id="11" name="Text 9"/>
-          <p:cNvSpPr/>
-          <p:nvPr/>
-        </p:nvSpPr>
-        <p:spPr>
-          <a:xfrm>
-            <a:off x="-45720" y="2359152"/>
-            <a:ext cx="1645920" cy="274320"/>
-          </a:xfrm>
-          <a:prstGeom prst="rect">
-            <a:avLst/>
-          </a:prstGeom>
-          <a:noFill/>
-          <a:ln/>
-        </p:spPr>
-        <p:txBody>
-          <a:bodyPr wrap="square" lIns="0" tIns="0" rIns="0" bIns="0" rtlCol="0" anchor="ctr"/>
-          <a:lstStyle/>
-          <a:p>
-            <a:pPr algn="ctr" indent="0" marL="0">
-              <a:buNone/>
-            </a:pPr>
-            <a:r>
               <a:rPr lang="en-US" sz="1150" b="1" dirty="0">
                 <a:solidFill>
                   <a:srgbClr val="1F1A18"/>
@@ -4089,13 +5555,13 @@
       </p:sp>
       <p:sp>
         <p:nvSpPr>
-          <p:cNvPr id="12" name="Text 10"/>
-          <p:cNvSpPr/>
-          <p:nvPr/>
-        </p:nvSpPr>
-        <p:spPr>
-          <a:xfrm>
-            <a:off x="-91440" y="2633472"/>
+          <p:cNvPr id="16" name="Text 14"/>
+          <p:cNvSpPr/>
+          <p:nvPr/>
+        </p:nvSpPr>
+        <p:spPr>
+          <a:xfrm>
+            <a:off x="-91440" y="2724912"/>
             <a:ext cx="1737360" cy="457200"/>
           </a:xfrm>
           <a:prstGeom prst="rect">
@@ -4131,13 +5597,91 @@
       </p:sp>
       <p:sp>
         <p:nvSpPr>
-          <p:cNvPr id="13" name="Shape 11"/>
-          <p:cNvSpPr/>
-          <p:nvPr/>
-        </p:nvSpPr>
-        <p:spPr>
-          <a:xfrm>
-            <a:off x="2404872" y="1975104"/>
+          <p:cNvPr id="17" name="Text 15"/>
+          <p:cNvSpPr/>
+          <p:nvPr/>
+        </p:nvSpPr>
+        <p:spPr>
+          <a:xfrm>
+            <a:off x="1911096" y="1371600"/>
+            <a:ext cx="1280160" cy="237744"/>
+          </a:xfrm>
+          <a:prstGeom prst="rect">
+            <a:avLst/>
+          </a:prstGeom>
+          <a:noFill/>
+          <a:ln/>
+        </p:spPr>
+        <p:txBody>
+          <a:bodyPr wrap="square" lIns="0" tIns="0" rIns="0" bIns="0" rtlCol="0" anchor="ctr"/>
+          <a:lstStyle/>
+          <a:p>
+            <a:pPr algn="ctr" indent="0" marL="0">
+              <a:buNone/>
+            </a:pPr>
+            <a:r>
+              <a:rPr lang="en-US" sz="1100" b="1" dirty="0">
+                <a:solidFill>
+                  <a:srgbClr val="1F1A18"/>
+                </a:solidFill>
+                <a:latin typeface="맑은 고딕" pitchFamily="34" charset="0"/>
+                <a:ea typeface="맑은 고딕" pitchFamily="34" charset="-122"/>
+                <a:cs typeface="맑은 고딕" pitchFamily="34" charset="-120"/>
+              </a:rPr>
+              <a:t>'26.6월</a:t>
+            </a:r>
+            <a:endParaRPr lang="en-US" sz="1100" dirty="0"/>
+          </a:p>
+        </p:txBody>
+      </p:sp>
+      <p:sp>
+        <p:nvSpPr>
+          <p:cNvPr id="18" name="Text 16"/>
+          <p:cNvSpPr/>
+          <p:nvPr/>
+        </p:nvSpPr>
+        <p:spPr>
+          <a:xfrm>
+            <a:off x="1911096" y="1645920"/>
+            <a:ext cx="1280160" cy="219456"/>
+          </a:xfrm>
+          <a:prstGeom prst="rect">
+            <a:avLst/>
+          </a:prstGeom>
+          <a:noFill/>
+          <a:ln/>
+        </p:spPr>
+        <p:txBody>
+          <a:bodyPr wrap="square" lIns="0" tIns="0" rIns="0" bIns="0" rtlCol="0" anchor="ctr"/>
+          <a:lstStyle/>
+          <a:p>
+            <a:pPr algn="ctr" indent="0" marL="0">
+              <a:buNone/>
+            </a:pPr>
+            <a:r>
+              <a:rPr lang="en-US" sz="950" b="1" dirty="0">
+                <a:solidFill>
+                  <a:srgbClr val="EA002C"/>
+                </a:solidFill>
+                <a:latin typeface="맑은 고딕" pitchFamily="34" charset="0"/>
+                <a:ea typeface="맑은 고딕" pitchFamily="34" charset="-122"/>
+                <a:cs typeface="맑은 고딕" pitchFamily="34" charset="-120"/>
+              </a:rPr>
+              <a:t>완료</a:t>
+            </a:r>
+            <a:endParaRPr lang="en-US" sz="950" dirty="0"/>
+          </a:p>
+        </p:txBody>
+      </p:sp>
+      <p:sp>
+        <p:nvSpPr>
+          <p:cNvPr id="19" name="Shape 17"/>
+          <p:cNvSpPr/>
+          <p:nvPr/>
+        </p:nvSpPr>
+        <p:spPr>
+          <a:xfrm>
+            <a:off x="2404872" y="2066544"/>
             <a:ext cx="292608" cy="292608"/>
           </a:xfrm>
           <a:prstGeom prst="ellipse">
@@ -4156,14 +5700,14 @@
       </p:sp>
       <p:sp>
         <p:nvSpPr>
-          <p:cNvPr id="14" name="Text 12"/>
-          <p:cNvSpPr/>
-          <p:nvPr/>
-        </p:nvSpPr>
-        <p:spPr>
-          <a:xfrm>
-            <a:off x="1984248" y="1408176"/>
-            <a:ext cx="1133856" cy="237744"/>
+          <p:cNvPr id="20" name="Text 18"/>
+          <p:cNvSpPr/>
+          <p:nvPr/>
+        </p:nvSpPr>
+        <p:spPr>
+          <a:xfrm>
+            <a:off x="1709928" y="2450592"/>
+            <a:ext cx="1682496" cy="274320"/>
           </a:xfrm>
           <a:prstGeom prst="rect">
             <a:avLst/>
@@ -4179,45 +5723,6 @@
               <a:buNone/>
             </a:pPr>
             <a:r>
-              <a:rPr lang="en-US" sz="950" b="1" dirty="0">
-                <a:solidFill>
-                  <a:srgbClr val="EA002C"/>
-                </a:solidFill>
-                <a:latin typeface="맑은 고딕" pitchFamily="34" charset="0"/>
-                <a:ea typeface="맑은 고딕" pitchFamily="34" charset="-122"/>
-                <a:cs typeface="맑은 고딕" pitchFamily="34" charset="-120"/>
-              </a:rPr>
-              <a:t>완료</a:t>
-            </a:r>
-            <a:endParaRPr lang="en-US" sz="950" dirty="0"/>
-          </a:p>
-        </p:txBody>
-      </p:sp>
-      <p:sp>
-        <p:nvSpPr>
-          <p:cNvPr id="15" name="Text 13"/>
-          <p:cNvSpPr/>
-          <p:nvPr/>
-        </p:nvSpPr>
-        <p:spPr>
-          <a:xfrm>
-            <a:off x="1728216" y="2359152"/>
-            <a:ext cx="1645920" cy="274320"/>
-          </a:xfrm>
-          <a:prstGeom prst="rect">
-            <a:avLst/>
-          </a:prstGeom>
-          <a:noFill/>
-          <a:ln/>
-        </p:spPr>
-        <p:txBody>
-          <a:bodyPr wrap="square" lIns="0" tIns="0" rIns="0" bIns="0" rtlCol="0" anchor="ctr"/>
-          <a:lstStyle/>
-          <a:p>
-            <a:pPr algn="ctr" indent="0" marL="0">
-              <a:buNone/>
-            </a:pPr>
-            <a:r>
               <a:rPr lang="en-US" sz="1150" b="1" dirty="0">
                 <a:solidFill>
                   <a:srgbClr val="1F1A18"/>
@@ -4234,13 +5739,13 @@
       </p:sp>
       <p:sp>
         <p:nvSpPr>
-          <p:cNvPr id="16" name="Text 14"/>
-          <p:cNvSpPr/>
-          <p:nvPr/>
-        </p:nvSpPr>
-        <p:spPr>
-          <a:xfrm>
-            <a:off x="1682496" y="2633472"/>
+          <p:cNvPr id="21" name="Text 19"/>
+          <p:cNvSpPr/>
+          <p:nvPr/>
+        </p:nvSpPr>
+        <p:spPr>
+          <a:xfrm>
+            <a:off x="1682496" y="2724912"/>
             <a:ext cx="1737360" cy="457200"/>
           </a:xfrm>
           <a:prstGeom prst="rect">
@@ -4276,13 +5781,91 @@
       </p:sp>
       <p:sp>
         <p:nvSpPr>
-          <p:cNvPr id="17" name="Shape 15"/>
-          <p:cNvSpPr/>
-          <p:nvPr/>
-        </p:nvSpPr>
-        <p:spPr>
-          <a:xfrm>
-            <a:off x="4178808" y="1975104"/>
+          <p:cNvPr id="22" name="Text 20"/>
+          <p:cNvSpPr/>
+          <p:nvPr/>
+        </p:nvSpPr>
+        <p:spPr>
+          <a:xfrm>
+            <a:off x="3685032" y="1371600"/>
+            <a:ext cx="1280160" cy="237744"/>
+          </a:xfrm>
+          <a:prstGeom prst="rect">
+            <a:avLst/>
+          </a:prstGeom>
+          <a:noFill/>
+          <a:ln/>
+        </p:spPr>
+        <p:txBody>
+          <a:bodyPr wrap="square" lIns="0" tIns="0" rIns="0" bIns="0" rtlCol="0" anchor="ctr"/>
+          <a:lstStyle/>
+          <a:p>
+            <a:pPr algn="ctr" indent="0" marL="0">
+              <a:buNone/>
+            </a:pPr>
+            <a:r>
+              <a:rPr lang="en-US" sz="1100" b="1" dirty="0">
+                <a:solidFill>
+                  <a:srgbClr val="1F1A18"/>
+                </a:solidFill>
+                <a:latin typeface="맑은 고딕" pitchFamily="34" charset="0"/>
+                <a:ea typeface="맑은 고딕" pitchFamily="34" charset="-122"/>
+                <a:cs typeface="맑은 고딕" pitchFamily="34" charset="-120"/>
+              </a:rPr>
+              <a:t>'26.7월</a:t>
+            </a:r>
+            <a:endParaRPr lang="en-US" sz="1100" dirty="0"/>
+          </a:p>
+        </p:txBody>
+      </p:sp>
+      <p:sp>
+        <p:nvSpPr>
+          <p:cNvPr id="23" name="Text 21"/>
+          <p:cNvSpPr/>
+          <p:nvPr/>
+        </p:nvSpPr>
+        <p:spPr>
+          <a:xfrm>
+            <a:off x="3685032" y="1645920"/>
+            <a:ext cx="1280160" cy="219456"/>
+          </a:xfrm>
+          <a:prstGeom prst="rect">
+            <a:avLst/>
+          </a:prstGeom>
+          <a:noFill/>
+          <a:ln/>
+        </p:spPr>
+        <p:txBody>
+          <a:bodyPr wrap="square" lIns="0" tIns="0" rIns="0" bIns="0" rtlCol="0" anchor="ctr"/>
+          <a:lstStyle/>
+          <a:p>
+            <a:pPr algn="ctr" indent="0" marL="0">
+              <a:buNone/>
+            </a:pPr>
+            <a:r>
+              <a:rPr lang="en-US" sz="950" b="1" dirty="0">
+                <a:solidFill>
+                  <a:srgbClr val="EA002C"/>
+                </a:solidFill>
+                <a:latin typeface="맑은 고딕" pitchFamily="34" charset="0"/>
+                <a:ea typeface="맑은 고딕" pitchFamily="34" charset="-122"/>
+                <a:cs typeface="맑은 고딕" pitchFamily="34" charset="-120"/>
+              </a:rPr>
+              <a:t>완료</a:t>
+            </a:r>
+            <a:endParaRPr lang="en-US" sz="950" dirty="0"/>
+          </a:p>
+        </p:txBody>
+      </p:sp>
+      <p:sp>
+        <p:nvSpPr>
+          <p:cNvPr id="24" name="Shape 22"/>
+          <p:cNvSpPr/>
+          <p:nvPr/>
+        </p:nvSpPr>
+        <p:spPr>
+          <a:xfrm>
+            <a:off x="4178808" y="2066544"/>
             <a:ext cx="292608" cy="292608"/>
           </a:xfrm>
           <a:prstGeom prst="ellipse">
@@ -4301,14 +5884,14 @@
       </p:sp>
       <p:sp>
         <p:nvSpPr>
-          <p:cNvPr id="18" name="Text 16"/>
-          <p:cNvSpPr/>
-          <p:nvPr/>
-        </p:nvSpPr>
-        <p:spPr>
-          <a:xfrm>
-            <a:off x="3758184" y="1408176"/>
-            <a:ext cx="1133856" cy="237744"/>
+          <p:cNvPr id="25" name="Text 23"/>
+          <p:cNvSpPr/>
+          <p:nvPr/>
+        </p:nvSpPr>
+        <p:spPr>
+          <a:xfrm>
+            <a:off x="3483864" y="2450592"/>
+            <a:ext cx="1682496" cy="274320"/>
           </a:xfrm>
           <a:prstGeom prst="rect">
             <a:avLst/>
@@ -4324,45 +5907,6 @@
               <a:buNone/>
             </a:pPr>
             <a:r>
-              <a:rPr lang="en-US" sz="950" b="1" dirty="0">
-                <a:solidFill>
-                  <a:srgbClr val="EA002C"/>
-                </a:solidFill>
-                <a:latin typeface="맑은 고딕" pitchFamily="34" charset="0"/>
-                <a:ea typeface="맑은 고딕" pitchFamily="34" charset="-122"/>
-                <a:cs typeface="맑은 고딕" pitchFamily="34" charset="-120"/>
-              </a:rPr>
-              <a:t>완료</a:t>
-            </a:r>
-            <a:endParaRPr lang="en-US" sz="950" dirty="0"/>
-          </a:p>
-        </p:txBody>
-      </p:sp>
-      <p:sp>
-        <p:nvSpPr>
-          <p:cNvPr id="19" name="Text 17"/>
-          <p:cNvSpPr/>
-          <p:nvPr/>
-        </p:nvSpPr>
-        <p:spPr>
-          <a:xfrm>
-            <a:off x="3502152" y="2359152"/>
-            <a:ext cx="1645920" cy="274320"/>
-          </a:xfrm>
-          <a:prstGeom prst="rect">
-            <a:avLst/>
-          </a:prstGeom>
-          <a:noFill/>
-          <a:ln/>
-        </p:spPr>
-        <p:txBody>
-          <a:bodyPr wrap="square" lIns="0" tIns="0" rIns="0" bIns="0" rtlCol="0" anchor="ctr"/>
-          <a:lstStyle/>
-          <a:p>
-            <a:pPr algn="ctr" indent="0" marL="0">
-              <a:buNone/>
-            </a:pPr>
-            <a:r>
               <a:rPr lang="en-US" sz="1150" b="1" dirty="0">
                 <a:solidFill>
                   <a:srgbClr val="1F1A18"/>
@@ -4379,13 +5923,13 @@
       </p:sp>
       <p:sp>
         <p:nvSpPr>
-          <p:cNvPr id="20" name="Text 18"/>
-          <p:cNvSpPr/>
-          <p:nvPr/>
-        </p:nvSpPr>
-        <p:spPr>
-          <a:xfrm>
-            <a:off x="3456432" y="2633472"/>
+          <p:cNvPr id="26" name="Text 24"/>
+          <p:cNvSpPr/>
+          <p:nvPr/>
+        </p:nvSpPr>
+        <p:spPr>
+          <a:xfrm>
+            <a:off x="3456432" y="2724912"/>
             <a:ext cx="1737360" cy="457200"/>
           </a:xfrm>
           <a:prstGeom prst="rect">
@@ -4421,13 +5965,91 @@
       </p:sp>
       <p:sp>
         <p:nvSpPr>
-          <p:cNvPr id="21" name="Shape 19"/>
-          <p:cNvSpPr/>
-          <p:nvPr/>
-        </p:nvSpPr>
-        <p:spPr>
-          <a:xfrm>
-            <a:off x="5952744" y="1975104"/>
+          <p:cNvPr id="27" name="Text 25"/>
+          <p:cNvSpPr/>
+          <p:nvPr/>
+        </p:nvSpPr>
+        <p:spPr>
+          <a:xfrm>
+            <a:off x="5458968" y="1371600"/>
+            <a:ext cx="1280160" cy="237744"/>
+          </a:xfrm>
+          <a:prstGeom prst="rect">
+            <a:avLst/>
+          </a:prstGeom>
+          <a:noFill/>
+          <a:ln/>
+        </p:spPr>
+        <p:txBody>
+          <a:bodyPr wrap="square" lIns="0" tIns="0" rIns="0" bIns="0" rtlCol="0" anchor="ctr"/>
+          <a:lstStyle/>
+          <a:p>
+            <a:pPr algn="ctr" indent="0" marL="0">
+              <a:buNone/>
+            </a:pPr>
+            <a:r>
+              <a:rPr lang="en-US" sz="1100" b="1" dirty="0">
+                <a:solidFill>
+                  <a:srgbClr val="1F1A18"/>
+                </a:solidFill>
+                <a:latin typeface="맑은 고딕" pitchFamily="34" charset="0"/>
+                <a:ea typeface="맑은 고딕" pitchFamily="34" charset="-122"/>
+                <a:cs typeface="맑은 고딕" pitchFamily="34" charset="-120"/>
+              </a:rPr>
+              <a:t>'26.8월</a:t>
+            </a:r>
+            <a:endParaRPr lang="en-US" sz="1100" dirty="0"/>
+          </a:p>
+        </p:txBody>
+      </p:sp>
+      <p:sp>
+        <p:nvSpPr>
+          <p:cNvPr id="28" name="Text 26"/>
+          <p:cNvSpPr/>
+          <p:nvPr/>
+        </p:nvSpPr>
+        <p:spPr>
+          <a:xfrm>
+            <a:off x="5458968" y="1645920"/>
+            <a:ext cx="1280160" cy="219456"/>
+          </a:xfrm>
+          <a:prstGeom prst="rect">
+            <a:avLst/>
+          </a:prstGeom>
+          <a:noFill/>
+          <a:ln/>
+        </p:spPr>
+        <p:txBody>
+          <a:bodyPr wrap="square" lIns="0" tIns="0" rIns="0" bIns="0" rtlCol="0" anchor="ctr"/>
+          <a:lstStyle/>
+          <a:p>
+            <a:pPr algn="ctr" indent="0" marL="0">
+              <a:buNone/>
+            </a:pPr>
+            <a:r>
+              <a:rPr lang="en-US" sz="950" b="1" dirty="0">
+                <a:solidFill>
+                  <a:srgbClr val="EA002C"/>
+                </a:solidFill>
+                <a:latin typeface="맑은 고딕" pitchFamily="34" charset="0"/>
+                <a:ea typeface="맑은 고딕" pitchFamily="34" charset="-122"/>
+                <a:cs typeface="맑은 고딕" pitchFamily="34" charset="-120"/>
+              </a:rPr>
+              <a:t>완료</a:t>
+            </a:r>
+            <a:endParaRPr lang="en-US" sz="950" dirty="0"/>
+          </a:p>
+        </p:txBody>
+      </p:sp>
+      <p:sp>
+        <p:nvSpPr>
+          <p:cNvPr id="29" name="Shape 27"/>
+          <p:cNvSpPr/>
+          <p:nvPr/>
+        </p:nvSpPr>
+        <p:spPr>
+          <a:xfrm>
+            <a:off x="5952744" y="2066544"/>
             <a:ext cx="292608" cy="292608"/>
           </a:xfrm>
           <a:prstGeom prst="ellipse">
@@ -4446,14 +6068,14 @@
       </p:sp>
       <p:sp>
         <p:nvSpPr>
-          <p:cNvPr id="22" name="Text 20"/>
-          <p:cNvSpPr/>
-          <p:nvPr/>
-        </p:nvSpPr>
-        <p:spPr>
-          <a:xfrm>
-            <a:off x="5532120" y="1408176"/>
-            <a:ext cx="1133856" cy="237744"/>
+          <p:cNvPr id="30" name="Text 28"/>
+          <p:cNvSpPr/>
+          <p:nvPr/>
+        </p:nvSpPr>
+        <p:spPr>
+          <a:xfrm>
+            <a:off x="5257800" y="2450592"/>
+            <a:ext cx="1682496" cy="274320"/>
           </a:xfrm>
           <a:prstGeom prst="rect">
             <a:avLst/>
@@ -4469,45 +6091,6 @@
               <a:buNone/>
             </a:pPr>
             <a:r>
-              <a:rPr lang="en-US" sz="950" b="1" dirty="0">
-                <a:solidFill>
-                  <a:srgbClr val="EA002C"/>
-                </a:solidFill>
-                <a:latin typeface="맑은 고딕" pitchFamily="34" charset="0"/>
-                <a:ea typeface="맑은 고딕" pitchFamily="34" charset="-122"/>
-                <a:cs typeface="맑은 고딕" pitchFamily="34" charset="-120"/>
-              </a:rPr>
-              <a:t>완료</a:t>
-            </a:r>
-            <a:endParaRPr lang="en-US" sz="950" dirty="0"/>
-          </a:p>
-        </p:txBody>
-      </p:sp>
-      <p:sp>
-        <p:nvSpPr>
-          <p:cNvPr id="23" name="Text 21"/>
-          <p:cNvSpPr/>
-          <p:nvPr/>
-        </p:nvSpPr>
-        <p:spPr>
-          <a:xfrm>
-            <a:off x="5276088" y="2359152"/>
-            <a:ext cx="1645920" cy="274320"/>
-          </a:xfrm>
-          <a:prstGeom prst="rect">
-            <a:avLst/>
-          </a:prstGeom>
-          <a:noFill/>
-          <a:ln/>
-        </p:spPr>
-        <p:txBody>
-          <a:bodyPr wrap="square" lIns="0" tIns="0" rIns="0" bIns="0" rtlCol="0" anchor="ctr"/>
-          <a:lstStyle/>
-          <a:p>
-            <a:pPr algn="ctr" indent="0" marL="0">
-              <a:buNone/>
-            </a:pPr>
-            <a:r>
               <a:rPr lang="en-US" sz="1150" b="1" dirty="0">
                 <a:solidFill>
                   <a:srgbClr val="1F1A18"/>
@@ -4524,13 +6107,13 @@
       </p:sp>
       <p:sp>
         <p:nvSpPr>
-          <p:cNvPr id="24" name="Text 22"/>
-          <p:cNvSpPr/>
-          <p:nvPr/>
-        </p:nvSpPr>
-        <p:spPr>
-          <a:xfrm>
-            <a:off x="5230368" y="2633472"/>
+          <p:cNvPr id="31" name="Text 29"/>
+          <p:cNvSpPr/>
+          <p:nvPr/>
+        </p:nvSpPr>
+        <p:spPr>
+          <a:xfrm>
+            <a:off x="5230368" y="2724912"/>
             <a:ext cx="1737360" cy="457200"/>
           </a:xfrm>
           <a:prstGeom prst="rect">
@@ -4566,38 +6149,91 @@
       </p:sp>
       <p:sp>
         <p:nvSpPr>
-          <p:cNvPr id="25" name="Shape 23"/>
-          <p:cNvSpPr/>
-          <p:nvPr/>
-        </p:nvSpPr>
-        <p:spPr>
-          <a:xfrm>
-            <a:off x="7726680" y="1975104"/>
-            <a:ext cx="292608" cy="292608"/>
-          </a:xfrm>
-          <a:prstGeom prst="ellipse">
-            <a:avLst/>
-          </a:prstGeom>
-          <a:solidFill>
-            <a:srgbClr val="F47725"/>
-          </a:solidFill>
-          <a:ln w="25400">
-            <a:solidFill>
-              <a:srgbClr val="FFFFFF"/>
-            </a:solidFill>
-            <a:prstDash val="solid"/>
-          </a:ln>
-        </p:spPr>
-      </p:sp>
-      <p:sp>
-        <p:nvSpPr>
-          <p:cNvPr id="26" name="Shape 24"/>
-          <p:cNvSpPr/>
-          <p:nvPr/>
-        </p:nvSpPr>
-        <p:spPr>
-          <a:xfrm>
-            <a:off x="7616952" y="1865376"/>
+          <p:cNvPr id="32" name="Text 30"/>
+          <p:cNvSpPr/>
+          <p:nvPr/>
+        </p:nvSpPr>
+        <p:spPr>
+          <a:xfrm>
+            <a:off x="7232904" y="1371600"/>
+            <a:ext cx="1280160" cy="237744"/>
+          </a:xfrm>
+          <a:prstGeom prst="rect">
+            <a:avLst/>
+          </a:prstGeom>
+          <a:noFill/>
+          <a:ln/>
+        </p:spPr>
+        <p:txBody>
+          <a:bodyPr wrap="square" lIns="0" tIns="0" rIns="0" bIns="0" rtlCol="0" anchor="ctr"/>
+          <a:lstStyle/>
+          <a:p>
+            <a:pPr algn="ctr" indent="0" marL="0">
+              <a:buNone/>
+            </a:pPr>
+            <a:r>
+              <a:rPr lang="en-US" sz="1100" b="1" dirty="0">
+                <a:solidFill>
+                  <a:srgbClr val="1F1A18"/>
+                </a:solidFill>
+                <a:latin typeface="맑은 고딕" pitchFamily="34" charset="0"/>
+                <a:ea typeface="맑은 고딕" pitchFamily="34" charset="-122"/>
+                <a:cs typeface="맑은 고딕" pitchFamily="34" charset="-120"/>
+              </a:rPr>
+              <a:t>'26.8월~</a:t>
+            </a:r>
+            <a:endParaRPr lang="en-US" sz="1100" dirty="0"/>
+          </a:p>
+        </p:txBody>
+      </p:sp>
+      <p:sp>
+        <p:nvSpPr>
+          <p:cNvPr id="33" name="Text 31"/>
+          <p:cNvSpPr/>
+          <p:nvPr/>
+        </p:nvSpPr>
+        <p:spPr>
+          <a:xfrm>
+            <a:off x="7232904" y="1645920"/>
+            <a:ext cx="1280160" cy="219456"/>
+          </a:xfrm>
+          <a:prstGeom prst="rect">
+            <a:avLst/>
+          </a:prstGeom>
+          <a:noFill/>
+          <a:ln/>
+        </p:spPr>
+        <p:txBody>
+          <a:bodyPr wrap="square" lIns="0" tIns="0" rIns="0" bIns="0" rtlCol="0" anchor="ctr"/>
+          <a:lstStyle/>
+          <a:p>
+            <a:pPr algn="ctr" indent="0" marL="0">
+              <a:buNone/>
+            </a:pPr>
+            <a:r>
+              <a:rPr lang="en-US" sz="950" b="1" dirty="0">
+                <a:solidFill>
+                  <a:srgbClr val="F47725"/>
+                </a:solidFill>
+                <a:latin typeface="맑은 고딕" pitchFamily="34" charset="0"/>
+                <a:ea typeface="맑은 고딕" pitchFamily="34" charset="-122"/>
+                <a:cs typeface="맑은 고딕" pitchFamily="34" charset="-120"/>
+              </a:rPr>
+              <a:t>진행중</a:t>
+            </a:r>
+            <a:endParaRPr lang="en-US" sz="950" dirty="0"/>
+          </a:p>
+        </p:txBody>
+      </p:sp>
+      <p:sp>
+        <p:nvSpPr>
+          <p:cNvPr id="34" name="Shape 32"/>
+          <p:cNvSpPr/>
+          <p:nvPr/>
+        </p:nvSpPr>
+        <p:spPr>
+          <a:xfrm>
+            <a:off x="7616952" y="1956816"/>
             <a:ext cx="512064" cy="512064"/>
           </a:xfrm>
           <a:prstGeom prst="ellipse">
@@ -4618,14 +6254,39 @@
       </p:sp>
       <p:sp>
         <p:nvSpPr>
-          <p:cNvPr id="27" name="Text 25"/>
-          <p:cNvSpPr/>
-          <p:nvPr/>
-        </p:nvSpPr>
-        <p:spPr>
-          <a:xfrm>
-            <a:off x="7306056" y="1408176"/>
-            <a:ext cx="1133856" cy="237744"/>
+          <p:cNvPr id="35" name="Shape 33"/>
+          <p:cNvSpPr/>
+          <p:nvPr/>
+        </p:nvSpPr>
+        <p:spPr>
+          <a:xfrm>
+            <a:off x="7726680" y="2066544"/>
+            <a:ext cx="292608" cy="292608"/>
+          </a:xfrm>
+          <a:prstGeom prst="ellipse">
+            <a:avLst/>
+          </a:prstGeom>
+          <a:solidFill>
+            <a:srgbClr val="F47725"/>
+          </a:solidFill>
+          <a:ln w="25400">
+            <a:solidFill>
+              <a:srgbClr val="FFFFFF"/>
+            </a:solidFill>
+            <a:prstDash val="solid"/>
+          </a:ln>
+        </p:spPr>
+      </p:sp>
+      <p:sp>
+        <p:nvSpPr>
+          <p:cNvPr id="36" name="Text 34"/>
+          <p:cNvSpPr/>
+          <p:nvPr/>
+        </p:nvSpPr>
+        <p:spPr>
+          <a:xfrm>
+            <a:off x="7031736" y="2450592"/>
+            <a:ext cx="1682496" cy="274320"/>
           </a:xfrm>
           <a:prstGeom prst="rect">
             <a:avLst/>
@@ -4641,45 +6302,6 @@
               <a:buNone/>
             </a:pPr>
             <a:r>
-              <a:rPr lang="en-US" sz="950" b="1" dirty="0">
-                <a:solidFill>
-                  <a:srgbClr val="F47725"/>
-                </a:solidFill>
-                <a:latin typeface="맑은 고딕" pitchFamily="34" charset="0"/>
-                <a:ea typeface="맑은 고딕" pitchFamily="34" charset="-122"/>
-                <a:cs typeface="맑은 고딕" pitchFamily="34" charset="-120"/>
-              </a:rPr>
-              <a:t>진행중</a:t>
-            </a:r>
-            <a:endParaRPr lang="en-US" sz="950" dirty="0"/>
-          </a:p>
-        </p:txBody>
-      </p:sp>
-      <p:sp>
-        <p:nvSpPr>
-          <p:cNvPr id="28" name="Text 26"/>
-          <p:cNvSpPr/>
-          <p:nvPr/>
-        </p:nvSpPr>
-        <p:spPr>
-          <a:xfrm>
-            <a:off x="7050024" y="2359152"/>
-            <a:ext cx="1645920" cy="274320"/>
-          </a:xfrm>
-          <a:prstGeom prst="rect">
-            <a:avLst/>
-          </a:prstGeom>
-          <a:noFill/>
-          <a:ln/>
-        </p:spPr>
-        <p:txBody>
-          <a:bodyPr wrap="square" lIns="0" tIns="0" rIns="0" bIns="0" rtlCol="0" anchor="ctr"/>
-          <a:lstStyle/>
-          <a:p>
-            <a:pPr algn="ctr" indent="0" marL="0">
-              <a:buNone/>
-            </a:pPr>
-            <a:r>
               <a:rPr lang="en-US" sz="1150" b="1" dirty="0">
                 <a:solidFill>
                   <a:srgbClr val="1F1A18"/>
@@ -4696,13 +6318,13 @@
       </p:sp>
       <p:sp>
         <p:nvSpPr>
-          <p:cNvPr id="29" name="Text 27"/>
-          <p:cNvSpPr/>
-          <p:nvPr/>
-        </p:nvSpPr>
-        <p:spPr>
-          <a:xfrm>
-            <a:off x="7004304" y="2633472"/>
+          <p:cNvPr id="37" name="Text 35"/>
+          <p:cNvSpPr/>
+          <p:nvPr/>
+        </p:nvSpPr>
+        <p:spPr>
+          <a:xfrm>
+            <a:off x="7004304" y="2724912"/>
             <a:ext cx="1737360" cy="457200"/>
           </a:xfrm>
           <a:prstGeom prst="rect">
@@ -4738,13 +6360,91 @@
       </p:sp>
       <p:sp>
         <p:nvSpPr>
-          <p:cNvPr id="30" name="Shape 28"/>
-          <p:cNvSpPr/>
-          <p:nvPr/>
-        </p:nvSpPr>
-        <p:spPr>
-          <a:xfrm>
-            <a:off x="9500616" y="1975104"/>
+          <p:cNvPr id="38" name="Text 36"/>
+          <p:cNvSpPr/>
+          <p:nvPr/>
+        </p:nvSpPr>
+        <p:spPr>
+          <a:xfrm>
+            <a:off x="9006840" y="1371600"/>
+            <a:ext cx="1280160" cy="237744"/>
+          </a:xfrm>
+          <a:prstGeom prst="rect">
+            <a:avLst/>
+          </a:prstGeom>
+          <a:noFill/>
+          <a:ln/>
+        </p:spPr>
+        <p:txBody>
+          <a:bodyPr wrap="square" lIns="0" tIns="0" rIns="0" bIns="0" rtlCol="0" anchor="ctr"/>
+          <a:lstStyle/>
+          <a:p>
+            <a:pPr algn="ctr" indent="0" marL="0">
+              <a:buNone/>
+            </a:pPr>
+            <a:r>
+              <a:rPr lang="en-US" sz="1100" b="1" dirty="0">
+                <a:solidFill>
+                  <a:srgbClr val="9A908C"/>
+                </a:solidFill>
+                <a:latin typeface="맑은 고딕" pitchFamily="34" charset="0"/>
+                <a:ea typeface="맑은 고딕" pitchFamily="34" charset="-122"/>
+                <a:cs typeface="맑은 고딕" pitchFamily="34" charset="-120"/>
+              </a:rPr>
+              <a:t>'26.9월</a:t>
+            </a:r>
+            <a:endParaRPr lang="en-US" sz="1100" dirty="0"/>
+          </a:p>
+        </p:txBody>
+      </p:sp>
+      <p:sp>
+        <p:nvSpPr>
+          <p:cNvPr id="39" name="Text 37"/>
+          <p:cNvSpPr/>
+          <p:nvPr/>
+        </p:nvSpPr>
+        <p:spPr>
+          <a:xfrm>
+            <a:off x="9006840" y="1645920"/>
+            <a:ext cx="1280160" cy="219456"/>
+          </a:xfrm>
+          <a:prstGeom prst="rect">
+            <a:avLst/>
+          </a:prstGeom>
+          <a:noFill/>
+          <a:ln/>
+        </p:spPr>
+        <p:txBody>
+          <a:bodyPr wrap="square" lIns="0" tIns="0" rIns="0" bIns="0" rtlCol="0" anchor="ctr"/>
+          <a:lstStyle/>
+          <a:p>
+            <a:pPr algn="ctr" indent="0" marL="0">
+              <a:buNone/>
+            </a:pPr>
+            <a:r>
+              <a:rPr lang="en-US" sz="950" b="1" dirty="0">
+                <a:solidFill>
+                  <a:srgbClr val="C9BFBB"/>
+                </a:solidFill>
+                <a:latin typeface="맑은 고딕" pitchFamily="34" charset="0"/>
+                <a:ea typeface="맑은 고딕" pitchFamily="34" charset="-122"/>
+                <a:cs typeface="맑은 고딕" pitchFamily="34" charset="-120"/>
+              </a:rPr>
+              <a:t>예정</a:t>
+            </a:r>
+            <a:endParaRPr lang="en-US" sz="950" dirty="0"/>
+          </a:p>
+        </p:txBody>
+      </p:sp>
+      <p:sp>
+        <p:nvSpPr>
+          <p:cNvPr id="40" name="Shape 38"/>
+          <p:cNvSpPr/>
+          <p:nvPr/>
+        </p:nvSpPr>
+        <p:spPr>
+          <a:xfrm>
+            <a:off x="9500616" y="2066544"/>
             <a:ext cx="292608" cy="292608"/>
           </a:xfrm>
           <a:prstGeom prst="ellipse">
@@ -4763,14 +6463,14 @@
       </p:sp>
       <p:sp>
         <p:nvSpPr>
-          <p:cNvPr id="31" name="Text 29"/>
-          <p:cNvSpPr/>
-          <p:nvPr/>
-        </p:nvSpPr>
-        <p:spPr>
-          <a:xfrm>
-            <a:off x="9079992" y="1408176"/>
-            <a:ext cx="1133856" cy="237744"/>
+          <p:cNvPr id="41" name="Text 39"/>
+          <p:cNvSpPr/>
+          <p:nvPr/>
+        </p:nvSpPr>
+        <p:spPr>
+          <a:xfrm>
+            <a:off x="8805672" y="2450592"/>
+            <a:ext cx="1682496" cy="274320"/>
           </a:xfrm>
           <a:prstGeom prst="rect">
             <a:avLst/>
@@ -4786,45 +6486,6 @@
               <a:buNone/>
             </a:pPr>
             <a:r>
-              <a:rPr lang="en-US" sz="950" b="1" dirty="0">
-                <a:solidFill>
-                  <a:srgbClr val="C9BFBB"/>
-                </a:solidFill>
-                <a:latin typeface="맑은 고딕" pitchFamily="34" charset="0"/>
-                <a:ea typeface="맑은 고딕" pitchFamily="34" charset="-122"/>
-                <a:cs typeface="맑은 고딕" pitchFamily="34" charset="-120"/>
-              </a:rPr>
-              <a:t>예정</a:t>
-            </a:r>
-            <a:endParaRPr lang="en-US" sz="950" dirty="0"/>
-          </a:p>
-        </p:txBody>
-      </p:sp>
-      <p:sp>
-        <p:nvSpPr>
-          <p:cNvPr id="32" name="Text 30"/>
-          <p:cNvSpPr/>
-          <p:nvPr/>
-        </p:nvSpPr>
-        <p:spPr>
-          <a:xfrm>
-            <a:off x="8823960" y="2359152"/>
-            <a:ext cx="1645920" cy="274320"/>
-          </a:xfrm>
-          <a:prstGeom prst="rect">
-            <a:avLst/>
-          </a:prstGeom>
-          <a:noFill/>
-          <a:ln/>
-        </p:spPr>
-        <p:txBody>
-          <a:bodyPr wrap="square" lIns="0" tIns="0" rIns="0" bIns="0" rtlCol="0" anchor="ctr"/>
-          <a:lstStyle/>
-          <a:p>
-            <a:pPr algn="ctr" indent="0" marL="0">
-              <a:buNone/>
-            </a:pPr>
-            <a:r>
               <a:rPr lang="en-US" sz="1150" b="1" dirty="0">
                 <a:solidFill>
                   <a:srgbClr val="9A908C"/>
@@ -4841,13 +6502,13 @@
       </p:sp>
       <p:sp>
         <p:nvSpPr>
-          <p:cNvPr id="33" name="Text 31"/>
-          <p:cNvSpPr/>
-          <p:nvPr/>
-        </p:nvSpPr>
-        <p:spPr>
-          <a:xfrm>
-            <a:off x="8778240" y="2633472"/>
+          <p:cNvPr id="42" name="Text 40"/>
+          <p:cNvSpPr/>
+          <p:nvPr/>
+        </p:nvSpPr>
+        <p:spPr>
+          <a:xfrm>
+            <a:off x="8778240" y="2724912"/>
             <a:ext cx="1737360" cy="457200"/>
           </a:xfrm>
           <a:prstGeom prst="rect">
@@ -4883,18 +6544,18 @@
       </p:sp>
       <p:sp>
         <p:nvSpPr>
-          <p:cNvPr id="34" name="Shape 32"/>
-          <p:cNvSpPr/>
-          <p:nvPr/>
-        </p:nvSpPr>
-        <p:spPr>
-          <a:xfrm>
-            <a:off x="502920" y="3639312"/>
-            <a:ext cx="3566160" cy="2304288"/>
+          <p:cNvPr id="43" name="Shape 41"/>
+          <p:cNvSpPr/>
+          <p:nvPr/>
+        </p:nvSpPr>
+        <p:spPr>
+          <a:xfrm>
+            <a:off x="502920" y="3785616"/>
+            <a:ext cx="3566160" cy="2212848"/>
           </a:xfrm>
           <a:prstGeom prst="roundRect">
             <a:avLst>
-              <a:gd name="adj" fmla="val 2381"/>
+              <a:gd name="adj" fmla="val 2479"/>
             </a:avLst>
           </a:prstGeom>
           <a:solidFill>
@@ -4917,14 +6578,14 @@
       </p:sp>
       <p:sp>
         <p:nvSpPr>
-          <p:cNvPr id="35" name="Shape 33"/>
-          <p:cNvSpPr/>
-          <p:nvPr/>
-        </p:nvSpPr>
-        <p:spPr>
-          <a:xfrm>
-            <a:off x="758952" y="3877056"/>
-            <a:ext cx="256032" cy="256032"/>
+          <p:cNvPr id="44" name="Shape 42"/>
+          <p:cNvSpPr/>
+          <p:nvPr/>
+        </p:nvSpPr>
+        <p:spPr>
+          <a:xfrm>
+            <a:off x="758952" y="4005072"/>
+            <a:ext cx="237744" cy="237744"/>
           </a:xfrm>
           <a:prstGeom prst="ellipse">
             <a:avLst/>
@@ -4937,14 +6598,14 @@
       </p:sp>
       <p:sp>
         <p:nvSpPr>
-          <p:cNvPr id="36" name="Text 34"/>
-          <p:cNvSpPr/>
-          <p:nvPr/>
-        </p:nvSpPr>
-        <p:spPr>
-          <a:xfrm>
-            <a:off x="1124712" y="3822192"/>
-            <a:ext cx="2834640" cy="365760"/>
+          <p:cNvPr id="45" name="Text 43"/>
+          <p:cNvSpPr/>
+          <p:nvPr/>
+        </p:nvSpPr>
+        <p:spPr>
+          <a:xfrm>
+            <a:off x="1106424" y="3959352"/>
+            <a:ext cx="2834640" cy="329184"/>
           </a:xfrm>
           <a:prstGeom prst="rect">
             <a:avLst/>
@@ -4960,7 +6621,7 @@
               <a:buNone/>
             </a:pPr>
             <a:r>
-              <a:rPr lang="en-US" sz="1300" b="1" dirty="0">
+              <a:rPr lang="en-US" sz="1250" b="1" dirty="0">
                 <a:solidFill>
                   <a:srgbClr val="1F1A18"/>
                 </a:solidFill>
@@ -4970,19 +6631,19 @@
               </a:rPr>
               <a:t>배포 방법</a:t>
             </a:r>
-            <a:endParaRPr lang="en-US" sz="1300" dirty="0"/>
-          </a:p>
-        </p:txBody>
-      </p:sp>
-      <p:sp>
-        <p:nvSpPr>
-          <p:cNvPr id="37" name="Text 35"/>
-          <p:cNvSpPr/>
-          <p:nvPr/>
-        </p:nvSpPr>
-        <p:spPr>
-          <a:xfrm>
-            <a:off x="777240" y="4297680"/>
+            <a:endParaRPr lang="en-US" sz="1250" dirty="0"/>
+          </a:p>
+        </p:txBody>
+      </p:sp>
+      <p:sp>
+        <p:nvSpPr>
+          <p:cNvPr id="46" name="Text 44"/>
+          <p:cNvSpPr/>
+          <p:nvPr/>
+        </p:nvSpPr>
+        <p:spPr>
+          <a:xfrm>
+            <a:off x="777240" y="4407408"/>
             <a:ext cx="3054096" cy="1463040"/>
           </a:xfrm>
           <a:prstGeom prst="rect">
@@ -5006,7 +6667,7 @@
               <a:buChar char="•"/>
             </a:pPr>
             <a:r>
-              <a:rPr lang="en-US" sz="1150" dirty="0">
+              <a:rPr lang="en-US" sz="1100" dirty="0">
                 <a:solidFill>
                   <a:srgbClr val="6B625E"/>
                 </a:solidFill>
@@ -5016,7 +6677,7 @@
               </a:rPr>
               <a:t>폴더 하나만 복사하면 끝 (설치 불필요)</a:t>
             </a:r>
-            <a:endParaRPr lang="en-US" sz="1150" dirty="0"/>
+            <a:endParaRPr lang="en-US" sz="1100" dirty="0"/>
           </a:p>
           <a:p>
             <a:pPr marL="342900" indent="-342900">
@@ -5030,7 +6691,7 @@
               <a:buChar char="•"/>
             </a:pPr>
             <a:r>
-              <a:rPr lang="en-US" sz="1150" dirty="0">
+              <a:rPr lang="en-US" sz="1100" dirty="0">
                 <a:solidFill>
                   <a:srgbClr val="6B625E"/>
                 </a:solidFill>
@@ -5040,7 +6701,7 @@
               </a:rPr>
               <a:t>사내 PC에서 바로 실행</a:t>
             </a:r>
-            <a:endParaRPr lang="en-US" sz="1150" dirty="0"/>
+            <a:endParaRPr lang="en-US" sz="1100" dirty="0"/>
           </a:p>
           <a:p>
             <a:pPr marL="342900" indent="-342900">
@@ -5054,7 +6715,7 @@
               <a:buChar char="•"/>
             </a:pPr>
             <a:r>
-              <a:rPr lang="en-US" sz="1150" dirty="0">
+              <a:rPr lang="en-US" sz="1100" dirty="0">
                 <a:solidFill>
                   <a:srgbClr val="6B625E"/>
                 </a:solidFill>
@@ -5064,24 +6725,24 @@
               </a:rPr>
               <a:t>엑셀·별도 프로그램 설치 필요 없음</a:t>
             </a:r>
-            <a:endParaRPr lang="en-US" sz="1150" dirty="0"/>
-          </a:p>
-        </p:txBody>
-      </p:sp>
-      <p:sp>
-        <p:nvSpPr>
-          <p:cNvPr id="38" name="Shape 36"/>
-          <p:cNvSpPr/>
-          <p:nvPr/>
-        </p:nvSpPr>
-        <p:spPr>
-          <a:xfrm>
-            <a:off x="4379976" y="3639312"/>
-            <a:ext cx="3566160" cy="2304288"/>
+            <a:endParaRPr lang="en-US" sz="1100" dirty="0"/>
+          </a:p>
+        </p:txBody>
+      </p:sp>
+      <p:sp>
+        <p:nvSpPr>
+          <p:cNvPr id="47" name="Shape 45"/>
+          <p:cNvSpPr/>
+          <p:nvPr/>
+        </p:nvSpPr>
+        <p:spPr>
+          <a:xfrm>
+            <a:off x="4379976" y="3785616"/>
+            <a:ext cx="3566160" cy="2212848"/>
           </a:xfrm>
           <a:prstGeom prst="roundRect">
             <a:avLst>
-              <a:gd name="adj" fmla="val 2381"/>
+              <a:gd name="adj" fmla="val 2479"/>
             </a:avLst>
           </a:prstGeom>
           <a:solidFill>
@@ -5104,14 +6765,14 @@
       </p:sp>
       <p:sp>
         <p:nvSpPr>
-          <p:cNvPr id="39" name="Shape 37"/>
-          <p:cNvSpPr/>
-          <p:nvPr/>
-        </p:nvSpPr>
-        <p:spPr>
-          <a:xfrm>
-            <a:off x="4636008" y="3877056"/>
-            <a:ext cx="256032" cy="256032"/>
+          <p:cNvPr id="48" name="Shape 46"/>
+          <p:cNvSpPr/>
+          <p:nvPr/>
+        </p:nvSpPr>
+        <p:spPr>
+          <a:xfrm>
+            <a:off x="4636008" y="4005072"/>
+            <a:ext cx="237744" cy="237744"/>
           </a:xfrm>
           <a:prstGeom prst="ellipse">
             <a:avLst/>
@@ -5124,14 +6785,14 @@
       </p:sp>
       <p:sp>
         <p:nvSpPr>
-          <p:cNvPr id="40" name="Text 38"/>
-          <p:cNvSpPr/>
-          <p:nvPr/>
-        </p:nvSpPr>
-        <p:spPr>
-          <a:xfrm>
-            <a:off x="5001768" y="3822192"/>
-            <a:ext cx="2834640" cy="365760"/>
+          <p:cNvPr id="49" name="Text 47"/>
+          <p:cNvSpPr/>
+          <p:nvPr/>
+        </p:nvSpPr>
+        <p:spPr>
+          <a:xfrm>
+            <a:off x="4983480" y="3959352"/>
+            <a:ext cx="2834640" cy="329184"/>
           </a:xfrm>
           <a:prstGeom prst="rect">
             <a:avLst/>
@@ -5147,7 +6808,7 @@
               <a:buNone/>
             </a:pPr>
             <a:r>
-              <a:rPr lang="en-US" sz="1300" b="1" dirty="0">
+              <a:rPr lang="en-US" sz="1250" b="1" dirty="0">
                 <a:solidFill>
                   <a:srgbClr val="1F1A18"/>
                 </a:solidFill>
@@ -5157,19 +6818,19 @@
               </a:rPr>
               <a:t>보안 — 자료 외부 유출 없음</a:t>
             </a:r>
-            <a:endParaRPr lang="en-US" sz="1300" dirty="0"/>
-          </a:p>
-        </p:txBody>
-      </p:sp>
-      <p:sp>
-        <p:nvSpPr>
-          <p:cNvPr id="41" name="Text 39"/>
-          <p:cNvSpPr/>
-          <p:nvPr/>
-        </p:nvSpPr>
-        <p:spPr>
-          <a:xfrm>
-            <a:off x="4654296" y="4297680"/>
+            <a:endParaRPr lang="en-US" sz="1250" dirty="0"/>
+          </a:p>
+        </p:txBody>
+      </p:sp>
+      <p:sp>
+        <p:nvSpPr>
+          <p:cNvPr id="50" name="Text 48"/>
+          <p:cNvSpPr/>
+          <p:nvPr/>
+        </p:nvSpPr>
+        <p:spPr>
+          <a:xfrm>
+            <a:off x="4654296" y="4407408"/>
             <a:ext cx="3054096" cy="1463040"/>
           </a:xfrm>
           <a:prstGeom prst="rect">
@@ -5193,7 +6854,7 @@
               <a:buChar char="•"/>
             </a:pPr>
             <a:r>
-              <a:rPr lang="en-US" sz="1150" dirty="0">
+              <a:rPr lang="en-US" sz="1100" dirty="0">
                 <a:solidFill>
                   <a:srgbClr val="6B625E"/>
                 </a:solidFill>
@@ -5203,7 +6864,7 @@
               </a:rPr>
               <a:t>모든 계산이 사내 PC 안에서만 수행</a:t>
             </a:r>
-            <a:endParaRPr lang="en-US" sz="1150" dirty="0"/>
+            <a:endParaRPr lang="en-US" sz="1100" dirty="0"/>
           </a:p>
           <a:p>
             <a:pPr marL="342900" indent="-342900">
@@ -5217,7 +6878,7 @@
               <a:buChar char="•"/>
             </a:pPr>
             <a:r>
-              <a:rPr lang="en-US" sz="1150" dirty="0">
+              <a:rPr lang="en-US" sz="1100" dirty="0">
                 <a:solidFill>
                   <a:srgbClr val="6B625E"/>
                 </a:solidFill>
@@ -5227,7 +6888,7 @@
               </a:rPr>
               <a:t>외부 인터넷·외부 AI 서버 전송 없음</a:t>
             </a:r>
-            <a:endParaRPr lang="en-US" sz="1150" dirty="0"/>
+            <a:endParaRPr lang="en-US" sz="1100" dirty="0"/>
           </a:p>
           <a:p>
             <a:pPr marL="342900" indent="-342900">
@@ -5241,7 +6902,7 @@
               <a:buChar char="•"/>
             </a:pPr>
             <a:r>
-              <a:rPr lang="en-US" sz="1150" dirty="0">
+              <a:rPr lang="en-US" sz="1100" dirty="0">
                 <a:solidFill>
                   <a:srgbClr val="6B625E"/>
                 </a:solidFill>
@@ -5251,24 +6912,24 @@
               </a:rPr>
               <a:t>데이터는 담당자 PC에만 저장</a:t>
             </a:r>
-            <a:endParaRPr lang="en-US" sz="1150" dirty="0"/>
-          </a:p>
-        </p:txBody>
-      </p:sp>
-      <p:sp>
-        <p:nvSpPr>
-          <p:cNvPr id="42" name="Shape 40"/>
-          <p:cNvSpPr/>
-          <p:nvPr/>
-        </p:nvSpPr>
-        <p:spPr>
-          <a:xfrm>
-            <a:off x="8257032" y="3639312"/>
-            <a:ext cx="3566160" cy="2304288"/>
+            <a:endParaRPr lang="en-US" sz="1100" dirty="0"/>
+          </a:p>
+        </p:txBody>
+      </p:sp>
+      <p:sp>
+        <p:nvSpPr>
+          <p:cNvPr id="51" name="Shape 49"/>
+          <p:cNvSpPr/>
+          <p:nvPr/>
+        </p:nvSpPr>
+        <p:spPr>
+          <a:xfrm>
+            <a:off x="8257032" y="3785616"/>
+            <a:ext cx="3566160" cy="2212848"/>
           </a:xfrm>
           <a:prstGeom prst="roundRect">
             <a:avLst>
-              <a:gd name="adj" fmla="val 2381"/>
+              <a:gd name="adj" fmla="val 2479"/>
             </a:avLst>
           </a:prstGeom>
           <a:solidFill>
@@ -5291,14 +6952,14 @@
       </p:sp>
       <p:sp>
         <p:nvSpPr>
-          <p:cNvPr id="43" name="Shape 41"/>
-          <p:cNvSpPr/>
-          <p:nvPr/>
-        </p:nvSpPr>
-        <p:spPr>
-          <a:xfrm>
-            <a:off x="8513064" y="3877056"/>
-            <a:ext cx="256032" cy="256032"/>
+          <p:cNvPr id="52" name="Shape 50"/>
+          <p:cNvSpPr/>
+          <p:nvPr/>
+        </p:nvSpPr>
+        <p:spPr>
+          <a:xfrm>
+            <a:off x="8513064" y="4005072"/>
+            <a:ext cx="237744" cy="237744"/>
           </a:xfrm>
           <a:prstGeom prst="ellipse">
             <a:avLst/>
@@ -5311,14 +6972,14 @@
       </p:sp>
       <p:sp>
         <p:nvSpPr>
-          <p:cNvPr id="44" name="Text 42"/>
-          <p:cNvSpPr/>
-          <p:nvPr/>
-        </p:nvSpPr>
-        <p:spPr>
-          <a:xfrm>
-            <a:off x="8878824" y="3822192"/>
-            <a:ext cx="2834640" cy="365760"/>
+          <p:cNvPr id="53" name="Text 51"/>
+          <p:cNvSpPr/>
+          <p:nvPr/>
+        </p:nvSpPr>
+        <p:spPr>
+          <a:xfrm>
+            <a:off x="8860536" y="3959352"/>
+            <a:ext cx="2834640" cy="329184"/>
           </a:xfrm>
           <a:prstGeom prst="rect">
             <a:avLst/>
@@ -5334,7 +6995,7 @@
               <a:buNone/>
             </a:pPr>
             <a:r>
-              <a:rPr lang="en-US" sz="1300" b="1" dirty="0">
+              <a:rPr lang="en-US" sz="1250" b="1" dirty="0">
                 <a:solidFill>
                   <a:srgbClr val="1F1A18"/>
                 </a:solidFill>
@@ -5344,19 +7005,19 @@
               </a:rPr>
               <a:t>향후 계획</a:t>
             </a:r>
-            <a:endParaRPr lang="en-US" sz="1300" dirty="0"/>
-          </a:p>
-        </p:txBody>
-      </p:sp>
-      <p:sp>
-        <p:nvSpPr>
-          <p:cNvPr id="45" name="Text 43"/>
-          <p:cNvSpPr/>
-          <p:nvPr/>
-        </p:nvSpPr>
-        <p:spPr>
-          <a:xfrm>
-            <a:off x="8531352" y="4297680"/>
+            <a:endParaRPr lang="en-US" sz="1250" dirty="0"/>
+          </a:p>
+        </p:txBody>
+      </p:sp>
+      <p:sp>
+        <p:nvSpPr>
+          <p:cNvPr id="54" name="Text 52"/>
+          <p:cNvSpPr/>
+          <p:nvPr/>
+        </p:nvSpPr>
+        <p:spPr>
+          <a:xfrm>
+            <a:off x="8531352" y="4407408"/>
             <a:ext cx="3054096" cy="1463040"/>
           </a:xfrm>
           <a:prstGeom prst="rect">
@@ -5380,7 +7041,7 @@
               <a:buChar char="•"/>
             </a:pPr>
             <a:r>
-              <a:rPr lang="en-US" sz="1150" dirty="0">
+              <a:rPr lang="en-US" sz="1100" dirty="0">
                 <a:solidFill>
                   <a:srgbClr val="6B625E"/>
                 </a:solidFill>
@@ -5390,7 +7051,7 @@
               </a:rPr>
               <a:t>시운전으로 실제 데이터 검증</a:t>
             </a:r>
-            <a:endParaRPr lang="en-US" sz="1150" dirty="0"/>
+            <a:endParaRPr lang="en-US" sz="1100" dirty="0"/>
           </a:p>
           <a:p>
             <a:pPr marL="342900" indent="-342900">
@@ -5404,7 +7065,7 @@
               <a:buChar char="•"/>
             </a:pPr>
             <a:r>
-              <a:rPr lang="en-US" sz="1150" dirty="0">
+              <a:rPr lang="en-US" sz="1100" dirty="0">
                 <a:solidFill>
                   <a:srgbClr val="6B625E"/>
                 </a:solidFill>
@@ -5414,7 +7075,7 @@
               </a:rPr>
               <a:t>오류 발견 시 즉시 보완</a:t>
             </a:r>
-            <a:endParaRPr lang="en-US" sz="1150" dirty="0"/>
+            <a:endParaRPr lang="en-US" sz="1100" dirty="0"/>
           </a:p>
           <a:p>
             <a:pPr marL="342900" indent="-342900">
@@ -5428,7 +7089,7 @@
               <a:buChar char="•"/>
             </a:pPr>
             <a:r>
-              <a:rPr lang="en-US" sz="1150" dirty="0">
+              <a:rPr lang="en-US" sz="1100" dirty="0">
                 <a:solidFill>
                   <a:srgbClr val="6B625E"/>
                 </a:solidFill>
@@ -5438,24 +7099,24 @@
               </a:rPr>
               <a:t>시험 결과가 쌓일수록 정확도 향상</a:t>
             </a:r>
-            <a:endParaRPr lang="en-US" sz="1150" dirty="0"/>
-          </a:p>
-        </p:txBody>
-      </p:sp>
-      <p:sp>
-        <p:nvSpPr>
-          <p:cNvPr id="46" name="Shape 44"/>
-          <p:cNvSpPr/>
-          <p:nvPr/>
-        </p:nvSpPr>
-        <p:spPr>
-          <a:xfrm>
-            <a:off x="502920" y="6089904"/>
-            <a:ext cx="11183112" cy="548640"/>
+            <a:endParaRPr lang="en-US" sz="1100" dirty="0"/>
+          </a:p>
+        </p:txBody>
+      </p:sp>
+      <p:sp>
+        <p:nvSpPr>
+          <p:cNvPr id="55" name="Shape 53"/>
+          <p:cNvSpPr/>
+          <p:nvPr/>
+        </p:nvSpPr>
+        <p:spPr>
+          <a:xfrm>
+            <a:off x="502920" y="6144768"/>
+            <a:ext cx="11183112" cy="475488"/>
           </a:xfrm>
           <a:prstGeom prst="roundRect">
             <a:avLst>
-              <a:gd name="adj" fmla="val 10000"/>
+              <a:gd name="adj" fmla="val 11538"/>
             </a:avLst>
           </a:prstGeom>
           <a:solidFill>
@@ -5478,14 +7139,14 @@
       </p:sp>
       <p:sp>
         <p:nvSpPr>
-          <p:cNvPr id="47" name="Text 45"/>
-          <p:cNvSpPr/>
-          <p:nvPr/>
-        </p:nvSpPr>
-        <p:spPr>
-          <a:xfrm>
-            <a:off x="777240" y="6163056"/>
-            <a:ext cx="10607040" cy="402336"/>
+          <p:cNvPr id="56" name="Text 54"/>
+          <p:cNvSpPr/>
+          <p:nvPr/>
+        </p:nvSpPr>
+        <p:spPr>
+          <a:xfrm>
+            <a:off x="777240" y="6199632"/>
+            <a:ext cx="10607040" cy="365760"/>
           </a:xfrm>
           <a:prstGeom prst="rect">
             <a:avLst/>
@@ -5501,7 +7162,7 @@
               <a:buNone/>
             </a:pPr>
             <a:r>
-              <a:rPr lang="en-US" sz="1250" b="1" dirty="0">
+              <a:rPr lang="en-US" sz="1200" b="1" dirty="0">
                 <a:solidFill>
                   <a:srgbClr val="FFFFFF"/>
                 </a:solidFill>
@@ -5511,7 +7172,7 @@
               </a:rPr>
               <a:t>1차 개발 완료 — 현재 시운전 단계 · 실제 시험으로 검증하며 정확도를 계속 높여갑니다</a:t>
             </a:r>
-            <a:endParaRPr lang="en-US" sz="1250" dirty="0"/>
+            <a:endParaRPr lang="en-US" sz="1200" dirty="0"/>
           </a:p>
         </p:txBody>
       </p:sp>

--- a/docs/ppt/PPT1_공급가능용량_프로젝트보고.pptx
+++ b/docs/ppt/PPT1_공급가능용량_프로젝트보고.pptx
@@ -8,9 +8,10 @@
     <p:sldId id="256" r:id="rId2"/>
     <p:sldId id="257" r:id="rId3"/>
     <p:sldId id="258" r:id="rId4"/>
+    <p:sldId id="259" r:id="rId5"/>
   </p:sldIdLst>
   <p:notesMasterIdLst>
-    <p:notesMasterId r:id="rId5"/>
+    <p:notesMasterId r:id="rId6"/>
   </p:notesMasterIdLst>
   <p:sldSz cx="12192000" cy="6858000"/>
   <p:notesSz cx="6858000" cy="12192000"/>
@@ -504,7 +505,7 @@
           <a:p>
             <a:r>
               <a:rPr lang="en-US" dirty="0"/>
-              <a:t>전력 판매를 위해 매일 '내일 낼 수 있는 전기량'을 신고합니다. 기온에 따라 출력이 376~469MW로 크게 달라지고, 허용범위가 ±0.5%(약 ±2MW)라 정확도가 중요합니다. 기존에는 엑셀 4개를 오가며 손으로 계산했는데 이를 자동화했고, 기존 엑셀과 계산이 동일함을 오차 0.18MW로 확인했습니다.</a:t>
+              <a:t>전력 판매를 위해 매일 '내일 낼 수 있는 전기량'을 신고합니다. 기온에 따라 출력이 376~472MW로 크게 달라지고, 허용범위가 ±0.5%(약 ±2MW)라 정확도가 중요합니다. 기존에는 엑셀 4개를 오가며 손으로 계산했는데 이를 자동화했고, 기존 엑셀과 계산이 동일함을 오차 0.19MW로 확인했습니다.</a:t>
             </a:r>
             <a:endParaRPr lang="en-US" dirty="0"/>
           </a:p>
@@ -592,7 +593,7 @@
           <a:p>
             <a:r>
               <a:rPr lang="en-US" dirty="0"/>
-              <a:t>화면 5개로 구성했습니다. 계산은 2단 구조입니다 — 1단은 설계 성능곡선(기존 엑셀과 동일), 2단은 실제 시험 32건에서 배운 보정값입니다. '150개 자동 점검'은 계산식을 수정할 때마다 프로그램이 스스로 150가지 항목을 다시 검사해 계산 오류를 사전에 막는 장치입니다.</a:t>
+              <a:t>화면 5개로 구성했습니다. 계산은 2단 구조입니다 — 1단은 설계 성능곡선(기존 엑셀과 동일), 2단은 실제 시험 31건에서 배운 보정값입니다. '186개 자동 점검'은 계산식을 수정할 때마다 프로그램이 스스로 186가지 항목을 다시 검사해 계산 오류를 사전에 막는 장치입니다.</a:t>
             </a:r>
             <a:endParaRPr lang="en-US" dirty="0"/>
           </a:p>
@@ -680,7 +681,7 @@
           <a:p>
             <a:r>
               <a:rPr lang="en-US" dirty="0"/>
-              <a:t>6월 분석·엔진 개발, 7월 데이터 자동취득, 8월 프로그램 완성까지 마쳤고 현재 시운전 중입니다. 9월 정식 운영이 목표입니다. 배포는 폴더 복사만으로 가능하며, 모든 계산이 사내 PC 안에서만 이뤄져 자료가 외부로 나가지 않습니다. ※ 마일스톤 날짜는 실제 일정에 맞게 수정하세요.</a:t>
+              <a:t>종전에는 이론값과 실제값의 차이를 평균해 온도와 무관하게 같은 보정값을 일괄 적용했습니다. 그런데 실제 보정값은 온도에 따라 -3.5에서 +12.9 MW까지 폭 16.4 MW로 변합니다. 수평선 하나로는 양 끝을 동시에 맞출 수 없습니다. 겨울에는 9.7 MW 낮게 신고해 팔 수 있는 만큼 못 팔고, 여름에는 7.2 MW 높게 신고해 신고량을 못 지킬 위험이 생깁니다. 틀리는 방향이 반대라 일괄값을 올리거나 내려도 한쪽이 나빠집니다. 온도별 곡선으로 바꾸면 예측오차가 3.63에서 1.33 MW로 줄고, 안전마진을 적용하면 미달이 0건이 됩니다. ※ 비교는 '일괄'에 가능한 최선(학습 보정값 평균)을 준 값이라 실제 적용값이 이보다 좋을 수 없습니다. 재현: tool/scripts/method_compare.py</a:t>
             </a:r>
             <a:endParaRPr lang="en-US" dirty="0"/>
           </a:p>
@@ -704,6 +705,94 @@
             <a:fld id="{F7021451-1387-4CA6-816F-3879F97B5CBC}" type="slidenum">
               <a:rPr lang="en-US"/>
               <a:t>3</a:t>
+            </a:fld>
+            <a:endParaRPr lang="en-US"/>
+          </a:p>
+        </p:txBody>
+      </p:sp>
+    </p:spTree>
+    <p:extLst>
+      <p:ext uri="{BB962C8B-B14F-4D97-AF65-F5344CB8AC3E}">
+        <p14:creationId xmlns:p14="http://schemas.microsoft.com/office/powerpoint/2010/main" val="1024086991"/>
+      </p:ext>
+    </p:extLst>
+  </p:cSld>
+  <p:clrMapOvr>
+    <a:masterClrMapping/>
+  </p:clrMapOvr>
+</p:notes>
+</file>
+
+<file path=ppt/notesSlides/notesSlide4.xml><?xml version="1.0" encoding="utf-8"?>
+<p:notes xmlns:a="http://schemas.openxmlformats.org/drawingml/2006/main" xmlns:r="http://schemas.openxmlformats.org/officeDocument/2006/relationships" xmlns:p="http://schemas.openxmlformats.org/presentationml/2006/main">
+  <p:cSld>
+    <p:spTree>
+      <p:nvGrpSpPr>
+        <p:cNvPr id="1" name=""/>
+        <p:cNvGrpSpPr/>
+        <p:nvPr/>
+      </p:nvGrpSpPr>
+      <p:grpSpPr>
+        <a:xfrm>
+          <a:off x="0" y="0"/>
+          <a:ext cx="0" cy="0"/>
+          <a:chOff x="0" y="0"/>
+          <a:chExt cx="0" cy="0"/>
+        </a:xfrm>
+      </p:grpSpPr>
+      <p:sp>
+        <p:nvSpPr>
+          <p:cNvPr id="2" name="Slide Image Placeholder 1"/>
+          <p:cNvSpPr>
+            <a:spLocks noGrp="1" noRot="1" noChangeAspect="1"/>
+          </p:cNvSpPr>
+          <p:nvPr>
+            <p:ph type="sldImg"/>
+          </p:nvPr>
+        </p:nvSpPr>
+        <p:spPr/>
+      </p:sp>
+      <p:sp>
+        <p:nvSpPr>
+          <p:cNvPr id="3" name="Notes Placeholder 2"/>
+          <p:cNvSpPr>
+            <a:spLocks noGrp="1"/>
+          </p:cNvSpPr>
+          <p:nvPr>
+            <p:ph type="body" idx="1"/>
+          </p:nvPr>
+        </p:nvSpPr>
+        <p:spPr/>
+        <p:txBody>
+          <a:bodyPr/>
+          <a:lstStyle/>
+          <a:p>
+            <a:r>
+              <a:rPr lang="en-US" dirty="0"/>
+              <a:t>6월 분석·엔진 개발, 7월 데이터 자동취득, 8월 프로그램 완성까지 마쳤고 현재 시운전 중입니다. 9월 정식 운영이 목표입니다. 배포는 폴더 복사만으로 가능하며, 모든 계산이 사내 PC 안에서만 이뤄져 자료가 외부로 나가지 않습니다. ※ 마일스톤 날짜는 실제 일정에 맞게 수정하세요.</a:t>
+            </a:r>
+            <a:endParaRPr lang="en-US" dirty="0"/>
+          </a:p>
+        </p:txBody>
+      </p:sp>
+      <p:sp>
+        <p:nvSpPr>
+          <p:cNvPr id="4" name="Slide Number Placeholder 3"/>
+          <p:cNvSpPr>
+            <a:spLocks noGrp="1"/>
+          </p:cNvSpPr>
+          <p:nvPr>
+            <p:ph type="sldNum" sz="quarter" idx="10"/>
+          </p:nvPr>
+        </p:nvSpPr>
+        <p:spPr/>
+        <p:txBody>
+          <a:bodyPr/>
+          <a:lstStyle/>
+          <a:p>
+            <a:fld id="{F7021451-1387-4CA6-816F-3879F97B5CBC}" type="slidenum">
+              <a:rPr lang="en-US"/>
+              <a:t>4</a:t>
             </a:fld>
             <a:endParaRPr lang="en-US"/>
           </a:p>
@@ -1611,7 +1700,7 @@
                 <a:ea typeface="맑은 고딕" pitchFamily="34" charset="-122"/>
                 <a:cs typeface="맑은 고딕" pitchFamily="34" charset="-120"/>
               </a:rPr>
-              <a:t>출력이 376~469 MW 로 변동</a:t>
+              <a:t>출력이 376~472 MW 로 변동</a:t>
             </a:r>
             <a:endParaRPr lang="en-US" sz="1100" dirty="0"/>
           </a:p>
@@ -2202,7 +2291,7 @@
                 <a:ea typeface="맑은 고딕" pitchFamily="34" charset="-122"/>
                 <a:cs typeface="맑은 고딕" pitchFamily="34" charset="-120"/>
               </a:rPr>
-              <a:t>기존 엑셀과 동일 계산 확인 (오차 0.18 MW)</a:t>
+              <a:t>기존 엑셀과 동일 계산 확인 (오차 0.19 MW)</a:t>
             </a:r>
             <a:endParaRPr lang="en-US" sz="1250" dirty="0"/>
           </a:p>
@@ -2314,7 +2403,7 @@
                 <a:ea typeface="맑은 고딕" pitchFamily="34" charset="-122"/>
                 <a:cs typeface="맑은 고딕" pitchFamily="34" charset="-120"/>
               </a:rPr>
-              <a:t>32</a:t>
+              <a:t>31</a:t>
             </a:r>
             <a:pPr indent="0" marL="0">
               <a:buNone/>
@@ -2429,7 +2518,7 @@
                 <a:ea typeface="맑은 고딕" pitchFamily="34" charset="-122"/>
                 <a:cs typeface="맑은 고딕" pitchFamily="34" charset="-120"/>
               </a:rPr>
-              <a:t>0.18</a:t>
+              <a:t>0.19</a:t>
             </a:r>
             <a:pPr indent="0" marL="0">
               <a:buNone/>
@@ -2544,7 +2633,7 @@
                 <a:ea typeface="맑은 고딕" pitchFamily="34" charset="-122"/>
                 <a:cs typeface="맑은 고딕" pitchFamily="34" charset="-120"/>
               </a:rPr>
-              <a:t>1.24</a:t>
+              <a:t>1.33</a:t>
             </a:r>
             <a:pPr indent="0" marL="0">
               <a:buNone/>
@@ -2620,7 +2709,7 @@
                 <a:ea typeface="맑은 고딕" pitchFamily="34" charset="-122"/>
                 <a:cs typeface="맑은 고딕" pitchFamily="34" charset="-120"/>
               </a:rPr>
-              <a:t>(1.42 → 12% 개선)</a:t>
+              <a:t>(일괄 3.63 → 2.7배 개선)</a:t>
             </a:r>
             <a:endParaRPr lang="en-US" sz="950" dirty="0"/>
           </a:p>
@@ -3225,7 +3314,7 @@
       </p:sp>
       <p:pic>
         <p:nvPicPr>
-          <p:cNvPr id="12" name="Image 0" descr="/tmp/claude-0/-home-user-Test/9494b856-101a-5688-a4a1-6c122cea1ac2/scratchpad/s_run.png">    </p:cNvPr>
+          <p:cNvPr id="12" name="Image 0" descr="/home/user/Test/docs/ppt/s_run.png">    </p:cNvPr>
           <p:cNvPicPr>
             <a:picLocks noChangeAspect="1"/>
           </p:cNvPicPr>
@@ -3469,7 +3558,7 @@
       </p:sp>
       <p:pic>
         <p:nvPicPr>
-          <p:cNvPr id="19" name="Image 1" descr="/tmp/claude-0/-home-user-Test/9494b856-101a-5688-a4a1-6c122cea1ac2/scratchpad/s_status.png">    </p:cNvPr>
+          <p:cNvPr id="19" name="Image 1" descr="/home/user/Test/docs/ppt/s_status.png">    </p:cNvPr>
           <p:cNvPicPr>
             <a:picLocks noChangeAspect="1"/>
           </p:cNvPicPr>
@@ -3713,7 +3802,7 @@
       </p:sp>
       <p:pic>
         <p:nvPicPr>
-          <p:cNvPr id="26" name="Image 2" descr="/tmp/claude-0/-home-user-Test/9494b856-101a-5688-a4a1-6c122cea1ac2/scratchpad/s_list.png">    </p:cNvPr>
+          <p:cNvPr id="26" name="Image 2" descr="/home/user/Test/docs/ppt/s_list.png">    </p:cNvPr>
           <p:cNvPicPr>
             <a:picLocks noChangeAspect="1"/>
           </p:cNvPicPr>
@@ -3868,7 +3957,7 @@
                 <a:ea typeface="맑은 고딕" pitchFamily="34" charset="-122"/>
                 <a:cs typeface="맑은 고딕" pitchFamily="34" charset="-120"/>
               </a:rPr>
-              <a:t>누적 32건 관리</a:t>
+              <a:t>누적 31건 관리</a:t>
             </a:r>
             <a:endParaRPr lang="en-US" sz="950" dirty="0"/>
           </a:p>
@@ -3957,7 +4046,7 @@
       </p:sp>
       <p:pic>
         <p:nvPicPr>
-          <p:cNvPr id="33" name="Image 3" descr="/tmp/claude-0/-home-user-Test/9494b856-101a-5688-a4a1-6c122cea1ac2/scratchpad/s_sim.png">    </p:cNvPr>
+          <p:cNvPr id="33" name="Image 3" descr="/home/user/Test/docs/ppt/s_sim.png">    </p:cNvPr>
           <p:cNvPicPr>
             <a:picLocks noChangeAspect="1"/>
           </p:cNvPicPr>
@@ -4201,7 +4290,7 @@
       </p:sp>
       <p:pic>
         <p:nvPicPr>
-          <p:cNvPr id="40" name="Image 4" descr="/tmp/claude-0/-home-user-Test/9494b856-101a-5688-a4a1-6c122cea1ac2/scratchpad/s_chart.png">    </p:cNvPr>
+          <p:cNvPr id="40" name="Image 4" descr="/home/user/Test/docs/ppt/s_chart.png">    </p:cNvPr>
           <p:cNvPicPr>
             <a:picLocks noChangeAspect="1"/>
           </p:cNvPicPr>
@@ -4580,7 +4669,7 @@
                 <a:ea typeface="맑은 고딕" pitchFamily="34" charset="-122"/>
                 <a:cs typeface="맑은 고딕" pitchFamily="34" charset="-120"/>
               </a:rPr>
-              <a:t>실제 시험 32건에서 배운 차이를 반영</a:t>
+              <a:t>실제 시험 31건에서 배운 차이를 반영</a:t>
             </a:r>
             <a:endParaRPr lang="en-US" sz="1200" dirty="0"/>
           </a:p>
@@ -4780,7 +4869,7 @@
                 <a:ea typeface="맑은 고딕" pitchFamily="34" charset="-122"/>
                 <a:cs typeface="맑은 고딕" pitchFamily="34" charset="-120"/>
               </a:rPr>
-              <a:t>최대 오차 0.18 MW</a:t>
+              <a:t>최대 오차 0.19 MW</a:t>
             </a:r>
             <a:endParaRPr lang="en-US" sz="1100" dirty="0"/>
           </a:p>
@@ -4819,7 +4908,7 @@
                 <a:ea typeface="맑은 고딕" pitchFamily="34" charset="-122"/>
                 <a:cs typeface="맑은 고딕" pitchFamily="34" charset="-120"/>
               </a:rPr>
-              <a:t>예측 오차 (시험 32건 교차검증)</a:t>
+              <a:t>예측 오차 (일괄 보정 → 온도별 곡선)</a:t>
             </a:r>
             <a:endParaRPr lang="en-US" sz="1050" dirty="0"/>
           </a:p>
@@ -4858,7 +4947,7 @@
                 <a:ea typeface="맑은 고딕" pitchFamily="34" charset="-122"/>
                 <a:cs typeface="맑은 고딕" pitchFamily="34" charset="-120"/>
               </a:rPr>
-              <a:t>1.42 → 1.24 MW</a:t>
+              <a:t>3.63 → 1.33 MW</a:t>
             </a:r>
             <a:endParaRPr lang="en-US" sz="1100" dirty="0"/>
           </a:p>
@@ -5014,7 +5103,7 @@
                 <a:ea typeface="맑은 고딕" pitchFamily="34" charset="-122"/>
                 <a:cs typeface="맑은 고딕" pitchFamily="34" charset="-120"/>
               </a:rPr>
-              <a:t>150개 / 수정 시마다</a:t>
+              <a:t>186개 / 수정 시마다</a:t>
             </a:r>
             <a:endParaRPr lang="en-US" sz="1100" dirty="0"/>
           </a:p>
@@ -5053,7 +5142,7 @@
                 <a:ea typeface="맑은 고딕" pitchFamily="34" charset="-122"/>
                 <a:cs typeface="맑은 고딕" pitchFamily="34" charset="-120"/>
               </a:rPr>
-              <a:t>※ 계산식이 바뀌면 150개 항목을 자동으로 다시 검사 — 오류를 사전에 차단</a:t>
+              <a:t>※ 계산식이 바뀌면 186개 항목을 자동으로 다시 검사 — 오류를 사전에 차단</a:t>
             </a:r>
             <a:endParaRPr lang="en-US" sz="900" dirty="0"/>
           </a:p>
@@ -5183,7 +5272,7 @@
                 <a:ea typeface="맑은 고딕" pitchFamily="34" charset="-122"/>
                 <a:cs typeface="맑은 고딕" pitchFamily="34" charset="-120"/>
               </a:rPr>
-              <a:t>어디까지 왔고, 앞으로</a:t>
+              <a:t>얼마나 정확해졌나</a:t>
             </a:r>
             <a:endParaRPr lang="en-US" sz="2300" dirty="0"/>
           </a:p>
@@ -5320,7 +5409,7 @@
                 <a:ea typeface="맑은 고딕" pitchFamily="34" charset="-122"/>
                 <a:cs typeface="맑은 고딕" pitchFamily="34" charset="-120"/>
               </a:rPr>
-              <a:t>진행 현황</a:t>
+              <a:t>종전에는 온도와 무관한 보정값 하나였습니다</a:t>
             </a:r>
             <a:endParaRPr lang="en-US" sz="1350" dirty="0"/>
           </a:p>
@@ -5359,6 +5448,3917 @@
                 <a:ea typeface="맑은 고딕" pitchFamily="34" charset="-122"/>
                 <a:cs typeface="맑은 고딕" pitchFamily="34" charset="-120"/>
               </a:rPr>
+              <a:t>이론값과 실제값의 차이를 평균해 전 온도에 같은 값을 적용 — '일괄 보정값'</a:t>
+            </a:r>
+            <a:endParaRPr lang="en-US" sz="1000" dirty="0"/>
+          </a:p>
+        </p:txBody>
+      </p:sp>
+      <p:sp>
+        <p:nvSpPr>
+          <p:cNvPr id="10" name="Shape 8"/>
+          <p:cNvSpPr/>
+          <p:nvPr/>
+        </p:nvSpPr>
+        <p:spPr>
+          <a:xfrm>
+            <a:off x="502920" y="1426464"/>
+            <a:ext cx="5577840" cy="2560320"/>
+          </a:xfrm>
+          <a:prstGeom prst="roundRect">
+            <a:avLst>
+              <a:gd name="adj" fmla="val 2143"/>
+            </a:avLst>
+          </a:prstGeom>
+          <a:solidFill>
+            <a:srgbClr val="FFFFFF"/>
+          </a:solidFill>
+          <a:ln w="12700">
+            <a:solidFill>
+              <a:srgbClr val="E8E0DC"/>
+            </a:solidFill>
+            <a:prstDash val="solid"/>
+          </a:ln>
+          <a:effectLst>
+            <a:outerShdw sx="100000" sy="100000" kx="0" ky="0" algn="bl" rotWithShape="0" blurRad="101600" dist="12700" dir="5400000">
+              <a:srgbClr val="D8CFCA">
+                <a:alpha val="50000"/>
+              </a:srgbClr>
+            </a:outerShdw>
+          </a:effectLst>
+        </p:spPr>
+      </p:sp>
+      <p:sp>
+        <p:nvSpPr>
+          <p:cNvPr id="11" name="Text 9"/>
+          <p:cNvSpPr/>
+          <p:nvPr/>
+        </p:nvSpPr>
+        <p:spPr>
+          <a:xfrm>
+            <a:off x="621792" y="1517904"/>
+            <a:ext cx="2011680" cy="201168"/>
+          </a:xfrm>
+          <a:prstGeom prst="rect">
+            <a:avLst/>
+          </a:prstGeom>
+          <a:noFill/>
+          <a:ln/>
+        </p:spPr>
+        <p:txBody>
+          <a:bodyPr wrap="square" lIns="0" tIns="0" rIns="0" bIns="0" rtlCol="0" anchor="ctr"/>
+          <a:lstStyle/>
+          <a:p>
+            <a:pPr indent="0" marL="0">
+              <a:buNone/>
+            </a:pPr>
+            <a:r>
+              <a:rPr lang="en-US" sz="850" b="1" dirty="0">
+                <a:solidFill>
+                  <a:srgbClr val="6B625E"/>
+                </a:solidFill>
+                <a:latin typeface="맑은 고딕" pitchFamily="34" charset="0"/>
+                <a:ea typeface="맑은 고딕" pitchFamily="34" charset="-122"/>
+                <a:cs typeface="맑은 고딕" pitchFamily="34" charset="-120"/>
+              </a:rPr>
+              <a:t>보정값 (MW)</a:t>
+            </a:r>
+            <a:endParaRPr lang="en-US" sz="850" dirty="0"/>
+          </a:p>
+        </p:txBody>
+      </p:sp>
+      <p:sp>
+        <p:nvSpPr>
+          <p:cNvPr id="12" name="Shape 10"/>
+          <p:cNvSpPr/>
+          <p:nvPr/>
+        </p:nvSpPr>
+        <p:spPr>
+          <a:xfrm>
+            <a:off x="1225296" y="3228746"/>
+            <a:ext cx="4626864" cy="0"/>
+          </a:xfrm>
+          <a:prstGeom prst="line">
+            <a:avLst/>
+          </a:prstGeom>
+          <a:noFill/>
+          <a:ln w="12700">
+            <a:solidFill>
+              <a:srgbClr val="F1EBE7"/>
+            </a:solidFill>
+            <a:prstDash val="solid"/>
+          </a:ln>
+        </p:spPr>
+      </p:sp>
+      <p:sp>
+        <p:nvSpPr>
+          <p:cNvPr id="13" name="Text 11"/>
+          <p:cNvSpPr/>
+          <p:nvPr/>
+        </p:nvSpPr>
+        <p:spPr>
+          <a:xfrm>
+            <a:off x="713232" y="3128162"/>
+            <a:ext cx="457200" cy="201168"/>
+          </a:xfrm>
+          <a:prstGeom prst="rect">
+            <a:avLst/>
+          </a:prstGeom>
+          <a:noFill/>
+          <a:ln/>
+        </p:spPr>
+        <p:txBody>
+          <a:bodyPr wrap="square" lIns="0" tIns="0" rIns="0" bIns="0" rtlCol="0" anchor="ctr"/>
+          <a:lstStyle/>
+          <a:p>
+            <a:pPr algn="r" indent="0" marL="0">
+              <a:buNone/>
+            </a:pPr>
+            <a:r>
+              <a:rPr lang="en-US" sz="800" dirty="0">
+                <a:solidFill>
+                  <a:srgbClr val="9A908C"/>
+                </a:solidFill>
+                <a:latin typeface="맑은 고딕" pitchFamily="34" charset="0"/>
+                <a:ea typeface="맑은 고딕" pitchFamily="34" charset="-122"/>
+                <a:cs typeface="맑은 고딕" pitchFamily="34" charset="-120"/>
+              </a:rPr>
+              <a:t>-4</a:t>
+            </a:r>
+            <a:endParaRPr lang="en-US" sz="800" dirty="0"/>
+          </a:p>
+        </p:txBody>
+      </p:sp>
+      <p:sp>
+        <p:nvSpPr>
+          <p:cNvPr id="14" name="Shape 12"/>
+          <p:cNvSpPr/>
+          <p:nvPr/>
+        </p:nvSpPr>
+        <p:spPr>
+          <a:xfrm>
+            <a:off x="1225296" y="2914193"/>
+            <a:ext cx="4626864" cy="0"/>
+          </a:xfrm>
+          <a:prstGeom prst="line">
+            <a:avLst/>
+          </a:prstGeom>
+          <a:noFill/>
+          <a:ln w="12700">
+            <a:solidFill>
+              <a:srgbClr val="DCD2CC"/>
+            </a:solidFill>
+            <a:prstDash val="solid"/>
+          </a:ln>
+        </p:spPr>
+      </p:sp>
+      <p:sp>
+        <p:nvSpPr>
+          <p:cNvPr id="15" name="Text 13"/>
+          <p:cNvSpPr/>
+          <p:nvPr/>
+        </p:nvSpPr>
+        <p:spPr>
+          <a:xfrm>
+            <a:off x="713232" y="2813609"/>
+            <a:ext cx="457200" cy="201168"/>
+          </a:xfrm>
+          <a:prstGeom prst="rect">
+            <a:avLst/>
+          </a:prstGeom>
+          <a:noFill/>
+          <a:ln/>
+        </p:spPr>
+        <p:txBody>
+          <a:bodyPr wrap="square" lIns="0" tIns="0" rIns="0" bIns="0" rtlCol="0" anchor="ctr"/>
+          <a:lstStyle/>
+          <a:p>
+            <a:pPr algn="r" indent="0" marL="0">
+              <a:buNone/>
+            </a:pPr>
+            <a:r>
+              <a:rPr lang="en-US" sz="800" dirty="0">
+                <a:solidFill>
+                  <a:srgbClr val="9A908C"/>
+                </a:solidFill>
+                <a:latin typeface="맑은 고딕" pitchFamily="34" charset="0"/>
+                <a:ea typeface="맑은 고딕" pitchFamily="34" charset="-122"/>
+                <a:cs typeface="맑은 고딕" pitchFamily="34" charset="-120"/>
+              </a:rPr>
+              <a:t>0</a:t>
+            </a:r>
+            <a:endParaRPr lang="en-US" sz="800" dirty="0"/>
+          </a:p>
+        </p:txBody>
+      </p:sp>
+      <p:sp>
+        <p:nvSpPr>
+          <p:cNvPr id="16" name="Shape 14"/>
+          <p:cNvSpPr/>
+          <p:nvPr/>
+        </p:nvSpPr>
+        <p:spPr>
+          <a:xfrm>
+            <a:off x="1225296" y="2599639"/>
+            <a:ext cx="4626864" cy="0"/>
+          </a:xfrm>
+          <a:prstGeom prst="line">
+            <a:avLst/>
+          </a:prstGeom>
+          <a:noFill/>
+          <a:ln w="12700">
+            <a:solidFill>
+              <a:srgbClr val="F1EBE7"/>
+            </a:solidFill>
+            <a:prstDash val="solid"/>
+          </a:ln>
+        </p:spPr>
+      </p:sp>
+      <p:sp>
+        <p:nvSpPr>
+          <p:cNvPr id="17" name="Text 15"/>
+          <p:cNvSpPr/>
+          <p:nvPr/>
+        </p:nvSpPr>
+        <p:spPr>
+          <a:xfrm>
+            <a:off x="713232" y="2499055"/>
+            <a:ext cx="457200" cy="201168"/>
+          </a:xfrm>
+          <a:prstGeom prst="rect">
+            <a:avLst/>
+          </a:prstGeom>
+          <a:noFill/>
+          <a:ln/>
+        </p:spPr>
+        <p:txBody>
+          <a:bodyPr wrap="square" lIns="0" tIns="0" rIns="0" bIns="0" rtlCol="0" anchor="ctr"/>
+          <a:lstStyle/>
+          <a:p>
+            <a:pPr algn="r" indent="0" marL="0">
+              <a:buNone/>
+            </a:pPr>
+            <a:r>
+              <a:rPr lang="en-US" sz="800" dirty="0">
+                <a:solidFill>
+                  <a:srgbClr val="9A908C"/>
+                </a:solidFill>
+                <a:latin typeface="맑은 고딕" pitchFamily="34" charset="0"/>
+                <a:ea typeface="맑은 고딕" pitchFamily="34" charset="-122"/>
+                <a:cs typeface="맑은 고딕" pitchFamily="34" charset="-120"/>
+              </a:rPr>
+              <a:t>+4</a:t>
+            </a:r>
+            <a:endParaRPr lang="en-US" sz="800" dirty="0"/>
+          </a:p>
+        </p:txBody>
+      </p:sp>
+      <p:sp>
+        <p:nvSpPr>
+          <p:cNvPr id="18" name="Shape 16"/>
+          <p:cNvSpPr/>
+          <p:nvPr/>
+        </p:nvSpPr>
+        <p:spPr>
+          <a:xfrm>
+            <a:off x="1225296" y="2285086"/>
+            <a:ext cx="4626864" cy="0"/>
+          </a:xfrm>
+          <a:prstGeom prst="line">
+            <a:avLst/>
+          </a:prstGeom>
+          <a:noFill/>
+          <a:ln w="12700">
+            <a:solidFill>
+              <a:srgbClr val="F1EBE7"/>
+            </a:solidFill>
+            <a:prstDash val="solid"/>
+          </a:ln>
+        </p:spPr>
+      </p:sp>
+      <p:sp>
+        <p:nvSpPr>
+          <p:cNvPr id="19" name="Text 17"/>
+          <p:cNvSpPr/>
+          <p:nvPr/>
+        </p:nvSpPr>
+        <p:spPr>
+          <a:xfrm>
+            <a:off x="713232" y="2184502"/>
+            <a:ext cx="457200" cy="201168"/>
+          </a:xfrm>
+          <a:prstGeom prst="rect">
+            <a:avLst/>
+          </a:prstGeom>
+          <a:noFill/>
+          <a:ln/>
+        </p:spPr>
+        <p:txBody>
+          <a:bodyPr wrap="square" lIns="0" tIns="0" rIns="0" bIns="0" rtlCol="0" anchor="ctr"/>
+          <a:lstStyle/>
+          <a:p>
+            <a:pPr algn="r" indent="0" marL="0">
+              <a:buNone/>
+            </a:pPr>
+            <a:r>
+              <a:rPr lang="en-US" sz="800" dirty="0">
+                <a:solidFill>
+                  <a:srgbClr val="9A908C"/>
+                </a:solidFill>
+                <a:latin typeface="맑은 고딕" pitchFamily="34" charset="0"/>
+                <a:ea typeface="맑은 고딕" pitchFamily="34" charset="-122"/>
+                <a:cs typeface="맑은 고딕" pitchFamily="34" charset="-120"/>
+              </a:rPr>
+              <a:t>+8</a:t>
+            </a:r>
+            <a:endParaRPr lang="en-US" sz="800" dirty="0"/>
+          </a:p>
+        </p:txBody>
+      </p:sp>
+      <p:sp>
+        <p:nvSpPr>
+          <p:cNvPr id="20" name="Shape 18"/>
+          <p:cNvSpPr/>
+          <p:nvPr/>
+        </p:nvSpPr>
+        <p:spPr>
+          <a:xfrm>
+            <a:off x="1225296" y="1970532"/>
+            <a:ext cx="4626864" cy="0"/>
+          </a:xfrm>
+          <a:prstGeom prst="line">
+            <a:avLst/>
+          </a:prstGeom>
+          <a:noFill/>
+          <a:ln w="12700">
+            <a:solidFill>
+              <a:srgbClr val="F1EBE7"/>
+            </a:solidFill>
+            <a:prstDash val="solid"/>
+          </a:ln>
+        </p:spPr>
+      </p:sp>
+      <p:sp>
+        <p:nvSpPr>
+          <p:cNvPr id="21" name="Text 19"/>
+          <p:cNvSpPr/>
+          <p:nvPr/>
+        </p:nvSpPr>
+        <p:spPr>
+          <a:xfrm>
+            <a:off x="713232" y="1869948"/>
+            <a:ext cx="457200" cy="201168"/>
+          </a:xfrm>
+          <a:prstGeom prst="rect">
+            <a:avLst/>
+          </a:prstGeom>
+          <a:noFill/>
+          <a:ln/>
+        </p:spPr>
+        <p:txBody>
+          <a:bodyPr wrap="square" lIns="0" tIns="0" rIns="0" bIns="0" rtlCol="0" anchor="ctr"/>
+          <a:lstStyle/>
+          <a:p>
+            <a:pPr algn="r" indent="0" marL="0">
+              <a:buNone/>
+            </a:pPr>
+            <a:r>
+              <a:rPr lang="en-US" sz="800" dirty="0">
+                <a:solidFill>
+                  <a:srgbClr val="9A908C"/>
+                </a:solidFill>
+                <a:latin typeface="맑은 고딕" pitchFamily="34" charset="0"/>
+                <a:ea typeface="맑은 고딕" pitchFamily="34" charset="-122"/>
+                <a:cs typeface="맑은 고딕" pitchFamily="34" charset="-120"/>
+              </a:rPr>
+              <a:t>+12</a:t>
+            </a:r>
+            <a:endParaRPr lang="en-US" sz="800" dirty="0"/>
+          </a:p>
+        </p:txBody>
+      </p:sp>
+      <p:sp>
+        <p:nvSpPr>
+          <p:cNvPr id="22" name="Text 20"/>
+          <p:cNvSpPr/>
+          <p:nvPr/>
+        </p:nvSpPr>
+        <p:spPr>
+          <a:xfrm>
+            <a:off x="1470848" y="3392424"/>
+            <a:ext cx="548640" cy="182880"/>
+          </a:xfrm>
+          <a:prstGeom prst="rect">
+            <a:avLst/>
+          </a:prstGeom>
+          <a:noFill/>
+          <a:ln/>
+        </p:spPr>
+        <p:txBody>
+          <a:bodyPr wrap="square" lIns="0" tIns="0" rIns="0" bIns="0" rtlCol="0" anchor="ctr"/>
+          <a:lstStyle/>
+          <a:p>
+            <a:pPr algn="ctr" indent="0" marL="0">
+              <a:buNone/>
+            </a:pPr>
+            <a:r>
+              <a:rPr lang="en-US" sz="800" dirty="0">
+                <a:solidFill>
+                  <a:srgbClr val="9A908C"/>
+                </a:solidFill>
+                <a:latin typeface="맑은 고딕" pitchFamily="34" charset="0"/>
+                <a:ea typeface="맑은 고딕" pitchFamily="34" charset="-122"/>
+                <a:cs typeface="맑은 고딕" pitchFamily="34" charset="-120"/>
+              </a:rPr>
+              <a:t>0°C</a:t>
+            </a:r>
+            <a:endParaRPr lang="en-US" sz="800" dirty="0"/>
+          </a:p>
+        </p:txBody>
+      </p:sp>
+      <p:sp>
+        <p:nvSpPr>
+          <p:cNvPr id="23" name="Text 21"/>
+          <p:cNvSpPr/>
+          <p:nvPr/>
+        </p:nvSpPr>
+        <p:spPr>
+          <a:xfrm>
+            <a:off x="2510593" y="3392424"/>
+            <a:ext cx="548640" cy="182880"/>
+          </a:xfrm>
+          <a:prstGeom prst="rect">
+            <a:avLst/>
+          </a:prstGeom>
+          <a:noFill/>
+          <a:ln/>
+        </p:spPr>
+        <p:txBody>
+          <a:bodyPr wrap="square" lIns="0" tIns="0" rIns="0" bIns="0" rtlCol="0" anchor="ctr"/>
+          <a:lstStyle/>
+          <a:p>
+            <a:pPr algn="ctr" indent="0" marL="0">
+              <a:buNone/>
+            </a:pPr>
+            <a:r>
+              <a:rPr lang="en-US" sz="800" dirty="0">
+                <a:solidFill>
+                  <a:srgbClr val="9A908C"/>
+                </a:solidFill>
+                <a:latin typeface="맑은 고딕" pitchFamily="34" charset="0"/>
+                <a:ea typeface="맑은 고딕" pitchFamily="34" charset="-122"/>
+                <a:cs typeface="맑은 고딕" pitchFamily="34" charset="-120"/>
+              </a:rPr>
+              <a:t>10°C</a:t>
+            </a:r>
+            <a:endParaRPr lang="en-US" sz="800" dirty="0"/>
+          </a:p>
+        </p:txBody>
+      </p:sp>
+      <p:sp>
+        <p:nvSpPr>
+          <p:cNvPr id="24" name="Text 22"/>
+          <p:cNvSpPr/>
+          <p:nvPr/>
+        </p:nvSpPr>
+        <p:spPr>
+          <a:xfrm>
+            <a:off x="3550338" y="3392424"/>
+            <a:ext cx="548640" cy="182880"/>
+          </a:xfrm>
+          <a:prstGeom prst="rect">
+            <a:avLst/>
+          </a:prstGeom>
+          <a:noFill/>
+          <a:ln/>
+        </p:spPr>
+        <p:txBody>
+          <a:bodyPr wrap="square" lIns="0" tIns="0" rIns="0" bIns="0" rtlCol="0" anchor="ctr"/>
+          <a:lstStyle/>
+          <a:p>
+            <a:pPr algn="ctr" indent="0" marL="0">
+              <a:buNone/>
+            </a:pPr>
+            <a:r>
+              <a:rPr lang="en-US" sz="800" dirty="0">
+                <a:solidFill>
+                  <a:srgbClr val="9A908C"/>
+                </a:solidFill>
+                <a:latin typeface="맑은 고딕" pitchFamily="34" charset="0"/>
+                <a:ea typeface="맑은 고딕" pitchFamily="34" charset="-122"/>
+                <a:cs typeface="맑은 고딕" pitchFamily="34" charset="-120"/>
+              </a:rPr>
+              <a:t>20°C</a:t>
+            </a:r>
+            <a:endParaRPr lang="en-US" sz="800" dirty="0"/>
+          </a:p>
+        </p:txBody>
+      </p:sp>
+      <p:sp>
+        <p:nvSpPr>
+          <p:cNvPr id="25" name="Text 23"/>
+          <p:cNvSpPr/>
+          <p:nvPr/>
+        </p:nvSpPr>
+        <p:spPr>
+          <a:xfrm>
+            <a:off x="4590083" y="3392424"/>
+            <a:ext cx="548640" cy="182880"/>
+          </a:xfrm>
+          <a:prstGeom prst="rect">
+            <a:avLst/>
+          </a:prstGeom>
+          <a:noFill/>
+          <a:ln/>
+        </p:spPr>
+        <p:txBody>
+          <a:bodyPr wrap="square" lIns="0" tIns="0" rIns="0" bIns="0" rtlCol="0" anchor="ctr"/>
+          <a:lstStyle/>
+          <a:p>
+            <a:pPr algn="ctr" indent="0" marL="0">
+              <a:buNone/>
+            </a:pPr>
+            <a:r>
+              <a:rPr lang="en-US" sz="800" dirty="0">
+                <a:solidFill>
+                  <a:srgbClr val="9A908C"/>
+                </a:solidFill>
+                <a:latin typeface="맑은 고딕" pitchFamily="34" charset="0"/>
+                <a:ea typeface="맑은 고딕" pitchFamily="34" charset="-122"/>
+                <a:cs typeface="맑은 고딕" pitchFamily="34" charset="-120"/>
+              </a:rPr>
+              <a:t>30°C</a:t>
+            </a:r>
+            <a:endParaRPr lang="en-US" sz="800" dirty="0"/>
+          </a:p>
+        </p:txBody>
+      </p:sp>
+      <p:sp>
+        <p:nvSpPr>
+          <p:cNvPr id="26" name="Shape 24"/>
+          <p:cNvSpPr/>
+          <p:nvPr/>
+        </p:nvSpPr>
+        <p:spPr>
+          <a:xfrm>
+            <a:off x="1225296" y="2635600"/>
+            <a:ext cx="4626864" cy="0"/>
+          </a:xfrm>
+          <a:prstGeom prst="line">
+            <a:avLst/>
+          </a:prstGeom>
+          <a:noFill/>
+          <a:ln w="22225">
+            <a:solidFill>
+              <a:srgbClr val="6B625E"/>
+            </a:solidFill>
+            <a:prstDash val="dash"/>
+          </a:ln>
+        </p:spPr>
+      </p:sp>
+      <p:sp>
+        <p:nvSpPr>
+          <p:cNvPr id="27" name="Text 25"/>
+          <p:cNvSpPr/>
+          <p:nvPr/>
+        </p:nvSpPr>
+        <p:spPr>
+          <a:xfrm>
+            <a:off x="3200400" y="2416144"/>
+            <a:ext cx="2651760" cy="182880"/>
+          </a:xfrm>
+          <a:prstGeom prst="rect">
+            <a:avLst/>
+          </a:prstGeom>
+          <a:noFill/>
+          <a:ln/>
+        </p:spPr>
+        <p:txBody>
+          <a:bodyPr wrap="square" lIns="0" tIns="0" rIns="0" bIns="0" rtlCol="0" anchor="ctr"/>
+          <a:lstStyle/>
+          <a:p>
+            <a:pPr algn="r" indent="0" marL="0">
+              <a:buNone/>
+            </a:pPr>
+            <a:r>
+              <a:rPr lang="en-US" sz="800" b="1" dirty="0">
+                <a:solidFill>
+                  <a:srgbClr val="6B625E"/>
+                </a:solidFill>
+                <a:latin typeface="맑은 고딕" pitchFamily="34" charset="0"/>
+                <a:ea typeface="맑은 고딕" pitchFamily="34" charset="-122"/>
+                <a:cs typeface="맑은 고딕" pitchFamily="34" charset="-120"/>
+              </a:rPr>
+              <a:t>종전 : 일괄 보정값 +3.5 MW (온도 무관)</a:t>
+            </a:r>
+            <a:endParaRPr lang="en-US" sz="800" dirty="0"/>
+          </a:p>
+        </p:txBody>
+      </p:sp>
+      <p:sp>
+        <p:nvSpPr>
+          <p:cNvPr id="28" name="Shape 26"/>
+          <p:cNvSpPr/>
+          <p:nvPr/>
+        </p:nvSpPr>
+        <p:spPr>
+          <a:xfrm>
+            <a:off x="1497325" y="1845927"/>
+            <a:ext cx="100584" cy="100584"/>
+          </a:xfrm>
+          <a:prstGeom prst="ellipse">
+            <a:avLst/>
+          </a:prstGeom>
+          <a:solidFill>
+            <a:srgbClr val="EA002C"/>
+          </a:solidFill>
+          <a:ln w="9525">
+            <a:solidFill>
+              <a:srgbClr val="FFFFFF"/>
+            </a:solidFill>
+            <a:prstDash val="solid"/>
+          </a:ln>
+        </p:spPr>
+      </p:sp>
+      <p:sp>
+        <p:nvSpPr>
+          <p:cNvPr id="29" name="Shape 27"/>
+          <p:cNvSpPr/>
+          <p:nvPr/>
+        </p:nvSpPr>
+        <p:spPr>
+          <a:xfrm>
+            <a:off x="1544113" y="1883123"/>
+            <a:ext cx="100584" cy="100584"/>
+          </a:xfrm>
+          <a:prstGeom prst="ellipse">
+            <a:avLst/>
+          </a:prstGeom>
+          <a:solidFill>
+            <a:srgbClr val="EA002C"/>
+          </a:solidFill>
+          <a:ln w="9525">
+            <a:solidFill>
+              <a:srgbClr val="FFFFFF"/>
+            </a:solidFill>
+            <a:prstDash val="solid"/>
+          </a:ln>
+        </p:spPr>
+      </p:sp>
+      <p:sp>
+        <p:nvSpPr>
+          <p:cNvPr id="30" name="Shape 28"/>
+          <p:cNvSpPr/>
+          <p:nvPr/>
+        </p:nvSpPr>
+        <p:spPr>
+          <a:xfrm>
+            <a:off x="1892428" y="2173220"/>
+            <a:ext cx="100584" cy="100584"/>
+          </a:xfrm>
+          <a:prstGeom prst="ellipse">
+            <a:avLst/>
+          </a:prstGeom>
+          <a:solidFill>
+            <a:srgbClr val="EA002C"/>
+          </a:solidFill>
+          <a:ln w="9525">
+            <a:solidFill>
+              <a:srgbClr val="FFFFFF"/>
+            </a:solidFill>
+            <a:prstDash val="solid"/>
+          </a:ln>
+        </p:spPr>
+      </p:sp>
+      <p:sp>
+        <p:nvSpPr>
+          <p:cNvPr id="31" name="Shape 29"/>
+          <p:cNvSpPr/>
+          <p:nvPr/>
+        </p:nvSpPr>
+        <p:spPr>
+          <a:xfrm>
+            <a:off x="2100377" y="2414640"/>
+            <a:ext cx="100584" cy="100584"/>
+          </a:xfrm>
+          <a:prstGeom prst="ellipse">
+            <a:avLst/>
+          </a:prstGeom>
+          <a:solidFill>
+            <a:srgbClr val="EA002C"/>
+          </a:solidFill>
+          <a:ln w="9525">
+            <a:solidFill>
+              <a:srgbClr val="FFFFFF"/>
+            </a:solidFill>
+            <a:prstDash val="solid"/>
+          </a:ln>
+        </p:spPr>
+      </p:sp>
+      <p:sp>
+        <p:nvSpPr>
+          <p:cNvPr id="32" name="Shape 30"/>
+          <p:cNvSpPr/>
+          <p:nvPr/>
+        </p:nvSpPr>
+        <p:spPr>
+          <a:xfrm>
+            <a:off x="2318723" y="2436580"/>
+            <a:ext cx="100584" cy="100584"/>
+          </a:xfrm>
+          <a:prstGeom prst="ellipse">
+            <a:avLst/>
+          </a:prstGeom>
+          <a:solidFill>
+            <a:srgbClr val="EA002C"/>
+          </a:solidFill>
+          <a:ln w="9525">
+            <a:solidFill>
+              <a:srgbClr val="FFFFFF"/>
+            </a:solidFill>
+            <a:prstDash val="solid"/>
+          </a:ln>
+        </p:spPr>
+      </p:sp>
+      <p:sp>
+        <p:nvSpPr>
+          <p:cNvPr id="33" name="Shape 31"/>
+          <p:cNvSpPr/>
+          <p:nvPr/>
+        </p:nvSpPr>
+        <p:spPr>
+          <a:xfrm>
+            <a:off x="2422698" y="2472517"/>
+            <a:ext cx="100584" cy="100584"/>
+          </a:xfrm>
+          <a:prstGeom prst="ellipse">
+            <a:avLst/>
+          </a:prstGeom>
+          <a:solidFill>
+            <a:srgbClr val="EA002C"/>
+          </a:solidFill>
+          <a:ln w="9525">
+            <a:solidFill>
+              <a:srgbClr val="FFFFFF"/>
+            </a:solidFill>
+            <a:prstDash val="solid"/>
+          </a:ln>
+        </p:spPr>
+      </p:sp>
+      <p:sp>
+        <p:nvSpPr>
+          <p:cNvPr id="34" name="Shape 32"/>
+          <p:cNvSpPr/>
+          <p:nvPr/>
+        </p:nvSpPr>
+        <p:spPr>
+          <a:xfrm>
+            <a:off x="2526672" y="2505860"/>
+            <a:ext cx="100584" cy="100584"/>
+          </a:xfrm>
+          <a:prstGeom prst="ellipse">
+            <a:avLst/>
+          </a:prstGeom>
+          <a:solidFill>
+            <a:srgbClr val="EA002C"/>
+          </a:solidFill>
+          <a:ln w="9525">
+            <a:solidFill>
+              <a:srgbClr val="FFFFFF"/>
+            </a:solidFill>
+            <a:prstDash val="solid"/>
+          </a:ln>
+        </p:spPr>
+      </p:sp>
+      <p:sp>
+        <p:nvSpPr>
+          <p:cNvPr id="35" name="Shape 33"/>
+          <p:cNvSpPr/>
+          <p:nvPr/>
+        </p:nvSpPr>
+        <p:spPr>
+          <a:xfrm>
+            <a:off x="2620249" y="2373276"/>
+            <a:ext cx="100584" cy="100584"/>
+          </a:xfrm>
+          <a:prstGeom prst="ellipse">
+            <a:avLst/>
+          </a:prstGeom>
+          <a:solidFill>
+            <a:srgbClr val="EA002C"/>
+          </a:solidFill>
+          <a:ln w="9525">
+            <a:solidFill>
+              <a:srgbClr val="FFFFFF"/>
+            </a:solidFill>
+            <a:prstDash val="solid"/>
+          </a:ln>
+        </p:spPr>
+      </p:sp>
+      <p:sp>
+        <p:nvSpPr>
+          <p:cNvPr id="36" name="Shape 34"/>
+          <p:cNvSpPr/>
+          <p:nvPr/>
+        </p:nvSpPr>
+        <p:spPr>
+          <a:xfrm>
+            <a:off x="2682634" y="2576320"/>
+            <a:ext cx="100584" cy="100584"/>
+          </a:xfrm>
+          <a:prstGeom prst="ellipse">
+            <a:avLst/>
+          </a:prstGeom>
+          <a:solidFill>
+            <a:srgbClr val="EA002C"/>
+          </a:solidFill>
+          <a:ln w="9525">
+            <a:solidFill>
+              <a:srgbClr val="FFFFFF"/>
+            </a:solidFill>
+            <a:prstDash val="solid"/>
+          </a:ln>
+        </p:spPr>
+      </p:sp>
+      <p:sp>
+        <p:nvSpPr>
+          <p:cNvPr id="37" name="Shape 35"/>
+          <p:cNvSpPr/>
+          <p:nvPr/>
+        </p:nvSpPr>
+        <p:spPr>
+          <a:xfrm>
+            <a:off x="2859390" y="2459385"/>
+            <a:ext cx="100584" cy="100584"/>
+          </a:xfrm>
+          <a:prstGeom prst="ellipse">
+            <a:avLst/>
+          </a:prstGeom>
+          <a:solidFill>
+            <a:srgbClr val="F0431F"/>
+          </a:solidFill>
+          <a:ln w="9525">
+            <a:solidFill>
+              <a:srgbClr val="FFFFFF"/>
+            </a:solidFill>
+            <a:prstDash val="solid"/>
+          </a:ln>
+        </p:spPr>
+      </p:sp>
+      <p:sp>
+        <p:nvSpPr>
+          <p:cNvPr id="38" name="Shape 36"/>
+          <p:cNvSpPr/>
+          <p:nvPr/>
+        </p:nvSpPr>
+        <p:spPr>
+          <a:xfrm>
+            <a:off x="3015352" y="2483763"/>
+            <a:ext cx="100584" cy="100584"/>
+          </a:xfrm>
+          <a:prstGeom prst="ellipse">
+            <a:avLst/>
+          </a:prstGeom>
+          <a:solidFill>
+            <a:srgbClr val="F0431F"/>
+          </a:solidFill>
+          <a:ln w="9525">
+            <a:solidFill>
+              <a:srgbClr val="FFFFFF"/>
+            </a:solidFill>
+            <a:prstDash val="solid"/>
+          </a:ln>
+        </p:spPr>
+      </p:sp>
+      <p:sp>
+        <p:nvSpPr>
+          <p:cNvPr id="39" name="Shape 37"/>
+          <p:cNvSpPr/>
+          <p:nvPr/>
+        </p:nvSpPr>
+        <p:spPr>
+          <a:xfrm>
+            <a:off x="3046544" y="2319409"/>
+            <a:ext cx="100584" cy="100584"/>
+          </a:xfrm>
+          <a:prstGeom prst="ellipse">
+            <a:avLst/>
+          </a:prstGeom>
+          <a:solidFill>
+            <a:srgbClr val="F0431F"/>
+          </a:solidFill>
+          <a:ln w="9525">
+            <a:solidFill>
+              <a:srgbClr val="FFFFFF"/>
+            </a:solidFill>
+            <a:prstDash val="solid"/>
+          </a:ln>
+        </p:spPr>
+      </p:sp>
+      <p:sp>
+        <p:nvSpPr>
+          <p:cNvPr id="40" name="Shape 38"/>
+          <p:cNvSpPr/>
+          <p:nvPr/>
+        </p:nvSpPr>
+        <p:spPr>
+          <a:xfrm>
+            <a:off x="3077737" y="2354403"/>
+            <a:ext cx="100584" cy="100584"/>
+          </a:xfrm>
+          <a:prstGeom prst="ellipse">
+            <a:avLst/>
+          </a:prstGeom>
+          <a:solidFill>
+            <a:srgbClr val="F0431F"/>
+          </a:solidFill>
+          <a:ln w="9525">
+            <a:solidFill>
+              <a:srgbClr val="FFFFFF"/>
+            </a:solidFill>
+            <a:prstDash val="solid"/>
+          </a:ln>
+        </p:spPr>
+      </p:sp>
+      <p:sp>
+        <p:nvSpPr>
+          <p:cNvPr id="41" name="Shape 39"/>
+          <p:cNvSpPr/>
+          <p:nvPr/>
+        </p:nvSpPr>
+        <p:spPr>
+          <a:xfrm>
+            <a:off x="3192109" y="2285830"/>
+            <a:ext cx="100584" cy="100584"/>
+          </a:xfrm>
+          <a:prstGeom prst="ellipse">
+            <a:avLst/>
+          </a:prstGeom>
+          <a:solidFill>
+            <a:srgbClr val="F0431F"/>
+          </a:solidFill>
+          <a:ln w="9525">
+            <a:solidFill>
+              <a:srgbClr val="FFFFFF"/>
+            </a:solidFill>
+            <a:prstDash val="solid"/>
+          </a:ln>
+        </p:spPr>
+      </p:sp>
+      <p:sp>
+        <p:nvSpPr>
+          <p:cNvPr id="42" name="Shape 40"/>
+          <p:cNvSpPr/>
+          <p:nvPr/>
+        </p:nvSpPr>
+        <p:spPr>
+          <a:xfrm>
+            <a:off x="3202506" y="2391205"/>
+            <a:ext cx="100584" cy="100584"/>
+          </a:xfrm>
+          <a:prstGeom prst="ellipse">
+            <a:avLst/>
+          </a:prstGeom>
+          <a:solidFill>
+            <a:srgbClr val="F0431F"/>
+          </a:solidFill>
+          <a:ln w="9525">
+            <a:solidFill>
+              <a:srgbClr val="FFFFFF"/>
+            </a:solidFill>
+            <a:prstDash val="solid"/>
+          </a:ln>
+        </p:spPr>
+      </p:sp>
+      <p:sp>
+        <p:nvSpPr>
+          <p:cNvPr id="43" name="Shape 41"/>
+          <p:cNvSpPr/>
+          <p:nvPr/>
+        </p:nvSpPr>
+        <p:spPr>
+          <a:xfrm>
+            <a:off x="3264891" y="2424469"/>
+            <a:ext cx="100584" cy="100584"/>
+          </a:xfrm>
+          <a:prstGeom prst="ellipse">
+            <a:avLst/>
+          </a:prstGeom>
+          <a:solidFill>
+            <a:srgbClr val="F0431F"/>
+          </a:solidFill>
+          <a:ln w="9525">
+            <a:solidFill>
+              <a:srgbClr val="FFFFFF"/>
+            </a:solidFill>
+            <a:prstDash val="solid"/>
+          </a:ln>
+        </p:spPr>
+      </p:sp>
+      <p:sp>
+        <p:nvSpPr>
+          <p:cNvPr id="44" name="Shape 42"/>
+          <p:cNvSpPr/>
+          <p:nvPr/>
+        </p:nvSpPr>
+        <p:spPr>
+          <a:xfrm>
+            <a:off x="3420853" y="2441927"/>
+            <a:ext cx="100584" cy="100584"/>
+          </a:xfrm>
+          <a:prstGeom prst="ellipse">
+            <a:avLst/>
+          </a:prstGeom>
+          <a:solidFill>
+            <a:srgbClr val="F0431F"/>
+          </a:solidFill>
+          <a:ln w="9525">
+            <a:solidFill>
+              <a:srgbClr val="FFFFFF"/>
+            </a:solidFill>
+            <a:prstDash val="solid"/>
+          </a:ln>
+        </p:spPr>
+      </p:sp>
+      <p:sp>
+        <p:nvSpPr>
+          <p:cNvPr id="45" name="Shape 43"/>
+          <p:cNvSpPr/>
+          <p:nvPr/>
+        </p:nvSpPr>
+        <p:spPr>
+          <a:xfrm>
+            <a:off x="3431250" y="2415426"/>
+            <a:ext cx="100584" cy="100584"/>
+          </a:xfrm>
+          <a:prstGeom prst="ellipse">
+            <a:avLst/>
+          </a:prstGeom>
+          <a:solidFill>
+            <a:srgbClr val="F0431F"/>
+          </a:solidFill>
+          <a:ln w="9525">
+            <a:solidFill>
+              <a:srgbClr val="FFFFFF"/>
+            </a:solidFill>
+            <a:prstDash val="solid"/>
+          </a:ln>
+        </p:spPr>
+      </p:sp>
+      <p:sp>
+        <p:nvSpPr>
+          <p:cNvPr id="46" name="Shape 44"/>
+          <p:cNvSpPr/>
+          <p:nvPr/>
+        </p:nvSpPr>
+        <p:spPr>
+          <a:xfrm>
+            <a:off x="3909533" y="2657947"/>
+            <a:ext cx="100584" cy="100584"/>
+          </a:xfrm>
+          <a:prstGeom prst="ellipse">
+            <a:avLst/>
+          </a:prstGeom>
+          <a:solidFill>
+            <a:srgbClr val="F0431F"/>
+          </a:solidFill>
+          <a:ln w="9525">
+            <a:solidFill>
+              <a:srgbClr val="FFFFFF"/>
+            </a:solidFill>
+            <a:prstDash val="solid"/>
+          </a:ln>
+        </p:spPr>
+      </p:sp>
+      <p:sp>
+        <p:nvSpPr>
+          <p:cNvPr id="47" name="Shape 45"/>
+          <p:cNvSpPr/>
+          <p:nvPr/>
+        </p:nvSpPr>
+        <p:spPr>
+          <a:xfrm>
+            <a:off x="4304636" y="3029749"/>
+            <a:ext cx="100584" cy="100584"/>
+          </a:xfrm>
+          <a:prstGeom prst="ellipse">
+            <a:avLst/>
+          </a:prstGeom>
+          <a:solidFill>
+            <a:srgbClr val="F47725"/>
+          </a:solidFill>
+          <a:ln w="9525">
+            <a:solidFill>
+              <a:srgbClr val="FFFFFF"/>
+            </a:solidFill>
+            <a:prstDash val="solid"/>
+          </a:ln>
+        </p:spPr>
+      </p:sp>
+      <p:sp>
+        <p:nvSpPr>
+          <p:cNvPr id="48" name="Shape 46"/>
+          <p:cNvSpPr/>
+          <p:nvPr/>
+        </p:nvSpPr>
+        <p:spPr>
+          <a:xfrm>
+            <a:off x="4325430" y="3122149"/>
+            <a:ext cx="100584" cy="100584"/>
+          </a:xfrm>
+          <a:prstGeom prst="ellipse">
+            <a:avLst/>
+          </a:prstGeom>
+          <a:solidFill>
+            <a:srgbClr val="F47725"/>
+          </a:solidFill>
+          <a:ln w="9525">
+            <a:solidFill>
+              <a:srgbClr val="FFFFFF"/>
+            </a:solidFill>
+            <a:prstDash val="solid"/>
+          </a:ln>
+        </p:spPr>
+      </p:sp>
+      <p:sp>
+        <p:nvSpPr>
+          <p:cNvPr id="49" name="Shape 47"/>
+          <p:cNvSpPr/>
+          <p:nvPr/>
+        </p:nvSpPr>
+        <p:spPr>
+          <a:xfrm>
+            <a:off x="4543777" y="3074023"/>
+            <a:ext cx="100584" cy="100584"/>
+          </a:xfrm>
+          <a:prstGeom prst="ellipse">
+            <a:avLst/>
+          </a:prstGeom>
+          <a:solidFill>
+            <a:srgbClr val="F47725"/>
+          </a:solidFill>
+          <a:ln w="9525">
+            <a:solidFill>
+              <a:srgbClr val="FFFFFF"/>
+            </a:solidFill>
+            <a:prstDash val="solid"/>
+          </a:ln>
+        </p:spPr>
+      </p:sp>
+      <p:sp>
+        <p:nvSpPr>
+          <p:cNvPr id="50" name="Shape 48"/>
+          <p:cNvSpPr/>
+          <p:nvPr/>
+        </p:nvSpPr>
+        <p:spPr>
+          <a:xfrm>
+            <a:off x="4834905" y="2990115"/>
+            <a:ext cx="100584" cy="100584"/>
+          </a:xfrm>
+          <a:prstGeom prst="ellipse">
+            <a:avLst/>
+          </a:prstGeom>
+          <a:solidFill>
+            <a:srgbClr val="F47725"/>
+          </a:solidFill>
+          <a:ln w="9525">
+            <a:solidFill>
+              <a:srgbClr val="FFFFFF"/>
+            </a:solidFill>
+            <a:prstDash val="solid"/>
+          </a:ln>
+        </p:spPr>
+      </p:sp>
+      <p:sp>
+        <p:nvSpPr>
+          <p:cNvPr id="51" name="Shape 49"/>
+          <p:cNvSpPr/>
+          <p:nvPr/>
+        </p:nvSpPr>
+        <p:spPr>
+          <a:xfrm>
+            <a:off x="4886893" y="3135125"/>
+            <a:ext cx="100584" cy="100584"/>
+          </a:xfrm>
+          <a:prstGeom prst="ellipse">
+            <a:avLst/>
+          </a:prstGeom>
+          <a:solidFill>
+            <a:srgbClr val="F47725"/>
+          </a:solidFill>
+          <a:ln w="9525">
+            <a:solidFill>
+              <a:srgbClr val="FFFFFF"/>
+            </a:solidFill>
+            <a:prstDash val="solid"/>
+          </a:ln>
+        </p:spPr>
+      </p:sp>
+      <p:sp>
+        <p:nvSpPr>
+          <p:cNvPr id="52" name="Shape 50"/>
+          <p:cNvSpPr/>
+          <p:nvPr/>
+        </p:nvSpPr>
+        <p:spPr>
+          <a:xfrm>
+            <a:off x="5094842" y="3063721"/>
+            <a:ext cx="100584" cy="100584"/>
+          </a:xfrm>
+          <a:prstGeom prst="ellipse">
+            <a:avLst/>
+          </a:prstGeom>
+          <a:solidFill>
+            <a:srgbClr val="F47725"/>
+          </a:solidFill>
+          <a:ln w="9525">
+            <a:solidFill>
+              <a:srgbClr val="FFFFFF"/>
+            </a:solidFill>
+            <a:prstDash val="solid"/>
+          </a:ln>
+        </p:spPr>
+      </p:sp>
+      <p:sp>
+        <p:nvSpPr>
+          <p:cNvPr id="53" name="Shape 51"/>
+          <p:cNvSpPr/>
+          <p:nvPr/>
+        </p:nvSpPr>
+        <p:spPr>
+          <a:xfrm>
+            <a:off x="5105239" y="2697895"/>
+            <a:ext cx="100584" cy="100584"/>
+          </a:xfrm>
+          <a:prstGeom prst="ellipse">
+            <a:avLst/>
+          </a:prstGeom>
+          <a:solidFill>
+            <a:srgbClr val="F47725"/>
+          </a:solidFill>
+          <a:ln w="9525">
+            <a:solidFill>
+              <a:srgbClr val="FFFFFF"/>
+            </a:solidFill>
+            <a:prstDash val="solid"/>
+          </a:ln>
+        </p:spPr>
+      </p:sp>
+      <p:sp>
+        <p:nvSpPr>
+          <p:cNvPr id="54" name="Shape 52"/>
+          <p:cNvSpPr/>
+          <p:nvPr/>
+        </p:nvSpPr>
+        <p:spPr>
+          <a:xfrm>
+            <a:off x="5105239" y="2754515"/>
+            <a:ext cx="100584" cy="100584"/>
+          </a:xfrm>
+          <a:prstGeom prst="ellipse">
+            <a:avLst/>
+          </a:prstGeom>
+          <a:solidFill>
+            <a:srgbClr val="F47725"/>
+          </a:solidFill>
+          <a:ln w="9525">
+            <a:solidFill>
+              <a:srgbClr val="FFFFFF"/>
+            </a:solidFill>
+            <a:prstDash val="solid"/>
+          </a:ln>
+        </p:spPr>
+      </p:sp>
+      <p:sp>
+        <p:nvSpPr>
+          <p:cNvPr id="55" name="Shape 53"/>
+          <p:cNvSpPr/>
+          <p:nvPr/>
+        </p:nvSpPr>
+        <p:spPr>
+          <a:xfrm>
+            <a:off x="5188419" y="2810584"/>
+            <a:ext cx="100584" cy="100584"/>
+          </a:xfrm>
+          <a:prstGeom prst="ellipse">
+            <a:avLst/>
+          </a:prstGeom>
+          <a:solidFill>
+            <a:srgbClr val="F47725"/>
+          </a:solidFill>
+          <a:ln w="9525">
+            <a:solidFill>
+              <a:srgbClr val="FFFFFF"/>
+            </a:solidFill>
+            <a:prstDash val="solid"/>
+          </a:ln>
+        </p:spPr>
+      </p:sp>
+      <p:sp>
+        <p:nvSpPr>
+          <p:cNvPr id="56" name="Shape 54"/>
+          <p:cNvSpPr/>
+          <p:nvPr/>
+        </p:nvSpPr>
+        <p:spPr>
+          <a:xfrm>
+            <a:off x="5209214" y="3046892"/>
+            <a:ext cx="100584" cy="100584"/>
+          </a:xfrm>
+          <a:prstGeom prst="ellipse">
+            <a:avLst/>
+          </a:prstGeom>
+          <a:solidFill>
+            <a:srgbClr val="F47725"/>
+          </a:solidFill>
+          <a:ln w="9525">
+            <a:solidFill>
+              <a:srgbClr val="FFFFFF"/>
+            </a:solidFill>
+            <a:prstDash val="solid"/>
+          </a:ln>
+        </p:spPr>
+      </p:sp>
+      <p:sp>
+        <p:nvSpPr>
+          <p:cNvPr id="57" name="Shape 55"/>
+          <p:cNvSpPr/>
+          <p:nvPr/>
+        </p:nvSpPr>
+        <p:spPr>
+          <a:xfrm>
+            <a:off x="5292393" y="2805787"/>
+            <a:ext cx="100584" cy="100584"/>
+          </a:xfrm>
+          <a:prstGeom prst="ellipse">
+            <a:avLst/>
+          </a:prstGeom>
+          <a:solidFill>
+            <a:srgbClr val="F47725"/>
+          </a:solidFill>
+          <a:ln w="9525">
+            <a:solidFill>
+              <a:srgbClr val="FFFFFF"/>
+            </a:solidFill>
+            <a:prstDash val="solid"/>
+          </a:ln>
+        </p:spPr>
+      </p:sp>
+      <p:sp>
+        <p:nvSpPr>
+          <p:cNvPr id="58" name="Shape 56"/>
+          <p:cNvSpPr/>
+          <p:nvPr/>
+        </p:nvSpPr>
+        <p:spPr>
+          <a:xfrm>
+            <a:off x="5448355" y="2698760"/>
+            <a:ext cx="100584" cy="100584"/>
+          </a:xfrm>
+          <a:prstGeom prst="ellipse">
+            <a:avLst/>
+          </a:prstGeom>
+          <a:solidFill>
+            <a:srgbClr val="F47725"/>
+          </a:solidFill>
+          <a:ln w="9525">
+            <a:solidFill>
+              <a:srgbClr val="FFFFFF"/>
+            </a:solidFill>
+            <a:prstDash val="solid"/>
+          </a:ln>
+        </p:spPr>
+      </p:sp>
+      <p:sp>
+        <p:nvSpPr>
+          <p:cNvPr id="59" name="Shape 57"/>
+          <p:cNvSpPr/>
+          <p:nvPr/>
+        </p:nvSpPr>
+        <p:spPr>
+          <a:xfrm>
+            <a:off x="1547617" y="1896219"/>
+            <a:ext cx="0" cy="739381"/>
+          </a:xfrm>
+          <a:prstGeom prst="line">
+            <a:avLst/>
+          </a:prstGeom>
+          <a:noFill/>
+          <a:ln w="15875">
+            <a:solidFill>
+              <a:srgbClr val="1F1A18"/>
+            </a:solidFill>
+            <a:prstDash val="solid"/>
+          </a:ln>
+        </p:spPr>
+      </p:sp>
+      <p:sp>
+        <p:nvSpPr>
+          <p:cNvPr id="60" name="Shape 58"/>
+          <p:cNvSpPr/>
+          <p:nvPr/>
+        </p:nvSpPr>
+        <p:spPr>
+          <a:xfrm>
+            <a:off x="4937185" y="2635600"/>
+            <a:ext cx="0" cy="549817"/>
+          </a:xfrm>
+          <a:prstGeom prst="line">
+            <a:avLst/>
+          </a:prstGeom>
+          <a:noFill/>
+          <a:ln w="15875">
+            <a:solidFill>
+              <a:srgbClr val="1F1A18"/>
+            </a:solidFill>
+            <a:prstDash val="solid"/>
+          </a:ln>
+        </p:spPr>
+      </p:sp>
+      <p:sp>
+        <p:nvSpPr>
+          <p:cNvPr id="61" name="Text 59"/>
+          <p:cNvSpPr/>
+          <p:nvPr/>
+        </p:nvSpPr>
+        <p:spPr>
+          <a:xfrm>
+            <a:off x="777240" y="3593592"/>
+            <a:ext cx="5029200" cy="365760"/>
+          </a:xfrm>
+          <a:prstGeom prst="rect">
+            <a:avLst/>
+          </a:prstGeom>
+          <a:noFill/>
+          <a:ln/>
+        </p:spPr>
+        <p:txBody>
+          <a:bodyPr wrap="square" lIns="0" tIns="0" rIns="0" bIns="0" rtlCol="0" anchor="ctr"/>
+          <a:lstStyle/>
+          <a:p>
+            <a:pPr indent="0" marL="0">
+              <a:lnSpc>
+                <a:spcPts val="1200"/>
+              </a:lnSpc>
+              <a:buNone/>
+            </a:pPr>
+            <a:r>
+              <a:rPr lang="en-US" sz="900" dirty="0">
+                <a:solidFill>
+                  <a:srgbClr val="6B625E"/>
+                </a:solidFill>
+                <a:latin typeface="맑은 고딕" pitchFamily="34" charset="0"/>
+                <a:ea typeface="맑은 고딕" pitchFamily="34" charset="-122"/>
+                <a:cs typeface="맑은 고딕" pitchFamily="34" charset="-120"/>
+              </a:rPr>
+              <a:t>실측 31건 — 보정값이 -3.4 ~ +12.9 MW (폭 16.4 MW) 로 변합니다. </a:t>
+            </a:r>
+            <a:pPr indent="0" marL="0">
+              <a:lnSpc>
+                <a:spcPts val="1200"/>
+              </a:lnSpc>
+              <a:buNone/>
+            </a:pPr>
+            <a:r>
+              <a:rPr lang="en-US" sz="900" b="1" dirty="0">
+                <a:solidFill>
+                  <a:srgbClr val="1F1A18"/>
+                </a:solidFill>
+                <a:latin typeface="맑은 고딕" pitchFamily="34" charset="0"/>
+                <a:ea typeface="맑은 고딕" pitchFamily="34" charset="-122"/>
+                <a:cs typeface="맑은 고딕" pitchFamily="34" charset="-120"/>
+              </a:rPr>
+              <a:t>수평선 하나로는 양 끝을 동시에 맞출 수 없습니다.</a:t>
+            </a:r>
+            <a:pPr indent="0" marL="0">
+              <a:lnSpc>
+                <a:spcPts val="1200"/>
+              </a:lnSpc>
+              <a:buNone/>
+            </a:pPr>
+            <a:endParaRPr lang="en-US" sz="900" dirty="0"/>
+          </a:p>
+          <a:p>
+            <a:pPr indent="0" marL="0">
+              <a:lnSpc>
+                <a:spcPts val="1200"/>
+              </a:lnSpc>
+              <a:buNone/>
+            </a:pPr>
+            <a:r>
+              <a:rPr lang="en-US" sz="900" dirty="0">
+                <a:solidFill>
+                  <a:srgbClr val="9A908C"/>
+                </a:solidFill>
+                <a:latin typeface="맑은 고딕" pitchFamily="34" charset="0"/>
+                <a:ea typeface="맑은 고딕" pitchFamily="34" charset="-122"/>
+                <a:cs typeface="맑은 고딕" pitchFamily="34" charset="-120"/>
+              </a:rPr>
+              <a:t>세로선 = 양 끝에서 어긋나는 폭 : 겨울 +9.4 MW · 여름 -7.0 MW</a:t>
+            </a:r>
+            <a:endParaRPr lang="en-US" sz="900" dirty="0"/>
+          </a:p>
+        </p:txBody>
+      </p:sp>
+      <p:sp>
+        <p:nvSpPr>
+          <p:cNvPr id="62" name="Shape 60"/>
+          <p:cNvSpPr/>
+          <p:nvPr/>
+        </p:nvSpPr>
+        <p:spPr>
+          <a:xfrm>
+            <a:off x="6291072" y="1426464"/>
+            <a:ext cx="5394960" cy="2560320"/>
+          </a:xfrm>
+          <a:prstGeom prst="roundRect">
+            <a:avLst>
+              <a:gd name="adj" fmla="val 2143"/>
+            </a:avLst>
+          </a:prstGeom>
+          <a:solidFill>
+            <a:srgbClr val="FFFFFF"/>
+          </a:solidFill>
+          <a:ln w="12700">
+            <a:solidFill>
+              <a:srgbClr val="E8E0DC"/>
+            </a:solidFill>
+            <a:prstDash val="solid"/>
+          </a:ln>
+          <a:effectLst>
+            <a:outerShdw sx="100000" sy="100000" kx="0" ky="0" algn="bl" rotWithShape="0" blurRad="101600" dist="12700" dir="5400000">
+              <a:srgbClr val="D8CFCA">
+                <a:alpha val="50000"/>
+              </a:srgbClr>
+            </a:outerShdw>
+          </a:effectLst>
+        </p:spPr>
+      </p:sp>
+      <p:sp>
+        <p:nvSpPr>
+          <p:cNvPr id="63" name="Text 61"/>
+          <p:cNvSpPr/>
+          <p:nvPr/>
+        </p:nvSpPr>
+        <p:spPr>
+          <a:xfrm>
+            <a:off x="6583680" y="1591056"/>
+            <a:ext cx="4846320" cy="256032"/>
+          </a:xfrm>
+          <a:prstGeom prst="rect">
+            <a:avLst/>
+          </a:prstGeom>
+          <a:noFill/>
+          <a:ln/>
+        </p:spPr>
+        <p:txBody>
+          <a:bodyPr wrap="square" lIns="0" tIns="0" rIns="0" bIns="0" rtlCol="0" anchor="ctr"/>
+          <a:lstStyle/>
+          <a:p>
+            <a:pPr indent="0" marL="0">
+              <a:buNone/>
+            </a:pPr>
+            <a:r>
+              <a:rPr lang="en-US" sz="1150" b="1" dirty="0">
+                <a:solidFill>
+                  <a:srgbClr val="1F1A18"/>
+                </a:solidFill>
+                <a:latin typeface="맑은 고딕" pitchFamily="34" charset="0"/>
+                <a:ea typeface="맑은 고딕" pitchFamily="34" charset="-122"/>
+                <a:cs typeface="맑은 고딕" pitchFamily="34" charset="-120"/>
+              </a:rPr>
+              <a:t>같은 데이터로 비교 — 시험 31건 교차검증</a:t>
+            </a:r>
+            <a:endParaRPr lang="en-US" sz="1150" dirty="0"/>
+          </a:p>
+        </p:txBody>
+      </p:sp>
+      <p:sp>
+        <p:nvSpPr>
+          <p:cNvPr id="64" name="Text 62"/>
+          <p:cNvSpPr/>
+          <p:nvPr/>
+        </p:nvSpPr>
+        <p:spPr>
+          <a:xfrm>
+            <a:off x="6583680" y="1901952"/>
+            <a:ext cx="2048256" cy="237744"/>
+          </a:xfrm>
+          <a:prstGeom prst="rect">
+            <a:avLst/>
+          </a:prstGeom>
+          <a:noFill/>
+          <a:ln/>
+        </p:spPr>
+        <p:txBody>
+          <a:bodyPr wrap="square" lIns="0" tIns="0" rIns="0" bIns="0" rtlCol="0" anchor="ctr"/>
+          <a:lstStyle/>
+          <a:p>
+            <a:pPr algn="l" indent="0" marL="0">
+              <a:buNone/>
+            </a:pPr>
+            <a:r>
+              <a:rPr lang="en-US" sz="900" b="1" dirty="0">
+                <a:solidFill>
+                  <a:srgbClr val="9A908C"/>
+                </a:solidFill>
+                <a:latin typeface="맑은 고딕" pitchFamily="34" charset="0"/>
+                <a:ea typeface="맑은 고딕" pitchFamily="34" charset="-122"/>
+                <a:cs typeface="맑은 고딕" pitchFamily="34" charset="-120"/>
+              </a:rPr>
+              <a:t>보정 방식</a:t>
+            </a:r>
+            <a:endParaRPr lang="en-US" sz="900" dirty="0"/>
+          </a:p>
+        </p:txBody>
+      </p:sp>
+      <p:sp>
+        <p:nvSpPr>
+          <p:cNvPr id="65" name="Text 63"/>
+          <p:cNvSpPr/>
+          <p:nvPr/>
+        </p:nvSpPr>
+        <p:spPr>
+          <a:xfrm>
+            <a:off x="8631936" y="1901952"/>
+            <a:ext cx="969264" cy="237744"/>
+          </a:xfrm>
+          <a:prstGeom prst="rect">
+            <a:avLst/>
+          </a:prstGeom>
+          <a:noFill/>
+          <a:ln/>
+        </p:spPr>
+        <p:txBody>
+          <a:bodyPr wrap="square" lIns="0" tIns="0" rIns="0" bIns="0" rtlCol="0" anchor="ctr"/>
+          <a:lstStyle/>
+          <a:p>
+            <a:pPr algn="r" indent="0" marL="0">
+              <a:buNone/>
+            </a:pPr>
+            <a:r>
+              <a:rPr lang="en-US" sz="900" b="1" dirty="0">
+                <a:solidFill>
+                  <a:srgbClr val="9A908C"/>
+                </a:solidFill>
+                <a:latin typeface="맑은 고딕" pitchFamily="34" charset="0"/>
+                <a:ea typeface="맑은 고딕" pitchFamily="34" charset="-122"/>
+                <a:cs typeface="맑은 고딕" pitchFamily="34" charset="-120"/>
+              </a:rPr>
+              <a:t>예측오차</a:t>
+            </a:r>
+            <a:endParaRPr lang="en-US" sz="900" dirty="0"/>
+          </a:p>
+        </p:txBody>
+      </p:sp>
+      <p:sp>
+        <p:nvSpPr>
+          <p:cNvPr id="66" name="Text 64"/>
+          <p:cNvSpPr/>
+          <p:nvPr/>
+        </p:nvSpPr>
+        <p:spPr>
+          <a:xfrm>
+            <a:off x="9601200" y="1901952"/>
+            <a:ext cx="694944" cy="237744"/>
+          </a:xfrm>
+          <a:prstGeom prst="rect">
+            <a:avLst/>
+          </a:prstGeom>
+          <a:noFill/>
+          <a:ln/>
+        </p:spPr>
+        <p:txBody>
+          <a:bodyPr wrap="square" lIns="0" tIns="0" rIns="0" bIns="0" rtlCol="0" anchor="ctr"/>
+          <a:lstStyle/>
+          <a:p>
+            <a:pPr algn="r" indent="0" marL="0">
+              <a:buNone/>
+            </a:pPr>
+            <a:r>
+              <a:rPr lang="en-US" sz="900" b="1" dirty="0">
+                <a:solidFill>
+                  <a:srgbClr val="9A908C"/>
+                </a:solidFill>
+                <a:latin typeface="맑은 고딕" pitchFamily="34" charset="0"/>
+                <a:ea typeface="맑은 고딕" pitchFamily="34" charset="-122"/>
+                <a:cs typeface="맑은 고딕" pitchFamily="34" charset="-120"/>
+              </a:rPr>
+              <a:t>미달</a:t>
+            </a:r>
+            <a:endParaRPr lang="en-US" sz="900" dirty="0"/>
+          </a:p>
+        </p:txBody>
+      </p:sp>
+      <p:sp>
+        <p:nvSpPr>
+          <p:cNvPr id="67" name="Text 65"/>
+          <p:cNvSpPr/>
+          <p:nvPr/>
+        </p:nvSpPr>
+        <p:spPr>
+          <a:xfrm>
+            <a:off x="10296144" y="1901952"/>
+            <a:ext cx="1133856" cy="237744"/>
+          </a:xfrm>
+          <a:prstGeom prst="rect">
+            <a:avLst/>
+          </a:prstGeom>
+          <a:noFill/>
+          <a:ln/>
+        </p:spPr>
+        <p:txBody>
+          <a:bodyPr wrap="square" lIns="0" tIns="0" rIns="0" bIns="0" rtlCol="0" anchor="ctr"/>
+          <a:lstStyle/>
+          <a:p>
+            <a:pPr algn="r" indent="0" marL="0">
+              <a:buNone/>
+            </a:pPr>
+            <a:r>
+              <a:rPr lang="en-US" sz="900" b="1" dirty="0">
+                <a:solidFill>
+                  <a:srgbClr val="9A908C"/>
+                </a:solidFill>
+                <a:latin typeface="맑은 고딕" pitchFamily="34" charset="0"/>
+                <a:ea typeface="맑은 고딕" pitchFamily="34" charset="-122"/>
+                <a:cs typeface="맑은 고딕" pitchFamily="34" charset="-120"/>
+              </a:rPr>
+              <a:t>과대입찰</a:t>
+            </a:r>
+            <a:endParaRPr lang="en-US" sz="900" dirty="0"/>
+          </a:p>
+        </p:txBody>
+      </p:sp>
+      <p:sp>
+        <p:nvSpPr>
+          <p:cNvPr id="68" name="Shape 66"/>
+          <p:cNvSpPr/>
+          <p:nvPr/>
+        </p:nvSpPr>
+        <p:spPr>
+          <a:xfrm>
+            <a:off x="6583680" y="2157984"/>
+            <a:ext cx="4846320" cy="0"/>
+          </a:xfrm>
+          <a:prstGeom prst="line">
+            <a:avLst/>
+          </a:prstGeom>
+          <a:noFill/>
+          <a:ln w="12700">
+            <a:solidFill>
+              <a:srgbClr val="E8E0DC"/>
+            </a:solidFill>
+            <a:prstDash val="solid"/>
+          </a:ln>
+        </p:spPr>
+      </p:sp>
+      <p:sp>
+        <p:nvSpPr>
+          <p:cNvPr id="69" name="Text 67"/>
+          <p:cNvSpPr/>
+          <p:nvPr/>
+        </p:nvSpPr>
+        <p:spPr>
+          <a:xfrm>
+            <a:off x="6583680" y="2212848"/>
+            <a:ext cx="2048256" cy="292608"/>
+          </a:xfrm>
+          <a:prstGeom prst="rect">
+            <a:avLst/>
+          </a:prstGeom>
+          <a:noFill/>
+          <a:ln/>
+        </p:spPr>
+        <p:txBody>
+          <a:bodyPr wrap="square" lIns="0" tIns="0" rIns="0" bIns="0" rtlCol="0" anchor="ctr"/>
+          <a:lstStyle/>
+          <a:p>
+            <a:pPr algn="l" indent="0" marL="0">
+              <a:buNone/>
+            </a:pPr>
+            <a:r>
+              <a:rPr lang="en-US" sz="1050" dirty="0">
+                <a:solidFill>
+                  <a:srgbClr val="1F1A18"/>
+                </a:solidFill>
+                <a:latin typeface="맑은 고딕" pitchFamily="34" charset="0"/>
+                <a:ea typeface="맑은 고딕" pitchFamily="34" charset="-122"/>
+                <a:cs typeface="맑은 고딕" pitchFamily="34" charset="-120"/>
+              </a:rPr>
+              <a:t>일괄 보정 (종전)</a:t>
+            </a:r>
+            <a:endParaRPr lang="en-US" sz="1050" dirty="0"/>
+          </a:p>
+        </p:txBody>
+      </p:sp>
+      <p:sp>
+        <p:nvSpPr>
+          <p:cNvPr id="70" name="Text 68"/>
+          <p:cNvSpPr/>
+          <p:nvPr/>
+        </p:nvSpPr>
+        <p:spPr>
+          <a:xfrm>
+            <a:off x="8631936" y="2212848"/>
+            <a:ext cx="969264" cy="292608"/>
+          </a:xfrm>
+          <a:prstGeom prst="rect">
+            <a:avLst/>
+          </a:prstGeom>
+          <a:noFill/>
+          <a:ln/>
+        </p:spPr>
+        <p:txBody>
+          <a:bodyPr wrap="square" lIns="0" tIns="0" rIns="0" bIns="0" rtlCol="0" anchor="ctr"/>
+          <a:lstStyle/>
+          <a:p>
+            <a:pPr algn="r" indent="0" marL="0">
+              <a:buNone/>
+            </a:pPr>
+            <a:r>
+              <a:rPr lang="en-US" sz="1050" b="1" dirty="0">
+                <a:solidFill>
+                  <a:srgbClr val="8A7F7A"/>
+                </a:solidFill>
+                <a:latin typeface="맑은 고딕" pitchFamily="34" charset="0"/>
+                <a:ea typeface="맑은 고딕" pitchFamily="34" charset="-122"/>
+                <a:cs typeface="맑은 고딕" pitchFamily="34" charset="-120"/>
+              </a:rPr>
+              <a:t>3.63 MW</a:t>
+            </a:r>
+            <a:endParaRPr lang="en-US" sz="1050" dirty="0"/>
+          </a:p>
+        </p:txBody>
+      </p:sp>
+      <p:sp>
+        <p:nvSpPr>
+          <p:cNvPr id="71" name="Text 69"/>
+          <p:cNvSpPr/>
+          <p:nvPr/>
+        </p:nvSpPr>
+        <p:spPr>
+          <a:xfrm>
+            <a:off x="9601200" y="2212848"/>
+            <a:ext cx="694944" cy="292608"/>
+          </a:xfrm>
+          <a:prstGeom prst="rect">
+            <a:avLst/>
+          </a:prstGeom>
+          <a:noFill/>
+          <a:ln/>
+        </p:spPr>
+        <p:txBody>
+          <a:bodyPr wrap="square" lIns="0" tIns="0" rIns="0" bIns="0" rtlCol="0" anchor="ctr"/>
+          <a:lstStyle/>
+          <a:p>
+            <a:pPr algn="r" indent="0" marL="0">
+              <a:buNone/>
+            </a:pPr>
+            <a:r>
+              <a:rPr lang="en-US" sz="1050" b="1" dirty="0">
+                <a:solidFill>
+                  <a:srgbClr val="8A7F7A"/>
+                </a:solidFill>
+                <a:latin typeface="맑은 고딕" pitchFamily="34" charset="0"/>
+                <a:ea typeface="맑은 고딕" pitchFamily="34" charset="-122"/>
+                <a:cs typeface="맑은 고딕" pitchFamily="34" charset="-120"/>
+              </a:rPr>
+              <a:t>10건</a:t>
+            </a:r>
+            <a:endParaRPr lang="en-US" sz="1050" dirty="0"/>
+          </a:p>
+        </p:txBody>
+      </p:sp>
+      <p:sp>
+        <p:nvSpPr>
+          <p:cNvPr id="72" name="Text 70"/>
+          <p:cNvSpPr/>
+          <p:nvPr/>
+        </p:nvSpPr>
+        <p:spPr>
+          <a:xfrm>
+            <a:off x="10296144" y="2212848"/>
+            <a:ext cx="1133856" cy="292608"/>
+          </a:xfrm>
+          <a:prstGeom prst="rect">
+            <a:avLst/>
+          </a:prstGeom>
+          <a:noFill/>
+          <a:ln/>
+        </p:spPr>
+        <p:txBody>
+          <a:bodyPr wrap="square" lIns="0" tIns="0" rIns="0" bIns="0" rtlCol="0" anchor="ctr"/>
+          <a:lstStyle/>
+          <a:p>
+            <a:pPr algn="r" indent="0" marL="0">
+              <a:buNone/>
+            </a:pPr>
+            <a:r>
+              <a:rPr lang="en-US" sz="1050" b="1" dirty="0">
+                <a:solidFill>
+                  <a:srgbClr val="8A7F7A"/>
+                </a:solidFill>
+                <a:latin typeface="맑은 고딕" pitchFamily="34" charset="0"/>
+                <a:ea typeface="맑은 고딕" pitchFamily="34" charset="-122"/>
+                <a:cs typeface="맑은 고딕" pitchFamily="34" charset="-120"/>
+              </a:rPr>
+              <a:t>51.9 MW</a:t>
+            </a:r>
+            <a:endParaRPr lang="en-US" sz="1050" dirty="0"/>
+          </a:p>
+        </p:txBody>
+      </p:sp>
+      <p:sp>
+        <p:nvSpPr>
+          <p:cNvPr id="73" name="Text 71"/>
+          <p:cNvSpPr/>
+          <p:nvPr/>
+        </p:nvSpPr>
+        <p:spPr>
+          <a:xfrm>
+            <a:off x="6583680" y="2578608"/>
+            <a:ext cx="2048256" cy="292608"/>
+          </a:xfrm>
+          <a:prstGeom prst="rect">
+            <a:avLst/>
+          </a:prstGeom>
+          <a:noFill/>
+          <a:ln/>
+        </p:spPr>
+        <p:txBody>
+          <a:bodyPr wrap="square" lIns="0" tIns="0" rIns="0" bIns="0" rtlCol="0" anchor="ctr"/>
+          <a:lstStyle/>
+          <a:p>
+            <a:pPr algn="l" indent="0" marL="0">
+              <a:buNone/>
+            </a:pPr>
+            <a:r>
+              <a:rPr lang="en-US" sz="1050" dirty="0">
+                <a:solidFill>
+                  <a:srgbClr val="1F1A18"/>
+                </a:solidFill>
+                <a:latin typeface="맑은 고딕" pitchFamily="34" charset="0"/>
+                <a:ea typeface="맑은 고딕" pitchFamily="34" charset="-122"/>
+                <a:cs typeface="맑은 고딕" pitchFamily="34" charset="-120"/>
+              </a:rPr>
+              <a:t>온도 구간평균</a:t>
+            </a:r>
+            <a:endParaRPr lang="en-US" sz="1050" dirty="0"/>
+          </a:p>
+        </p:txBody>
+      </p:sp>
+      <p:sp>
+        <p:nvSpPr>
+          <p:cNvPr id="74" name="Text 72"/>
+          <p:cNvSpPr/>
+          <p:nvPr/>
+        </p:nvSpPr>
+        <p:spPr>
+          <a:xfrm>
+            <a:off x="8631936" y="2578608"/>
+            <a:ext cx="969264" cy="292608"/>
+          </a:xfrm>
+          <a:prstGeom prst="rect">
+            <a:avLst/>
+          </a:prstGeom>
+          <a:noFill/>
+          <a:ln/>
+        </p:spPr>
+        <p:txBody>
+          <a:bodyPr wrap="square" lIns="0" tIns="0" rIns="0" bIns="0" rtlCol="0" anchor="ctr"/>
+          <a:lstStyle/>
+          <a:p>
+            <a:pPr algn="r" indent="0" marL="0">
+              <a:buNone/>
+            </a:pPr>
+            <a:r>
+              <a:rPr lang="en-US" sz="1050" b="1" dirty="0">
+                <a:solidFill>
+                  <a:srgbClr val="6B625E"/>
+                </a:solidFill>
+                <a:latin typeface="맑은 고딕" pitchFamily="34" charset="0"/>
+                <a:ea typeface="맑은 고딕" pitchFamily="34" charset="-122"/>
+                <a:cs typeface="맑은 고딕" pitchFamily="34" charset="-120"/>
+              </a:rPr>
+              <a:t>1.52 MW</a:t>
+            </a:r>
+            <a:endParaRPr lang="en-US" sz="1050" dirty="0"/>
+          </a:p>
+        </p:txBody>
+      </p:sp>
+      <p:sp>
+        <p:nvSpPr>
+          <p:cNvPr id="75" name="Text 73"/>
+          <p:cNvSpPr/>
+          <p:nvPr/>
+        </p:nvSpPr>
+        <p:spPr>
+          <a:xfrm>
+            <a:off x="9601200" y="2578608"/>
+            <a:ext cx="694944" cy="292608"/>
+          </a:xfrm>
+          <a:prstGeom prst="rect">
+            <a:avLst/>
+          </a:prstGeom>
+          <a:noFill/>
+          <a:ln/>
+        </p:spPr>
+        <p:txBody>
+          <a:bodyPr wrap="square" lIns="0" tIns="0" rIns="0" bIns="0" rtlCol="0" anchor="ctr"/>
+          <a:lstStyle/>
+          <a:p>
+            <a:pPr algn="r" indent="0" marL="0">
+              <a:buNone/>
+            </a:pPr>
+            <a:r>
+              <a:rPr lang="en-US" sz="1050" b="1" dirty="0">
+                <a:solidFill>
+                  <a:srgbClr val="6B625E"/>
+                </a:solidFill>
+                <a:latin typeface="맑은 고딕" pitchFamily="34" charset="0"/>
+                <a:ea typeface="맑은 고딕" pitchFamily="34" charset="-122"/>
+                <a:cs typeface="맑은 고딕" pitchFamily="34" charset="-120"/>
+              </a:rPr>
+              <a:t>4건</a:t>
+            </a:r>
+            <a:endParaRPr lang="en-US" sz="1050" dirty="0"/>
+          </a:p>
+        </p:txBody>
+      </p:sp>
+      <p:sp>
+        <p:nvSpPr>
+          <p:cNvPr id="76" name="Text 74"/>
+          <p:cNvSpPr/>
+          <p:nvPr/>
+        </p:nvSpPr>
+        <p:spPr>
+          <a:xfrm>
+            <a:off x="10296144" y="2578608"/>
+            <a:ext cx="1133856" cy="292608"/>
+          </a:xfrm>
+          <a:prstGeom prst="rect">
+            <a:avLst/>
+          </a:prstGeom>
+          <a:noFill/>
+          <a:ln/>
+        </p:spPr>
+        <p:txBody>
+          <a:bodyPr wrap="square" lIns="0" tIns="0" rIns="0" bIns="0" rtlCol="0" anchor="ctr"/>
+          <a:lstStyle/>
+          <a:p>
+            <a:pPr algn="r" indent="0" marL="0">
+              <a:buNone/>
+            </a:pPr>
+            <a:r>
+              <a:rPr lang="en-US" sz="1050" b="1" dirty="0">
+                <a:solidFill>
+                  <a:srgbClr val="6B625E"/>
+                </a:solidFill>
+                <a:latin typeface="맑은 고딕" pitchFamily="34" charset="0"/>
+                <a:ea typeface="맑은 고딕" pitchFamily="34" charset="-122"/>
+                <a:cs typeface="맑은 고딕" pitchFamily="34" charset="-120"/>
+              </a:rPr>
+              <a:t>10.5 MW</a:t>
+            </a:r>
+            <a:endParaRPr lang="en-US" sz="1050" dirty="0"/>
+          </a:p>
+        </p:txBody>
+      </p:sp>
+      <p:sp>
+        <p:nvSpPr>
+          <p:cNvPr id="77" name="Shape 75"/>
+          <p:cNvSpPr/>
+          <p:nvPr/>
+        </p:nvSpPr>
+        <p:spPr>
+          <a:xfrm>
+            <a:off x="6492240" y="2926080"/>
+            <a:ext cx="5029200" cy="329184"/>
+          </a:xfrm>
+          <a:prstGeom prst="rect">
+            <a:avLst/>
+          </a:prstGeom>
+          <a:solidFill>
+            <a:srgbClr val="FFF4EE"/>
+          </a:solidFill>
+          <a:ln/>
+        </p:spPr>
+      </p:sp>
+      <p:sp>
+        <p:nvSpPr>
+          <p:cNvPr id="78" name="Text 76"/>
+          <p:cNvSpPr/>
+          <p:nvPr/>
+        </p:nvSpPr>
+        <p:spPr>
+          <a:xfrm>
+            <a:off x="6583680" y="2944368"/>
+            <a:ext cx="2048256" cy="292608"/>
+          </a:xfrm>
+          <a:prstGeom prst="rect">
+            <a:avLst/>
+          </a:prstGeom>
+          <a:noFill/>
+          <a:ln/>
+        </p:spPr>
+        <p:txBody>
+          <a:bodyPr wrap="square" lIns="0" tIns="0" rIns="0" bIns="0" rtlCol="0" anchor="ctr"/>
+          <a:lstStyle/>
+          <a:p>
+            <a:pPr algn="l" indent="0" marL="0">
+              <a:buNone/>
+            </a:pPr>
+            <a:r>
+              <a:rPr lang="en-US" sz="1050" b="1" dirty="0">
+                <a:solidFill>
+                  <a:srgbClr val="1F1A18"/>
+                </a:solidFill>
+                <a:latin typeface="맑은 고딕" pitchFamily="34" charset="0"/>
+                <a:ea typeface="맑은 고딕" pitchFamily="34" charset="-122"/>
+                <a:cs typeface="맑은 고딕" pitchFamily="34" charset="-120"/>
+              </a:rPr>
+              <a:t>온도별 곡선 (현재)</a:t>
+            </a:r>
+            <a:endParaRPr lang="en-US" sz="1050" dirty="0"/>
+          </a:p>
+        </p:txBody>
+      </p:sp>
+      <p:sp>
+        <p:nvSpPr>
+          <p:cNvPr id="79" name="Text 77"/>
+          <p:cNvSpPr/>
+          <p:nvPr/>
+        </p:nvSpPr>
+        <p:spPr>
+          <a:xfrm>
+            <a:off x="8631936" y="2944368"/>
+            <a:ext cx="969264" cy="292608"/>
+          </a:xfrm>
+          <a:prstGeom prst="rect">
+            <a:avLst/>
+          </a:prstGeom>
+          <a:noFill/>
+          <a:ln/>
+        </p:spPr>
+        <p:txBody>
+          <a:bodyPr wrap="square" lIns="0" tIns="0" rIns="0" bIns="0" rtlCol="0" anchor="ctr"/>
+          <a:lstStyle/>
+          <a:p>
+            <a:pPr algn="r" indent="0" marL="0">
+              <a:buNone/>
+            </a:pPr>
+            <a:r>
+              <a:rPr lang="en-US" sz="1050" b="1" dirty="0">
+                <a:solidFill>
+                  <a:srgbClr val="EA002C"/>
+                </a:solidFill>
+                <a:latin typeface="맑은 고딕" pitchFamily="34" charset="0"/>
+                <a:ea typeface="맑은 고딕" pitchFamily="34" charset="-122"/>
+                <a:cs typeface="맑은 고딕" pitchFamily="34" charset="-120"/>
+              </a:rPr>
+              <a:t>1.33 MW</a:t>
+            </a:r>
+            <a:endParaRPr lang="en-US" sz="1050" dirty="0"/>
+          </a:p>
+        </p:txBody>
+      </p:sp>
+      <p:sp>
+        <p:nvSpPr>
+          <p:cNvPr id="80" name="Text 78"/>
+          <p:cNvSpPr/>
+          <p:nvPr/>
+        </p:nvSpPr>
+        <p:spPr>
+          <a:xfrm>
+            <a:off x="9601200" y="2944368"/>
+            <a:ext cx="694944" cy="292608"/>
+          </a:xfrm>
+          <a:prstGeom prst="rect">
+            <a:avLst/>
+          </a:prstGeom>
+          <a:noFill/>
+          <a:ln/>
+        </p:spPr>
+        <p:txBody>
+          <a:bodyPr wrap="square" lIns="0" tIns="0" rIns="0" bIns="0" rtlCol="0" anchor="ctr"/>
+          <a:lstStyle/>
+          <a:p>
+            <a:pPr algn="r" indent="0" marL="0">
+              <a:buNone/>
+            </a:pPr>
+            <a:r>
+              <a:rPr lang="en-US" sz="1050" b="1" dirty="0">
+                <a:solidFill>
+                  <a:srgbClr val="EA002C"/>
+                </a:solidFill>
+                <a:latin typeface="맑은 고딕" pitchFamily="34" charset="0"/>
+                <a:ea typeface="맑은 고딕" pitchFamily="34" charset="-122"/>
+                <a:cs typeface="맑은 고딕" pitchFamily="34" charset="-120"/>
+              </a:rPr>
+              <a:t>2건</a:t>
+            </a:r>
+            <a:endParaRPr lang="en-US" sz="1050" dirty="0"/>
+          </a:p>
+        </p:txBody>
+      </p:sp>
+      <p:sp>
+        <p:nvSpPr>
+          <p:cNvPr id="81" name="Text 79"/>
+          <p:cNvSpPr/>
+          <p:nvPr/>
+        </p:nvSpPr>
+        <p:spPr>
+          <a:xfrm>
+            <a:off x="10296144" y="2944368"/>
+            <a:ext cx="1133856" cy="292608"/>
+          </a:xfrm>
+          <a:prstGeom prst="rect">
+            <a:avLst/>
+          </a:prstGeom>
+          <a:noFill/>
+          <a:ln/>
+        </p:spPr>
+        <p:txBody>
+          <a:bodyPr wrap="square" lIns="0" tIns="0" rIns="0" bIns="0" rtlCol="0" anchor="ctr"/>
+          <a:lstStyle/>
+          <a:p>
+            <a:pPr algn="r" indent="0" marL="0">
+              <a:buNone/>
+            </a:pPr>
+            <a:r>
+              <a:rPr lang="en-US" sz="1050" b="1" dirty="0">
+                <a:solidFill>
+                  <a:srgbClr val="EA002C"/>
+                </a:solidFill>
+                <a:latin typeface="맑은 고딕" pitchFamily="34" charset="0"/>
+                <a:ea typeface="맑은 고딕" pitchFamily="34" charset="-122"/>
+                <a:cs typeface="맑은 고딕" pitchFamily="34" charset="-120"/>
+              </a:rPr>
+              <a:t>5.3 MW</a:t>
+            </a:r>
+            <a:endParaRPr lang="en-US" sz="1050" dirty="0"/>
+          </a:p>
+        </p:txBody>
+      </p:sp>
+      <p:sp>
+        <p:nvSpPr>
+          <p:cNvPr id="82" name="Shape 80"/>
+          <p:cNvSpPr/>
+          <p:nvPr/>
+        </p:nvSpPr>
+        <p:spPr>
+          <a:xfrm>
+            <a:off x="6492240" y="3291840"/>
+            <a:ext cx="5029200" cy="329184"/>
+          </a:xfrm>
+          <a:prstGeom prst="rect">
+            <a:avLst/>
+          </a:prstGeom>
+          <a:solidFill>
+            <a:srgbClr val="FFF4EE"/>
+          </a:solidFill>
+          <a:ln/>
+        </p:spPr>
+      </p:sp>
+      <p:sp>
+        <p:nvSpPr>
+          <p:cNvPr id="83" name="Text 81"/>
+          <p:cNvSpPr/>
+          <p:nvPr/>
+        </p:nvSpPr>
+        <p:spPr>
+          <a:xfrm>
+            <a:off x="6583680" y="3310128"/>
+            <a:ext cx="2048256" cy="292608"/>
+          </a:xfrm>
+          <a:prstGeom prst="rect">
+            <a:avLst/>
+          </a:prstGeom>
+          <a:noFill/>
+          <a:ln/>
+        </p:spPr>
+        <p:txBody>
+          <a:bodyPr wrap="square" lIns="0" tIns="0" rIns="0" bIns="0" rtlCol="0" anchor="ctr"/>
+          <a:lstStyle/>
+          <a:p>
+            <a:pPr algn="l" indent="0" marL="0">
+              <a:buNone/>
+            </a:pPr>
+            <a:r>
+              <a:rPr lang="en-US" sz="1050" b="1" dirty="0">
+                <a:solidFill>
+                  <a:srgbClr val="1F1A18"/>
+                </a:solidFill>
+                <a:latin typeface="맑은 고딕" pitchFamily="34" charset="0"/>
+                <a:ea typeface="맑은 고딕" pitchFamily="34" charset="-122"/>
+                <a:cs typeface="맑은 고딕" pitchFamily="34" charset="-120"/>
+              </a:rPr>
+              <a:t>＋ 안전마진 적용</a:t>
+            </a:r>
+            <a:endParaRPr lang="en-US" sz="1050" dirty="0"/>
+          </a:p>
+        </p:txBody>
+      </p:sp>
+      <p:sp>
+        <p:nvSpPr>
+          <p:cNvPr id="84" name="Text 82"/>
+          <p:cNvSpPr/>
+          <p:nvPr/>
+        </p:nvSpPr>
+        <p:spPr>
+          <a:xfrm>
+            <a:off x="8631936" y="3310128"/>
+            <a:ext cx="969264" cy="292608"/>
+          </a:xfrm>
+          <a:prstGeom prst="rect">
+            <a:avLst/>
+          </a:prstGeom>
+          <a:noFill/>
+          <a:ln/>
+        </p:spPr>
+        <p:txBody>
+          <a:bodyPr wrap="square" lIns="0" tIns="0" rIns="0" bIns="0" rtlCol="0" anchor="ctr"/>
+          <a:lstStyle/>
+          <a:p>
+            <a:pPr algn="r" indent="0" marL="0">
+              <a:buNone/>
+            </a:pPr>
+            <a:r>
+              <a:rPr lang="en-US" sz="1050" b="1" dirty="0">
+                <a:solidFill>
+                  <a:srgbClr val="EA002C"/>
+                </a:solidFill>
+                <a:latin typeface="맑은 고딕" pitchFamily="34" charset="0"/>
+                <a:ea typeface="맑은 고딕" pitchFamily="34" charset="-122"/>
+                <a:cs typeface="맑은 고딕" pitchFamily="34" charset="-120"/>
+              </a:rPr>
+              <a:t>1.73 MW</a:t>
+            </a:r>
+            <a:endParaRPr lang="en-US" sz="1050" dirty="0"/>
+          </a:p>
+        </p:txBody>
+      </p:sp>
+      <p:sp>
+        <p:nvSpPr>
+          <p:cNvPr id="85" name="Text 83"/>
+          <p:cNvSpPr/>
+          <p:nvPr/>
+        </p:nvSpPr>
+        <p:spPr>
+          <a:xfrm>
+            <a:off x="9601200" y="3310128"/>
+            <a:ext cx="694944" cy="292608"/>
+          </a:xfrm>
+          <a:prstGeom prst="rect">
+            <a:avLst/>
+          </a:prstGeom>
+          <a:noFill/>
+          <a:ln/>
+        </p:spPr>
+        <p:txBody>
+          <a:bodyPr wrap="square" lIns="0" tIns="0" rIns="0" bIns="0" rtlCol="0" anchor="ctr"/>
+          <a:lstStyle/>
+          <a:p>
+            <a:pPr algn="r" indent="0" marL="0">
+              <a:buNone/>
+            </a:pPr>
+            <a:r>
+              <a:rPr lang="en-US" sz="1050" b="1" dirty="0">
+                <a:solidFill>
+                  <a:srgbClr val="EA002C"/>
+                </a:solidFill>
+                <a:latin typeface="맑은 고딕" pitchFamily="34" charset="0"/>
+                <a:ea typeface="맑은 고딕" pitchFamily="34" charset="-122"/>
+                <a:cs typeface="맑은 고딕" pitchFamily="34" charset="-120"/>
+              </a:rPr>
+              <a:t>0건</a:t>
+            </a:r>
+            <a:endParaRPr lang="en-US" sz="1050" dirty="0"/>
+          </a:p>
+        </p:txBody>
+      </p:sp>
+      <p:sp>
+        <p:nvSpPr>
+          <p:cNvPr id="86" name="Text 84"/>
+          <p:cNvSpPr/>
+          <p:nvPr/>
+        </p:nvSpPr>
+        <p:spPr>
+          <a:xfrm>
+            <a:off x="10296144" y="3310128"/>
+            <a:ext cx="1133856" cy="292608"/>
+          </a:xfrm>
+          <a:prstGeom prst="rect">
+            <a:avLst/>
+          </a:prstGeom>
+          <a:noFill/>
+          <a:ln/>
+        </p:spPr>
+        <p:txBody>
+          <a:bodyPr wrap="square" lIns="0" tIns="0" rIns="0" bIns="0" rtlCol="0" anchor="ctr"/>
+          <a:lstStyle/>
+          <a:p>
+            <a:pPr algn="r" indent="0" marL="0">
+              <a:buNone/>
+            </a:pPr>
+            <a:r>
+              <a:rPr lang="en-US" sz="1050" b="1" dirty="0">
+                <a:solidFill>
+                  <a:srgbClr val="EA002C"/>
+                </a:solidFill>
+                <a:latin typeface="맑은 고딕" pitchFamily="34" charset="0"/>
+                <a:ea typeface="맑은 고딕" pitchFamily="34" charset="-122"/>
+                <a:cs typeface="맑은 고딕" pitchFamily="34" charset="-120"/>
+              </a:rPr>
+              <a:t>0.0 MW</a:t>
+            </a:r>
+            <a:endParaRPr lang="en-US" sz="1050" dirty="0"/>
+          </a:p>
+        </p:txBody>
+      </p:sp>
+      <p:sp>
+        <p:nvSpPr>
+          <p:cNvPr id="87" name="Text 85"/>
+          <p:cNvSpPr/>
+          <p:nvPr/>
+        </p:nvSpPr>
+        <p:spPr>
+          <a:xfrm>
+            <a:off x="6583680" y="3675888"/>
+            <a:ext cx="4846320" cy="292608"/>
+          </a:xfrm>
+          <a:prstGeom prst="rect">
+            <a:avLst/>
+          </a:prstGeom>
+          <a:noFill/>
+          <a:ln/>
+        </p:spPr>
+        <p:txBody>
+          <a:bodyPr wrap="square" lIns="0" tIns="0" rIns="0" bIns="0" rtlCol="0" anchor="ctr"/>
+          <a:lstStyle/>
+          <a:p>
+            <a:pPr indent="0" marL="0">
+              <a:lnSpc>
+                <a:spcPts val="1100"/>
+              </a:lnSpc>
+              <a:buNone/>
+            </a:pPr>
+            <a:r>
+              <a:rPr lang="en-US" sz="850" dirty="0">
+                <a:solidFill>
+                  <a:srgbClr val="9A908C"/>
+                </a:solidFill>
+                <a:latin typeface="맑은 고딕" pitchFamily="34" charset="0"/>
+                <a:ea typeface="맑은 고딕" pitchFamily="34" charset="-122"/>
+                <a:cs typeface="맑은 고딕" pitchFamily="34" charset="-120"/>
+              </a:rPr>
+              <a:t>예측오차 = 평균적으로 틀리는 폭  ·  미달 = 신고량을 못 지킨 횟수(31건 중)</a:t>
+            </a:r>
+            <a:endParaRPr lang="en-US" sz="850" dirty="0"/>
+          </a:p>
+          <a:p>
+            <a:pPr indent="0" marL="0">
+              <a:lnSpc>
+                <a:spcPts val="1100"/>
+              </a:lnSpc>
+              <a:buNone/>
+            </a:pPr>
+            <a:r>
+              <a:rPr lang="en-US" sz="850" dirty="0">
+                <a:solidFill>
+                  <a:srgbClr val="9A908C"/>
+                </a:solidFill>
+                <a:latin typeface="맑은 고딕" pitchFamily="34" charset="0"/>
+                <a:ea typeface="맑은 고딕" pitchFamily="34" charset="-122"/>
+                <a:cs typeface="맑은 고딕" pitchFamily="34" charset="-120"/>
+              </a:rPr>
+              <a:t>과대입찰 = 미달 건들의 부족분 합계 — 페널티 위험에 노출된 총량</a:t>
+            </a:r>
+            <a:endParaRPr lang="en-US" sz="850" dirty="0"/>
+          </a:p>
+        </p:txBody>
+      </p:sp>
+      <p:sp>
+        <p:nvSpPr>
+          <p:cNvPr id="88" name="Shape 86"/>
+          <p:cNvSpPr/>
+          <p:nvPr/>
+        </p:nvSpPr>
+        <p:spPr>
+          <a:xfrm>
+            <a:off x="502920" y="4160520"/>
+            <a:ext cx="237744" cy="237744"/>
+          </a:xfrm>
+          <a:prstGeom prst="ellipse">
+            <a:avLst/>
+          </a:prstGeom>
+          <a:solidFill>
+            <a:srgbClr val="F47725"/>
+          </a:solidFill>
+          <a:ln/>
+        </p:spPr>
+      </p:sp>
+      <p:sp>
+        <p:nvSpPr>
+          <p:cNvPr id="89" name="Text 87"/>
+          <p:cNvSpPr/>
+          <p:nvPr/>
+        </p:nvSpPr>
+        <p:spPr>
+          <a:xfrm>
+            <a:off x="868680" y="4114800"/>
+            <a:ext cx="4572000" cy="310896"/>
+          </a:xfrm>
+          <a:prstGeom prst="rect">
+            <a:avLst/>
+          </a:prstGeom>
+          <a:noFill/>
+          <a:ln/>
+        </p:spPr>
+        <p:txBody>
+          <a:bodyPr wrap="square" lIns="0" tIns="0" rIns="0" bIns="0" rtlCol="0" anchor="ctr"/>
+          <a:lstStyle/>
+          <a:p>
+            <a:pPr indent="0" marL="0">
+              <a:buNone/>
+            </a:pPr>
+            <a:r>
+              <a:rPr lang="en-US" sz="1350" b="1" dirty="0">
+                <a:solidFill>
+                  <a:srgbClr val="1F1A18"/>
+                </a:solidFill>
+                <a:latin typeface="맑은 고딕" pitchFamily="34" charset="0"/>
+                <a:ea typeface="맑은 고딕" pitchFamily="34" charset="-122"/>
+                <a:cs typeface="맑은 고딕" pitchFamily="34" charset="-120"/>
+              </a:rPr>
+              <a:t>하나의 값으로는 고칠 수 없는 구조</a:t>
+            </a:r>
+            <a:endParaRPr lang="en-US" sz="1350" dirty="0"/>
+          </a:p>
+        </p:txBody>
+      </p:sp>
+      <p:sp>
+        <p:nvSpPr>
+          <p:cNvPr id="90" name="Shape 88"/>
+          <p:cNvSpPr/>
+          <p:nvPr/>
+        </p:nvSpPr>
+        <p:spPr>
+          <a:xfrm>
+            <a:off x="502920" y="4498848"/>
+            <a:ext cx="5577840" cy="1591056"/>
+          </a:xfrm>
+          <a:prstGeom prst="roundRect">
+            <a:avLst>
+              <a:gd name="adj" fmla="val 3448"/>
+            </a:avLst>
+          </a:prstGeom>
+          <a:solidFill>
+            <a:srgbClr val="FFF4EE"/>
+          </a:solidFill>
+          <a:ln w="12700">
+            <a:solidFill>
+              <a:srgbClr val="E8E0DC"/>
+            </a:solidFill>
+            <a:prstDash val="solid"/>
+          </a:ln>
+          <a:effectLst>
+            <a:outerShdw sx="100000" sy="100000" kx="0" ky="0" algn="bl" rotWithShape="0" blurRad="101600" dist="12700" dir="5400000">
+              <a:srgbClr val="D8CFCA">
+                <a:alpha val="50000"/>
+              </a:srgbClr>
+            </a:outerShdw>
+          </a:effectLst>
+        </p:spPr>
+      </p:sp>
+      <p:sp>
+        <p:nvSpPr>
+          <p:cNvPr id="91" name="Text 89"/>
+          <p:cNvSpPr/>
+          <p:nvPr/>
+        </p:nvSpPr>
+        <p:spPr>
+          <a:xfrm>
+            <a:off x="804672" y="4681728"/>
+            <a:ext cx="1234440" cy="310896"/>
+          </a:xfrm>
+          <a:prstGeom prst="rect">
+            <a:avLst/>
+          </a:prstGeom>
+          <a:noFill/>
+          <a:ln/>
+        </p:spPr>
+        <p:txBody>
+          <a:bodyPr wrap="square" lIns="0" tIns="0" rIns="0" bIns="0" rtlCol="0" anchor="ctr"/>
+          <a:lstStyle/>
+          <a:p>
+            <a:pPr indent="0" marL="0">
+              <a:buNone/>
+            </a:pPr>
+            <a:r>
+              <a:rPr lang="en-US" sz="1050" b="1" dirty="0">
+                <a:solidFill>
+                  <a:srgbClr val="EA002C"/>
+                </a:solidFill>
+                <a:latin typeface="맑은 고딕" pitchFamily="34" charset="0"/>
+                <a:ea typeface="맑은 고딕" pitchFamily="34" charset="-122"/>
+                <a:cs typeface="맑은 고딕" pitchFamily="34" charset="-120"/>
+              </a:rPr>
+              <a:t>겨울  −1.9°C</a:t>
+            </a:r>
+            <a:endParaRPr lang="en-US" sz="1050" dirty="0"/>
+          </a:p>
+        </p:txBody>
+      </p:sp>
+      <p:sp>
+        <p:nvSpPr>
+          <p:cNvPr id="92" name="Text 90"/>
+          <p:cNvSpPr/>
+          <p:nvPr/>
+        </p:nvSpPr>
+        <p:spPr>
+          <a:xfrm>
+            <a:off x="2066544" y="4681728"/>
+            <a:ext cx="960120" cy="310896"/>
+          </a:xfrm>
+          <a:prstGeom prst="rect">
+            <a:avLst/>
+          </a:prstGeom>
+          <a:noFill/>
+          <a:ln/>
+        </p:spPr>
+        <p:txBody>
+          <a:bodyPr wrap="square" lIns="0" tIns="0" rIns="0" bIns="0" rtlCol="0" anchor="ctr"/>
+          <a:lstStyle/>
+          <a:p>
+            <a:pPr indent="0" marL="0">
+              <a:buNone/>
+            </a:pPr>
+            <a:r>
+              <a:rPr lang="en-US" sz="1050" dirty="0">
+                <a:solidFill>
+                  <a:srgbClr val="1F1A18"/>
+                </a:solidFill>
+                <a:latin typeface="맑은 고딕" pitchFamily="34" charset="0"/>
+                <a:ea typeface="맑은 고딕" pitchFamily="34" charset="-122"/>
+                <a:cs typeface="맑은 고딕" pitchFamily="34" charset="-120"/>
+              </a:rPr>
+              <a:t>실측 +12.9</a:t>
+            </a:r>
+            <a:endParaRPr lang="en-US" sz="1050" dirty="0"/>
+          </a:p>
+        </p:txBody>
+      </p:sp>
+      <p:sp>
+        <p:nvSpPr>
+          <p:cNvPr id="93" name="Text 91"/>
+          <p:cNvSpPr/>
+          <p:nvPr/>
+        </p:nvSpPr>
+        <p:spPr>
+          <a:xfrm>
+            <a:off x="3054096" y="4681728"/>
+            <a:ext cx="960120" cy="310896"/>
+          </a:xfrm>
+          <a:prstGeom prst="rect">
+            <a:avLst/>
+          </a:prstGeom>
+          <a:noFill/>
+          <a:ln/>
+        </p:spPr>
+        <p:txBody>
+          <a:bodyPr wrap="square" lIns="0" tIns="0" rIns="0" bIns="0" rtlCol="0" anchor="ctr"/>
+          <a:lstStyle/>
+          <a:p>
+            <a:pPr indent="0" marL="0">
+              <a:buNone/>
+            </a:pPr>
+            <a:r>
+              <a:rPr lang="en-US" sz="1050" dirty="0">
+                <a:solidFill>
+                  <a:srgbClr val="8A7F7A"/>
+                </a:solidFill>
+                <a:latin typeface="맑은 고딕" pitchFamily="34" charset="0"/>
+                <a:ea typeface="맑은 고딕" pitchFamily="34" charset="-122"/>
+                <a:cs typeface="맑은 고딕" pitchFamily="34" charset="-120"/>
+              </a:rPr>
+              <a:t>일괄 +3.5</a:t>
+            </a:r>
+            <a:endParaRPr lang="en-US" sz="1050" dirty="0"/>
+          </a:p>
+        </p:txBody>
+      </p:sp>
+      <p:sp>
+        <p:nvSpPr>
+          <p:cNvPr id="94" name="Text 92"/>
+          <p:cNvSpPr/>
+          <p:nvPr/>
+        </p:nvSpPr>
+        <p:spPr>
+          <a:xfrm>
+            <a:off x="4041648" y="4681728"/>
+            <a:ext cx="1901952" cy="310896"/>
+          </a:xfrm>
+          <a:prstGeom prst="rect">
+            <a:avLst/>
+          </a:prstGeom>
+          <a:noFill/>
+          <a:ln/>
+        </p:spPr>
+        <p:txBody>
+          <a:bodyPr wrap="square" lIns="0" tIns="0" rIns="0" bIns="0" rtlCol="0" anchor="ctr"/>
+          <a:lstStyle/>
+          <a:p>
+            <a:pPr indent="0" marL="0">
+              <a:buNone/>
+            </a:pPr>
+            <a:r>
+              <a:rPr lang="en-US" sz="1050" b="1" dirty="0">
+                <a:solidFill>
+                  <a:srgbClr val="1F1A18"/>
+                </a:solidFill>
+                <a:latin typeface="맑은 고딕" pitchFamily="34" charset="0"/>
+                <a:ea typeface="맑은 고딕" pitchFamily="34" charset="-122"/>
+                <a:cs typeface="맑은 고딕" pitchFamily="34" charset="-120"/>
+              </a:rPr>
+              <a:t>→  9.4 MW 낮게 신고 = 기회손실</a:t>
+            </a:r>
+            <a:endParaRPr lang="en-US" sz="1050" dirty="0"/>
+          </a:p>
+        </p:txBody>
+      </p:sp>
+      <p:sp>
+        <p:nvSpPr>
+          <p:cNvPr id="95" name="Text 93"/>
+          <p:cNvSpPr/>
+          <p:nvPr/>
+        </p:nvSpPr>
+        <p:spPr>
+          <a:xfrm>
+            <a:off x="804672" y="5102352"/>
+            <a:ext cx="1234440" cy="310896"/>
+          </a:xfrm>
+          <a:prstGeom prst="rect">
+            <a:avLst/>
+          </a:prstGeom>
+          <a:noFill/>
+          <a:ln/>
+        </p:spPr>
+        <p:txBody>
+          <a:bodyPr wrap="square" lIns="0" tIns="0" rIns="0" bIns="0" rtlCol="0" anchor="ctr"/>
+          <a:lstStyle/>
+          <a:p>
+            <a:pPr indent="0" marL="0">
+              <a:buNone/>
+            </a:pPr>
+            <a:r>
+              <a:rPr lang="en-US" sz="1050" b="1" dirty="0">
+                <a:solidFill>
+                  <a:srgbClr val="F47725"/>
+                </a:solidFill>
+                <a:latin typeface="맑은 고딕" pitchFamily="34" charset="0"/>
+                <a:ea typeface="맑은 고딕" pitchFamily="34" charset="-122"/>
+                <a:cs typeface="맑은 고딕" pitchFamily="34" charset="-120"/>
+              </a:rPr>
+              <a:t>여름  30.7°C</a:t>
+            </a:r>
+            <a:endParaRPr lang="en-US" sz="1050" dirty="0"/>
+          </a:p>
+        </p:txBody>
+      </p:sp>
+      <p:sp>
+        <p:nvSpPr>
+          <p:cNvPr id="96" name="Text 94"/>
+          <p:cNvSpPr/>
+          <p:nvPr/>
+        </p:nvSpPr>
+        <p:spPr>
+          <a:xfrm>
+            <a:off x="2066544" y="5102352"/>
+            <a:ext cx="960120" cy="310896"/>
+          </a:xfrm>
+          <a:prstGeom prst="rect">
+            <a:avLst/>
+          </a:prstGeom>
+          <a:noFill/>
+          <a:ln/>
+        </p:spPr>
+        <p:txBody>
+          <a:bodyPr wrap="square" lIns="0" tIns="0" rIns="0" bIns="0" rtlCol="0" anchor="ctr"/>
+          <a:lstStyle/>
+          <a:p>
+            <a:pPr indent="0" marL="0">
+              <a:buNone/>
+            </a:pPr>
+            <a:r>
+              <a:rPr lang="en-US" sz="1050" dirty="0">
+                <a:solidFill>
+                  <a:srgbClr val="1F1A18"/>
+                </a:solidFill>
+                <a:latin typeface="맑은 고딕" pitchFamily="34" charset="0"/>
+                <a:ea typeface="맑은 고딕" pitchFamily="34" charset="-122"/>
+                <a:cs typeface="맑은 고딕" pitchFamily="34" charset="-120"/>
+              </a:rPr>
+              <a:t>실측 −3.4</a:t>
+            </a:r>
+            <a:endParaRPr lang="en-US" sz="1050" dirty="0"/>
+          </a:p>
+        </p:txBody>
+      </p:sp>
+      <p:sp>
+        <p:nvSpPr>
+          <p:cNvPr id="97" name="Text 95"/>
+          <p:cNvSpPr/>
+          <p:nvPr/>
+        </p:nvSpPr>
+        <p:spPr>
+          <a:xfrm>
+            <a:off x="3054096" y="5102352"/>
+            <a:ext cx="960120" cy="310896"/>
+          </a:xfrm>
+          <a:prstGeom prst="rect">
+            <a:avLst/>
+          </a:prstGeom>
+          <a:noFill/>
+          <a:ln/>
+        </p:spPr>
+        <p:txBody>
+          <a:bodyPr wrap="square" lIns="0" tIns="0" rIns="0" bIns="0" rtlCol="0" anchor="ctr"/>
+          <a:lstStyle/>
+          <a:p>
+            <a:pPr indent="0" marL="0">
+              <a:buNone/>
+            </a:pPr>
+            <a:r>
+              <a:rPr lang="en-US" sz="1050" dirty="0">
+                <a:solidFill>
+                  <a:srgbClr val="8A7F7A"/>
+                </a:solidFill>
+                <a:latin typeface="맑은 고딕" pitchFamily="34" charset="0"/>
+                <a:ea typeface="맑은 고딕" pitchFamily="34" charset="-122"/>
+                <a:cs typeface="맑은 고딕" pitchFamily="34" charset="-120"/>
+              </a:rPr>
+              <a:t>일괄 +3.5</a:t>
+            </a:r>
+            <a:endParaRPr lang="en-US" sz="1050" dirty="0"/>
+          </a:p>
+        </p:txBody>
+      </p:sp>
+      <p:sp>
+        <p:nvSpPr>
+          <p:cNvPr id="98" name="Text 96"/>
+          <p:cNvSpPr/>
+          <p:nvPr/>
+        </p:nvSpPr>
+        <p:spPr>
+          <a:xfrm>
+            <a:off x="4041648" y="5102352"/>
+            <a:ext cx="1901952" cy="310896"/>
+          </a:xfrm>
+          <a:prstGeom prst="rect">
+            <a:avLst/>
+          </a:prstGeom>
+          <a:noFill/>
+          <a:ln/>
+        </p:spPr>
+        <p:txBody>
+          <a:bodyPr wrap="square" lIns="0" tIns="0" rIns="0" bIns="0" rtlCol="0" anchor="ctr"/>
+          <a:lstStyle/>
+          <a:p>
+            <a:pPr indent="0" marL="0">
+              <a:buNone/>
+            </a:pPr>
+            <a:r>
+              <a:rPr lang="en-US" sz="1050" b="1" dirty="0">
+                <a:solidFill>
+                  <a:srgbClr val="1F1A18"/>
+                </a:solidFill>
+                <a:latin typeface="맑은 고딕" pitchFamily="34" charset="0"/>
+                <a:ea typeface="맑은 고딕" pitchFamily="34" charset="-122"/>
+                <a:cs typeface="맑은 고딕" pitchFamily="34" charset="-120"/>
+              </a:rPr>
+              <a:t>→  7.0 MW 높게 신고 = 미달 위험</a:t>
+            </a:r>
+            <a:endParaRPr lang="en-US" sz="1050" dirty="0"/>
+          </a:p>
+        </p:txBody>
+      </p:sp>
+      <p:sp>
+        <p:nvSpPr>
+          <p:cNvPr id="99" name="Text 97"/>
+          <p:cNvSpPr/>
+          <p:nvPr/>
+        </p:nvSpPr>
+        <p:spPr>
+          <a:xfrm>
+            <a:off x="804672" y="5559552"/>
+            <a:ext cx="4992624" cy="402336"/>
+          </a:xfrm>
+          <a:prstGeom prst="rect">
+            <a:avLst/>
+          </a:prstGeom>
+          <a:noFill/>
+          <a:ln/>
+        </p:spPr>
+        <p:txBody>
+          <a:bodyPr wrap="square" lIns="0" tIns="0" rIns="0" bIns="0" rtlCol="0" anchor="ctr"/>
+          <a:lstStyle/>
+          <a:p>
+            <a:pPr indent="0" marL="0">
+              <a:lnSpc>
+                <a:spcPts val="1400"/>
+              </a:lnSpc>
+              <a:buNone/>
+            </a:pPr>
+            <a:r>
+              <a:rPr lang="en-US" sz="1000" dirty="0">
+                <a:solidFill>
+                  <a:srgbClr val="6B625E"/>
+                </a:solidFill>
+                <a:latin typeface="맑은 고딕" pitchFamily="34" charset="0"/>
+                <a:ea typeface="맑은 고딕" pitchFamily="34" charset="-122"/>
+                <a:cs typeface="맑은 고딕" pitchFamily="34" charset="-120"/>
+              </a:rPr>
+              <a:t>틀리는 방향이 반대입니다. 일괄값을 올리면 여름 미달이 커지고, 내리면 겨울 기회손실이 커집니다.</a:t>
+            </a:r>
+            <a:endParaRPr lang="en-US" sz="1000" dirty="0"/>
+          </a:p>
+        </p:txBody>
+      </p:sp>
+      <p:sp>
+        <p:nvSpPr>
+          <p:cNvPr id="100" name="Shape 98"/>
+          <p:cNvSpPr/>
+          <p:nvPr/>
+        </p:nvSpPr>
+        <p:spPr>
+          <a:xfrm>
+            <a:off x="6291072" y="4160520"/>
+            <a:ext cx="237744" cy="237744"/>
+          </a:xfrm>
+          <a:prstGeom prst="ellipse">
+            <a:avLst/>
+          </a:prstGeom>
+          <a:solidFill>
+            <a:srgbClr val="8A7F7A"/>
+          </a:solidFill>
+          <a:ln/>
+        </p:spPr>
+      </p:sp>
+      <p:sp>
+        <p:nvSpPr>
+          <p:cNvPr id="101" name="Text 99"/>
+          <p:cNvSpPr/>
+          <p:nvPr/>
+        </p:nvSpPr>
+        <p:spPr>
+          <a:xfrm>
+            <a:off x="6656832" y="4114800"/>
+            <a:ext cx="4572000" cy="310896"/>
+          </a:xfrm>
+          <a:prstGeom prst="rect">
+            <a:avLst/>
+          </a:prstGeom>
+          <a:noFill/>
+          <a:ln/>
+        </p:spPr>
+        <p:txBody>
+          <a:bodyPr wrap="square" lIns="0" tIns="0" rIns="0" bIns="0" rtlCol="0" anchor="ctr"/>
+          <a:lstStyle/>
+          <a:p>
+            <a:pPr indent="0" marL="0">
+              <a:buNone/>
+            </a:pPr>
+            <a:r>
+              <a:rPr lang="en-US" sz="1350" b="1" dirty="0">
+                <a:solidFill>
+                  <a:srgbClr val="1F1A18"/>
+                </a:solidFill>
+                <a:latin typeface="맑은 고딕" pitchFamily="34" charset="0"/>
+                <a:ea typeface="맑은 고딕" pitchFamily="34" charset="-122"/>
+                <a:cs typeface="맑은 고딕" pitchFamily="34" charset="-120"/>
+              </a:rPr>
+              <a:t>실제 운용 순서로 재검증</a:t>
+            </a:r>
+            <a:endParaRPr lang="en-US" sz="1350" dirty="0"/>
+          </a:p>
+        </p:txBody>
+      </p:sp>
+      <p:sp>
+        <p:nvSpPr>
+          <p:cNvPr id="102" name="Shape 100"/>
+          <p:cNvSpPr/>
+          <p:nvPr/>
+        </p:nvSpPr>
+        <p:spPr>
+          <a:xfrm>
+            <a:off x="6291072" y="4498848"/>
+            <a:ext cx="5394960" cy="1591056"/>
+          </a:xfrm>
+          <a:prstGeom prst="roundRect">
+            <a:avLst>
+              <a:gd name="adj" fmla="val 3448"/>
+            </a:avLst>
+          </a:prstGeom>
+          <a:solidFill>
+            <a:srgbClr val="FFFFFF"/>
+          </a:solidFill>
+          <a:ln w="12700">
+            <a:solidFill>
+              <a:srgbClr val="E8E0DC"/>
+            </a:solidFill>
+            <a:prstDash val="solid"/>
+          </a:ln>
+          <a:effectLst>
+            <a:outerShdw sx="100000" sy="100000" kx="0" ky="0" algn="bl" rotWithShape="0" blurRad="101600" dist="12700" dir="5400000">
+              <a:srgbClr val="D8CFCA">
+                <a:alpha val="50000"/>
+              </a:srgbClr>
+            </a:outerShdw>
+          </a:effectLst>
+        </p:spPr>
+      </p:sp>
+      <p:sp>
+        <p:nvSpPr>
+          <p:cNvPr id="103" name="Text 101"/>
+          <p:cNvSpPr/>
+          <p:nvPr/>
+        </p:nvSpPr>
+        <p:spPr>
+          <a:xfrm>
+            <a:off x="6583680" y="4590288"/>
+            <a:ext cx="2514600" cy="237744"/>
+          </a:xfrm>
+          <a:prstGeom prst="rect">
+            <a:avLst/>
+          </a:prstGeom>
+          <a:noFill/>
+          <a:ln/>
+        </p:spPr>
+        <p:txBody>
+          <a:bodyPr wrap="square" lIns="0" tIns="0" rIns="0" bIns="0" rtlCol="0" anchor="ctr"/>
+          <a:lstStyle/>
+          <a:p>
+            <a:pPr indent="0" marL="0">
+              <a:buNone/>
+            </a:pPr>
+            <a:r>
+              <a:rPr lang="en-US" sz="850" dirty="0">
+                <a:solidFill>
+                  <a:srgbClr val="9A908C"/>
+                </a:solidFill>
+                <a:latin typeface="맑은 고딕" pitchFamily="34" charset="0"/>
+                <a:ea typeface="맑은 고딕" pitchFamily="34" charset="-122"/>
+                <a:cs typeface="맑은 고딕" pitchFamily="34" charset="-120"/>
+              </a:rPr>
+              <a:t>과거만 보고 다음 시험을 예측 (23건)</a:t>
+            </a:r>
+            <a:endParaRPr lang="en-US" sz="850" dirty="0"/>
+          </a:p>
+        </p:txBody>
+      </p:sp>
+      <p:sp>
+        <p:nvSpPr>
+          <p:cNvPr id="104" name="Text 102"/>
+          <p:cNvSpPr/>
+          <p:nvPr/>
+        </p:nvSpPr>
+        <p:spPr>
+          <a:xfrm>
+            <a:off x="9144000" y="4626864"/>
+            <a:ext cx="1097280" cy="219456"/>
+          </a:xfrm>
+          <a:prstGeom prst="rect">
+            <a:avLst/>
+          </a:prstGeom>
+          <a:noFill/>
+          <a:ln/>
+        </p:spPr>
+        <p:txBody>
+          <a:bodyPr wrap="square" lIns="0" tIns="0" rIns="0" bIns="0" rtlCol="0" anchor="ctr"/>
+          <a:lstStyle/>
+          <a:p>
+            <a:pPr algn="r" indent="0" marL="0">
+              <a:buNone/>
+            </a:pPr>
+            <a:r>
+              <a:rPr lang="en-US" sz="900" b="1" dirty="0">
+                <a:solidFill>
+                  <a:srgbClr val="9A908C"/>
+                </a:solidFill>
+                <a:latin typeface="맑은 고딕" pitchFamily="34" charset="0"/>
+                <a:ea typeface="맑은 고딕" pitchFamily="34" charset="-122"/>
+                <a:cs typeface="맑은 고딕" pitchFamily="34" charset="-120"/>
+              </a:rPr>
+              <a:t>종전</a:t>
+            </a:r>
+            <a:endParaRPr lang="en-US" sz="900" dirty="0"/>
+          </a:p>
+        </p:txBody>
+      </p:sp>
+      <p:sp>
+        <p:nvSpPr>
+          <p:cNvPr id="105" name="Text 103"/>
+          <p:cNvSpPr/>
+          <p:nvPr/>
+        </p:nvSpPr>
+        <p:spPr>
+          <a:xfrm>
+            <a:off x="10287000" y="4626864"/>
+            <a:ext cx="1143000" cy="219456"/>
+          </a:xfrm>
+          <a:prstGeom prst="rect">
+            <a:avLst/>
+          </a:prstGeom>
+          <a:noFill/>
+          <a:ln/>
+        </p:spPr>
+        <p:txBody>
+          <a:bodyPr wrap="square" lIns="0" tIns="0" rIns="0" bIns="0" rtlCol="0" anchor="ctr"/>
+          <a:lstStyle/>
+          <a:p>
+            <a:pPr algn="r" indent="0" marL="0">
+              <a:buNone/>
+            </a:pPr>
+            <a:r>
+              <a:rPr lang="en-US" sz="900" b="1" dirty="0">
+                <a:solidFill>
+                  <a:srgbClr val="EA002C"/>
+                </a:solidFill>
+                <a:latin typeface="맑은 고딕" pitchFamily="34" charset="0"/>
+                <a:ea typeface="맑은 고딕" pitchFamily="34" charset="-122"/>
+                <a:cs typeface="맑은 고딕" pitchFamily="34" charset="-120"/>
+              </a:rPr>
+              <a:t>현재</a:t>
+            </a:r>
+            <a:endParaRPr lang="en-US" sz="900" dirty="0"/>
+          </a:p>
+        </p:txBody>
+      </p:sp>
+      <p:sp>
+        <p:nvSpPr>
+          <p:cNvPr id="106" name="Text 104"/>
+          <p:cNvSpPr/>
+          <p:nvPr/>
+        </p:nvSpPr>
+        <p:spPr>
+          <a:xfrm>
+            <a:off x="6583680" y="4882896"/>
+            <a:ext cx="2514600" cy="274320"/>
+          </a:xfrm>
+          <a:prstGeom prst="rect">
+            <a:avLst/>
+          </a:prstGeom>
+          <a:noFill/>
+          <a:ln/>
+        </p:spPr>
+        <p:txBody>
+          <a:bodyPr wrap="square" lIns="0" tIns="0" rIns="0" bIns="0" rtlCol="0" anchor="ctr"/>
+          <a:lstStyle/>
+          <a:p>
+            <a:pPr indent="0" marL="0">
+              <a:buNone/>
+            </a:pPr>
+            <a:r>
+              <a:rPr lang="en-US" sz="1000" dirty="0">
+                <a:solidFill>
+                  <a:srgbClr val="6B625E"/>
+                </a:solidFill>
+                <a:latin typeface="맑은 고딕" pitchFamily="34" charset="0"/>
+                <a:ea typeface="맑은 고딕" pitchFamily="34" charset="-122"/>
+                <a:cs typeface="맑은 고딕" pitchFamily="34" charset="-120"/>
+              </a:rPr>
+              <a:t>예측오차</a:t>
+            </a:r>
+            <a:endParaRPr lang="en-US" sz="1000" dirty="0"/>
+          </a:p>
+        </p:txBody>
+      </p:sp>
+      <p:sp>
+        <p:nvSpPr>
+          <p:cNvPr id="107" name="Text 105"/>
+          <p:cNvSpPr/>
+          <p:nvPr/>
+        </p:nvSpPr>
+        <p:spPr>
+          <a:xfrm>
+            <a:off x="9144000" y="4882896"/>
+            <a:ext cx="1097280" cy="274320"/>
+          </a:xfrm>
+          <a:prstGeom prst="rect">
+            <a:avLst/>
+          </a:prstGeom>
+          <a:noFill/>
+          <a:ln/>
+        </p:spPr>
+        <p:txBody>
+          <a:bodyPr wrap="square" lIns="0" tIns="0" rIns="0" bIns="0" rtlCol="0" anchor="ctr"/>
+          <a:lstStyle/>
+          <a:p>
+            <a:pPr algn="r" indent="0" marL="0">
+              <a:buNone/>
+            </a:pPr>
+            <a:r>
+              <a:rPr lang="en-US" sz="1050" dirty="0">
+                <a:solidFill>
+                  <a:srgbClr val="8A7F7A"/>
+                </a:solidFill>
+                <a:latin typeface="맑은 고딕" pitchFamily="34" charset="0"/>
+                <a:ea typeface="맑은 고딕" pitchFamily="34" charset="-122"/>
+                <a:cs typeface="맑은 고딕" pitchFamily="34" charset="-120"/>
+              </a:rPr>
+              <a:t>2.83 MW</a:t>
+            </a:r>
+            <a:endParaRPr lang="en-US" sz="1050" dirty="0"/>
+          </a:p>
+        </p:txBody>
+      </p:sp>
+      <p:sp>
+        <p:nvSpPr>
+          <p:cNvPr id="108" name="Text 106"/>
+          <p:cNvSpPr/>
+          <p:nvPr/>
+        </p:nvSpPr>
+        <p:spPr>
+          <a:xfrm>
+            <a:off x="10287000" y="4882896"/>
+            <a:ext cx="1143000" cy="274320"/>
+          </a:xfrm>
+          <a:prstGeom prst="rect">
+            <a:avLst/>
+          </a:prstGeom>
+          <a:noFill/>
+          <a:ln/>
+        </p:spPr>
+        <p:txBody>
+          <a:bodyPr wrap="square" lIns="0" tIns="0" rIns="0" bIns="0" rtlCol="0" anchor="ctr"/>
+          <a:lstStyle/>
+          <a:p>
+            <a:pPr algn="r" indent="0" marL="0">
+              <a:buNone/>
+            </a:pPr>
+            <a:r>
+              <a:rPr lang="en-US" sz="1050" b="1" dirty="0">
+                <a:solidFill>
+                  <a:srgbClr val="EA002C"/>
+                </a:solidFill>
+                <a:latin typeface="맑은 고딕" pitchFamily="34" charset="0"/>
+                <a:ea typeface="맑은 고딕" pitchFamily="34" charset="-122"/>
+                <a:cs typeface="맑은 고딕" pitchFamily="34" charset="-120"/>
+              </a:rPr>
+              <a:t>1.79 MW</a:t>
+            </a:r>
+            <a:endParaRPr lang="en-US" sz="1050" dirty="0"/>
+          </a:p>
+        </p:txBody>
+      </p:sp>
+      <p:sp>
+        <p:nvSpPr>
+          <p:cNvPr id="109" name="Text 107"/>
+          <p:cNvSpPr/>
+          <p:nvPr/>
+        </p:nvSpPr>
+        <p:spPr>
+          <a:xfrm>
+            <a:off x="6583680" y="5212080"/>
+            <a:ext cx="2514600" cy="274320"/>
+          </a:xfrm>
+          <a:prstGeom prst="rect">
+            <a:avLst/>
+          </a:prstGeom>
+          <a:noFill/>
+          <a:ln/>
+        </p:spPr>
+        <p:txBody>
+          <a:bodyPr wrap="square" lIns="0" tIns="0" rIns="0" bIns="0" rtlCol="0" anchor="ctr"/>
+          <a:lstStyle/>
+          <a:p>
+            <a:pPr indent="0" marL="0">
+              <a:buNone/>
+            </a:pPr>
+            <a:r>
+              <a:rPr lang="en-US" sz="1000" dirty="0">
+                <a:solidFill>
+                  <a:srgbClr val="6B625E"/>
+                </a:solidFill>
+                <a:latin typeface="맑은 고딕" pitchFamily="34" charset="0"/>
+                <a:ea typeface="맑은 고딕" pitchFamily="34" charset="-122"/>
+                <a:cs typeface="맑은 고딕" pitchFamily="34" charset="-120"/>
+              </a:rPr>
+              <a:t>미달</a:t>
+            </a:r>
+            <a:endParaRPr lang="en-US" sz="1000" dirty="0"/>
+          </a:p>
+        </p:txBody>
+      </p:sp>
+      <p:sp>
+        <p:nvSpPr>
+          <p:cNvPr id="110" name="Text 108"/>
+          <p:cNvSpPr/>
+          <p:nvPr/>
+        </p:nvSpPr>
+        <p:spPr>
+          <a:xfrm>
+            <a:off x="9144000" y="5212080"/>
+            <a:ext cx="1097280" cy="274320"/>
+          </a:xfrm>
+          <a:prstGeom prst="rect">
+            <a:avLst/>
+          </a:prstGeom>
+          <a:noFill/>
+          <a:ln/>
+        </p:spPr>
+        <p:txBody>
+          <a:bodyPr wrap="square" lIns="0" tIns="0" rIns="0" bIns="0" rtlCol="0" anchor="ctr"/>
+          <a:lstStyle/>
+          <a:p>
+            <a:pPr algn="r" indent="0" marL="0">
+              <a:buNone/>
+            </a:pPr>
+            <a:r>
+              <a:rPr lang="en-US" sz="1050" dirty="0">
+                <a:solidFill>
+                  <a:srgbClr val="8A7F7A"/>
+                </a:solidFill>
+                <a:latin typeface="맑은 고딕" pitchFamily="34" charset="0"/>
+                <a:ea typeface="맑은 고딕" pitchFamily="34" charset="-122"/>
+                <a:cs typeface="맑은 고딕" pitchFamily="34" charset="-120"/>
+              </a:rPr>
+              <a:t>5건</a:t>
+            </a:r>
+            <a:endParaRPr lang="en-US" sz="1050" dirty="0"/>
+          </a:p>
+        </p:txBody>
+      </p:sp>
+      <p:sp>
+        <p:nvSpPr>
+          <p:cNvPr id="111" name="Text 109"/>
+          <p:cNvSpPr/>
+          <p:nvPr/>
+        </p:nvSpPr>
+        <p:spPr>
+          <a:xfrm>
+            <a:off x="10287000" y="5212080"/>
+            <a:ext cx="1143000" cy="274320"/>
+          </a:xfrm>
+          <a:prstGeom prst="rect">
+            <a:avLst/>
+          </a:prstGeom>
+          <a:noFill/>
+          <a:ln/>
+        </p:spPr>
+        <p:txBody>
+          <a:bodyPr wrap="square" lIns="0" tIns="0" rIns="0" bIns="0" rtlCol="0" anchor="ctr"/>
+          <a:lstStyle/>
+          <a:p>
+            <a:pPr algn="r" indent="0" marL="0">
+              <a:buNone/>
+            </a:pPr>
+            <a:r>
+              <a:rPr lang="en-US" sz="1050" b="1" dirty="0">
+                <a:solidFill>
+                  <a:srgbClr val="EA002C"/>
+                </a:solidFill>
+                <a:latin typeface="맑은 고딕" pitchFamily="34" charset="0"/>
+                <a:ea typeface="맑은 고딕" pitchFamily="34" charset="-122"/>
+                <a:cs typeface="맑은 고딕" pitchFamily="34" charset="-120"/>
+              </a:rPr>
+              <a:t>1건</a:t>
+            </a:r>
+            <a:endParaRPr lang="en-US" sz="1050" dirty="0"/>
+          </a:p>
+        </p:txBody>
+      </p:sp>
+      <p:sp>
+        <p:nvSpPr>
+          <p:cNvPr id="112" name="Text 110"/>
+          <p:cNvSpPr/>
+          <p:nvPr/>
+        </p:nvSpPr>
+        <p:spPr>
+          <a:xfrm>
+            <a:off x="6583680" y="5541264"/>
+            <a:ext cx="2514600" cy="274320"/>
+          </a:xfrm>
+          <a:prstGeom prst="rect">
+            <a:avLst/>
+          </a:prstGeom>
+          <a:noFill/>
+          <a:ln/>
+        </p:spPr>
+        <p:txBody>
+          <a:bodyPr wrap="square" lIns="0" tIns="0" rIns="0" bIns="0" rtlCol="0" anchor="ctr"/>
+          <a:lstStyle/>
+          <a:p>
+            <a:pPr indent="0" marL="0">
+              <a:buNone/>
+            </a:pPr>
+            <a:r>
+              <a:rPr lang="en-US" sz="1000" dirty="0">
+                <a:solidFill>
+                  <a:srgbClr val="6B625E"/>
+                </a:solidFill>
+                <a:latin typeface="맑은 고딕" pitchFamily="34" charset="0"/>
+                <a:ea typeface="맑은 고딕" pitchFamily="34" charset="-122"/>
+                <a:cs typeface="맑은 고딕" pitchFamily="34" charset="-120"/>
+              </a:rPr>
+              <a:t>손실 합계 (과대입찰＋기회손실)</a:t>
+            </a:r>
+            <a:endParaRPr lang="en-US" sz="1000" dirty="0"/>
+          </a:p>
+        </p:txBody>
+      </p:sp>
+      <p:sp>
+        <p:nvSpPr>
+          <p:cNvPr id="113" name="Text 111"/>
+          <p:cNvSpPr/>
+          <p:nvPr/>
+        </p:nvSpPr>
+        <p:spPr>
+          <a:xfrm>
+            <a:off x="9144000" y="5541264"/>
+            <a:ext cx="1097280" cy="274320"/>
+          </a:xfrm>
+          <a:prstGeom prst="rect">
+            <a:avLst/>
+          </a:prstGeom>
+          <a:noFill/>
+          <a:ln/>
+        </p:spPr>
+        <p:txBody>
+          <a:bodyPr wrap="square" lIns="0" tIns="0" rIns="0" bIns="0" rtlCol="0" anchor="ctr"/>
+          <a:lstStyle/>
+          <a:p>
+            <a:pPr algn="r" indent="0" marL="0">
+              <a:buNone/>
+            </a:pPr>
+            <a:r>
+              <a:rPr lang="en-US" sz="1050" dirty="0">
+                <a:solidFill>
+                  <a:srgbClr val="8A7F7A"/>
+                </a:solidFill>
+                <a:latin typeface="맑은 고딕" pitchFamily="34" charset="0"/>
+                <a:ea typeface="맑은 고딕" pitchFamily="34" charset="-122"/>
+                <a:cs typeface="맑은 고딕" pitchFamily="34" charset="-120"/>
+              </a:rPr>
+              <a:t>58.3 MW</a:t>
+            </a:r>
+            <a:endParaRPr lang="en-US" sz="1050" dirty="0"/>
+          </a:p>
+        </p:txBody>
+      </p:sp>
+      <p:sp>
+        <p:nvSpPr>
+          <p:cNvPr id="114" name="Text 112"/>
+          <p:cNvSpPr/>
+          <p:nvPr/>
+        </p:nvSpPr>
+        <p:spPr>
+          <a:xfrm>
+            <a:off x="10287000" y="5541264"/>
+            <a:ext cx="1143000" cy="274320"/>
+          </a:xfrm>
+          <a:prstGeom prst="rect">
+            <a:avLst/>
+          </a:prstGeom>
+          <a:noFill/>
+          <a:ln/>
+        </p:spPr>
+        <p:txBody>
+          <a:bodyPr wrap="square" lIns="0" tIns="0" rIns="0" bIns="0" rtlCol="0" anchor="ctr"/>
+          <a:lstStyle/>
+          <a:p>
+            <a:pPr algn="r" indent="0" marL="0">
+              <a:buNone/>
+            </a:pPr>
+            <a:r>
+              <a:rPr lang="en-US" sz="1050" b="1" dirty="0">
+                <a:solidFill>
+                  <a:srgbClr val="EA002C"/>
+                </a:solidFill>
+                <a:latin typeface="맑은 고딕" pitchFamily="34" charset="0"/>
+                <a:ea typeface="맑은 고딕" pitchFamily="34" charset="-122"/>
+                <a:cs typeface="맑은 고딕" pitchFamily="34" charset="-120"/>
+              </a:rPr>
+              <a:t>30.0 MW</a:t>
+            </a:r>
+            <a:endParaRPr lang="en-US" sz="1050" dirty="0"/>
+          </a:p>
+        </p:txBody>
+      </p:sp>
+      <p:sp>
+        <p:nvSpPr>
+          <p:cNvPr id="115" name="Text 113"/>
+          <p:cNvSpPr/>
+          <p:nvPr/>
+        </p:nvSpPr>
+        <p:spPr>
+          <a:xfrm>
+            <a:off x="6583680" y="5833872"/>
+            <a:ext cx="4846320" cy="219456"/>
+          </a:xfrm>
+          <a:prstGeom prst="rect">
+            <a:avLst/>
+          </a:prstGeom>
+          <a:noFill/>
+          <a:ln/>
+        </p:spPr>
+        <p:txBody>
+          <a:bodyPr wrap="square" lIns="0" tIns="0" rIns="0" bIns="0" rtlCol="0" anchor="ctr"/>
+          <a:lstStyle/>
+          <a:p>
+            <a:pPr indent="0" marL="0">
+              <a:buNone/>
+            </a:pPr>
+            <a:r>
+              <a:rPr lang="en-US" sz="850" dirty="0">
+                <a:solidFill>
+                  <a:srgbClr val="9A908C"/>
+                </a:solidFill>
+                <a:latin typeface="맑은 고딕" pitchFamily="34" charset="0"/>
+                <a:ea typeface="맑은 고딕" pitchFamily="34" charset="-122"/>
+                <a:cs typeface="맑은 고딕" pitchFamily="34" charset="-120"/>
+              </a:rPr>
+              <a:t>※ 초기 학습 데이터가 적어 오차가 큽니다 — 시험이 쌓이면 줄어듭니다.</a:t>
+            </a:r>
+            <a:endParaRPr lang="en-US" sz="850" dirty="0"/>
+          </a:p>
+        </p:txBody>
+      </p:sp>
+      <p:sp>
+        <p:nvSpPr>
+          <p:cNvPr id="116" name="Shape 114"/>
+          <p:cNvSpPr/>
+          <p:nvPr/>
+        </p:nvSpPr>
+        <p:spPr>
+          <a:xfrm>
+            <a:off x="502920" y="6199632"/>
+            <a:ext cx="11183112" cy="457200"/>
+          </a:xfrm>
+          <a:prstGeom prst="roundRect">
+            <a:avLst>
+              <a:gd name="adj" fmla="val 12000"/>
+            </a:avLst>
+          </a:prstGeom>
+          <a:solidFill>
+            <a:srgbClr val="1F1A18"/>
+          </a:solidFill>
+          <a:ln w="12700">
+            <a:solidFill>
+              <a:srgbClr val="E8E0DC"/>
+            </a:solidFill>
+            <a:prstDash val="solid"/>
+          </a:ln>
+          <a:effectLst>
+            <a:outerShdw sx="100000" sy="100000" kx="0" ky="0" algn="bl" rotWithShape="0" blurRad="101600" dist="12700" dir="5400000">
+              <a:srgbClr val="D8CFCA">
+                <a:alpha val="50000"/>
+              </a:srgbClr>
+            </a:outerShdw>
+          </a:effectLst>
+        </p:spPr>
+      </p:sp>
+      <p:sp>
+        <p:nvSpPr>
+          <p:cNvPr id="117" name="Text 115"/>
+          <p:cNvSpPr/>
+          <p:nvPr/>
+        </p:nvSpPr>
+        <p:spPr>
+          <a:xfrm>
+            <a:off x="777240" y="6245352"/>
+            <a:ext cx="10607040" cy="365760"/>
+          </a:xfrm>
+          <a:prstGeom prst="rect">
+            <a:avLst/>
+          </a:prstGeom>
+          <a:noFill/>
+          <a:ln/>
+        </p:spPr>
+        <p:txBody>
+          <a:bodyPr wrap="square" lIns="0" tIns="0" rIns="0" bIns="0" rtlCol="0" anchor="ctr"/>
+          <a:lstStyle/>
+          <a:p>
+            <a:pPr indent="0" marL="0">
+              <a:buNone/>
+            </a:pPr>
+            <a:r>
+              <a:rPr lang="en-US" sz="1200" b="1" dirty="0">
+                <a:solidFill>
+                  <a:srgbClr val="FFFFFF"/>
+                </a:solidFill>
+                <a:latin typeface="맑은 고딕" pitchFamily="34" charset="0"/>
+                <a:ea typeface="맑은 고딕" pitchFamily="34" charset="-122"/>
+                <a:cs typeface="맑은 고딕" pitchFamily="34" charset="-120"/>
+              </a:rPr>
+              <a:t>보정값 하나 → 온도별 곡선 : 예측오차 3.63 → 1.33 MW, 신고량 미달 10건 → 0건 (안전마진 적용 시)</a:t>
+            </a:r>
+            <a:endParaRPr lang="en-US" sz="1200" dirty="0"/>
+          </a:p>
+        </p:txBody>
+      </p:sp>
+    </p:spTree>
+  </p:cSld>
+  <p:clrMapOvr>
+    <a:masterClrMapping/>
+  </p:clrMapOvr>
+</p:sld>
+</file>
+
+<file path=ppt/slides/slide4.xml><?xml version="1.0" encoding="utf-8"?>
+<p:sld xmlns:a="http://schemas.openxmlformats.org/drawingml/2006/main" xmlns:r="http://schemas.openxmlformats.org/officeDocument/2006/relationships" xmlns:p="http://schemas.openxmlformats.org/presentationml/2006/main">
+  <p:cSld name="Slide 4">
+    <p:bg>
+      <p:bgPr>
+        <a:solidFill>
+          <a:srgbClr val="FFFFFF"/>
+        </a:solidFill>
+      </p:bgPr>
+    </p:bg>
+    <p:spTree>
+      <p:nvGrpSpPr>
+        <p:cNvPr id="1" name=""/>
+        <p:cNvGrpSpPr/>
+        <p:nvPr/>
+      </p:nvGrpSpPr>
+      <p:grpSpPr>
+        <a:xfrm>
+          <a:off x="0" y="0"/>
+          <a:ext cx="0" cy="0"/>
+          <a:chOff x="0" y="0"/>
+          <a:chExt cx="0" cy="0"/>
+        </a:xfrm>
+      </p:grpSpPr>
+      <p:sp>
+        <p:nvSpPr>
+          <p:cNvPr id="2" name="Shape 0"/>
+          <p:cNvSpPr/>
+          <p:nvPr/>
+        </p:nvSpPr>
+        <p:spPr>
+          <a:xfrm>
+            <a:off x="0" y="0"/>
+            <a:ext cx="12188952" cy="914400"/>
+          </a:xfrm>
+          <a:prstGeom prst="rect">
+            <a:avLst/>
+          </a:prstGeom>
+          <a:solidFill>
+            <a:srgbClr val="1F1A18"/>
+          </a:solidFill>
+          <a:ln/>
+        </p:spPr>
+      </p:sp>
+      <p:sp>
+        <p:nvSpPr>
+          <p:cNvPr id="3" name="Text 1"/>
+          <p:cNvSpPr/>
+          <p:nvPr/>
+        </p:nvSpPr>
+        <p:spPr>
+          <a:xfrm>
+            <a:off x="411480" y="182880"/>
+            <a:ext cx="640080" cy="548640"/>
+          </a:xfrm>
+          <a:prstGeom prst="rect">
+            <a:avLst/>
+          </a:prstGeom>
+          <a:noFill/>
+          <a:ln/>
+        </p:spPr>
+        <p:txBody>
+          <a:bodyPr wrap="square" lIns="0" tIns="0" rIns="0" bIns="0" rtlCol="0" anchor="ctr"/>
+          <a:lstStyle/>
+          <a:p>
+            <a:pPr indent="0" marL="0">
+              <a:buNone/>
+            </a:pPr>
+            <a:r>
+              <a:rPr lang="en-US" sz="2600" b="1" dirty="0">
+                <a:solidFill>
+                  <a:srgbClr val="F47725"/>
+                </a:solidFill>
+                <a:latin typeface="맑은 고딕" pitchFamily="34" charset="0"/>
+                <a:ea typeface="맑은 고딕" pitchFamily="34" charset="-122"/>
+                <a:cs typeface="맑은 고딕" pitchFamily="34" charset="-120"/>
+              </a:rPr>
+              <a:t>04</a:t>
+            </a:r>
+            <a:endParaRPr lang="en-US" sz="2600" dirty="0"/>
+          </a:p>
+        </p:txBody>
+      </p:sp>
+      <p:sp>
+        <p:nvSpPr>
+          <p:cNvPr id="4" name="Text 2"/>
+          <p:cNvSpPr/>
+          <p:nvPr/>
+        </p:nvSpPr>
+        <p:spPr>
+          <a:xfrm>
+            <a:off x="1051560" y="182880"/>
+            <a:ext cx="6766560" cy="548640"/>
+          </a:xfrm>
+          <a:prstGeom prst="rect">
+            <a:avLst/>
+          </a:prstGeom>
+          <a:noFill/>
+          <a:ln/>
+        </p:spPr>
+        <p:txBody>
+          <a:bodyPr wrap="square" lIns="0" tIns="0" rIns="0" bIns="0" rtlCol="0" anchor="ctr"/>
+          <a:lstStyle/>
+          <a:p>
+            <a:pPr indent="0" marL="0">
+              <a:buNone/>
+            </a:pPr>
+            <a:r>
+              <a:rPr lang="en-US" sz="2300" b="1" dirty="0">
+                <a:solidFill>
+                  <a:srgbClr val="FFFFFF"/>
+                </a:solidFill>
+                <a:latin typeface="맑은 고딕" pitchFamily="34" charset="0"/>
+                <a:ea typeface="맑은 고딕" pitchFamily="34" charset="-122"/>
+                <a:cs typeface="맑은 고딕" pitchFamily="34" charset="-120"/>
+              </a:rPr>
+              <a:t>어디까지 왔고, 앞으로</a:t>
+            </a:r>
+            <a:endParaRPr lang="en-US" sz="2300" dirty="0"/>
+          </a:p>
+        </p:txBody>
+      </p:sp>
+      <p:sp>
+        <p:nvSpPr>
+          <p:cNvPr id="5" name="Text 3"/>
+          <p:cNvSpPr/>
+          <p:nvPr/>
+        </p:nvSpPr>
+        <p:spPr>
+          <a:xfrm>
+            <a:off x="7955280" y="155448"/>
+            <a:ext cx="3840480" cy="292608"/>
+          </a:xfrm>
+          <a:prstGeom prst="rect">
+            <a:avLst/>
+          </a:prstGeom>
+          <a:noFill/>
+          <a:ln/>
+        </p:spPr>
+        <p:txBody>
+          <a:bodyPr wrap="square" lIns="0" tIns="0" rIns="0" bIns="0" rtlCol="0" anchor="ctr"/>
+          <a:lstStyle/>
+          <a:p>
+            <a:pPr algn="r" indent="0" marL="0">
+              <a:buNone/>
+            </a:pPr>
+            <a:r>
+              <a:rPr lang="en-US" sz="1200" dirty="0">
+                <a:solidFill>
+                  <a:srgbClr val="C9BFBB"/>
+                </a:solidFill>
+                <a:latin typeface="맑은 고딕" pitchFamily="34" charset="0"/>
+                <a:ea typeface="맑은 고딕" pitchFamily="34" charset="-122"/>
+                <a:cs typeface="맑은 고딕" pitchFamily="34" charset="-120"/>
+              </a:rPr>
+              <a:t>소속 : 발전운영팀</a:t>
+            </a:r>
+            <a:endParaRPr lang="en-US" sz="1200" dirty="0"/>
+          </a:p>
+        </p:txBody>
+      </p:sp>
+      <p:sp>
+        <p:nvSpPr>
+          <p:cNvPr id="6" name="Text 4"/>
+          <p:cNvSpPr/>
+          <p:nvPr/>
+        </p:nvSpPr>
+        <p:spPr>
+          <a:xfrm>
+            <a:off x="7955280" y="457200"/>
+            <a:ext cx="3840480" cy="292608"/>
+          </a:xfrm>
+          <a:prstGeom prst="rect">
+            <a:avLst/>
+          </a:prstGeom>
+          <a:noFill/>
+          <a:ln/>
+        </p:spPr>
+        <p:txBody>
+          <a:bodyPr wrap="square" lIns="0" tIns="0" rIns="0" bIns="0" rtlCol="0" anchor="ctr"/>
+          <a:lstStyle/>
+          <a:p>
+            <a:pPr algn="r" indent="0" marL="0">
+              <a:buNone/>
+            </a:pPr>
+            <a:r>
+              <a:rPr lang="en-US" sz="1200" b="1" dirty="0">
+                <a:solidFill>
+                  <a:srgbClr val="FFFFFF"/>
+                </a:solidFill>
+                <a:latin typeface="맑은 고딕" pitchFamily="34" charset="0"/>
+                <a:ea typeface="맑은 고딕" pitchFamily="34" charset="-122"/>
+                <a:cs typeface="맑은 고딕" pitchFamily="34" charset="-120"/>
+              </a:rPr>
+              <a:t>담당자 : ○○○  ·  2026. 8월</a:t>
+            </a:r>
+            <a:endParaRPr lang="en-US" sz="1200" dirty="0"/>
+          </a:p>
+        </p:txBody>
+      </p:sp>
+      <p:sp>
+        <p:nvSpPr>
+          <p:cNvPr id="7" name="Shape 5"/>
+          <p:cNvSpPr/>
+          <p:nvPr/>
+        </p:nvSpPr>
+        <p:spPr>
+          <a:xfrm>
+            <a:off x="502920" y="1069848"/>
+            <a:ext cx="237744" cy="237744"/>
+          </a:xfrm>
+          <a:prstGeom prst="ellipse">
+            <a:avLst/>
+          </a:prstGeom>
+          <a:solidFill>
+            <a:srgbClr val="EA002C"/>
+          </a:solidFill>
+          <a:ln/>
+        </p:spPr>
+      </p:sp>
+      <p:sp>
+        <p:nvSpPr>
+          <p:cNvPr id="8" name="Text 6"/>
+          <p:cNvSpPr/>
+          <p:nvPr/>
+        </p:nvSpPr>
+        <p:spPr>
+          <a:xfrm>
+            <a:off x="868680" y="1024128"/>
+            <a:ext cx="4572000" cy="310896"/>
+          </a:xfrm>
+          <a:prstGeom prst="rect">
+            <a:avLst/>
+          </a:prstGeom>
+          <a:noFill/>
+          <a:ln/>
+        </p:spPr>
+        <p:txBody>
+          <a:bodyPr wrap="square" lIns="0" tIns="0" rIns="0" bIns="0" rtlCol="0" anchor="ctr"/>
+          <a:lstStyle/>
+          <a:p>
+            <a:pPr indent="0" marL="0">
+              <a:buNone/>
+            </a:pPr>
+            <a:r>
+              <a:rPr lang="en-US" sz="1350" b="1" dirty="0">
+                <a:solidFill>
+                  <a:srgbClr val="1F1A18"/>
+                </a:solidFill>
+                <a:latin typeface="맑은 고딕" pitchFamily="34" charset="0"/>
+                <a:ea typeface="맑은 고딕" pitchFamily="34" charset="-122"/>
+                <a:cs typeface="맑은 고딕" pitchFamily="34" charset="-120"/>
+              </a:rPr>
+              <a:t>진행 현황</a:t>
+            </a:r>
+            <a:endParaRPr lang="en-US" sz="1350" dirty="0"/>
+          </a:p>
+        </p:txBody>
+      </p:sp>
+      <p:sp>
+        <p:nvSpPr>
+          <p:cNvPr id="9" name="Text 7"/>
+          <p:cNvSpPr/>
+          <p:nvPr/>
+        </p:nvSpPr>
+        <p:spPr>
+          <a:xfrm>
+            <a:off x="5532120" y="1024128"/>
+            <a:ext cx="6126480" cy="310896"/>
+          </a:xfrm>
+          <a:prstGeom prst="rect">
+            <a:avLst/>
+          </a:prstGeom>
+          <a:noFill/>
+          <a:ln/>
+        </p:spPr>
+        <p:txBody>
+          <a:bodyPr wrap="square" lIns="0" tIns="0" rIns="0" bIns="0" rtlCol="0" anchor="ctr"/>
+          <a:lstStyle/>
+          <a:p>
+            <a:pPr algn="r" indent="0" marL="0">
+              <a:buNone/>
+            </a:pPr>
+            <a:r>
+              <a:rPr lang="en-US" sz="1000" dirty="0">
+                <a:solidFill>
+                  <a:srgbClr val="9A908C"/>
+                </a:solidFill>
+                <a:latin typeface="맑은 고딕" pitchFamily="34" charset="0"/>
+                <a:ea typeface="맑은 고딕" pitchFamily="34" charset="-122"/>
+                <a:cs typeface="맑은 고딕" pitchFamily="34" charset="-120"/>
+              </a:rPr>
               <a:t>1차 개발 완료 · 현재 시운전 단계</a:t>
             </a:r>
             <a:endParaRPr lang="en-US" sz="1000" dirty="0"/>
@@ -5373,7 +9373,7 @@
         </p:nvSpPr>
         <p:spPr>
           <a:xfrm>
-            <a:off x="777240" y="2212848"/>
+            <a:off x="914400" y="2212848"/>
             <a:ext cx="8869680" cy="0"/>
           </a:xfrm>
           <a:prstGeom prst="line">
@@ -5396,7 +9396,7 @@
         </p:nvSpPr>
         <p:spPr>
           <a:xfrm>
-            <a:off x="777240" y="2212848"/>
+            <a:off x="914400" y="2212848"/>
             <a:ext cx="7095744" cy="0"/>
           </a:xfrm>
           <a:prstGeom prst="line">
@@ -5419,7 +9419,7 @@
         </p:nvSpPr>
         <p:spPr>
           <a:xfrm>
-            <a:off x="137160" y="1371600"/>
+            <a:off x="274320" y="1371600"/>
             <a:ext cx="1280160" cy="237744"/>
           </a:xfrm>
           <a:prstGeom prst="rect">
@@ -5458,7 +9458,7 @@
         </p:nvSpPr>
         <p:spPr>
           <a:xfrm>
-            <a:off x="137160" y="1645920"/>
+            <a:off x="274320" y="1645920"/>
             <a:ext cx="1280160" cy="219456"/>
           </a:xfrm>
           <a:prstGeom prst="rect">
@@ -5497,7 +9497,7 @@
         </p:nvSpPr>
         <p:spPr>
           <a:xfrm>
-            <a:off x="630936" y="2066544"/>
+            <a:off x="768096" y="2066544"/>
             <a:ext cx="292608" cy="292608"/>
           </a:xfrm>
           <a:prstGeom prst="ellipse">
@@ -5522,7 +9522,7 @@
         </p:nvSpPr>
         <p:spPr>
           <a:xfrm>
-            <a:off x="-64008" y="2450592"/>
+            <a:off x="73152" y="2450592"/>
             <a:ext cx="1682496" cy="274320"/>
           </a:xfrm>
           <a:prstGeom prst="rect">
@@ -5561,7 +9561,7 @@
         </p:nvSpPr>
         <p:spPr>
           <a:xfrm>
-            <a:off x="-91440" y="2724912"/>
+            <a:off x="45720" y="2724912"/>
             <a:ext cx="1737360" cy="457200"/>
           </a:xfrm>
           <a:prstGeom prst="rect">
@@ -5603,7 +9603,7 @@
         </p:nvSpPr>
         <p:spPr>
           <a:xfrm>
-            <a:off x="1911096" y="1371600"/>
+            <a:off x="2048256" y="1371600"/>
             <a:ext cx="1280160" cy="237744"/>
           </a:xfrm>
           <a:prstGeom prst="rect">
@@ -5642,7 +9642,7 @@
         </p:nvSpPr>
         <p:spPr>
           <a:xfrm>
-            <a:off x="1911096" y="1645920"/>
+            <a:off x="2048256" y="1645920"/>
             <a:ext cx="1280160" cy="219456"/>
           </a:xfrm>
           <a:prstGeom prst="rect">
@@ -5681,7 +9681,7 @@
         </p:nvSpPr>
         <p:spPr>
           <a:xfrm>
-            <a:off x="2404872" y="2066544"/>
+            <a:off x="2542032" y="2066544"/>
             <a:ext cx="292608" cy="292608"/>
           </a:xfrm>
           <a:prstGeom prst="ellipse">
@@ -5706,7 +9706,7 @@
         </p:nvSpPr>
         <p:spPr>
           <a:xfrm>
-            <a:off x="1709928" y="2450592"/>
+            <a:off x="1847088" y="2450592"/>
             <a:ext cx="1682496" cy="274320"/>
           </a:xfrm>
           <a:prstGeom prst="rect">
@@ -5745,7 +9745,7 @@
         </p:nvSpPr>
         <p:spPr>
           <a:xfrm>
-            <a:off x="1682496" y="2724912"/>
+            <a:off x="1819656" y="2724912"/>
             <a:ext cx="1737360" cy="457200"/>
           </a:xfrm>
           <a:prstGeom prst="rect">
@@ -5787,7 +9787,7 @@
         </p:nvSpPr>
         <p:spPr>
           <a:xfrm>
-            <a:off x="3685032" y="1371600"/>
+            <a:off x="3822192" y="1371600"/>
             <a:ext cx="1280160" cy="237744"/>
           </a:xfrm>
           <a:prstGeom prst="rect">
@@ -5826,7 +9826,7 @@
         </p:nvSpPr>
         <p:spPr>
           <a:xfrm>
-            <a:off x="3685032" y="1645920"/>
+            <a:off x="3822192" y="1645920"/>
             <a:ext cx="1280160" cy="219456"/>
           </a:xfrm>
           <a:prstGeom prst="rect">
@@ -5865,7 +9865,7 @@
         </p:nvSpPr>
         <p:spPr>
           <a:xfrm>
-            <a:off x="4178808" y="2066544"/>
+            <a:off x="4315968" y="2066544"/>
             <a:ext cx="292608" cy="292608"/>
           </a:xfrm>
           <a:prstGeom prst="ellipse">
@@ -5890,7 +9890,7 @@
         </p:nvSpPr>
         <p:spPr>
           <a:xfrm>
-            <a:off x="3483864" y="2450592"/>
+            <a:off x="3621024" y="2450592"/>
             <a:ext cx="1682496" cy="274320"/>
           </a:xfrm>
           <a:prstGeom prst="rect">
@@ -5929,7 +9929,7 @@
         </p:nvSpPr>
         <p:spPr>
           <a:xfrm>
-            <a:off x="3456432" y="2724912"/>
+            <a:off x="3593592" y="2724912"/>
             <a:ext cx="1737360" cy="457200"/>
           </a:xfrm>
           <a:prstGeom prst="rect">
@@ -5971,7 +9971,7 @@
         </p:nvSpPr>
         <p:spPr>
           <a:xfrm>
-            <a:off x="5458968" y="1371600"/>
+            <a:off x="5596128" y="1371600"/>
             <a:ext cx="1280160" cy="237744"/>
           </a:xfrm>
           <a:prstGeom prst="rect">
@@ -6010,7 +10010,7 @@
         </p:nvSpPr>
         <p:spPr>
           <a:xfrm>
-            <a:off x="5458968" y="1645920"/>
+            <a:off x="5596128" y="1645920"/>
             <a:ext cx="1280160" cy="219456"/>
           </a:xfrm>
           <a:prstGeom prst="rect">
@@ -6049,7 +10049,7 @@
         </p:nvSpPr>
         <p:spPr>
           <a:xfrm>
-            <a:off x="5952744" y="2066544"/>
+            <a:off x="6089904" y="2066544"/>
             <a:ext cx="292608" cy="292608"/>
           </a:xfrm>
           <a:prstGeom prst="ellipse">
@@ -6074,7 +10074,7 @@
         </p:nvSpPr>
         <p:spPr>
           <a:xfrm>
-            <a:off x="5257800" y="2450592"/>
+            <a:off x="5394960" y="2450592"/>
             <a:ext cx="1682496" cy="274320"/>
           </a:xfrm>
           <a:prstGeom prst="rect">
@@ -6113,7 +10113,7 @@
         </p:nvSpPr>
         <p:spPr>
           <a:xfrm>
-            <a:off x="5230368" y="2724912"/>
+            <a:off x="5367528" y="2724912"/>
             <a:ext cx="1737360" cy="457200"/>
           </a:xfrm>
           <a:prstGeom prst="rect">
@@ -6155,7 +10155,7 @@
         </p:nvSpPr>
         <p:spPr>
           <a:xfrm>
-            <a:off x="7232904" y="1371600"/>
+            <a:off x="7370064" y="1371600"/>
             <a:ext cx="1280160" cy="237744"/>
           </a:xfrm>
           <a:prstGeom prst="rect">
@@ -6194,7 +10194,7 @@
         </p:nvSpPr>
         <p:spPr>
           <a:xfrm>
-            <a:off x="7232904" y="1645920"/>
+            <a:off x="7370064" y="1645920"/>
             <a:ext cx="1280160" cy="219456"/>
           </a:xfrm>
           <a:prstGeom prst="rect">
@@ -6233,7 +10233,7 @@
         </p:nvSpPr>
         <p:spPr>
           <a:xfrm>
-            <a:off x="7616952" y="1956816"/>
+            <a:off x="7754112" y="1956816"/>
             <a:ext cx="512064" cy="512064"/>
           </a:xfrm>
           <a:prstGeom prst="ellipse">
@@ -6260,7 +10260,7 @@
         </p:nvSpPr>
         <p:spPr>
           <a:xfrm>
-            <a:off x="7726680" y="2066544"/>
+            <a:off x="7863840" y="2066544"/>
             <a:ext cx="292608" cy="292608"/>
           </a:xfrm>
           <a:prstGeom prst="ellipse">
@@ -6285,7 +10285,7 @@
         </p:nvSpPr>
         <p:spPr>
           <a:xfrm>
-            <a:off x="7031736" y="2450592"/>
+            <a:off x="7168896" y="2450592"/>
             <a:ext cx="1682496" cy="274320"/>
           </a:xfrm>
           <a:prstGeom prst="rect">
@@ -6324,7 +10324,7 @@
         </p:nvSpPr>
         <p:spPr>
           <a:xfrm>
-            <a:off x="7004304" y="2724912"/>
+            <a:off x="7141464" y="2724912"/>
             <a:ext cx="1737360" cy="457200"/>
           </a:xfrm>
           <a:prstGeom prst="rect">
@@ -6366,7 +10366,7 @@
         </p:nvSpPr>
         <p:spPr>
           <a:xfrm>
-            <a:off x="9006840" y="1371600"/>
+            <a:off x="9144000" y="1371600"/>
             <a:ext cx="1280160" cy="237744"/>
           </a:xfrm>
           <a:prstGeom prst="rect">
@@ -6405,7 +10405,7 @@
         </p:nvSpPr>
         <p:spPr>
           <a:xfrm>
-            <a:off x="9006840" y="1645920"/>
+            <a:off x="9144000" y="1645920"/>
             <a:ext cx="1280160" cy="219456"/>
           </a:xfrm>
           <a:prstGeom prst="rect">
@@ -6444,7 +10444,7 @@
         </p:nvSpPr>
         <p:spPr>
           <a:xfrm>
-            <a:off x="9500616" y="2066544"/>
+            <a:off x="9637776" y="2066544"/>
             <a:ext cx="292608" cy="292608"/>
           </a:xfrm>
           <a:prstGeom prst="ellipse">
@@ -6469,7 +10469,7 @@
         </p:nvSpPr>
         <p:spPr>
           <a:xfrm>
-            <a:off x="8805672" y="2450592"/>
+            <a:off x="8942832" y="2450592"/>
             <a:ext cx="1682496" cy="274320"/>
           </a:xfrm>
           <a:prstGeom prst="rect">
@@ -6508,7 +10508,7 @@
         </p:nvSpPr>
         <p:spPr>
           <a:xfrm>
-            <a:off x="8778240" y="2724912"/>
+            <a:off x="8915400" y="2724912"/>
             <a:ext cx="1737360" cy="457200"/>
           </a:xfrm>
           <a:prstGeom prst="rect">

--- a/docs/ppt/PPT1_공급가능용량_프로젝트보고.pptx
+++ b/docs/ppt/PPT1_공급가능용량_프로젝트보고.pptx
@@ -593,7 +593,7 @@
           <a:p>
             <a:r>
               <a:rPr lang="en-US" dirty="0"/>
-              <a:t>화면 5개로 구성했습니다. 계산은 2단 구조입니다 — 1단은 설계 성능곡선(기존 엑셀과 동일), 2단은 실제 시험 31건에서 배운 보정값입니다. '186개 자동 점검'은 계산식을 수정할 때마다 프로그램이 스스로 186가지 항목을 다시 검사해 계산 오류를 사전에 막는 장치입니다.</a:t>
+              <a:t>화면 5개로 구성했습니다. 계산은 2단 구조입니다 — 1단은 설계 성능곡선(기존 엑셀과 동일), 2단은 실제 시험 31건에서 배운 보정값입니다. '194개 자동 점검'은 계산식을 수정할 때마다 프로그램이 스스로 194가지 항목을 다시 검사해 계산 오류를 사전에 막는 장치입니다.</a:t>
             </a:r>
             <a:endParaRPr lang="en-US" dirty="0"/>
           </a:p>
@@ -5103,7 +5103,7 @@
                 <a:ea typeface="맑은 고딕" pitchFamily="34" charset="-122"/>
                 <a:cs typeface="맑은 고딕" pitchFamily="34" charset="-120"/>
               </a:rPr>
-              <a:t>186개 / 수정 시마다</a:t>
+              <a:t>194개 / 수정 시마다</a:t>
             </a:r>
             <a:endParaRPr lang="en-US" sz="1100" dirty="0"/>
           </a:p>
@@ -5142,7 +5142,7 @@
                 <a:ea typeface="맑은 고딕" pitchFamily="34" charset="-122"/>
                 <a:cs typeface="맑은 고딕" pitchFamily="34" charset="-120"/>
               </a:rPr>
-              <a:t>※ 계산식이 바뀌면 186개 항목을 자동으로 다시 검사 — 오류를 사전에 차단</a:t>
+              <a:t>※ 계산식이 바뀌면 194개 항목을 자동으로 다시 검사 — 오류를 사전에 차단</a:t>
             </a:r>
             <a:endParaRPr lang="en-US" sz="900" dirty="0"/>
           </a:p>
